--- a/KMIP_PKCS11_Overview_Deck.pptx
+++ b/KMIP_PKCS11_Overview_Deck.pptx
@@ -6352,8 +6352,8 @@
         </p:nvSpPr>
         <p:spPr>
           <a:xfrm>
-            <a:off x="804672" y="2121408"/>
-            <a:ext cx="3044952" cy="1188720"/>
+            <a:off x="804672" y="2139696"/>
+            <a:ext cx="3044952" cy="1170432"/>
           </a:xfrm>
           <a:prstGeom prst="rect">
             <a:avLst/>
@@ -6467,8 +6467,8 @@
         </p:nvSpPr>
         <p:spPr>
           <a:xfrm>
-            <a:off x="4572000" y="2121408"/>
-            <a:ext cx="3044952" cy="1188720"/>
+            <a:off x="4572000" y="2139696"/>
+            <a:ext cx="3044952" cy="1170432"/>
           </a:xfrm>
           <a:prstGeom prst="rect">
             <a:avLst/>
@@ -6582,8 +6582,8 @@
         </p:nvSpPr>
         <p:spPr>
           <a:xfrm>
-            <a:off x="8339328" y="2121408"/>
-            <a:ext cx="3044952" cy="1188720"/>
+            <a:off x="8339328" y="2139696"/>
+            <a:ext cx="3044952" cy="1170432"/>
           </a:xfrm>
           <a:prstGeom prst="rect">
             <a:avLst/>
@@ -6697,8 +6697,8 @@
         </p:nvSpPr>
         <p:spPr>
           <a:xfrm>
-            <a:off x="804672" y="4261104"/>
-            <a:ext cx="3044952" cy="1188720"/>
+            <a:off x="804672" y="4279392"/>
+            <a:ext cx="3044952" cy="1170432"/>
           </a:xfrm>
           <a:prstGeom prst="rect">
             <a:avLst/>
@@ -6812,8 +6812,8 @@
         </p:nvSpPr>
         <p:spPr>
           <a:xfrm>
-            <a:off x="4572000" y="4261104"/>
-            <a:ext cx="3044952" cy="1188720"/>
+            <a:off x="4572000" y="4279392"/>
+            <a:ext cx="3044952" cy="1170432"/>
           </a:xfrm>
           <a:prstGeom prst="rect">
             <a:avLst/>
@@ -6927,8 +6927,8 @@
         </p:nvSpPr>
         <p:spPr>
           <a:xfrm>
-            <a:off x="8339328" y="4261104"/>
-            <a:ext cx="3044952" cy="1188720"/>
+            <a:off x="8339328" y="4279392"/>
+            <a:ext cx="3044952" cy="1170432"/>
           </a:xfrm>
           <a:prstGeom prst="rect">
             <a:avLst/>
@@ -7221,8 +7221,8 @@
         </p:nvSpPr>
         <p:spPr>
           <a:xfrm>
-            <a:off x="804672" y="2377440"/>
-            <a:ext cx="2139696" cy="1024128"/>
+            <a:off x="804672" y="2395728"/>
+            <a:ext cx="2139696" cy="1005840"/>
           </a:xfrm>
           <a:prstGeom prst="rect">
             <a:avLst/>
@@ -7336,8 +7336,8 @@
         </p:nvSpPr>
         <p:spPr>
           <a:xfrm>
-            <a:off x="3630168" y="2377440"/>
-            <a:ext cx="2139696" cy="1024128"/>
+            <a:off x="3630168" y="2395728"/>
+            <a:ext cx="2139696" cy="1005840"/>
           </a:xfrm>
           <a:prstGeom prst="rect">
             <a:avLst/>
@@ -7451,8 +7451,8 @@
         </p:nvSpPr>
         <p:spPr>
           <a:xfrm>
-            <a:off x="6455664" y="2377440"/>
-            <a:ext cx="2139696" cy="1024128"/>
+            <a:off x="6455664" y="2395728"/>
+            <a:ext cx="2139696" cy="1005840"/>
           </a:xfrm>
           <a:prstGeom prst="rect">
             <a:avLst/>
@@ -7566,8 +7566,8 @@
         </p:nvSpPr>
         <p:spPr>
           <a:xfrm>
-            <a:off x="9281160" y="2377440"/>
-            <a:ext cx="2139696" cy="1024128"/>
+            <a:off x="9281160" y="2395728"/>
+            <a:ext cx="2139696" cy="1005840"/>
           </a:xfrm>
           <a:prstGeom prst="rect">
             <a:avLst/>
@@ -7681,8 +7681,8 @@
         </p:nvSpPr>
         <p:spPr>
           <a:xfrm>
-            <a:off x="804672" y="4590288"/>
-            <a:ext cx="2139696" cy="1024128"/>
+            <a:off x="804672" y="4608576"/>
+            <a:ext cx="2139696" cy="1005840"/>
           </a:xfrm>
           <a:prstGeom prst="rect">
             <a:avLst/>
@@ -7796,8 +7796,8 @@
         </p:nvSpPr>
         <p:spPr>
           <a:xfrm>
-            <a:off x="3630168" y="4590288"/>
-            <a:ext cx="2139696" cy="1024128"/>
+            <a:off x="3630168" y="4608576"/>
+            <a:ext cx="2139696" cy="1005840"/>
           </a:xfrm>
           <a:prstGeom prst="rect">
             <a:avLst/>
@@ -7911,8 +7911,8 @@
         </p:nvSpPr>
         <p:spPr>
           <a:xfrm>
-            <a:off x="6455664" y="4590288"/>
-            <a:ext cx="2139696" cy="1024128"/>
+            <a:off x="6455664" y="4608576"/>
+            <a:ext cx="2139696" cy="1005840"/>
           </a:xfrm>
           <a:prstGeom prst="rect">
             <a:avLst/>
@@ -8026,8 +8026,8 @@
         </p:nvSpPr>
         <p:spPr>
           <a:xfrm>
-            <a:off x="9281160" y="4590288"/>
-            <a:ext cx="2139696" cy="1024128"/>
+            <a:off x="9281160" y="4608576"/>
+            <a:ext cx="2139696" cy="1005840"/>
           </a:xfrm>
           <a:prstGeom prst="rect">
             <a:avLst/>
@@ -8218,11 +8218,11 @@
         <p:spPr>
           <a:xfrm>
             <a:off x="566928" y="1591056"/>
-            <a:ext cx="1975104" cy="2395728"/>
+            <a:ext cx="1975104" cy="1920240"/>
           </a:xfrm>
           <a:prstGeom prst="roundRect">
             <a:avLst>
-              <a:gd name="adj" fmla="val 2778"/>
+              <a:gd name="adj" fmla="val 2857"/>
             </a:avLst>
           </a:prstGeom>
           <a:solidFill>
@@ -8368,19 +8368,20 @@
         </p:nvSpPr>
         <p:spPr>
           <a:xfrm>
-            <a:off x="2560320" y="2788920"/>
-            <a:ext cx="246888" cy="0"/>
-          </a:xfrm>
-          <a:prstGeom prst="line">
-            <a:avLst/>
-          </a:prstGeom>
-          <a:noFill/>
-          <a:ln w="19050">
+            <a:off x="2569464" y="2468880"/>
+            <a:ext cx="237744" cy="164592"/>
+          </a:xfrm>
+          <a:prstGeom prst="rightArrow">
+            <a:avLst/>
+          </a:prstGeom>
+          <a:solidFill>
+            <a:srgbClr val="2E6DA4"/>
+          </a:solidFill>
+          <a:ln w="12700">
             <a:solidFill>
               <a:srgbClr val="2E6DA4"/>
             </a:solidFill>
             <a:prstDash val="solid"/>
-            <a:tailEnd type="triangle"/>
           </a:ln>
         </p:spPr>
       </p:sp>
@@ -8393,11 +8394,11 @@
         <p:spPr>
           <a:xfrm>
             <a:off x="2825496" y="1591056"/>
-            <a:ext cx="1975104" cy="2395728"/>
+            <a:ext cx="1975104" cy="1920240"/>
           </a:xfrm>
           <a:prstGeom prst="roundRect">
             <a:avLst>
-              <a:gd name="adj" fmla="val 2778"/>
+              <a:gd name="adj" fmla="val 2857"/>
             </a:avLst>
           </a:prstGeom>
           <a:solidFill>
@@ -8543,19 +8544,20 @@
         </p:nvSpPr>
         <p:spPr>
           <a:xfrm>
-            <a:off x="4818888" y="2788920"/>
-            <a:ext cx="246888" cy="0"/>
-          </a:xfrm>
-          <a:prstGeom prst="line">
-            <a:avLst/>
-          </a:prstGeom>
-          <a:noFill/>
-          <a:ln w="19050">
+            <a:off x="4828032" y="2468880"/>
+            <a:ext cx="237744" cy="164592"/>
+          </a:xfrm>
+          <a:prstGeom prst="rightArrow">
+            <a:avLst/>
+          </a:prstGeom>
+          <a:solidFill>
+            <a:srgbClr val="2E6DA4"/>
+          </a:solidFill>
+          <a:ln w="12700">
             <a:solidFill>
               <a:srgbClr val="2E6DA4"/>
             </a:solidFill>
             <a:prstDash val="solid"/>
-            <a:tailEnd type="triangle"/>
           </a:ln>
         </p:spPr>
       </p:sp>
@@ -8568,11 +8570,11 @@
         <p:spPr>
           <a:xfrm>
             <a:off x="5084064" y="1591056"/>
-            <a:ext cx="1975104" cy="2395728"/>
+            <a:ext cx="1975104" cy="1920240"/>
           </a:xfrm>
           <a:prstGeom prst="roundRect">
             <a:avLst>
-              <a:gd name="adj" fmla="val 2778"/>
+              <a:gd name="adj" fmla="val 2857"/>
             </a:avLst>
           </a:prstGeom>
           <a:solidFill>
@@ -8718,19 +8720,20 @@
         </p:nvSpPr>
         <p:spPr>
           <a:xfrm>
-            <a:off x="7077456" y="2788920"/>
-            <a:ext cx="246888" cy="0"/>
-          </a:xfrm>
-          <a:prstGeom prst="line">
-            <a:avLst/>
-          </a:prstGeom>
-          <a:noFill/>
-          <a:ln w="19050">
+            <a:off x="7086600" y="2468880"/>
+            <a:ext cx="237744" cy="164592"/>
+          </a:xfrm>
+          <a:prstGeom prst="rightArrow">
+            <a:avLst/>
+          </a:prstGeom>
+          <a:solidFill>
+            <a:srgbClr val="2E6DA4"/>
+          </a:solidFill>
+          <a:ln w="12700">
             <a:solidFill>
               <a:srgbClr val="2E6DA4"/>
             </a:solidFill>
             <a:prstDash val="solid"/>
-            <a:tailEnd type="triangle"/>
           </a:ln>
         </p:spPr>
       </p:sp>
@@ -8743,11 +8746,11 @@
         <p:spPr>
           <a:xfrm>
             <a:off x="7342632" y="1591056"/>
-            <a:ext cx="1975104" cy="2395728"/>
+            <a:ext cx="1975104" cy="1920240"/>
           </a:xfrm>
           <a:prstGeom prst="roundRect">
             <a:avLst>
-              <a:gd name="adj" fmla="val 2778"/>
+              <a:gd name="adj" fmla="val 2857"/>
             </a:avLst>
           </a:prstGeom>
           <a:solidFill>
@@ -8893,19 +8896,20 @@
         </p:nvSpPr>
         <p:spPr>
           <a:xfrm>
-            <a:off x="9336024" y="2788920"/>
-            <a:ext cx="246888" cy="0"/>
-          </a:xfrm>
-          <a:prstGeom prst="line">
-            <a:avLst/>
-          </a:prstGeom>
-          <a:noFill/>
-          <a:ln w="19050">
+            <a:off x="9345168" y="2468880"/>
+            <a:ext cx="237744" cy="164592"/>
+          </a:xfrm>
+          <a:prstGeom prst="rightArrow">
+            <a:avLst/>
+          </a:prstGeom>
+          <a:solidFill>
+            <a:srgbClr val="2E6DA4"/>
+          </a:solidFill>
+          <a:ln w="12700">
             <a:solidFill>
               <a:srgbClr val="2E6DA4"/>
             </a:solidFill>
             <a:prstDash val="solid"/>
-            <a:tailEnd type="triangle"/>
           </a:ln>
         </p:spPr>
       </p:sp>
@@ -8918,11 +8922,11 @@
         <p:spPr>
           <a:xfrm>
             <a:off x="9601200" y="1591056"/>
-            <a:ext cx="1975104" cy="2395728"/>
+            <a:ext cx="1975104" cy="1920240"/>
           </a:xfrm>
           <a:prstGeom prst="roundRect">
             <a:avLst>
-              <a:gd name="adj" fmla="val 2778"/>
+              <a:gd name="adj" fmla="val 2857"/>
             </a:avLst>
           </a:prstGeom>
           <a:solidFill>
@@ -9103,7 +9107,7 @@
         <p:spPr>
           <a:xfrm>
             <a:off x="804672" y="4425696"/>
-            <a:ext cx="4919472" cy="310896"/>
+            <a:ext cx="4919472" cy="272288"/>
           </a:xfrm>
           <a:prstGeom prst="rect">
             <a:avLst/>
@@ -9141,8 +9145,8 @@
         </p:nvSpPr>
         <p:spPr>
           <a:xfrm>
-            <a:off x="804672" y="4791456"/>
-            <a:ext cx="4919472" cy="969264"/>
+            <a:off x="804672" y="4771136"/>
+            <a:ext cx="4919472" cy="989584"/>
           </a:xfrm>
           <a:prstGeom prst="rect">
             <a:avLst/>
@@ -9333,7 +9337,7 @@
         <p:spPr>
           <a:xfrm>
             <a:off x="6473952" y="4700016"/>
-            <a:ext cx="4919472" cy="310896"/>
+            <a:ext cx="4919472" cy="272288"/>
           </a:xfrm>
           <a:prstGeom prst="rect">
             <a:avLst/>
@@ -9371,8 +9375,8 @@
         </p:nvSpPr>
         <p:spPr>
           <a:xfrm>
-            <a:off x="6473952" y="5065776"/>
-            <a:ext cx="4919472" cy="694944"/>
+            <a:off x="6473952" y="5045456"/>
+            <a:ext cx="4919472" cy="715264"/>
           </a:xfrm>
           <a:prstGeom prst="rect">
             <a:avLst/>
@@ -9523,12 +9527,12 @@
         </p:nvSpPr>
         <p:spPr>
           <a:xfrm>
-            <a:off x="566928" y="1554480"/>
-            <a:ext cx="3520440" cy="2304288"/>
+            <a:off x="566928" y="1481328"/>
+            <a:ext cx="3520440" cy="2487168"/>
           </a:xfrm>
           <a:prstGeom prst="roundRect">
             <a:avLst>
-              <a:gd name="adj" fmla="val 2381"/>
+              <a:gd name="adj" fmla="val 2206"/>
             </a:avLst>
           </a:prstGeom>
           <a:solidFill>
@@ -9557,7 +9561,7 @@
         </p:nvSpPr>
         <p:spPr>
           <a:xfrm>
-            <a:off x="804672" y="1755648"/>
+            <a:off x="804672" y="1682496"/>
             <a:ext cx="3044952" cy="201168"/>
           </a:xfrm>
           <a:prstGeom prst="rect">
@@ -9596,8 +9600,8 @@
         </p:nvSpPr>
         <p:spPr>
           <a:xfrm>
-            <a:off x="804672" y="2029968"/>
-            <a:ext cx="3044952" cy="512064"/>
+            <a:off x="804672" y="1956816"/>
+            <a:ext cx="3044952" cy="310896"/>
           </a:xfrm>
           <a:prstGeom prst="rect">
             <a:avLst/>
@@ -9635,8 +9639,8 @@
         </p:nvSpPr>
         <p:spPr>
           <a:xfrm>
-            <a:off x="804672" y="2596896"/>
-            <a:ext cx="3044952" cy="713232"/>
+            <a:off x="804672" y="2340864"/>
+            <a:ext cx="3044952" cy="768096"/>
           </a:xfrm>
           <a:prstGeom prst="rect">
             <a:avLst/>
@@ -9678,7 +9682,7 @@
         <p:spPr>
           <a:xfrm>
             <a:off x="804672" y="3346704"/>
-            <a:ext cx="3044952" cy="402336"/>
+            <a:ext cx="3044952" cy="548640"/>
           </a:xfrm>
           <a:prstGeom prst="rect">
             <a:avLst/>
@@ -9716,12 +9720,12 @@
         </p:nvSpPr>
         <p:spPr>
           <a:xfrm>
-            <a:off x="4334256" y="1554480"/>
-            <a:ext cx="3520440" cy="2304288"/>
+            <a:off x="4334256" y="1481328"/>
+            <a:ext cx="3520440" cy="2487168"/>
           </a:xfrm>
           <a:prstGeom prst="roundRect">
             <a:avLst>
-              <a:gd name="adj" fmla="val 2381"/>
+              <a:gd name="adj" fmla="val 2206"/>
             </a:avLst>
           </a:prstGeom>
           <a:solidFill>
@@ -9750,7 +9754,7 @@
         </p:nvSpPr>
         <p:spPr>
           <a:xfrm>
-            <a:off x="4572000" y="1755648"/>
+            <a:off x="4572000" y="1682496"/>
             <a:ext cx="3044952" cy="201168"/>
           </a:xfrm>
           <a:prstGeom prst="rect">
@@ -9789,8 +9793,8 @@
         </p:nvSpPr>
         <p:spPr>
           <a:xfrm>
-            <a:off x="4572000" y="2029968"/>
-            <a:ext cx="3044952" cy="512064"/>
+            <a:off x="4572000" y="1956816"/>
+            <a:ext cx="3044952" cy="310896"/>
           </a:xfrm>
           <a:prstGeom prst="rect">
             <a:avLst/>
@@ -9828,8 +9832,8 @@
         </p:nvSpPr>
         <p:spPr>
           <a:xfrm>
-            <a:off x="4572000" y="2596896"/>
-            <a:ext cx="3044952" cy="713232"/>
+            <a:off x="4572000" y="2340864"/>
+            <a:ext cx="3044952" cy="768096"/>
           </a:xfrm>
           <a:prstGeom prst="rect">
             <a:avLst/>
@@ -9871,7 +9875,7 @@
         <p:spPr>
           <a:xfrm>
             <a:off x="4572000" y="3346704"/>
-            <a:ext cx="3044952" cy="402336"/>
+            <a:ext cx="3044952" cy="548640"/>
           </a:xfrm>
           <a:prstGeom prst="rect">
             <a:avLst/>
@@ -9909,12 +9913,12 @@
         </p:nvSpPr>
         <p:spPr>
           <a:xfrm>
-            <a:off x="8101584" y="1554480"/>
-            <a:ext cx="3520440" cy="2304288"/>
+            <a:off x="8101584" y="1481328"/>
+            <a:ext cx="3520440" cy="2487168"/>
           </a:xfrm>
           <a:prstGeom prst="roundRect">
             <a:avLst>
-              <a:gd name="adj" fmla="val 2381"/>
+              <a:gd name="adj" fmla="val 2206"/>
             </a:avLst>
           </a:prstGeom>
           <a:solidFill>
@@ -9943,7 +9947,7 @@
         </p:nvSpPr>
         <p:spPr>
           <a:xfrm>
-            <a:off x="8339328" y="1755648"/>
+            <a:off x="8339328" y="1682496"/>
             <a:ext cx="3044952" cy="201168"/>
           </a:xfrm>
           <a:prstGeom prst="rect">
@@ -9982,8 +9986,8 @@
         </p:nvSpPr>
         <p:spPr>
           <a:xfrm>
-            <a:off x="8339328" y="2029968"/>
-            <a:ext cx="3044952" cy="512064"/>
+            <a:off x="8339328" y="1956816"/>
+            <a:ext cx="3044952" cy="310896"/>
           </a:xfrm>
           <a:prstGeom prst="rect">
             <a:avLst/>
@@ -10021,8 +10025,8 @@
         </p:nvSpPr>
         <p:spPr>
           <a:xfrm>
-            <a:off x="8339328" y="2596896"/>
-            <a:ext cx="3044952" cy="713232"/>
+            <a:off x="8339328" y="2340864"/>
+            <a:ext cx="3044952" cy="768096"/>
           </a:xfrm>
           <a:prstGeom prst="rect">
             <a:avLst/>
@@ -10064,7 +10068,7 @@
         <p:spPr>
           <a:xfrm>
             <a:off x="8339328" y="3346704"/>
-            <a:ext cx="3044952" cy="402336"/>
+            <a:ext cx="3044952" cy="548640"/>
           </a:xfrm>
           <a:prstGeom prst="rect">
             <a:avLst/>
@@ -10102,12 +10106,12 @@
         </p:nvSpPr>
         <p:spPr>
           <a:xfrm>
-            <a:off x="566928" y="4041648"/>
-            <a:ext cx="3520440" cy="2304288"/>
+            <a:off x="566928" y="4096512"/>
+            <a:ext cx="3520440" cy="2487168"/>
           </a:xfrm>
           <a:prstGeom prst="roundRect">
             <a:avLst>
-              <a:gd name="adj" fmla="val 2381"/>
+              <a:gd name="adj" fmla="val 2206"/>
             </a:avLst>
           </a:prstGeom>
           <a:solidFill>
@@ -10136,7 +10140,7 @@
         </p:nvSpPr>
         <p:spPr>
           <a:xfrm>
-            <a:off x="804672" y="4242816"/>
+            <a:off x="804672" y="4297680"/>
             <a:ext cx="3044952" cy="201168"/>
           </a:xfrm>
           <a:prstGeom prst="rect">
@@ -10175,8 +10179,8 @@
         </p:nvSpPr>
         <p:spPr>
           <a:xfrm>
-            <a:off x="804672" y="4517136"/>
-            <a:ext cx="3044952" cy="512064"/>
+            <a:off x="804672" y="4572000"/>
+            <a:ext cx="3044952" cy="310896"/>
           </a:xfrm>
           <a:prstGeom prst="rect">
             <a:avLst/>
@@ -10214,8 +10218,8 @@
         </p:nvSpPr>
         <p:spPr>
           <a:xfrm>
-            <a:off x="804672" y="5084064"/>
-            <a:ext cx="3044952" cy="713232"/>
+            <a:off x="804672" y="4956048"/>
+            <a:ext cx="3044952" cy="768096"/>
           </a:xfrm>
           <a:prstGeom prst="rect">
             <a:avLst/>
@@ -10256,8 +10260,8 @@
         </p:nvSpPr>
         <p:spPr>
           <a:xfrm>
-            <a:off x="804672" y="5833872"/>
-            <a:ext cx="3044952" cy="402336"/>
+            <a:off x="804672" y="5961888"/>
+            <a:ext cx="3044952" cy="548640"/>
           </a:xfrm>
           <a:prstGeom prst="rect">
             <a:avLst/>
@@ -10295,12 +10299,12 @@
         </p:nvSpPr>
         <p:spPr>
           <a:xfrm>
-            <a:off x="4334256" y="4041648"/>
-            <a:ext cx="3520440" cy="2304288"/>
+            <a:off x="4334256" y="4096512"/>
+            <a:ext cx="3520440" cy="2487168"/>
           </a:xfrm>
           <a:prstGeom prst="roundRect">
             <a:avLst>
-              <a:gd name="adj" fmla="val 2381"/>
+              <a:gd name="adj" fmla="val 2206"/>
             </a:avLst>
           </a:prstGeom>
           <a:solidFill>
@@ -10329,7 +10333,7 @@
         </p:nvSpPr>
         <p:spPr>
           <a:xfrm>
-            <a:off x="4572000" y="4242816"/>
+            <a:off x="4572000" y="4297680"/>
             <a:ext cx="3044952" cy="201168"/>
           </a:xfrm>
           <a:prstGeom prst="rect">
@@ -10368,8 +10372,8 @@
         </p:nvSpPr>
         <p:spPr>
           <a:xfrm>
-            <a:off x="4572000" y="4517136"/>
-            <a:ext cx="3044952" cy="512064"/>
+            <a:off x="4572000" y="4572000"/>
+            <a:ext cx="3044952" cy="510540"/>
           </a:xfrm>
           <a:prstGeom prst="rect">
             <a:avLst/>
@@ -10407,8 +10411,8 @@
         </p:nvSpPr>
         <p:spPr>
           <a:xfrm>
-            <a:off x="4572000" y="5084064"/>
-            <a:ext cx="3044952" cy="713232"/>
+            <a:off x="4572000" y="5155692"/>
+            <a:ext cx="3044952" cy="768096"/>
           </a:xfrm>
           <a:prstGeom prst="rect">
             <a:avLst/>
@@ -10449,8 +10453,8 @@
         </p:nvSpPr>
         <p:spPr>
           <a:xfrm>
-            <a:off x="4572000" y="5833872"/>
-            <a:ext cx="3044952" cy="402336"/>
+            <a:off x="4572000" y="5961888"/>
+            <a:ext cx="3044952" cy="548640"/>
           </a:xfrm>
           <a:prstGeom prst="rect">
             <a:avLst/>
@@ -10488,12 +10492,12 @@
         </p:nvSpPr>
         <p:spPr>
           <a:xfrm>
-            <a:off x="8101584" y="4041648"/>
-            <a:ext cx="3520440" cy="2304288"/>
+            <a:off x="8101584" y="4096512"/>
+            <a:ext cx="3520440" cy="2487168"/>
           </a:xfrm>
           <a:prstGeom prst="roundRect">
             <a:avLst>
-              <a:gd name="adj" fmla="val 2381"/>
+              <a:gd name="adj" fmla="val 2206"/>
             </a:avLst>
           </a:prstGeom>
           <a:solidFill>
@@ -10522,7 +10526,7 @@
         </p:nvSpPr>
         <p:spPr>
           <a:xfrm>
-            <a:off x="8339328" y="4242816"/>
+            <a:off x="8339328" y="4297680"/>
             <a:ext cx="3044952" cy="201168"/>
           </a:xfrm>
           <a:prstGeom prst="rect">
@@ -10561,8 +10565,8 @@
         </p:nvSpPr>
         <p:spPr>
           <a:xfrm>
-            <a:off x="8339328" y="4517136"/>
-            <a:ext cx="3044952" cy="512064"/>
+            <a:off x="8339328" y="4572000"/>
+            <a:ext cx="3044952" cy="310896"/>
           </a:xfrm>
           <a:prstGeom prst="rect">
             <a:avLst/>
@@ -10600,8 +10604,8 @@
         </p:nvSpPr>
         <p:spPr>
           <a:xfrm>
-            <a:off x="8339328" y="5084064"/>
-            <a:ext cx="3044952" cy="713232"/>
+            <a:off x="8339328" y="4956048"/>
+            <a:ext cx="3044952" cy="768096"/>
           </a:xfrm>
           <a:prstGeom prst="rect">
             <a:avLst/>
@@ -10642,8 +10646,8 @@
         </p:nvSpPr>
         <p:spPr>
           <a:xfrm>
-            <a:off x="8339328" y="5833872"/>
-            <a:ext cx="3044952" cy="402336"/>
+            <a:off x="8339328" y="5961888"/>
+            <a:ext cx="3044952" cy="548640"/>
           </a:xfrm>
           <a:prstGeom prst="rect">
             <a:avLst/>
@@ -11271,8 +11275,8 @@
         </p:nvSpPr>
         <p:spPr>
           <a:xfrm>
-            <a:off x="566928" y="5632704"/>
-            <a:ext cx="5120640" cy="868680"/>
+            <a:off x="566928" y="5614416"/>
+            <a:ext cx="5486400" cy="896112"/>
           </a:xfrm>
           <a:prstGeom prst="rect">
             <a:avLst/>
@@ -11300,7 +11304,7 @@
                 <a:ea typeface="Calibri" pitchFamily="34" charset="-122"/>
                 <a:cs typeface="Calibri" pitchFamily="34" charset="-120"/>
               </a:rPr>
-              <a:t>Tokenization and format-preserving encryption — a separate product, not a KMS feature.</a:t>
+              <a:t>Tokenization and FPE — a separate product, not a KMS feature.</a:t>
             </a:r>
             <a:endParaRPr lang="en-US" sz="1150" dirty="0"/>
           </a:p>
@@ -11609,7 +11613,7 @@
         <p:spPr>
           <a:xfrm>
             <a:off x="804672" y="2048256"/>
-            <a:ext cx="4919472" cy="310896"/>
+            <a:ext cx="4919472" cy="272288"/>
           </a:xfrm>
           <a:prstGeom prst="rect">
             <a:avLst/>
@@ -11647,8 +11651,8 @@
         </p:nvSpPr>
         <p:spPr>
           <a:xfrm>
-            <a:off x="804672" y="2414016"/>
-            <a:ext cx="4919472" cy="1078992"/>
+            <a:off x="804672" y="2393696"/>
+            <a:ext cx="4919472" cy="1099312"/>
           </a:xfrm>
           <a:prstGeom prst="rect">
             <a:avLst/>
@@ -11815,7 +11819,7 @@
         <p:spPr>
           <a:xfrm>
             <a:off x="6473952" y="2048256"/>
-            <a:ext cx="4919472" cy="310896"/>
+            <a:ext cx="4919472" cy="272288"/>
           </a:xfrm>
           <a:prstGeom prst="rect">
             <a:avLst/>
@@ -11853,8 +11857,8 @@
         </p:nvSpPr>
         <p:spPr>
           <a:xfrm>
-            <a:off x="6473952" y="2414016"/>
-            <a:ext cx="4919472" cy="1078992"/>
+            <a:off x="6473952" y="2393696"/>
+            <a:ext cx="4919472" cy="1099312"/>
           </a:xfrm>
           <a:prstGeom prst="rect">
             <a:avLst/>
@@ -11982,7 +11986,7 @@
         <p:spPr>
           <a:xfrm>
             <a:off x="804672" y="4059936"/>
-            <a:ext cx="10552176" cy="310896"/>
+            <a:ext cx="10552176" cy="272288"/>
           </a:xfrm>
           <a:prstGeom prst="rect">
             <a:avLst/>
@@ -12020,8 +12024,8 @@
         </p:nvSpPr>
         <p:spPr>
           <a:xfrm>
-            <a:off x="804672" y="4425696"/>
-            <a:ext cx="10552176" cy="1417320"/>
+            <a:off x="804672" y="4405376"/>
+            <a:ext cx="10552176" cy="1437640"/>
           </a:xfrm>
           <a:prstGeom prst="rect">
             <a:avLst/>
@@ -12322,7 +12326,7 @@
         <p:spPr>
           <a:xfrm>
             <a:off x="804672" y="2048256"/>
-            <a:ext cx="3044952" cy="310896"/>
+            <a:ext cx="3044952" cy="272288"/>
           </a:xfrm>
           <a:prstGeom prst="rect">
             <a:avLst/>
@@ -12360,8 +12364,8 @@
         </p:nvSpPr>
         <p:spPr>
           <a:xfrm>
-            <a:off x="804672" y="2414016"/>
-            <a:ext cx="3044952" cy="1325880"/>
+            <a:off x="804672" y="2393696"/>
+            <a:ext cx="3044952" cy="1346200"/>
           </a:xfrm>
           <a:prstGeom prst="rect">
             <a:avLst/>
@@ -12600,7 +12604,7 @@
         <p:spPr>
           <a:xfrm>
             <a:off x="4572000" y="2048256"/>
-            <a:ext cx="3044952" cy="310896"/>
+            <a:ext cx="3044952" cy="272288"/>
           </a:xfrm>
           <a:prstGeom prst="rect">
             <a:avLst/>
@@ -12638,8 +12642,8 @@
         </p:nvSpPr>
         <p:spPr>
           <a:xfrm>
-            <a:off x="4572000" y="2414016"/>
-            <a:ext cx="3044952" cy="1325880"/>
+            <a:off x="4572000" y="2393696"/>
+            <a:ext cx="3044952" cy="1346200"/>
           </a:xfrm>
           <a:prstGeom prst="rect">
             <a:avLst/>
@@ -12878,7 +12882,7 @@
         <p:spPr>
           <a:xfrm>
             <a:off x="8339328" y="2048256"/>
-            <a:ext cx="3054096" cy="310896"/>
+            <a:ext cx="3054096" cy="272288"/>
           </a:xfrm>
           <a:prstGeom prst="rect">
             <a:avLst/>
@@ -12916,8 +12920,8 @@
         </p:nvSpPr>
         <p:spPr>
           <a:xfrm>
-            <a:off x="8339328" y="2414016"/>
-            <a:ext cx="3054096" cy="1325880"/>
+            <a:off x="8339328" y="2393696"/>
+            <a:ext cx="3054096" cy="1346200"/>
           </a:xfrm>
           <a:prstGeom prst="rect">
             <a:avLst/>
@@ -12998,7 +13002,7 @@
         <p:spPr>
           <a:xfrm>
             <a:off x="566928" y="4443984"/>
-            <a:ext cx="1956816" cy="566928"/>
+            <a:ext cx="1901952" cy="566928"/>
           </a:xfrm>
           <a:prstGeom prst="roundRect">
             <a:avLst>
@@ -13025,7 +13029,7 @@
         <p:spPr>
           <a:xfrm>
             <a:off x="566928" y="4443984"/>
-            <a:ext cx="1956816" cy="566928"/>
+            <a:ext cx="1901952" cy="566928"/>
           </a:xfrm>
           <a:prstGeom prst="rect">
             <a:avLst/>
@@ -13063,19 +13067,20 @@
         </p:nvSpPr>
         <p:spPr>
           <a:xfrm>
-            <a:off x="2542032" y="4727448"/>
-            <a:ext cx="274320" cy="0"/>
-          </a:xfrm>
-          <a:prstGeom prst="line">
-            <a:avLst/>
-          </a:prstGeom>
-          <a:noFill/>
-          <a:ln w="19050">
+            <a:off x="2496312" y="4645152"/>
+            <a:ext cx="256032" cy="164592"/>
+          </a:xfrm>
+          <a:prstGeom prst="rightArrow">
+            <a:avLst/>
+          </a:prstGeom>
+          <a:solidFill>
+            <a:srgbClr val="2E6DA4"/>
+          </a:solidFill>
+          <a:ln w="12700">
             <a:solidFill>
               <a:srgbClr val="2E6DA4"/>
             </a:solidFill>
             <a:prstDash val="solid"/>
-            <a:tailEnd type="triangle"/>
           </a:ln>
         </p:spPr>
       </p:sp>
@@ -13087,8 +13092,8 @@
         </p:nvSpPr>
         <p:spPr>
           <a:xfrm>
-            <a:off x="2834640" y="4443984"/>
-            <a:ext cx="1956816" cy="566928"/>
+            <a:off x="2779776" y="4443984"/>
+            <a:ext cx="1901952" cy="566928"/>
           </a:xfrm>
           <a:prstGeom prst="roundRect">
             <a:avLst>
@@ -13114,8 +13119,8 @@
         </p:nvSpPr>
         <p:spPr>
           <a:xfrm>
-            <a:off x="2834640" y="4443984"/>
-            <a:ext cx="1956816" cy="566928"/>
+            <a:off x="2779776" y="4443984"/>
+            <a:ext cx="1901952" cy="566928"/>
           </a:xfrm>
           <a:prstGeom prst="rect">
             <a:avLst/>
@@ -13153,19 +13158,20 @@
         </p:nvSpPr>
         <p:spPr>
           <a:xfrm>
-            <a:off x="4809744" y="4727448"/>
-            <a:ext cx="274320" cy="0"/>
-          </a:xfrm>
-          <a:prstGeom prst="line">
-            <a:avLst/>
-          </a:prstGeom>
-          <a:noFill/>
-          <a:ln w="19050">
+            <a:off x="4709160" y="4645152"/>
+            <a:ext cx="256032" cy="164592"/>
+          </a:xfrm>
+          <a:prstGeom prst="rightArrow">
+            <a:avLst/>
+          </a:prstGeom>
+          <a:solidFill>
+            <a:srgbClr val="2E6DA4"/>
+          </a:solidFill>
+          <a:ln w="12700">
             <a:solidFill>
               <a:srgbClr val="2E6DA4"/>
             </a:solidFill>
             <a:prstDash val="solid"/>
-            <a:tailEnd type="triangle"/>
           </a:ln>
         </p:spPr>
       </p:sp>
@@ -13177,8 +13183,8 @@
         </p:nvSpPr>
         <p:spPr>
           <a:xfrm>
-            <a:off x="5102352" y="4443984"/>
-            <a:ext cx="1956816" cy="566928"/>
+            <a:off x="4992624" y="4443984"/>
+            <a:ext cx="1901952" cy="566928"/>
           </a:xfrm>
           <a:prstGeom prst="roundRect">
             <a:avLst>
@@ -13204,8 +13210,8 @@
         </p:nvSpPr>
         <p:spPr>
           <a:xfrm>
-            <a:off x="5102352" y="4443984"/>
-            <a:ext cx="1956816" cy="566928"/>
+            <a:off x="4992624" y="4443984"/>
+            <a:ext cx="1901952" cy="566928"/>
           </a:xfrm>
           <a:prstGeom prst="rect">
             <a:avLst/>
@@ -13243,19 +13249,20 @@
         </p:nvSpPr>
         <p:spPr>
           <a:xfrm>
-            <a:off x="7077456" y="4727448"/>
-            <a:ext cx="274320" cy="0"/>
-          </a:xfrm>
-          <a:prstGeom prst="line">
-            <a:avLst/>
-          </a:prstGeom>
-          <a:noFill/>
-          <a:ln w="19050">
+            <a:off x="6922008" y="4645152"/>
+            <a:ext cx="256032" cy="164592"/>
+          </a:xfrm>
+          <a:prstGeom prst="rightArrow">
+            <a:avLst/>
+          </a:prstGeom>
+          <a:solidFill>
+            <a:srgbClr val="2E6DA4"/>
+          </a:solidFill>
+          <a:ln w="12700">
             <a:solidFill>
               <a:srgbClr val="2E6DA4"/>
             </a:solidFill>
             <a:prstDash val="solid"/>
-            <a:tailEnd type="triangle"/>
           </a:ln>
         </p:spPr>
       </p:sp>
@@ -13267,8 +13274,8 @@
         </p:nvSpPr>
         <p:spPr>
           <a:xfrm>
-            <a:off x="7370064" y="4443984"/>
-            <a:ext cx="1956816" cy="566928"/>
+            <a:off x="7205472" y="4443984"/>
+            <a:ext cx="1901952" cy="566928"/>
           </a:xfrm>
           <a:prstGeom prst="roundRect">
             <a:avLst>
@@ -13294,8 +13301,8 @@
         </p:nvSpPr>
         <p:spPr>
           <a:xfrm>
-            <a:off x="7370064" y="4443984"/>
-            <a:ext cx="1956816" cy="566928"/>
+            <a:off x="7205472" y="4443984"/>
+            <a:ext cx="1901952" cy="566928"/>
           </a:xfrm>
           <a:prstGeom prst="rect">
             <a:avLst/>
@@ -13333,8 +13340,8 @@
         </p:nvSpPr>
         <p:spPr>
           <a:xfrm>
-            <a:off x="9637776" y="4443984"/>
-            <a:ext cx="1956816" cy="566928"/>
+            <a:off x="9729216" y="4443984"/>
+            <a:ext cx="1901952" cy="566928"/>
           </a:xfrm>
           <a:prstGeom prst="roundRect">
             <a:avLst>
@@ -13360,8 +13367,8 @@
         </p:nvSpPr>
         <p:spPr>
           <a:xfrm>
-            <a:off x="9637776" y="4443984"/>
-            <a:ext cx="1956816" cy="566928"/>
+            <a:off x="9729216" y="4443984"/>
+            <a:ext cx="1901952" cy="566928"/>
           </a:xfrm>
           <a:prstGeom prst="rect">
             <a:avLst/>
@@ -13399,8 +13406,8 @@
         </p:nvSpPr>
         <p:spPr>
           <a:xfrm>
-            <a:off x="9637776" y="5047488"/>
-            <a:ext cx="1956816" cy="237744"/>
+            <a:off x="9729216" y="5084064"/>
+            <a:ext cx="1901952" cy="237744"/>
           </a:xfrm>
           <a:prstGeom prst="rect">
             <a:avLst/>
@@ -13424,7 +13431,7 @@
                 <a:ea typeface="Calibri" pitchFamily="34" charset="-122"/>
                 <a:cs typeface="Calibri" pitchFamily="34" charset="-120"/>
               </a:rPr>
-              <a:t>reachable from any live state</a:t>
+              <a:t>from any live state</a:t>
             </a:r>
             <a:endParaRPr lang="en-US" sz="950" dirty="0"/>
           </a:p>
@@ -13661,7 +13668,7 @@
         <p:spPr>
           <a:xfrm>
             <a:off x="804672" y="2048256"/>
-            <a:ext cx="4919472" cy="310896"/>
+            <a:ext cx="4919472" cy="272288"/>
           </a:xfrm>
           <a:prstGeom prst="rect">
             <a:avLst/>
@@ -13699,8 +13706,8 @@
         </p:nvSpPr>
         <p:spPr>
           <a:xfrm>
-            <a:off x="804672" y="2414016"/>
-            <a:ext cx="4919472" cy="1481328"/>
+            <a:off x="804672" y="2393696"/>
+            <a:ext cx="4919472" cy="1501648"/>
           </a:xfrm>
           <a:prstGeom prst="rect">
             <a:avLst/>
@@ -13891,7 +13898,7 @@
         <p:spPr>
           <a:xfrm>
             <a:off x="6473952" y="2048256"/>
-            <a:ext cx="4919472" cy="310896"/>
+            <a:ext cx="4919472" cy="272288"/>
           </a:xfrm>
           <a:prstGeom prst="rect">
             <a:avLst/>
@@ -13929,8 +13936,8 @@
         </p:nvSpPr>
         <p:spPr>
           <a:xfrm>
-            <a:off x="6473952" y="2414016"/>
-            <a:ext cx="4919472" cy="1481328"/>
+            <a:off x="6473952" y="2393696"/>
+            <a:ext cx="4919472" cy="1501648"/>
           </a:xfrm>
           <a:prstGeom prst="rect">
             <a:avLst/>
@@ -14075,7 +14082,7 @@
         <p:spPr>
           <a:xfrm>
             <a:off x="804672" y="4462272"/>
-            <a:ext cx="6382512" cy="310896"/>
+            <a:ext cx="6382512" cy="272288"/>
           </a:xfrm>
           <a:prstGeom prst="rect">
             <a:avLst/>
@@ -14113,8 +14120,8 @@
         </p:nvSpPr>
         <p:spPr>
           <a:xfrm>
-            <a:off x="804672" y="4828032"/>
-            <a:ext cx="6382512" cy="1024128"/>
+            <a:off x="804672" y="4807712"/>
+            <a:ext cx="6382512" cy="1044448"/>
           </a:xfrm>
           <a:prstGeom prst="rect">
             <a:avLst/>
@@ -14229,7 +14236,7 @@
         <p:spPr>
           <a:xfrm>
             <a:off x="7936992" y="4736592"/>
-            <a:ext cx="3456432" cy="310896"/>
+            <a:ext cx="3456432" cy="272288"/>
           </a:xfrm>
           <a:prstGeom prst="rect">
             <a:avLst/>
@@ -14267,8 +14274,8 @@
         </p:nvSpPr>
         <p:spPr>
           <a:xfrm>
-            <a:off x="7936992" y="5102352"/>
-            <a:ext cx="3456432" cy="749808"/>
+            <a:off x="7936992" y="5082032"/>
+            <a:ext cx="3456432" cy="770128"/>
           </a:xfrm>
           <a:prstGeom prst="rect">
             <a:avLst/>
@@ -14524,37 +14531,11 @@
         </p:nvSpPr>
         <p:spPr>
           <a:xfrm>
-            <a:off x="6080760" y="2002536"/>
-            <a:ext cx="0" cy="182880"/>
-          </a:xfrm>
-          <a:prstGeom prst="line">
-            <a:avLst/>
-          </a:prstGeom>
-          <a:noFill/>
-          <a:ln w="19050">
-            <a:solidFill>
-              <a:srgbClr val="2E6DA4"/>
-            </a:solidFill>
-            <a:prstDash val="solid"/>
-            <a:tailEnd type="triangle"/>
-          </a:ln>
-        </p:spPr>
-      </p:sp>
-      <p:sp>
-        <p:nvSpPr>
-          <p:cNvPr id="8" name="Shape 6"/>
-          <p:cNvSpPr/>
-          <p:nvPr/>
-        </p:nvSpPr>
-        <p:spPr>
-          <a:xfrm>
-            <a:off x="3977640" y="2199132"/>
-            <a:ext cx="4206240" cy="475488"/>
-          </a:xfrm>
-          <a:prstGeom prst="roundRect">
-            <a:avLst>
-              <a:gd name="adj" fmla="val 11538"/>
-            </a:avLst>
+            <a:off x="5998464" y="2002536"/>
+            <a:ext cx="164592" cy="182880"/>
+          </a:xfrm>
+          <a:prstGeom prst="downArrow">
+            <a:avLst/>
           </a:prstGeom>
           <a:solidFill>
             <a:srgbClr val="2E6DA4"/>
@@ -14569,8 +14550,8 @@
       </p:sp>
       <p:sp>
         <p:nvSpPr>
-          <p:cNvPr id="9" name="Text 7"/>
-          <p:cNvSpPr txBox="1"/>
+          <p:cNvPr id="8" name="Shape 6"/>
+          <p:cNvSpPr/>
           <p:nvPr/>
         </p:nvSpPr>
         <p:spPr>
@@ -14578,94 +14559,122 @@
             <a:off x="3977640" y="2199132"/>
             <a:ext cx="4206240" cy="475488"/>
           </a:xfrm>
-          <a:prstGeom prst="rect">
-            <a:avLst/>
-          </a:prstGeom>
-          <a:noFill/>
-          <a:ln/>
-        </p:spPr>
-        <p:txBody>
-          <a:bodyPr wrap="square" lIns="0" tIns="0" rIns="0" bIns="0" rtlCol="0" anchor="ctr"/>
-          <a:lstStyle/>
-          <a:p>
-            <a:pPr algn="ctr" indent="0" marL="0">
-              <a:buNone/>
-            </a:pPr>
-            <a:r>
-              <a:rPr lang="en-US" sz="1250" b="1" dirty="0">
-                <a:solidFill>
-                  <a:srgbClr val="FFFFFF"/>
-                </a:solidFill>
-                <a:latin typeface="Calibri" pitchFamily="34" charset="0"/>
-                <a:ea typeface="Calibri" pitchFamily="34" charset="-122"/>
-                <a:cs typeface="Calibri" pitchFamily="34" charset="-120"/>
-              </a:rPr>
-              <a:t>TLS 1.2+  ·  TCP 5696</a:t>
-            </a:r>
-            <a:endParaRPr lang="en-US" sz="1250" dirty="0"/>
-          </a:p>
-        </p:txBody>
-      </p:sp>
-      <p:sp>
-        <p:nvSpPr>
-          <p:cNvPr id="10" name="Text 8"/>
-          <p:cNvSpPr txBox="1"/>
-          <p:nvPr/>
-        </p:nvSpPr>
-        <p:spPr>
-          <a:xfrm>
-            <a:off x="8348472" y="2272284"/>
-            <a:ext cx="3246120" cy="329184"/>
-          </a:xfrm>
-          <a:prstGeom prst="rect">
-            <a:avLst/>
-          </a:prstGeom>
-          <a:noFill/>
-          <a:ln/>
-        </p:spPr>
-        <p:txBody>
-          <a:bodyPr wrap="square" lIns="0" tIns="0" rIns="0" bIns="0" rtlCol="0" anchor="ctr"/>
-          <a:lstStyle/>
-          <a:p>
-            <a:pPr indent="0" marL="0">
-              <a:buNone/>
-            </a:pPr>
-            <a:r>
-              <a:rPr lang="en-US" sz="1050" dirty="0">
-                <a:solidFill>
-                  <a:srgbClr val="7B8794"/>
-                </a:solidFill>
-                <a:latin typeface="Calibri" pitchFamily="34" charset="0"/>
-                <a:ea typeface="Calibri" pitchFamily="34" charset="-122"/>
-                <a:cs typeface="Calibri" pitchFamily="34" charset="-120"/>
-              </a:rPr>
-              <a:t>enforced by default; mTLS optional</a:t>
-            </a:r>
-            <a:endParaRPr lang="en-US" sz="1050" dirty="0"/>
-          </a:p>
-        </p:txBody>
-      </p:sp>
-      <p:sp>
-        <p:nvSpPr>
-          <p:cNvPr id="11" name="Shape 9"/>
-          <p:cNvSpPr/>
-          <p:nvPr/>
-        </p:nvSpPr>
-        <p:spPr>
-          <a:xfrm>
-            <a:off x="6080760" y="2683764"/>
-            <a:ext cx="0" cy="182880"/>
-          </a:xfrm>
-          <a:prstGeom prst="line">
-            <a:avLst/>
-          </a:prstGeom>
-          <a:noFill/>
-          <a:ln w="19050">
+          <a:prstGeom prst="roundRect">
+            <a:avLst>
+              <a:gd name="adj" fmla="val 11538"/>
+            </a:avLst>
+          </a:prstGeom>
+          <a:solidFill>
+            <a:srgbClr val="2E6DA4"/>
+          </a:solidFill>
+          <a:ln w="12700">
             <a:solidFill>
               <a:srgbClr val="2E6DA4"/>
             </a:solidFill>
             <a:prstDash val="solid"/>
-            <a:tailEnd type="triangle"/>
+          </a:ln>
+        </p:spPr>
+      </p:sp>
+      <p:sp>
+        <p:nvSpPr>
+          <p:cNvPr id="9" name="Text 7"/>
+          <p:cNvSpPr txBox="1"/>
+          <p:nvPr/>
+        </p:nvSpPr>
+        <p:spPr>
+          <a:xfrm>
+            <a:off x="3977640" y="2199132"/>
+            <a:ext cx="4206240" cy="475488"/>
+          </a:xfrm>
+          <a:prstGeom prst="rect">
+            <a:avLst/>
+          </a:prstGeom>
+          <a:noFill/>
+          <a:ln/>
+        </p:spPr>
+        <p:txBody>
+          <a:bodyPr wrap="square" lIns="0" tIns="0" rIns="0" bIns="0" rtlCol="0" anchor="ctr"/>
+          <a:lstStyle/>
+          <a:p>
+            <a:pPr algn="ctr" indent="0" marL="0">
+              <a:buNone/>
+            </a:pPr>
+            <a:r>
+              <a:rPr lang="en-US" sz="1250" b="1" dirty="0">
+                <a:solidFill>
+                  <a:srgbClr val="FFFFFF"/>
+                </a:solidFill>
+                <a:latin typeface="Calibri" pitchFamily="34" charset="0"/>
+                <a:ea typeface="Calibri" pitchFamily="34" charset="-122"/>
+                <a:cs typeface="Calibri" pitchFamily="34" charset="-120"/>
+              </a:rPr>
+              <a:t>TLS 1.2+  ·  TCP 5696</a:t>
+            </a:r>
+            <a:endParaRPr lang="en-US" sz="1250" dirty="0"/>
+          </a:p>
+        </p:txBody>
+      </p:sp>
+      <p:sp>
+        <p:nvSpPr>
+          <p:cNvPr id="10" name="Text 8"/>
+          <p:cNvSpPr txBox="1"/>
+          <p:nvPr/>
+        </p:nvSpPr>
+        <p:spPr>
+          <a:xfrm>
+            <a:off x="8348472" y="2272284"/>
+            <a:ext cx="3246120" cy="329184"/>
+          </a:xfrm>
+          <a:prstGeom prst="rect">
+            <a:avLst/>
+          </a:prstGeom>
+          <a:noFill/>
+          <a:ln/>
+        </p:spPr>
+        <p:txBody>
+          <a:bodyPr wrap="square" lIns="0" tIns="0" rIns="0" bIns="0" rtlCol="0" anchor="ctr"/>
+          <a:lstStyle/>
+          <a:p>
+            <a:pPr indent="0" marL="0">
+              <a:buNone/>
+            </a:pPr>
+            <a:r>
+              <a:rPr lang="en-US" sz="1050" dirty="0">
+                <a:solidFill>
+                  <a:srgbClr val="7B8794"/>
+                </a:solidFill>
+                <a:latin typeface="Calibri" pitchFamily="34" charset="0"/>
+                <a:ea typeface="Calibri" pitchFamily="34" charset="-122"/>
+                <a:cs typeface="Calibri" pitchFamily="34" charset="-120"/>
+              </a:rPr>
+              <a:t>enforced by default; mTLS optional</a:t>
+            </a:r>
+            <a:endParaRPr lang="en-US" sz="1050" dirty="0"/>
+          </a:p>
+        </p:txBody>
+      </p:sp>
+      <p:sp>
+        <p:nvSpPr>
+          <p:cNvPr id="11" name="Shape 9"/>
+          <p:cNvSpPr/>
+          <p:nvPr/>
+        </p:nvSpPr>
+        <p:spPr>
+          <a:xfrm>
+            <a:off x="5998464" y="2683764"/>
+            <a:ext cx="164592" cy="182880"/>
+          </a:xfrm>
+          <a:prstGeom prst="downArrow">
+            <a:avLst/>
+          </a:prstGeom>
+          <a:solidFill>
+            <a:srgbClr val="2E6DA4"/>
+          </a:solidFill>
+          <a:ln w="12700">
+            <a:solidFill>
+              <a:srgbClr val="2E6DA4"/>
+            </a:solidFill>
+            <a:prstDash val="solid"/>
           </a:ln>
         </p:spPr>
       </p:sp>
@@ -14782,19 +14791,20 @@
         </p:nvSpPr>
         <p:spPr>
           <a:xfrm>
-            <a:off x="6080760" y="3364992"/>
-            <a:ext cx="0" cy="182880"/>
-          </a:xfrm>
-          <a:prstGeom prst="line">
-            <a:avLst/>
-          </a:prstGeom>
-          <a:noFill/>
-          <a:ln w="19050">
+            <a:off x="5998464" y="3364992"/>
+            <a:ext cx="164592" cy="182880"/>
+          </a:xfrm>
+          <a:prstGeom prst="downArrow">
+            <a:avLst/>
+          </a:prstGeom>
+          <a:solidFill>
+            <a:srgbClr val="2E6DA4"/>
+          </a:solidFill>
+          <a:ln w="12700">
             <a:solidFill>
               <a:srgbClr val="2E6DA4"/>
             </a:solidFill>
             <a:prstDash val="solid"/>
-            <a:tailEnd type="triangle"/>
           </a:ln>
         </p:spPr>
       </p:sp>
@@ -14911,37 +14921,11 @@
         </p:nvSpPr>
         <p:spPr>
           <a:xfrm>
-            <a:off x="6080760" y="4046220"/>
-            <a:ext cx="0" cy="182880"/>
-          </a:xfrm>
-          <a:prstGeom prst="line">
-            <a:avLst/>
-          </a:prstGeom>
-          <a:noFill/>
-          <a:ln w="19050">
-            <a:solidFill>
-              <a:srgbClr val="2E6DA4"/>
-            </a:solidFill>
-            <a:prstDash val="solid"/>
-            <a:tailEnd type="triangle"/>
-          </a:ln>
-        </p:spPr>
-      </p:sp>
-      <p:sp>
-        <p:nvSpPr>
-          <p:cNvPr id="20" name="Shape 18"/>
-          <p:cNvSpPr/>
-          <p:nvPr/>
-        </p:nvSpPr>
-        <p:spPr>
-          <a:xfrm>
-            <a:off x="3977640" y="4242816"/>
-            <a:ext cx="4206240" cy="475488"/>
-          </a:xfrm>
-          <a:prstGeom prst="roundRect">
-            <a:avLst>
-              <a:gd name="adj" fmla="val 11538"/>
-            </a:avLst>
+            <a:off x="5998464" y="4046220"/>
+            <a:ext cx="164592" cy="182880"/>
+          </a:xfrm>
+          <a:prstGeom prst="downArrow">
+            <a:avLst/>
           </a:prstGeom>
           <a:solidFill>
             <a:srgbClr val="2E6DA4"/>
@@ -14956,8 +14940,8 @@
       </p:sp>
       <p:sp>
         <p:nvSpPr>
-          <p:cNvPr id="21" name="Text 19"/>
-          <p:cNvSpPr txBox="1"/>
+          <p:cNvPr id="20" name="Shape 18"/>
+          <p:cNvSpPr/>
           <p:nvPr/>
         </p:nvSpPr>
         <p:spPr>
@@ -14965,94 +14949,122 @@
             <a:off x="3977640" y="4242816"/>
             <a:ext cx="4206240" cy="475488"/>
           </a:xfrm>
-          <a:prstGeom prst="rect">
-            <a:avLst/>
-          </a:prstGeom>
-          <a:noFill/>
-          <a:ln/>
-        </p:spPr>
-        <p:txBody>
-          <a:bodyPr wrap="square" lIns="0" tIns="0" rIns="0" bIns="0" rtlCol="0" anchor="ctr"/>
-          <a:lstStyle/>
-          <a:p>
-            <a:pPr algn="ctr" indent="0" marL="0">
-              <a:buNone/>
-            </a:pPr>
-            <a:r>
-              <a:rPr lang="en-US" sz="1250" b="1" dirty="0">
-                <a:solidFill>
-                  <a:srgbClr val="FFFFFF"/>
-                </a:solidFill>
-                <a:latin typeface="Calibri" pitchFamily="34" charset="0"/>
-                <a:ea typeface="Calibri" pitchFamily="34" charset="-122"/>
-                <a:cs typeface="Calibri" pitchFamily="34" charset="-120"/>
-              </a:rPr>
-              <a:t>40 operation handlers</a:t>
-            </a:r>
-            <a:endParaRPr lang="en-US" sz="1250" dirty="0"/>
-          </a:p>
-        </p:txBody>
-      </p:sp>
-      <p:sp>
-        <p:nvSpPr>
-          <p:cNvPr id="22" name="Text 20"/>
-          <p:cNvSpPr txBox="1"/>
-          <p:nvPr/>
-        </p:nvSpPr>
-        <p:spPr>
-          <a:xfrm>
-            <a:off x="8348472" y="4315968"/>
-            <a:ext cx="3246120" cy="329184"/>
-          </a:xfrm>
-          <a:prstGeom prst="rect">
-            <a:avLst/>
-          </a:prstGeom>
-          <a:noFill/>
-          <a:ln/>
-        </p:spPr>
-        <p:txBody>
-          <a:bodyPr wrap="square" lIns="0" tIns="0" rIns="0" bIns="0" rtlCol="0" anchor="ctr"/>
-          <a:lstStyle/>
-          <a:p>
-            <a:pPr indent="0" marL="0">
-              <a:buNone/>
-            </a:pPr>
-            <a:r>
-              <a:rPr lang="en-US" sz="1050" dirty="0">
-                <a:solidFill>
-                  <a:srgbClr val="7B8794"/>
-                </a:solidFill>
-                <a:latin typeface="Calibri" pitchFamily="34" charset="0"/>
-                <a:ea typeface="Calibri" pitchFamily="34" charset="-122"/>
-                <a:cs typeface="Calibri" pitchFamily="34" charset="-120"/>
-              </a:rPr>
-              <a:t>one file per KMIP operation</a:t>
-            </a:r>
-            <a:endParaRPr lang="en-US" sz="1050" dirty="0"/>
-          </a:p>
-        </p:txBody>
-      </p:sp>
-      <p:sp>
-        <p:nvSpPr>
-          <p:cNvPr id="23" name="Shape 21"/>
-          <p:cNvSpPr/>
-          <p:nvPr/>
-        </p:nvSpPr>
-        <p:spPr>
-          <a:xfrm>
-            <a:off x="6080760" y="4727448"/>
-            <a:ext cx="0" cy="182880"/>
-          </a:xfrm>
-          <a:prstGeom prst="line">
-            <a:avLst/>
-          </a:prstGeom>
-          <a:noFill/>
-          <a:ln w="19050">
+          <a:prstGeom prst="roundRect">
+            <a:avLst>
+              <a:gd name="adj" fmla="val 11538"/>
+            </a:avLst>
+          </a:prstGeom>
+          <a:solidFill>
+            <a:srgbClr val="2E6DA4"/>
+          </a:solidFill>
+          <a:ln w="12700">
             <a:solidFill>
               <a:srgbClr val="2E6DA4"/>
             </a:solidFill>
             <a:prstDash val="solid"/>
-            <a:tailEnd type="triangle"/>
+          </a:ln>
+        </p:spPr>
+      </p:sp>
+      <p:sp>
+        <p:nvSpPr>
+          <p:cNvPr id="21" name="Text 19"/>
+          <p:cNvSpPr txBox="1"/>
+          <p:nvPr/>
+        </p:nvSpPr>
+        <p:spPr>
+          <a:xfrm>
+            <a:off x="3977640" y="4242816"/>
+            <a:ext cx="4206240" cy="475488"/>
+          </a:xfrm>
+          <a:prstGeom prst="rect">
+            <a:avLst/>
+          </a:prstGeom>
+          <a:noFill/>
+          <a:ln/>
+        </p:spPr>
+        <p:txBody>
+          <a:bodyPr wrap="square" lIns="0" tIns="0" rIns="0" bIns="0" rtlCol="0" anchor="ctr"/>
+          <a:lstStyle/>
+          <a:p>
+            <a:pPr algn="ctr" indent="0" marL="0">
+              <a:buNone/>
+            </a:pPr>
+            <a:r>
+              <a:rPr lang="en-US" sz="1250" b="1" dirty="0">
+                <a:solidFill>
+                  <a:srgbClr val="FFFFFF"/>
+                </a:solidFill>
+                <a:latin typeface="Calibri" pitchFamily="34" charset="0"/>
+                <a:ea typeface="Calibri" pitchFamily="34" charset="-122"/>
+                <a:cs typeface="Calibri" pitchFamily="34" charset="-120"/>
+              </a:rPr>
+              <a:t>40 operation handlers</a:t>
+            </a:r>
+            <a:endParaRPr lang="en-US" sz="1250" dirty="0"/>
+          </a:p>
+        </p:txBody>
+      </p:sp>
+      <p:sp>
+        <p:nvSpPr>
+          <p:cNvPr id="22" name="Text 20"/>
+          <p:cNvSpPr txBox="1"/>
+          <p:nvPr/>
+        </p:nvSpPr>
+        <p:spPr>
+          <a:xfrm>
+            <a:off x="8348472" y="4315968"/>
+            <a:ext cx="3246120" cy="329184"/>
+          </a:xfrm>
+          <a:prstGeom prst="rect">
+            <a:avLst/>
+          </a:prstGeom>
+          <a:noFill/>
+          <a:ln/>
+        </p:spPr>
+        <p:txBody>
+          <a:bodyPr wrap="square" lIns="0" tIns="0" rIns="0" bIns="0" rtlCol="0" anchor="ctr"/>
+          <a:lstStyle/>
+          <a:p>
+            <a:pPr indent="0" marL="0">
+              <a:buNone/>
+            </a:pPr>
+            <a:r>
+              <a:rPr lang="en-US" sz="1050" dirty="0">
+                <a:solidFill>
+                  <a:srgbClr val="7B8794"/>
+                </a:solidFill>
+                <a:latin typeface="Calibri" pitchFamily="34" charset="0"/>
+                <a:ea typeface="Calibri" pitchFamily="34" charset="-122"/>
+                <a:cs typeface="Calibri" pitchFamily="34" charset="-120"/>
+              </a:rPr>
+              <a:t>one file per KMIP operation</a:t>
+            </a:r>
+            <a:endParaRPr lang="en-US" sz="1050" dirty="0"/>
+          </a:p>
+        </p:txBody>
+      </p:sp>
+      <p:sp>
+        <p:nvSpPr>
+          <p:cNvPr id="23" name="Shape 21"/>
+          <p:cNvSpPr/>
+          <p:nvPr/>
+        </p:nvSpPr>
+        <p:spPr>
+          <a:xfrm>
+            <a:off x="5998464" y="4727448"/>
+            <a:ext cx="164592" cy="182880"/>
+          </a:xfrm>
+          <a:prstGeom prst="downArrow">
+            <a:avLst/>
+          </a:prstGeom>
+          <a:solidFill>
+            <a:srgbClr val="2E6DA4"/>
+          </a:solidFill>
+          <a:ln w="12700">
+            <a:solidFill>
+              <a:srgbClr val="2E6DA4"/>
+            </a:solidFill>
+            <a:prstDash val="solid"/>
           </a:ln>
         </p:spPr>
       </p:sp>
@@ -15169,19 +15181,20 @@
         </p:nvSpPr>
         <p:spPr>
           <a:xfrm>
-            <a:off x="6080760" y="5408676"/>
-            <a:ext cx="0" cy="182880"/>
-          </a:xfrm>
-          <a:prstGeom prst="line">
-            <a:avLst/>
-          </a:prstGeom>
-          <a:noFill/>
-          <a:ln w="19050">
+            <a:off x="5998464" y="5408676"/>
+            <a:ext cx="164592" cy="182880"/>
+          </a:xfrm>
+          <a:prstGeom prst="downArrow">
+            <a:avLst/>
+          </a:prstGeom>
+          <a:solidFill>
+            <a:srgbClr val="2E6DA4"/>
+          </a:solidFill>
+          <a:ln w="12700">
             <a:solidFill>
               <a:srgbClr val="2E6DA4"/>
             </a:solidFill>
             <a:prstDash val="solid"/>
-            <a:tailEnd type="triangle"/>
           </a:ln>
         </p:spPr>
       </p:sp>
@@ -15372,7 +15385,7 @@
         <p:spPr>
           <a:xfrm>
             <a:off x="804672" y="1993392"/>
-            <a:ext cx="2724912" cy="310896"/>
+            <a:ext cx="2724912" cy="272288"/>
           </a:xfrm>
           <a:prstGeom prst="rect">
             <a:avLst/>
@@ -15410,8 +15423,8 @@
         </p:nvSpPr>
         <p:spPr>
           <a:xfrm>
-            <a:off x="804672" y="2359152"/>
-            <a:ext cx="2724912" cy="1143000"/>
+            <a:off x="804672" y="2338832"/>
+            <a:ext cx="2724912" cy="1163320"/>
           </a:xfrm>
           <a:prstGeom prst="rect">
             <a:avLst/>
@@ -15529,11 +15542,11 @@
         <p:spPr>
           <a:xfrm>
             <a:off x="566928" y="3840480"/>
-            <a:ext cx="3200400" cy="2048256"/>
+            <a:ext cx="3200400" cy="2231136"/>
           </a:xfrm>
           <a:prstGeom prst="roundRect">
             <a:avLst>
-              <a:gd name="adj" fmla="val 2679"/>
+              <a:gd name="adj" fmla="val 2459"/>
             </a:avLst>
           </a:prstGeom>
           <a:solidFill>
@@ -15602,7 +15615,7 @@
         <p:spPr>
           <a:xfrm>
             <a:off x="804672" y="4315968"/>
-            <a:ext cx="2724912" cy="310896"/>
+            <a:ext cx="2724912" cy="272288"/>
           </a:xfrm>
           <a:prstGeom prst="rect">
             <a:avLst/>
@@ -15640,8 +15653,8 @@
         </p:nvSpPr>
         <p:spPr>
           <a:xfrm>
-            <a:off x="804672" y="4681728"/>
-            <a:ext cx="2724912" cy="1042416"/>
+            <a:off x="804672" y="4661408"/>
+            <a:ext cx="2724912" cy="1245616"/>
           </a:xfrm>
           <a:prstGeom prst="rect">
             <a:avLst/>
@@ -15859,7 +15872,7 @@
         <p:spPr>
           <a:xfrm>
             <a:off x="804672" y="2048256"/>
-            <a:ext cx="4919472" cy="310896"/>
+            <a:ext cx="4919472" cy="272288"/>
           </a:xfrm>
           <a:prstGeom prst="rect">
             <a:avLst/>
@@ -15897,8 +15910,8 @@
         </p:nvSpPr>
         <p:spPr>
           <a:xfrm>
-            <a:off x="804672" y="2414016"/>
-            <a:ext cx="4919472" cy="1280160"/>
+            <a:off x="804672" y="2393696"/>
+            <a:ext cx="4919472" cy="1300480"/>
           </a:xfrm>
           <a:prstGeom prst="rect">
             <a:avLst/>
@@ -16065,7 +16078,7 @@
         <p:spPr>
           <a:xfrm>
             <a:off x="6473952" y="2048256"/>
-            <a:ext cx="4919472" cy="457200"/>
+            <a:ext cx="4919472" cy="510540"/>
           </a:xfrm>
           <a:prstGeom prst="rect">
             <a:avLst/>
@@ -16103,8 +16116,8 @@
         </p:nvSpPr>
         <p:spPr>
           <a:xfrm>
-            <a:off x="6473952" y="2560320"/>
-            <a:ext cx="4919472" cy="1133856"/>
+            <a:off x="6473952" y="2631948"/>
+            <a:ext cx="4919472" cy="1062228"/>
           </a:xfrm>
           <a:prstGeom prst="rect">
             <a:avLst/>
@@ -16271,7 +16284,7 @@
         <p:spPr>
           <a:xfrm>
             <a:off x="804672" y="4535424"/>
-            <a:ext cx="6382512" cy="310896"/>
+            <a:ext cx="6382512" cy="272288"/>
           </a:xfrm>
           <a:prstGeom prst="rect">
             <a:avLst/>
@@ -16309,8 +16322,8 @@
         </p:nvSpPr>
         <p:spPr>
           <a:xfrm>
-            <a:off x="804672" y="4901184"/>
-            <a:ext cx="6382512" cy="987552"/>
+            <a:off x="804672" y="4880864"/>
+            <a:ext cx="6382512" cy="1007872"/>
           </a:xfrm>
           <a:prstGeom prst="rect">
             <a:avLst/>
@@ -16379,7 +16392,7 @@
         <p:spPr>
           <a:xfrm>
             <a:off x="7936992" y="4261104"/>
-            <a:ext cx="3456432" cy="310896"/>
+            <a:ext cx="3456432" cy="272288"/>
           </a:xfrm>
           <a:prstGeom prst="rect">
             <a:avLst/>
@@ -16417,8 +16430,8 @@
         </p:nvSpPr>
         <p:spPr>
           <a:xfrm>
-            <a:off x="7936992" y="4626864"/>
-            <a:ext cx="3456432" cy="1261872"/>
+            <a:off x="7936992" y="4606544"/>
+            <a:ext cx="3456432" cy="1282192"/>
           </a:xfrm>
           <a:prstGeom prst="rect">
             <a:avLst/>
@@ -16635,37 +16648,11 @@
         </p:nvSpPr>
         <p:spPr>
           <a:xfrm>
-            <a:off x="2560320" y="1892808"/>
-            <a:ext cx="246888" cy="0"/>
-          </a:xfrm>
-          <a:prstGeom prst="line">
-            <a:avLst/>
-          </a:prstGeom>
-          <a:noFill/>
-          <a:ln w="19050">
-            <a:solidFill>
-              <a:srgbClr val="2E6DA4"/>
-            </a:solidFill>
-            <a:prstDash val="solid"/>
-            <a:tailEnd type="triangle"/>
-          </a:ln>
-        </p:spPr>
-      </p:sp>
-      <p:sp>
-        <p:nvSpPr>
-          <p:cNvPr id="7" name="Shape 5"/>
-          <p:cNvSpPr/>
-          <p:nvPr/>
-        </p:nvSpPr>
-        <p:spPr>
-          <a:xfrm>
-            <a:off x="2825496" y="1591056"/>
-            <a:ext cx="1975104" cy="603504"/>
-          </a:xfrm>
-          <a:prstGeom prst="roundRect">
-            <a:avLst>
-              <a:gd name="adj" fmla="val 9091"/>
-            </a:avLst>
+            <a:off x="2569464" y="1810512"/>
+            <a:ext cx="237744" cy="164592"/>
+          </a:xfrm>
+          <a:prstGeom prst="rightArrow">
+            <a:avLst/>
           </a:prstGeom>
           <a:solidFill>
             <a:srgbClr val="2E6DA4"/>
@@ -16680,8 +16667,8 @@
       </p:sp>
       <p:sp>
         <p:nvSpPr>
-          <p:cNvPr id="8" name="Text 6"/>
-          <p:cNvSpPr txBox="1"/>
+          <p:cNvPr id="7" name="Shape 5"/>
+          <p:cNvSpPr/>
           <p:nvPr/>
         </p:nvSpPr>
         <p:spPr>
@@ -16689,55 +16676,83 @@
             <a:off x="2825496" y="1591056"/>
             <a:ext cx="1975104" cy="603504"/>
           </a:xfrm>
-          <a:prstGeom prst="rect">
-            <a:avLst/>
-          </a:prstGeom>
-          <a:noFill/>
-          <a:ln/>
-        </p:spPr>
-        <p:txBody>
-          <a:bodyPr wrap="square" lIns="0" tIns="0" rIns="0" bIns="0" rtlCol="0" anchor="ctr"/>
-          <a:lstStyle/>
-          <a:p>
-            <a:pPr algn="ctr" indent="0" marL="0">
-              <a:buNone/>
-            </a:pPr>
-            <a:r>
-              <a:rPr lang="en-US" sz="1200" b="1" dirty="0">
-                <a:solidFill>
-                  <a:srgbClr val="FFFFFF"/>
-                </a:solidFill>
-                <a:latin typeface="Calibri" pitchFamily="34" charset="0"/>
-                <a:ea typeface="Calibri" pitchFamily="34" charset="-122"/>
-                <a:cs typeface="Calibri" pitchFamily="34" charset="-120"/>
-              </a:rPr>
-              <a:t>Role allowlist</a:t>
-            </a:r>
-            <a:endParaRPr lang="en-US" sz="1200" dirty="0"/>
-          </a:p>
-        </p:txBody>
-      </p:sp>
-      <p:sp>
-        <p:nvSpPr>
-          <p:cNvPr id="9" name="Shape 7"/>
-          <p:cNvSpPr/>
-          <p:nvPr/>
-        </p:nvSpPr>
-        <p:spPr>
-          <a:xfrm>
-            <a:off x="4818888" y="1892808"/>
-            <a:ext cx="246888" cy="0"/>
-          </a:xfrm>
-          <a:prstGeom prst="line">
-            <a:avLst/>
-          </a:prstGeom>
-          <a:noFill/>
-          <a:ln w="19050">
+          <a:prstGeom prst="roundRect">
+            <a:avLst>
+              <a:gd name="adj" fmla="val 9091"/>
+            </a:avLst>
+          </a:prstGeom>
+          <a:solidFill>
+            <a:srgbClr val="2E6DA4"/>
+          </a:solidFill>
+          <a:ln w="12700">
             <a:solidFill>
               <a:srgbClr val="2E6DA4"/>
             </a:solidFill>
             <a:prstDash val="solid"/>
-            <a:tailEnd type="triangle"/>
+          </a:ln>
+        </p:spPr>
+      </p:sp>
+      <p:sp>
+        <p:nvSpPr>
+          <p:cNvPr id="8" name="Text 6"/>
+          <p:cNvSpPr txBox="1"/>
+          <p:nvPr/>
+        </p:nvSpPr>
+        <p:spPr>
+          <a:xfrm>
+            <a:off x="2825496" y="1591056"/>
+            <a:ext cx="1975104" cy="603504"/>
+          </a:xfrm>
+          <a:prstGeom prst="rect">
+            <a:avLst/>
+          </a:prstGeom>
+          <a:noFill/>
+          <a:ln/>
+        </p:spPr>
+        <p:txBody>
+          <a:bodyPr wrap="square" lIns="0" tIns="0" rIns="0" bIns="0" rtlCol="0" anchor="ctr"/>
+          <a:lstStyle/>
+          <a:p>
+            <a:pPr algn="ctr" indent="0" marL="0">
+              <a:buNone/>
+            </a:pPr>
+            <a:r>
+              <a:rPr lang="en-US" sz="1200" b="1" dirty="0">
+                <a:solidFill>
+                  <a:srgbClr val="FFFFFF"/>
+                </a:solidFill>
+                <a:latin typeface="Calibri" pitchFamily="34" charset="0"/>
+                <a:ea typeface="Calibri" pitchFamily="34" charset="-122"/>
+                <a:cs typeface="Calibri" pitchFamily="34" charset="-120"/>
+              </a:rPr>
+              <a:t>Role allowlist</a:t>
+            </a:r>
+            <a:endParaRPr lang="en-US" sz="1200" dirty="0"/>
+          </a:p>
+        </p:txBody>
+      </p:sp>
+      <p:sp>
+        <p:nvSpPr>
+          <p:cNvPr id="9" name="Shape 7"/>
+          <p:cNvSpPr/>
+          <p:nvPr/>
+        </p:nvSpPr>
+        <p:spPr>
+          <a:xfrm>
+            <a:off x="4828032" y="1810512"/>
+            <a:ext cx="237744" cy="164592"/>
+          </a:xfrm>
+          <a:prstGeom prst="rightArrow">
+            <a:avLst/>
+          </a:prstGeom>
+          <a:solidFill>
+            <a:srgbClr val="2E6DA4"/>
+          </a:solidFill>
+          <a:ln w="12700">
+            <a:solidFill>
+              <a:srgbClr val="2E6DA4"/>
+            </a:solidFill>
+            <a:prstDash val="solid"/>
           </a:ln>
         </p:spPr>
       </p:sp>
@@ -16815,19 +16830,20 @@
         </p:nvSpPr>
         <p:spPr>
           <a:xfrm>
-            <a:off x="7077456" y="1892808"/>
-            <a:ext cx="246888" cy="0"/>
-          </a:xfrm>
-          <a:prstGeom prst="line">
-            <a:avLst/>
-          </a:prstGeom>
-          <a:noFill/>
-          <a:ln w="19050">
+            <a:off x="7086600" y="1810512"/>
+            <a:ext cx="237744" cy="164592"/>
+          </a:xfrm>
+          <a:prstGeom prst="rightArrow">
+            <a:avLst/>
+          </a:prstGeom>
+          <a:solidFill>
+            <a:srgbClr val="2E6DA4"/>
+          </a:solidFill>
+          <a:ln w="12700">
             <a:solidFill>
               <a:srgbClr val="2E6DA4"/>
             </a:solidFill>
             <a:prstDash val="solid"/>
-            <a:tailEnd type="triangle"/>
           </a:ln>
         </p:spPr>
       </p:sp>
@@ -16905,19 +16921,20 @@
         </p:nvSpPr>
         <p:spPr>
           <a:xfrm>
-            <a:off x="9336024" y="1892808"/>
-            <a:ext cx="246888" cy="0"/>
-          </a:xfrm>
-          <a:prstGeom prst="line">
-            <a:avLst/>
-          </a:prstGeom>
-          <a:noFill/>
-          <a:ln w="19050">
+            <a:off x="9345168" y="1810512"/>
+            <a:ext cx="237744" cy="164592"/>
+          </a:xfrm>
+          <a:prstGeom prst="rightArrow">
+            <a:avLst/>
+          </a:prstGeom>
+          <a:solidFill>
+            <a:srgbClr val="2E6DA4"/>
+          </a:solidFill>
+          <a:ln w="12700">
             <a:solidFill>
               <a:srgbClr val="2E6DA4"/>
             </a:solidFill>
             <a:prstDash val="solid"/>
-            <a:tailEnd type="triangle"/>
           </a:ln>
         </p:spPr>
       </p:sp>
@@ -17035,11 +17052,11 @@
         <p:spPr>
           <a:xfrm>
             <a:off x="566928" y="2761488"/>
-            <a:ext cx="3520440" cy="3017520"/>
+            <a:ext cx="3520440" cy="2761488"/>
           </a:xfrm>
           <a:prstGeom prst="roundRect">
             <a:avLst>
-              <a:gd name="adj" fmla="val 1818"/>
+              <a:gd name="adj" fmla="val 1987"/>
             </a:avLst>
           </a:prstGeom>
           <a:solidFill>
@@ -17108,7 +17125,7 @@
         <p:spPr>
           <a:xfrm>
             <a:off x="804672" y="3236976"/>
-            <a:ext cx="3044952" cy="310896"/>
+            <a:ext cx="3044952" cy="272288"/>
           </a:xfrm>
           <a:prstGeom prst="rect">
             <a:avLst/>
@@ -17146,8 +17163,8 @@
         </p:nvSpPr>
         <p:spPr>
           <a:xfrm>
-            <a:off x="804672" y="3602736"/>
-            <a:ext cx="3044952" cy="2011680"/>
+            <a:off x="804672" y="3582416"/>
+            <a:ext cx="3044952" cy="1775968"/>
           </a:xfrm>
           <a:prstGeom prst="rect">
             <a:avLst/>
@@ -17189,11 +17206,11 @@
         <p:spPr>
           <a:xfrm>
             <a:off x="4334256" y="2761488"/>
-            <a:ext cx="3520440" cy="3017520"/>
+            <a:ext cx="3520440" cy="2761488"/>
           </a:xfrm>
           <a:prstGeom prst="roundRect">
             <a:avLst>
-              <a:gd name="adj" fmla="val 1818"/>
+              <a:gd name="adj" fmla="val 1987"/>
             </a:avLst>
           </a:prstGeom>
           <a:solidFill>
@@ -17262,7 +17279,7 @@
         <p:spPr>
           <a:xfrm>
             <a:off x="4572000" y="3236976"/>
-            <a:ext cx="3044952" cy="310896"/>
+            <a:ext cx="3044952" cy="272288"/>
           </a:xfrm>
           <a:prstGeom prst="rect">
             <a:avLst/>
@@ -17300,8 +17317,8 @@
         </p:nvSpPr>
         <p:spPr>
           <a:xfrm>
-            <a:off x="4572000" y="3602736"/>
-            <a:ext cx="3044952" cy="2011680"/>
+            <a:off x="4572000" y="3582416"/>
+            <a:ext cx="3044952" cy="1775968"/>
           </a:xfrm>
           <a:prstGeom prst="rect">
             <a:avLst/>
@@ -17343,11 +17360,11 @@
         <p:spPr>
           <a:xfrm>
             <a:off x="8101584" y="2761488"/>
-            <a:ext cx="3529584" cy="3017520"/>
+            <a:ext cx="3529584" cy="2761488"/>
           </a:xfrm>
           <a:prstGeom prst="roundRect">
             <a:avLst>
-              <a:gd name="adj" fmla="val 1818"/>
+              <a:gd name="adj" fmla="val 1987"/>
             </a:avLst>
           </a:prstGeom>
           <a:solidFill>
@@ -17416,7 +17433,7 @@
         <p:spPr>
           <a:xfrm>
             <a:off x="8339328" y="3236976"/>
-            <a:ext cx="3054096" cy="310896"/>
+            <a:ext cx="3054096" cy="544576"/>
           </a:xfrm>
           <a:prstGeom prst="rect">
             <a:avLst/>
@@ -17454,8 +17471,8 @@
         </p:nvSpPr>
         <p:spPr>
           <a:xfrm>
-            <a:off x="8339328" y="3602736"/>
-            <a:ext cx="3054096" cy="2011680"/>
+            <a:off x="8339328" y="3854704"/>
+            <a:ext cx="3054096" cy="1503680"/>
           </a:xfrm>
           <a:prstGeom prst="rect">
             <a:avLst/>
@@ -17606,12 +17623,12 @@
         </p:nvSpPr>
         <p:spPr>
           <a:xfrm>
-            <a:off x="566928" y="1572768"/>
-            <a:ext cx="1956816" cy="2487168"/>
+            <a:off x="566928" y="1554480"/>
+            <a:ext cx="3520440" cy="2048256"/>
           </a:xfrm>
           <a:prstGeom prst="roundRect">
             <a:avLst>
-              <a:gd name="adj" fmla="val 2804"/>
+              <a:gd name="adj" fmla="val 2679"/>
             </a:avLst>
           </a:prstGeom>
           <a:solidFill>
@@ -17640,8 +17657,8 @@
         </p:nvSpPr>
         <p:spPr>
           <a:xfrm>
-            <a:off x="804672" y="1773936"/>
-            <a:ext cx="1481328" cy="201168"/>
+            <a:off x="804672" y="1755648"/>
+            <a:ext cx="3044952" cy="201168"/>
           </a:xfrm>
           <a:prstGeom prst="rect">
             <a:avLst/>
@@ -17679,8 +17696,8 @@
         </p:nvSpPr>
         <p:spPr>
           <a:xfrm>
-            <a:off x="804672" y="2048256"/>
-            <a:ext cx="1481328" cy="566928"/>
+            <a:off x="804672" y="2029968"/>
+            <a:ext cx="3044952" cy="310896"/>
           </a:xfrm>
           <a:prstGeom prst="rect">
             <a:avLst/>
@@ -17696,7 +17713,7 @@
               <a:buNone/>
             </a:pPr>
             <a:r>
-              <a:rPr lang="en-US" sz="1300" b="1" dirty="0">
+              <a:rPr lang="en-US" sz="1400" b="1" dirty="0">
                 <a:solidFill>
                   <a:srgbClr val="1A3A5C"/>
                 </a:solidFill>
@@ -17706,7 +17723,7 @@
               </a:rPr>
               <a:t>The operations do not exist</a:t>
             </a:r>
-            <a:endParaRPr lang="en-US" sz="1300" dirty="0"/>
+            <a:endParaRPr lang="en-US" sz="1400" dirty="0"/>
           </a:p>
         </p:txBody>
       </p:sp>
@@ -17718,8 +17735,8 @@
         </p:nvSpPr>
         <p:spPr>
           <a:xfrm>
-            <a:off x="804672" y="2670048"/>
-            <a:ext cx="1481328" cy="1225296"/>
+            <a:off x="804672" y="2414016"/>
+            <a:ext cx="3044952" cy="1024128"/>
           </a:xfrm>
           <a:prstGeom prst="rect">
             <a:avLst/>
@@ -17738,7 +17755,7 @@
               <a:buNone/>
             </a:pPr>
             <a:r>
-              <a:rPr lang="en-US" sz="1100" dirty="0">
+              <a:rPr lang="en-US" sz="1200" dirty="0">
                 <a:solidFill>
                   <a:srgbClr val="4D5A68"/>
                 </a:solidFill>
@@ -17748,7 +17765,7 @@
               </a:rPr>
               <a:t>Identities, roles, grants, approvals, cryptoperiods, audit search, backups — KMIP defines none of them.</a:t>
             </a:r>
-            <a:endParaRPr lang="en-US" sz="1100" dirty="0"/>
+            <a:endParaRPr lang="en-US" sz="1200" dirty="0"/>
           </a:p>
         </p:txBody>
       </p:sp>
@@ -17760,12 +17777,12 @@
         </p:nvSpPr>
         <p:spPr>
           <a:xfrm>
-            <a:off x="2834640" y="1572768"/>
-            <a:ext cx="1956816" cy="2487168"/>
+            <a:off x="4334256" y="1554480"/>
+            <a:ext cx="3520440" cy="2048256"/>
           </a:xfrm>
           <a:prstGeom prst="roundRect">
             <a:avLst>
-              <a:gd name="adj" fmla="val 2804"/>
+              <a:gd name="adj" fmla="val 2679"/>
             </a:avLst>
           </a:prstGeom>
           <a:solidFill>
@@ -17794,8 +17811,8 @@
         </p:nvSpPr>
         <p:spPr>
           <a:xfrm>
-            <a:off x="3072384" y="1773936"/>
-            <a:ext cx="1481328" cy="201168"/>
+            <a:off x="4572000" y="1755648"/>
+            <a:ext cx="3044952" cy="201168"/>
           </a:xfrm>
           <a:prstGeom prst="rect">
             <a:avLst/>
@@ -17833,8 +17850,8 @@
         </p:nvSpPr>
         <p:spPr>
           <a:xfrm>
-            <a:off x="3072384" y="2048256"/>
-            <a:ext cx="1481328" cy="566928"/>
+            <a:off x="4572000" y="2029968"/>
+            <a:ext cx="3044952" cy="310896"/>
           </a:xfrm>
           <a:prstGeom prst="rect">
             <a:avLst/>
@@ -17850,7 +17867,7 @@
               <a:buNone/>
             </a:pPr>
             <a:r>
-              <a:rPr lang="en-US" sz="1300" b="1" dirty="0">
+              <a:rPr lang="en-US" sz="1400" b="1" dirty="0">
                 <a:solidFill>
                   <a:srgbClr val="1A3A5C"/>
                 </a:solidFill>
@@ -17860,7 +17877,7 @@
               </a:rPr>
               <a:t>A browser cannot speak TTLV</a:t>
             </a:r>
-            <a:endParaRPr lang="en-US" sz="1300" dirty="0"/>
+            <a:endParaRPr lang="en-US" sz="1400" dirty="0"/>
           </a:p>
         </p:txBody>
       </p:sp>
@@ -17872,8 +17889,8 @@
         </p:nvSpPr>
         <p:spPr>
           <a:xfrm>
-            <a:off x="3072384" y="2670048"/>
-            <a:ext cx="1481328" cy="1225296"/>
+            <a:off x="4572000" y="2414016"/>
+            <a:ext cx="3044952" cy="1024128"/>
           </a:xfrm>
           <a:prstGeom prst="rect">
             <a:avLst/>
@@ -17892,7 +17909,7 @@
               <a:buNone/>
             </a:pPr>
             <a:r>
-              <a:rPr lang="en-US" sz="1100" dirty="0">
+              <a:rPr lang="en-US" sz="1200" dirty="0">
                 <a:solidFill>
                   <a:srgbClr val="4D5A68"/>
                 </a:solidFill>
@@ -17902,7 +17919,7 @@
               </a:rPr>
               <a:t>Binary over raw TCP. A browser has fetch and WebSocket. Something must translate — and that translator is the API.</a:t>
             </a:r>
-            <a:endParaRPr lang="en-US" sz="1100" dirty="0"/>
+            <a:endParaRPr lang="en-US" sz="1200" dirty="0"/>
           </a:p>
         </p:txBody>
       </p:sp>
@@ -17914,12 +17931,12 @@
         </p:nvSpPr>
         <p:spPr>
           <a:xfrm>
-            <a:off x="5102352" y="1572768"/>
-            <a:ext cx="1956816" cy="2487168"/>
+            <a:off x="8101584" y="1554480"/>
+            <a:ext cx="3520440" cy="2048256"/>
           </a:xfrm>
           <a:prstGeom prst="roundRect">
             <a:avLst>
-              <a:gd name="adj" fmla="val 2804"/>
+              <a:gd name="adj" fmla="val 2679"/>
             </a:avLst>
           </a:prstGeom>
           <a:solidFill>
@@ -17948,8 +17965,8 @@
         </p:nvSpPr>
         <p:spPr>
           <a:xfrm>
-            <a:off x="5340096" y="1773936"/>
-            <a:ext cx="1481328" cy="201168"/>
+            <a:off x="8339328" y="1755648"/>
+            <a:ext cx="3044952" cy="201168"/>
           </a:xfrm>
           <a:prstGeom prst="rect">
             <a:avLst/>
@@ -17987,8 +18004,8 @@
         </p:nvSpPr>
         <p:spPr>
           <a:xfrm>
-            <a:off x="5340096" y="2048256"/>
-            <a:ext cx="1481328" cy="566928"/>
+            <a:off x="8339328" y="2029968"/>
+            <a:ext cx="3044952" cy="310896"/>
           </a:xfrm>
           <a:prstGeom prst="rect">
             <a:avLst/>
@@ -18004,7 +18021,7 @@
               <a:buNone/>
             </a:pPr>
             <a:r>
-              <a:rPr lang="en-US" sz="1300" b="1" dirty="0">
+              <a:rPr lang="en-US" sz="1400" b="1" dirty="0">
                 <a:solidFill>
                   <a:srgbClr val="1A3A5C"/>
                 </a:solidFill>
@@ -18014,7 +18031,7 @@
               </a:rPr>
               <a:t>The auth models differ</a:t>
             </a:r>
-            <a:endParaRPr lang="en-US" sz="1300" dirty="0"/>
+            <a:endParaRPr lang="en-US" sz="1400" dirty="0"/>
           </a:p>
         </p:txBody>
       </p:sp>
@@ -18026,8 +18043,8 @@
         </p:nvSpPr>
         <p:spPr>
           <a:xfrm>
-            <a:off x="5340096" y="2670048"/>
-            <a:ext cx="1481328" cy="1225296"/>
+            <a:off x="8339328" y="2414016"/>
+            <a:ext cx="3044952" cy="1024128"/>
           </a:xfrm>
           <a:prstGeom prst="rect">
             <a:avLst/>
@@ -18046,7 +18063,7 @@
               <a:buNone/>
             </a:pPr>
             <a:r>
-              <a:rPr lang="en-US" sz="1100" dirty="0">
+              <a:rPr lang="en-US" sz="1200" dirty="0">
                 <a:solidFill>
                   <a:srgbClr val="4D5A68"/>
                 </a:solidFill>
@@ -18056,7 +18073,7 @@
               </a:rPr>
               <a:t>KMIP re-authenticates every request from a header credential. A console needs login, session, idle timeout, CSRF, revocation.</a:t>
             </a:r>
-            <a:endParaRPr lang="en-US" sz="1100" dirty="0"/>
+            <a:endParaRPr lang="en-US" sz="1200" dirty="0"/>
           </a:p>
         </p:txBody>
       </p:sp>
@@ -18068,12 +18085,12 @@
         </p:nvSpPr>
         <p:spPr>
           <a:xfrm>
-            <a:off x="7370064" y="1572768"/>
-            <a:ext cx="1956816" cy="2487168"/>
+            <a:off x="566928" y="3767328"/>
+            <a:ext cx="3520440" cy="2048256"/>
           </a:xfrm>
           <a:prstGeom prst="roundRect">
             <a:avLst>
-              <a:gd name="adj" fmla="val 2804"/>
+              <a:gd name="adj" fmla="val 2679"/>
             </a:avLst>
           </a:prstGeom>
           <a:solidFill>
@@ -18102,8 +18119,8 @@
         </p:nvSpPr>
         <p:spPr>
           <a:xfrm>
-            <a:off x="7607808" y="1773936"/>
-            <a:ext cx="1481328" cy="201168"/>
+            <a:off x="804672" y="3968496"/>
+            <a:ext cx="3044952" cy="201168"/>
           </a:xfrm>
           <a:prstGeom prst="rect">
             <a:avLst/>
@@ -18141,8 +18158,8 @@
         </p:nvSpPr>
         <p:spPr>
           <a:xfrm>
-            <a:off x="7607808" y="2048256"/>
-            <a:ext cx="1481328" cy="566928"/>
+            <a:off x="804672" y="4242816"/>
+            <a:ext cx="3044952" cy="310896"/>
           </a:xfrm>
           <a:prstGeom prst="rect">
             <a:avLst/>
@@ -18158,7 +18175,7 @@
               <a:buNone/>
             </a:pPr>
             <a:r>
-              <a:rPr lang="en-US" sz="1300" b="1" dirty="0">
+              <a:rPr lang="en-US" sz="1400" b="1" dirty="0">
                 <a:solidFill>
                   <a:srgbClr val="1A3A5C"/>
                 </a:solidFill>
@@ -18168,7 +18185,7 @@
               </a:rPr>
               <a:t>The read shapes are wrong</a:t>
             </a:r>
-            <a:endParaRPr lang="en-US" sz="1300" dirty="0"/>
+            <a:endParaRPr lang="en-US" sz="1400" dirty="0"/>
           </a:p>
         </p:txBody>
       </p:sp>
@@ -18180,8 +18197,8 @@
         </p:nvSpPr>
         <p:spPr>
           <a:xfrm>
-            <a:off x="7607808" y="2670048"/>
-            <a:ext cx="1481328" cy="1225296"/>
+            <a:off x="804672" y="4626864"/>
+            <a:ext cx="3044952" cy="1024128"/>
           </a:xfrm>
           <a:prstGeom prst="rect">
             <a:avLst/>
@@ -18200,7 +18217,7 @@
               <a:buNone/>
             </a:pPr>
             <a:r>
-              <a:rPr lang="en-US" sz="1100" dirty="0">
+              <a:rPr lang="en-US" sz="1200" dirty="0">
                 <a:solidFill>
                   <a:srgbClr val="4D5A68"/>
                 </a:solidFill>
@@ -18210,7 +18227,7 @@
               </a:rPr>
               <a:t>Locate returns bare identifiers with no paging, sort or count. A console table becomes N+1 round trips.</a:t>
             </a:r>
-            <a:endParaRPr lang="en-US" sz="1100" dirty="0"/>
+            <a:endParaRPr lang="en-US" sz="1200" dirty="0"/>
           </a:p>
         </p:txBody>
       </p:sp>
@@ -18222,12 +18239,12 @@
         </p:nvSpPr>
         <p:spPr>
           <a:xfrm>
-            <a:off x="9637776" y="1572768"/>
-            <a:ext cx="1956816" cy="2487168"/>
+            <a:off x="4334256" y="3767328"/>
+            <a:ext cx="3520440" cy="2048256"/>
           </a:xfrm>
           <a:prstGeom prst="roundRect">
             <a:avLst>
-              <a:gd name="adj" fmla="val 2804"/>
+              <a:gd name="adj" fmla="val 2679"/>
             </a:avLst>
           </a:prstGeom>
           <a:solidFill>
@@ -18256,8 +18273,8 @@
         </p:nvSpPr>
         <p:spPr>
           <a:xfrm>
-            <a:off x="9875520" y="1773936"/>
-            <a:ext cx="1481328" cy="201168"/>
+            <a:off x="4572000" y="3968496"/>
+            <a:ext cx="3044952" cy="201168"/>
           </a:xfrm>
           <a:prstGeom prst="rect">
             <a:avLst/>
@@ -18295,8 +18312,8 @@
         </p:nvSpPr>
         <p:spPr>
           <a:xfrm>
-            <a:off x="9875520" y="2048256"/>
-            <a:ext cx="1481328" cy="566928"/>
+            <a:off x="4572000" y="4242816"/>
+            <a:ext cx="3044952" cy="476504"/>
           </a:xfrm>
           <a:prstGeom prst="rect">
             <a:avLst/>
@@ -18312,7 +18329,7 @@
               <a:buNone/>
             </a:pPr>
             <a:r>
-              <a:rPr lang="en-US" sz="1300" b="1" dirty="0">
+              <a:rPr lang="en-US" sz="1400" b="1" dirty="0">
                 <a:solidFill>
                   <a:srgbClr val="1A3A5C"/>
                 </a:solidFill>
@@ -18322,7 +18339,7 @@
               </a:rPr>
               <a:t>Not everything is object-centric</a:t>
             </a:r>
-            <a:endParaRPr lang="en-US" sz="1300" dirty="0"/>
+            <a:endParaRPr lang="en-US" sz="1400" dirty="0"/>
           </a:p>
         </p:txBody>
       </p:sp>
@@ -18334,8 +18351,8 @@
         </p:nvSpPr>
         <p:spPr>
           <a:xfrm>
-            <a:off x="9875520" y="2670048"/>
-            <a:ext cx="1481328" cy="1225296"/>
+            <a:off x="4572000" y="4792472"/>
+            <a:ext cx="3044952" cy="858520"/>
           </a:xfrm>
           <a:prstGeom prst="rect">
             <a:avLst/>
@@ -18354,7 +18371,7 @@
               <a:buNone/>
             </a:pPr>
             <a:r>
-              <a:rPr lang="en-US" sz="1100" dirty="0">
+              <a:rPr lang="en-US" sz="1200" dirty="0">
                 <a:solidFill>
                   <a:srgbClr val="4D5A68"/>
                 </a:solidFill>
@@ -18364,7 +18381,7 @@
               </a:rPr>
               <a:t>Approval queues, audit search, expiry reports, chain verification, health. None is an operation on a managed object.</a:t>
             </a:r>
-            <a:endParaRPr lang="en-US" sz="1100" dirty="0"/>
+            <a:endParaRPr lang="en-US" sz="1200" dirty="0"/>
           </a:p>
         </p:txBody>
       </p:sp>
@@ -18376,12 +18393,12 @@
         </p:nvSpPr>
         <p:spPr>
           <a:xfrm>
-            <a:off x="566928" y="4279392"/>
-            <a:ext cx="11027664" cy="1572768"/>
+            <a:off x="8101584" y="3767328"/>
+            <a:ext cx="3520440" cy="2304288"/>
           </a:xfrm>
           <a:prstGeom prst="roundRect">
             <a:avLst>
-              <a:gd name="adj" fmla="val 3488"/>
+              <a:gd name="adj" fmla="val 2381"/>
             </a:avLst>
           </a:prstGeom>
           <a:solidFill>
@@ -18403,8 +18420,8 @@
         </p:nvSpPr>
         <p:spPr>
           <a:xfrm>
-            <a:off x="804672" y="4480560"/>
-            <a:ext cx="10552176" cy="310896"/>
+            <a:off x="8339328" y="3968496"/>
+            <a:ext cx="3044952" cy="255270"/>
           </a:xfrm>
           <a:prstGeom prst="rect">
             <a:avLst/>
@@ -18420,7 +18437,7 @@
               <a:buNone/>
             </a:pPr>
             <a:r>
-              <a:rPr lang="en-US" sz="1600" b="1" dirty="0">
+              <a:rPr lang="en-US" sz="1500" b="1" dirty="0">
                 <a:solidFill>
                   <a:srgbClr val="FFFFFF"/>
                 </a:solidFill>
@@ -18430,7 +18447,7 @@
               </a:rPr>
               <a:t>The division of labour</a:t>
             </a:r>
-            <a:endParaRPr lang="en-US" sz="1600" dirty="0"/>
+            <a:endParaRPr lang="en-US" sz="1500" dirty="0"/>
           </a:p>
         </p:txBody>
       </p:sp>
@@ -18442,8 +18459,8 @@
         </p:nvSpPr>
         <p:spPr>
           <a:xfrm>
-            <a:off x="804672" y="4846320"/>
-            <a:ext cx="10552176" cy="841248"/>
+            <a:off x="8339328" y="4296918"/>
+            <a:ext cx="3044952" cy="1610106"/>
           </a:xfrm>
           <a:prstGeom prst="rect">
             <a:avLst/>
@@ -18462,7 +18479,7 @@
               <a:buNone/>
             </a:pPr>
             <a:r>
-              <a:rPr lang="en-US" sz="1350" dirty="0">
+              <a:rPr lang="en-US" sz="1150" dirty="0">
                 <a:solidFill>
                   <a:srgbClr val="C9DAEA"/>
                 </a:solidFill>
@@ -18470,9 +18487,9 @@
                 <a:ea typeface="Calibri" pitchFamily="34" charset="-122"/>
                 <a:cs typeface="Calibri" pitchFamily="34" charset="-120"/>
               </a:rPr>
-              <a:t>KMIP stays the data plane — creating and using keys, spoken by databases and storage. REST becomes the control plane — administering the service, spoken by people and by CI. Do not duplicate crypto operations across both, or you get two paths to Destroy with two authorization implementations.</a:t>
-            </a:r>
-            <a:endParaRPr lang="en-US" sz="1350" dirty="0"/>
+              <a:t>KMIP stays the data plane — machines creating and using keys. REST becomes the control plane — people and CI administering the service. Duplicating crypto operations across both gives you two paths to Destroy, and two authorization implementations to keep in step.</a:t>
+            </a:r>
+            <a:endParaRPr lang="en-US" sz="1150" dirty="0"/>
           </a:p>
         </p:txBody>
       </p:sp>
@@ -18726,19 +18743,20 @@
         </p:nvSpPr>
         <p:spPr>
           <a:xfrm>
-            <a:off x="3099816" y="2103120"/>
-            <a:ext cx="0" cy="237744"/>
-          </a:xfrm>
-          <a:prstGeom prst="line">
-            <a:avLst/>
-          </a:prstGeom>
-          <a:noFill/>
-          <a:ln w="19050">
+            <a:off x="3017520" y="2103120"/>
+            <a:ext cx="164592" cy="237744"/>
+          </a:xfrm>
+          <a:prstGeom prst="downArrow">
+            <a:avLst/>
+          </a:prstGeom>
+          <a:solidFill>
+            <a:srgbClr val="2E6DA4"/>
+          </a:solidFill>
+          <a:ln w="12700">
             <a:solidFill>
               <a:srgbClr val="2E6DA4"/>
             </a:solidFill>
             <a:prstDash val="solid"/>
-            <a:tailEnd type="triangle"/>
           </a:ln>
         </p:spPr>
       </p:sp>
@@ -18750,19 +18768,20 @@
         </p:nvSpPr>
         <p:spPr>
           <a:xfrm>
-            <a:off x="9089136" y="2103120"/>
-            <a:ext cx="0" cy="237744"/>
-          </a:xfrm>
-          <a:prstGeom prst="line">
-            <a:avLst/>
-          </a:prstGeom>
-          <a:noFill/>
-          <a:ln w="19050">
+            <a:off x="9006840" y="2103120"/>
+            <a:ext cx="164592" cy="237744"/>
+          </a:xfrm>
+          <a:prstGeom prst="downArrow">
+            <a:avLst/>
+          </a:prstGeom>
+          <a:solidFill>
+            <a:srgbClr val="2E6DA4"/>
+          </a:solidFill>
+          <a:ln w="12700">
             <a:solidFill>
               <a:srgbClr val="2E6DA4"/>
             </a:solidFill>
             <a:prstDash val="solid"/>
-            <a:tailEnd type="triangle"/>
           </a:ln>
         </p:spPr>
       </p:sp>
@@ -18906,19 +18925,20 @@
         </p:nvSpPr>
         <p:spPr>
           <a:xfrm>
-            <a:off x="3099816" y="3054096"/>
-            <a:ext cx="0" cy="274320"/>
-          </a:xfrm>
-          <a:prstGeom prst="line">
-            <a:avLst/>
-          </a:prstGeom>
-          <a:noFill/>
-          <a:ln w="19050">
+            <a:off x="3017520" y="3054096"/>
+            <a:ext cx="164592" cy="274320"/>
+          </a:xfrm>
+          <a:prstGeom prst="downArrow">
+            <a:avLst/>
+          </a:prstGeom>
+          <a:solidFill>
+            <a:srgbClr val="2E6DA4"/>
+          </a:solidFill>
+          <a:ln w="12700">
             <a:solidFill>
               <a:srgbClr val="2E6DA4"/>
             </a:solidFill>
             <a:prstDash val="solid"/>
-            <a:tailEnd type="triangle"/>
           </a:ln>
         </p:spPr>
       </p:sp>
@@ -18930,19 +18950,20 @@
         </p:nvSpPr>
         <p:spPr>
           <a:xfrm>
-            <a:off x="9089136" y="3054096"/>
-            <a:ext cx="0" cy="274320"/>
-          </a:xfrm>
-          <a:prstGeom prst="line">
-            <a:avLst/>
-          </a:prstGeom>
-          <a:noFill/>
-          <a:ln w="19050">
+            <a:off x="9006840" y="3054096"/>
+            <a:ext cx="164592" cy="274320"/>
+          </a:xfrm>
+          <a:prstGeom prst="downArrow">
+            <a:avLst/>
+          </a:prstGeom>
+          <a:solidFill>
+            <a:srgbClr val="2E6DA4"/>
+          </a:solidFill>
+          <a:ln w="12700">
             <a:solidFill>
               <a:srgbClr val="2E6DA4"/>
             </a:solidFill>
             <a:prstDash val="solid"/>
-            <a:tailEnd type="triangle"/>
           </a:ln>
         </p:spPr>
       </p:sp>
@@ -18955,11 +18976,11 @@
         <p:spPr>
           <a:xfrm>
             <a:off x="566928" y="3383280"/>
-            <a:ext cx="11027664" cy="786384"/>
+            <a:ext cx="11027664" cy="603504"/>
           </a:xfrm>
           <a:prstGeom prst="roundRect">
             <a:avLst>
-              <a:gd name="adj" fmla="val 6977"/>
+              <a:gd name="adj" fmla="val 9091"/>
             </a:avLst>
           </a:prstGeom>
           <a:solidFill>
@@ -18982,7 +19003,7 @@
         <p:spPr>
           <a:xfrm>
             <a:off x="566928" y="3383280"/>
-            <a:ext cx="11027664" cy="786384"/>
+            <a:ext cx="11027664" cy="603504"/>
           </a:xfrm>
           <a:prstGeom prst="rect">
             <a:avLst/>
@@ -19020,8 +19041,8 @@
         </p:nvSpPr>
         <p:spPr>
           <a:xfrm>
-            <a:off x="566928" y="4187952"/>
-            <a:ext cx="11027664" cy="256032"/>
+            <a:off x="566928" y="4023360"/>
+            <a:ext cx="11027664" cy="237744"/>
           </a:xfrm>
           <a:prstGeom prst="rect">
             <a:avLst/>
@@ -19059,19 +19080,20 @@
         </p:nvSpPr>
         <p:spPr>
           <a:xfrm>
-            <a:off x="6080760" y="4462272"/>
-            <a:ext cx="0" cy="237744"/>
-          </a:xfrm>
-          <a:prstGeom prst="line">
-            <a:avLst/>
-          </a:prstGeom>
-          <a:noFill/>
-          <a:ln w="19050">
+            <a:off x="3017520" y="4315968"/>
+            <a:ext cx="164592" cy="274320"/>
+          </a:xfrm>
+          <a:prstGeom prst="downArrow">
+            <a:avLst/>
+          </a:prstGeom>
+          <a:solidFill>
+            <a:srgbClr val="2E6DA4"/>
+          </a:solidFill>
+          <a:ln w="12700">
             <a:solidFill>
               <a:srgbClr val="2E6DA4"/>
             </a:solidFill>
             <a:prstDash val="solid"/>
-            <a:tailEnd type="triangle"/>
           </a:ln>
         </p:spPr>
       </p:sp>
@@ -19083,7 +19105,32 @@
         </p:nvSpPr>
         <p:spPr>
           <a:xfrm>
-            <a:off x="566928" y="4736592"/>
+            <a:off x="9006840" y="4315968"/>
+            <a:ext cx="164592" cy="274320"/>
+          </a:xfrm>
+          <a:prstGeom prst="downArrow">
+            <a:avLst/>
+          </a:prstGeom>
+          <a:solidFill>
+            <a:srgbClr val="2E6DA4"/>
+          </a:solidFill>
+          <a:ln w="12700">
+            <a:solidFill>
+              <a:srgbClr val="2E6DA4"/>
+            </a:solidFill>
+            <a:prstDash val="solid"/>
+          </a:ln>
+        </p:spPr>
+      </p:sp>
+      <p:sp>
+        <p:nvSpPr>
+          <p:cNvPr id="21" name="Shape 19"/>
+          <p:cNvSpPr/>
+          <p:nvPr/>
+        </p:nvSpPr>
+        <p:spPr>
+          <a:xfrm>
+            <a:off x="566928" y="4663440"/>
             <a:ext cx="5074920" cy="530352"/>
           </a:xfrm>
           <a:prstGeom prst="roundRect">
@@ -19104,13 +19151,13 @@
       </p:sp>
       <p:sp>
         <p:nvSpPr>
-          <p:cNvPr id="21" name="Text 19"/>
-          <p:cNvSpPr txBox="1"/>
-          <p:nvPr/>
-        </p:nvSpPr>
-        <p:spPr>
-          <a:xfrm>
-            <a:off x="566928" y="4736592"/>
+          <p:cNvPr id="22" name="Text 20"/>
+          <p:cNvSpPr txBox="1"/>
+          <p:nvPr/>
+        </p:nvSpPr>
+        <p:spPr>
+          <a:xfrm>
+            <a:off x="566928" y="4663440"/>
             <a:ext cx="5074920" cy="530352"/>
           </a:xfrm>
           <a:prstGeom prst="rect">
@@ -19143,13 +19190,13 @@
       </p:sp>
       <p:sp>
         <p:nvSpPr>
-          <p:cNvPr id="22" name="Shape 20"/>
+          <p:cNvPr id="23" name="Shape 21"/>
           <p:cNvSpPr/>
           <p:nvPr/>
         </p:nvSpPr>
         <p:spPr>
           <a:xfrm>
-            <a:off x="6556248" y="4736592"/>
+            <a:off x="6556248" y="4663440"/>
             <a:ext cx="5074920" cy="530352"/>
           </a:xfrm>
           <a:prstGeom prst="roundRect">
@@ -19170,13 +19217,13 @@
       </p:sp>
       <p:sp>
         <p:nvSpPr>
-          <p:cNvPr id="23" name="Text 21"/>
-          <p:cNvSpPr txBox="1"/>
-          <p:nvPr/>
-        </p:nvSpPr>
-        <p:spPr>
-          <a:xfrm>
-            <a:off x="6556248" y="4736592"/>
+          <p:cNvPr id="24" name="Text 22"/>
+          <p:cNvSpPr txBox="1"/>
+          <p:nvPr/>
+        </p:nvSpPr>
+        <p:spPr>
+          <a:xfrm>
+            <a:off x="6556248" y="4663440"/>
             <a:ext cx="5074920" cy="530352"/>
           </a:xfrm>
           <a:prstGeom prst="rect">
@@ -19209,18 +19256,18 @@
       </p:sp>
       <p:sp>
         <p:nvSpPr>
-          <p:cNvPr id="24" name="Shape 22"/>
+          <p:cNvPr id="25" name="Shape 23"/>
           <p:cNvSpPr/>
           <p:nvPr/>
         </p:nvSpPr>
         <p:spPr>
           <a:xfrm>
-            <a:off x="566928" y="5486400"/>
-            <a:ext cx="11027664" cy="749808"/>
+            <a:off x="566928" y="5394960"/>
+            <a:ext cx="11027664" cy="987552"/>
           </a:xfrm>
           <a:prstGeom prst="roundRect">
             <a:avLst>
-              <a:gd name="adj" fmla="val 7317"/>
+              <a:gd name="adj" fmla="val 5556"/>
             </a:avLst>
           </a:prstGeom>
           <a:solidFill>
@@ -19236,14 +19283,14 @@
       </p:sp>
       <p:sp>
         <p:nvSpPr>
-          <p:cNvPr id="25" name="Text 23"/>
-          <p:cNvSpPr txBox="1"/>
-          <p:nvPr/>
-        </p:nvSpPr>
-        <p:spPr>
-          <a:xfrm>
-            <a:off x="804672" y="5687568"/>
-            <a:ext cx="10552176" cy="384048"/>
+          <p:cNvPr id="26" name="Text 24"/>
+          <p:cNvSpPr txBox="1"/>
+          <p:nvPr/>
+        </p:nvSpPr>
+        <p:spPr>
+          <a:xfrm>
+            <a:off x="804672" y="5596128"/>
+            <a:ext cx="10552176" cy="621792"/>
           </a:xfrm>
           <a:prstGeom prst="rect">
             <a:avLst/>

--- a/KMIP_PKCS11_Overview_Deck.pptx
+++ b/KMIP_PKCS11_Overview_Deck.pptx
@@ -9073,11 +9073,11 @@
         <p:spPr>
           <a:xfrm>
             <a:off x="566928" y="4224528"/>
-            <a:ext cx="5394960" cy="1700784"/>
+            <a:ext cx="5394960" cy="2084832"/>
           </a:xfrm>
           <a:prstGeom prst="roundRect">
             <a:avLst>
-              <a:gd name="adj" fmla="val 3226"/>
+              <a:gd name="adj" fmla="val 2632"/>
             </a:avLst>
           </a:prstGeom>
           <a:solidFill>
@@ -9146,7 +9146,7 @@
         <p:spPr>
           <a:xfrm>
             <a:off x="804672" y="4771136"/>
-            <a:ext cx="4919472" cy="989584"/>
+            <a:ext cx="4919472" cy="1373632"/>
           </a:xfrm>
           <a:prstGeom prst="rect">
             <a:avLst/>
@@ -9264,11 +9264,11 @@
         <p:spPr>
           <a:xfrm>
             <a:off x="6236208" y="4224528"/>
-            <a:ext cx="5394960" cy="1700784"/>
+            <a:ext cx="5394960" cy="2084832"/>
           </a:xfrm>
           <a:prstGeom prst="roundRect">
             <a:avLst>
-              <a:gd name="adj" fmla="val 3226"/>
+              <a:gd name="adj" fmla="val 2632"/>
             </a:avLst>
           </a:prstGeom>
           <a:solidFill>
@@ -9376,7 +9376,7 @@
         <p:spPr>
           <a:xfrm>
             <a:off x="6473952" y="5045456"/>
-            <a:ext cx="4919472" cy="715264"/>
+            <a:ext cx="4919472" cy="1099312"/>
           </a:xfrm>
           <a:prstGeom prst="rect">
             <a:avLst/>
@@ -11540,11 +11540,11 @@
         <p:spPr>
           <a:xfrm>
             <a:off x="566928" y="1572768"/>
-            <a:ext cx="5394960" cy="2084832"/>
+            <a:ext cx="5394960" cy="2560320"/>
           </a:xfrm>
           <a:prstGeom prst="roundRect">
             <a:avLst>
-              <a:gd name="adj" fmla="val 2632"/>
+              <a:gd name="adj" fmla="val 2143"/>
             </a:avLst>
           </a:prstGeom>
           <a:solidFill>
@@ -11652,7 +11652,7 @@
         <p:spPr>
           <a:xfrm>
             <a:off x="804672" y="2393696"/>
-            <a:ext cx="4919472" cy="1099312"/>
+            <a:ext cx="4919472" cy="1574800"/>
           </a:xfrm>
           <a:prstGeom prst="rect">
             <a:avLst/>
@@ -11746,11 +11746,11 @@
         <p:spPr>
           <a:xfrm>
             <a:off x="6236208" y="1572768"/>
-            <a:ext cx="5394960" cy="2084832"/>
+            <a:ext cx="5394960" cy="2560320"/>
           </a:xfrm>
           <a:prstGeom prst="roundRect">
             <a:avLst>
-              <a:gd name="adj" fmla="val 2632"/>
+              <a:gd name="adj" fmla="val 2143"/>
             </a:avLst>
           </a:prstGeom>
           <a:solidFill>
@@ -11858,7 +11858,7 @@
         <p:spPr>
           <a:xfrm>
             <a:off x="6473952" y="2393696"/>
-            <a:ext cx="4919472" cy="1099312"/>
+            <a:ext cx="4919472" cy="1574800"/>
           </a:xfrm>
           <a:prstGeom prst="rect">
             <a:avLst/>
@@ -11951,12 +11951,12 @@
         </p:nvSpPr>
         <p:spPr>
           <a:xfrm>
-            <a:off x="566928" y="3858768"/>
-            <a:ext cx="11027664" cy="2148840"/>
+            <a:off x="566928" y="4315968"/>
+            <a:ext cx="11027664" cy="2121408"/>
           </a:xfrm>
           <a:prstGeom prst="roundRect">
             <a:avLst>
-              <a:gd name="adj" fmla="val 2553"/>
+              <a:gd name="adj" fmla="val 2586"/>
             </a:avLst>
           </a:prstGeom>
           <a:solidFill>
@@ -11985,7 +11985,7 @@
         </p:nvSpPr>
         <p:spPr>
           <a:xfrm>
-            <a:off x="804672" y="4059936"/>
+            <a:off x="804672" y="4517136"/>
             <a:ext cx="10552176" cy="272288"/>
           </a:xfrm>
           <a:prstGeom prst="rect">
@@ -12024,8 +12024,8 @@
         </p:nvSpPr>
         <p:spPr>
           <a:xfrm>
-            <a:off x="804672" y="4405376"/>
-            <a:ext cx="10552176" cy="1437640"/>
+            <a:off x="804672" y="4862576"/>
+            <a:ext cx="10552176" cy="1410208"/>
           </a:xfrm>
           <a:prstGeom prst="rect">
             <a:avLst/>
@@ -12253,11 +12253,11 @@
         <p:spPr>
           <a:xfrm>
             <a:off x="566928" y="1572768"/>
-            <a:ext cx="3520440" cy="2331720"/>
+            <a:ext cx="3520440" cy="2944368"/>
           </a:xfrm>
           <a:prstGeom prst="roundRect">
             <a:avLst>
-              <a:gd name="adj" fmla="val 2353"/>
+              <a:gd name="adj" fmla="val 1863"/>
             </a:avLst>
           </a:prstGeom>
           <a:solidFill>
@@ -12365,7 +12365,7 @@
         <p:spPr>
           <a:xfrm>
             <a:off x="804672" y="2393696"/>
-            <a:ext cx="3044952" cy="1346200"/>
+            <a:ext cx="3044952" cy="1958848"/>
           </a:xfrm>
           <a:prstGeom prst="rect">
             <a:avLst/>
@@ -12531,11 +12531,11 @@
         <p:spPr>
           <a:xfrm>
             <a:off x="4334256" y="1572768"/>
-            <a:ext cx="3520440" cy="2331720"/>
+            <a:ext cx="3520440" cy="2944368"/>
           </a:xfrm>
           <a:prstGeom prst="roundRect">
             <a:avLst>
-              <a:gd name="adj" fmla="val 2353"/>
+              <a:gd name="adj" fmla="val 1863"/>
             </a:avLst>
           </a:prstGeom>
           <a:solidFill>
@@ -12643,7 +12643,7 @@
         <p:spPr>
           <a:xfrm>
             <a:off x="4572000" y="2393696"/>
-            <a:ext cx="3044952" cy="1346200"/>
+            <a:ext cx="3044952" cy="1958848"/>
           </a:xfrm>
           <a:prstGeom prst="rect">
             <a:avLst/>
@@ -12809,11 +12809,11 @@
         <p:spPr>
           <a:xfrm>
             <a:off x="8101584" y="1572768"/>
-            <a:ext cx="3529584" cy="2331720"/>
+            <a:ext cx="3529584" cy="2944368"/>
           </a:xfrm>
           <a:prstGeom prst="roundRect">
             <a:avLst>
-              <a:gd name="adj" fmla="val 2353"/>
+              <a:gd name="adj" fmla="val 1863"/>
             </a:avLst>
           </a:prstGeom>
           <a:solidFill>
@@ -12921,7 +12921,7 @@
         <p:spPr>
           <a:xfrm>
             <a:off x="8339328" y="2393696"/>
-            <a:ext cx="3054096" cy="1346200"/>
+            <a:ext cx="3054096" cy="1958848"/>
           </a:xfrm>
           <a:prstGeom prst="rect">
             <a:avLst/>
@@ -12962,7 +12962,7 @@
         </p:nvSpPr>
         <p:spPr>
           <a:xfrm>
-            <a:off x="566928" y="4133088"/>
+            <a:off x="566928" y="4681728"/>
             <a:ext cx="2743200" cy="256032"/>
           </a:xfrm>
           <a:prstGeom prst="rect">
@@ -13001,7 +13001,7 @@
         </p:nvSpPr>
         <p:spPr>
           <a:xfrm>
-            <a:off x="566928" y="4443984"/>
+            <a:off x="566928" y="4974336"/>
             <a:ext cx="1901952" cy="566928"/>
           </a:xfrm>
           <a:prstGeom prst="roundRect">
@@ -13028,7 +13028,7 @@
         </p:nvSpPr>
         <p:spPr>
           <a:xfrm>
-            <a:off x="566928" y="4443984"/>
+            <a:off x="566928" y="4974336"/>
             <a:ext cx="1901952" cy="566928"/>
           </a:xfrm>
           <a:prstGeom prst="rect">
@@ -13067,7 +13067,7 @@
         </p:nvSpPr>
         <p:spPr>
           <a:xfrm>
-            <a:off x="2496312" y="4645152"/>
+            <a:off x="2496312" y="5175504"/>
             <a:ext cx="256032" cy="164592"/>
           </a:xfrm>
           <a:prstGeom prst="rightArrow">
@@ -13092,7 +13092,7 @@
         </p:nvSpPr>
         <p:spPr>
           <a:xfrm>
-            <a:off x="2779776" y="4443984"/>
+            <a:off x="2779776" y="4974336"/>
             <a:ext cx="1901952" cy="566928"/>
           </a:xfrm>
           <a:prstGeom prst="roundRect">
@@ -13119,7 +13119,7 @@
         </p:nvSpPr>
         <p:spPr>
           <a:xfrm>
-            <a:off x="2779776" y="4443984"/>
+            <a:off x="2779776" y="4974336"/>
             <a:ext cx="1901952" cy="566928"/>
           </a:xfrm>
           <a:prstGeom prst="rect">
@@ -13158,7 +13158,7 @@
         </p:nvSpPr>
         <p:spPr>
           <a:xfrm>
-            <a:off x="4709160" y="4645152"/>
+            <a:off x="4709160" y="5175504"/>
             <a:ext cx="256032" cy="164592"/>
           </a:xfrm>
           <a:prstGeom prst="rightArrow">
@@ -13183,7 +13183,7 @@
         </p:nvSpPr>
         <p:spPr>
           <a:xfrm>
-            <a:off x="4992624" y="4443984"/>
+            <a:off x="4992624" y="4974336"/>
             <a:ext cx="1901952" cy="566928"/>
           </a:xfrm>
           <a:prstGeom prst="roundRect">
@@ -13210,7 +13210,7 @@
         </p:nvSpPr>
         <p:spPr>
           <a:xfrm>
-            <a:off x="4992624" y="4443984"/>
+            <a:off x="4992624" y="4974336"/>
             <a:ext cx="1901952" cy="566928"/>
           </a:xfrm>
           <a:prstGeom prst="rect">
@@ -13249,7 +13249,7 @@
         </p:nvSpPr>
         <p:spPr>
           <a:xfrm>
-            <a:off x="6922008" y="4645152"/>
+            <a:off x="6922008" y="5175504"/>
             <a:ext cx="256032" cy="164592"/>
           </a:xfrm>
           <a:prstGeom prst="rightArrow">
@@ -13274,7 +13274,7 @@
         </p:nvSpPr>
         <p:spPr>
           <a:xfrm>
-            <a:off x="7205472" y="4443984"/>
+            <a:off x="7205472" y="4974336"/>
             <a:ext cx="1901952" cy="566928"/>
           </a:xfrm>
           <a:prstGeom prst="roundRect">
@@ -13301,7 +13301,7 @@
         </p:nvSpPr>
         <p:spPr>
           <a:xfrm>
-            <a:off x="7205472" y="4443984"/>
+            <a:off x="7205472" y="4974336"/>
             <a:ext cx="1901952" cy="566928"/>
           </a:xfrm>
           <a:prstGeom prst="rect">
@@ -13340,7 +13340,7 @@
         </p:nvSpPr>
         <p:spPr>
           <a:xfrm>
-            <a:off x="9729216" y="4443984"/>
+            <a:off x="9729216" y="4974336"/>
             <a:ext cx="1901952" cy="566928"/>
           </a:xfrm>
           <a:prstGeom prst="roundRect">
@@ -13367,7 +13367,7 @@
         </p:nvSpPr>
         <p:spPr>
           <a:xfrm>
-            <a:off x="9729216" y="4443984"/>
+            <a:off x="9729216" y="4974336"/>
             <a:ext cx="1901952" cy="566928"/>
           </a:xfrm>
           <a:prstGeom prst="rect">
@@ -13406,7 +13406,7 @@
         </p:nvSpPr>
         <p:spPr>
           <a:xfrm>
-            <a:off x="9729216" y="5084064"/>
+            <a:off x="9729216" y="5614416"/>
             <a:ext cx="1901952" cy="237744"/>
           </a:xfrm>
           <a:prstGeom prst="rect">
@@ -13445,7 +13445,7 @@
         </p:nvSpPr>
         <p:spPr>
           <a:xfrm>
-            <a:off x="566928" y="5440680"/>
+            <a:off x="566928" y="5961888"/>
             <a:ext cx="11027664" cy="329184"/>
           </a:xfrm>
           <a:prstGeom prst="rect">
@@ -13595,11 +13595,11 @@
         <p:spPr>
           <a:xfrm>
             <a:off x="566928" y="1572768"/>
-            <a:ext cx="5394960" cy="2487168"/>
+            <a:ext cx="5394960" cy="2633472"/>
           </a:xfrm>
           <a:prstGeom prst="roundRect">
             <a:avLst>
-              <a:gd name="adj" fmla="val 2206"/>
+              <a:gd name="adj" fmla="val 2083"/>
             </a:avLst>
           </a:prstGeom>
           <a:solidFill>
@@ -13707,7 +13707,7 @@
         <p:spPr>
           <a:xfrm>
             <a:off x="804672" y="2393696"/>
-            <a:ext cx="4919472" cy="1501648"/>
+            <a:ext cx="4919472" cy="1647952"/>
           </a:xfrm>
           <a:prstGeom prst="rect">
             <a:avLst/>
@@ -13825,11 +13825,11 @@
         <p:spPr>
           <a:xfrm>
             <a:off x="6236208" y="1572768"/>
-            <a:ext cx="5394960" cy="2487168"/>
+            <a:ext cx="5394960" cy="2633472"/>
           </a:xfrm>
           <a:prstGeom prst="roundRect">
             <a:avLst>
-              <a:gd name="adj" fmla="val 2206"/>
+              <a:gd name="adj" fmla="val 2083"/>
             </a:avLst>
           </a:prstGeom>
           <a:solidFill>
@@ -13937,7 +13937,7 @@
         <p:spPr>
           <a:xfrm>
             <a:off x="6473952" y="2393696"/>
-            <a:ext cx="4919472" cy="1501648"/>
+            <a:ext cx="4919472" cy="1647952"/>
           </a:xfrm>
           <a:prstGeom prst="rect">
             <a:avLst/>
@@ -14054,12 +14054,12 @@
         </p:nvSpPr>
         <p:spPr>
           <a:xfrm>
-            <a:off x="566928" y="4261104"/>
-            <a:ext cx="6858000" cy="1755648"/>
+            <a:off x="566928" y="4407408"/>
+            <a:ext cx="6858000" cy="1828800"/>
           </a:xfrm>
           <a:prstGeom prst="roundRect">
             <a:avLst>
-              <a:gd name="adj" fmla="val 3125"/>
+              <a:gd name="adj" fmla="val 3000"/>
             </a:avLst>
           </a:prstGeom>
           <a:solidFill>
@@ -14081,7 +14081,7 @@
         </p:nvSpPr>
         <p:spPr>
           <a:xfrm>
-            <a:off x="804672" y="4462272"/>
+            <a:off x="804672" y="4608576"/>
             <a:ext cx="6382512" cy="272288"/>
           </a:xfrm>
           <a:prstGeom prst="rect">
@@ -14120,8 +14120,8 @@
         </p:nvSpPr>
         <p:spPr>
           <a:xfrm>
-            <a:off x="804672" y="4807712"/>
-            <a:ext cx="6382512" cy="1044448"/>
+            <a:off x="804672" y="4954016"/>
+            <a:ext cx="6382512" cy="1117600"/>
           </a:xfrm>
           <a:prstGeom prst="rect">
             <a:avLst/>
@@ -14162,12 +14162,12 @@
         </p:nvSpPr>
         <p:spPr>
           <a:xfrm>
-            <a:off x="7699248" y="4261104"/>
-            <a:ext cx="3931920" cy="1755648"/>
+            <a:off x="7699248" y="4407408"/>
+            <a:ext cx="3931920" cy="1828800"/>
           </a:xfrm>
           <a:prstGeom prst="roundRect">
             <a:avLst>
-              <a:gd name="adj" fmla="val 3125"/>
+              <a:gd name="adj" fmla="val 3000"/>
             </a:avLst>
           </a:prstGeom>
           <a:solidFill>
@@ -14196,7 +14196,7 @@
         </p:nvSpPr>
         <p:spPr>
           <a:xfrm>
-            <a:off x="7936992" y="4462272"/>
+            <a:off x="7936992" y="4608576"/>
             <a:ext cx="3456432" cy="201168"/>
           </a:xfrm>
           <a:prstGeom prst="rect">
@@ -14235,7 +14235,7 @@
         </p:nvSpPr>
         <p:spPr>
           <a:xfrm>
-            <a:off x="7936992" y="4736592"/>
+            <a:off x="7936992" y="4882896"/>
             <a:ext cx="3456432" cy="272288"/>
           </a:xfrm>
           <a:prstGeom prst="rect">
@@ -14274,8 +14274,8 @@
         </p:nvSpPr>
         <p:spPr>
           <a:xfrm>
-            <a:off x="7936992" y="5082032"/>
-            <a:ext cx="3456432" cy="770128"/>
+            <a:off x="7936992" y="5228336"/>
+            <a:ext cx="3456432" cy="843280"/>
           </a:xfrm>
           <a:prstGeom prst="rect">
             <a:avLst/>

--- a/KMIP_PKCS11_Overview_Deck.pptx
+++ b/KMIP_PKCS11_Overview_Deck.pptx
@@ -604,7 +604,7 @@
           <a:p>
             <a:r>
               <a:rPr lang="en-US" dirty="0"/>
-              <a:t>The fourth statistic is the one to dwell on: 19 of the shortfalls are not backlog items for the KMIP layer at all. Integration and identity are where the concentration of gaps sits.</a:t>
+              <a:t>The fourth statistic is the one to dwell on: 23 of the shortfalls are not backlog items for the KMIP layer at all. Integration and identity are where the concentration of gaps sits.</a:t>
             </a:r>
             <a:endParaRPr lang="en-US" dirty="0"/>
           </a:p>
@@ -2427,7 +2427,7 @@
                 <a:ea typeface="Cambria" pitchFamily="34" charset="-122"/>
                 <a:cs typeface="Cambria" pitchFamily="34" charset="-120"/>
               </a:rPr>
-              <a:t>74</a:t>
+              <a:t>82</a:t>
             </a:r>
             <a:endParaRPr lang="en-US" sz="3000" dirty="0"/>
           </a:p>
@@ -2505,7 +2505,7 @@
                 <a:ea typeface="Cambria" pitchFamily="34" charset="-122"/>
                 <a:cs typeface="Cambria" pitchFamily="34" charset="-120"/>
               </a:rPr>
-              <a:t>19</a:t>
+              <a:t>23</a:t>
             </a:r>
             <a:endParaRPr lang="en-US" sz="3000" dirty="0"/>
           </a:p>
@@ -2693,7 +2693,7 @@
                 <a:ea typeface="Cambria" pitchFamily="34" charset="-122"/>
                 <a:cs typeface="Cambria" pitchFamily="34" charset="-120"/>
               </a:rPr>
-              <a:t>74 features the market expects</a:t>
+              <a:t>82 features the market expects</a:t>
             </a:r>
             <a:endParaRPr lang="en-US" sz="3400" dirty="0"/>
           </a:p>
@@ -2810,7 +2810,7 @@
                 <a:ea typeface="Cambria" pitchFamily="34" charset="-122"/>
                 <a:cs typeface="Cambria" pitchFamily="34" charset="-120"/>
               </a:rPr>
-              <a:t>16</a:t>
+              <a:t>18</a:t>
             </a:r>
             <a:endParaRPr lang="en-US" sz="4000" dirty="0"/>
           </a:p>
@@ -2888,7 +2888,7 @@
                 <a:ea typeface="Cambria" pitchFamily="34" charset="-122"/>
                 <a:cs typeface="Cambria" pitchFamily="34" charset="-120"/>
               </a:rPr>
-              <a:t>26</a:t>
+              <a:t>32</a:t>
             </a:r>
             <a:endParaRPr lang="en-US" sz="4000" dirty="0"/>
           </a:p>
@@ -2966,7 +2966,7 @@
                 <a:ea typeface="Cambria" pitchFamily="34" charset="-122"/>
                 <a:cs typeface="Cambria" pitchFamily="34" charset="-120"/>
               </a:rPr>
-              <a:t>19</a:t>
+              <a:t>23</a:t>
             </a:r>
             <a:endParaRPr lang="en-US" sz="4000" dirty="0"/>
           </a:p>
@@ -3468,7 +3468,7 @@
                           <a:ea typeface="Calibri" pitchFamily="34" charset="-122"/>
                           <a:cs typeface="Calibri" pitchFamily="34" charset="-120"/>
                         </a:rPr>
-                        <a:t>14</a:t>
+                        <a:t>15</a:t>
                       </a:r>
                       <a:endParaRPr lang="en-US" sz="1200" dirty="0">
                         <a:latin typeface="Calibri" charset="0"/>
@@ -3672,7 +3672,7 @@
                           <a:ea typeface="Calibri" pitchFamily="34" charset="-122"/>
                           <a:cs typeface="Calibri" pitchFamily="34" charset="-120"/>
                         </a:rPr>
-                        <a:t>2</a:t>
+                        <a:t>3</a:t>
                       </a:r>
                       <a:endParaRPr lang="en-US" sz="1200" dirty="0">
                         <a:latin typeface="Calibri" charset="0"/>
@@ -3810,7 +3810,7 @@
                           <a:ea typeface="Calibri" pitchFamily="34" charset="-122"/>
                           <a:cs typeface="Calibri" pitchFamily="34" charset="-120"/>
                         </a:rPr>
-                        <a:t>12</a:t>
+                        <a:t>15</a:t>
                       </a:r>
                       <a:endParaRPr lang="en-US" sz="1200" dirty="0">
                         <a:latin typeface="Calibri" charset="0"/>
@@ -3946,7 +3946,7 @@
                           <a:ea typeface="Calibri" pitchFamily="34" charset="-122"/>
                           <a:cs typeface="Calibri" pitchFamily="34" charset="-120"/>
                         </a:rPr>
-                        <a:t>4</a:t>
+                        <a:t>5</a:t>
                       </a:r>
                       <a:endParaRPr lang="en-US" sz="1200" dirty="0">
                         <a:latin typeface="Calibri" charset="0"/>
@@ -4014,7 +4014,7 @@
                           <a:ea typeface="Calibri" pitchFamily="34" charset="-122"/>
                           <a:cs typeface="Calibri" pitchFamily="34" charset="-120"/>
                         </a:rPr>
-                        <a:t>7</a:t>
+                        <a:t>9</a:t>
                       </a:r>
                       <a:endParaRPr lang="en-US" sz="1200" dirty="0">
                         <a:latin typeface="Calibri" charset="0"/>
@@ -4494,7 +4494,7 @@
                           <a:ea typeface="Calibri" pitchFamily="34" charset="-122"/>
                           <a:cs typeface="Calibri" pitchFamily="34" charset="-120"/>
                         </a:rPr>
-                        <a:t>10</a:t>
+                        <a:t>11</a:t>
                       </a:r>
                       <a:endParaRPr lang="en-US" sz="1200" dirty="0">
                         <a:latin typeface="Calibri" charset="0"/>
@@ -4698,7 +4698,7 @@
                           <a:ea typeface="Calibri" pitchFamily="34" charset="-122"/>
                           <a:cs typeface="Calibri" pitchFamily="34" charset="-120"/>
                         </a:rPr>
-                        <a:t>5</a:t>
+                        <a:t>6</a:t>
                       </a:r>
                       <a:endParaRPr lang="en-US" sz="1200" dirty="0">
                         <a:latin typeface="Calibri" charset="0"/>
@@ -4836,7 +4836,7 @@
                           <a:ea typeface="Calibri" pitchFamily="34" charset="-122"/>
                           <a:cs typeface="Calibri" pitchFamily="34" charset="-120"/>
                         </a:rPr>
-                        <a:t>10</a:t>
+                        <a:t>11</a:t>
                       </a:r>
                       <a:endParaRPr lang="en-US" sz="1200" dirty="0">
                         <a:latin typeface="Calibri" charset="0"/>
@@ -5040,7 +5040,7 @@
                           <a:ea typeface="Calibri" pitchFamily="34" charset="-122"/>
                           <a:cs typeface="Calibri" pitchFamily="34" charset="-120"/>
                         </a:rPr>
-                        <a:t>4</a:t>
+                        <a:t>5</a:t>
                       </a:r>
                       <a:endParaRPr lang="en-US" sz="1200" dirty="0">
                         <a:latin typeface="Calibri" charset="0"/>
@@ -5178,7 +5178,7 @@
                           <a:ea typeface="Calibri" pitchFamily="34" charset="-122"/>
                           <a:cs typeface="Calibri" pitchFamily="34" charset="-120"/>
                         </a:rPr>
-                        <a:t>8</a:t>
+                        <a:t>9</a:t>
                       </a:r>
                       <a:endParaRPr lang="en-US" sz="1200" dirty="0">
                         <a:latin typeface="Calibri" charset="0"/>
@@ -5382,7 +5382,7 @@
                           <a:ea typeface="Calibri" pitchFamily="34" charset="-122"/>
                           <a:cs typeface="Calibri" pitchFamily="34" charset="-120"/>
                         </a:rPr>
-                        <a:t>2</a:t>
+                        <a:t>3</a:t>
                       </a:r>
                       <a:endParaRPr lang="en-US" sz="1200" dirty="0">
                         <a:latin typeface="Calibri" charset="0"/>
@@ -5520,7 +5520,7 @@
                           <a:ea typeface="Calibri" pitchFamily="34" charset="-122"/>
                           <a:cs typeface="Calibri" pitchFamily="34" charset="-120"/>
                         </a:rPr>
-                        <a:t>7</a:t>
+                        <a:t>8</a:t>
                       </a:r>
                       <a:endParaRPr lang="en-US" sz="1200" dirty="0">
                         <a:latin typeface="Calibri" charset="0"/>
@@ -5656,7 +5656,7 @@
                           <a:ea typeface="Calibri" pitchFamily="34" charset="-122"/>
                           <a:cs typeface="Calibri" pitchFamily="34" charset="-120"/>
                         </a:rPr>
-                        <a:t>1</a:t>
+                        <a:t>2</a:t>
                       </a:r>
                       <a:endParaRPr lang="en-US" sz="1200" dirty="0">
                         <a:latin typeface="Calibri" charset="0"/>
@@ -5862,7 +5862,7 @@
                           <a:ea typeface="Calibri" pitchFamily="34" charset="-122"/>
                           <a:cs typeface="Calibri" pitchFamily="34" charset="-120"/>
                         </a:rPr>
-                        <a:t>74</a:t>
+                        <a:t>82</a:t>
                       </a:r>
                       <a:endParaRPr lang="en-US" sz="1200" dirty="0">
                         <a:latin typeface="Calibri" charset="0"/>
@@ -5998,7 +5998,7 @@
                           <a:ea typeface="Calibri" pitchFamily="34" charset="-122"/>
                           <a:cs typeface="Calibri" pitchFamily="34" charset="-120"/>
                         </a:rPr>
-                        <a:t>16</a:t>
+                        <a:t>18</a:t>
                       </a:r>
                       <a:endParaRPr lang="en-US" sz="1200" dirty="0">
                         <a:latin typeface="Calibri" charset="0"/>
@@ -6066,7 +6066,7 @@
                           <a:ea typeface="Calibri" pitchFamily="34" charset="-122"/>
                           <a:cs typeface="Calibri" pitchFamily="34" charset="-120"/>
                         </a:rPr>
-                        <a:t>26</a:t>
+                        <a:t>32</a:t>
                       </a:r>
                       <a:endParaRPr lang="en-US" sz="1200" dirty="0">
                         <a:latin typeface="Calibri" charset="0"/>
@@ -6130,8 +6130,8 @@
         </p:nvSpPr>
         <p:spPr>
           <a:xfrm>
-            <a:off x="566928" y="6327648"/>
-            <a:ext cx="11027664" cy="274320"/>
+            <a:off x="566928" y="6291072"/>
+            <a:ext cx="11027664" cy="310896"/>
           </a:xfrm>
           <a:prstGeom prst="rect">
             <a:avLst/>
@@ -6155,7 +6155,7 @@
                 <a:ea typeface="Calibri" pitchFamily="34" charset="-122"/>
                 <a:cs typeface="Calibri" pitchFamily="34" charset="-120"/>
               </a:rPr>
-              <a:t>Requirements drawn from Thales CipherTrust, Entrust KeyControl, Fortanix DSM, Utimaco ESKM and the cloud KMS services, plus NIST SP 800-57 and SP 800-152.</a:t>
+              <a:t>Requirements drawn from Thales CipherTrust, Entrust KeyControl, Fortanix DSM, Utimaco ESKM, Bloombase KeyCastle, Cosmian/Eviden, Securosys CyberVault, HashiCorp Vault and the cloud KMS services, plus NIST SP 800-57 and SP 800-152.</a:t>
             </a:r>
             <a:endParaRPr lang="en-US" sz="1000" dirty="0"/>
           </a:p>
@@ -7149,11 +7149,11 @@
         <p:spPr>
           <a:xfrm>
             <a:off x="566928" y="1554480"/>
-            <a:ext cx="2615184" cy="2011680"/>
+            <a:ext cx="2615184" cy="2121408"/>
           </a:xfrm>
           <a:prstGeom prst="roundRect">
             <a:avLst>
-              <a:gd name="adj" fmla="val 2727"/>
+              <a:gd name="adj" fmla="val 2586"/>
             </a:avLst>
           </a:prstGeom>
           <a:solidFill>
@@ -7222,7 +7222,7 @@
         <p:spPr>
           <a:xfrm>
             <a:off x="804672" y="2395728"/>
-            <a:ext cx="2139696" cy="1005840"/>
+            <a:ext cx="2139696" cy="1115568"/>
           </a:xfrm>
           <a:prstGeom prst="rect">
             <a:avLst/>
@@ -7264,11 +7264,11 @@
         <p:spPr>
           <a:xfrm>
             <a:off x="3392424" y="1554480"/>
-            <a:ext cx="2615184" cy="2011680"/>
+            <a:ext cx="2615184" cy="2121408"/>
           </a:xfrm>
           <a:prstGeom prst="roundRect">
             <a:avLst>
-              <a:gd name="adj" fmla="val 2727"/>
+              <a:gd name="adj" fmla="val 2586"/>
             </a:avLst>
           </a:prstGeom>
           <a:solidFill>
@@ -7337,7 +7337,7 @@
         <p:spPr>
           <a:xfrm>
             <a:off x="3630168" y="2395728"/>
-            <a:ext cx="2139696" cy="1005840"/>
+            <a:ext cx="2139696" cy="1115568"/>
           </a:xfrm>
           <a:prstGeom prst="rect">
             <a:avLst/>
@@ -7379,11 +7379,11 @@
         <p:spPr>
           <a:xfrm>
             <a:off x="6217920" y="1554480"/>
-            <a:ext cx="2615184" cy="2011680"/>
+            <a:ext cx="2615184" cy="2121408"/>
           </a:xfrm>
           <a:prstGeom prst="roundRect">
             <a:avLst>
-              <a:gd name="adj" fmla="val 2727"/>
+              <a:gd name="adj" fmla="val 2586"/>
             </a:avLst>
           </a:prstGeom>
           <a:solidFill>
@@ -7452,7 +7452,7 @@
         <p:spPr>
           <a:xfrm>
             <a:off x="6455664" y="2395728"/>
-            <a:ext cx="2139696" cy="1005840"/>
+            <a:ext cx="2139696" cy="1115568"/>
           </a:xfrm>
           <a:prstGeom prst="rect">
             <a:avLst/>
@@ -7494,11 +7494,11 @@
         <p:spPr>
           <a:xfrm>
             <a:off x="9043416" y="1554480"/>
-            <a:ext cx="2615184" cy="2011680"/>
+            <a:ext cx="2615184" cy="2121408"/>
           </a:xfrm>
           <a:prstGeom prst="roundRect">
             <a:avLst>
-              <a:gd name="adj" fmla="val 2727"/>
+              <a:gd name="adj" fmla="val 2586"/>
             </a:avLst>
           </a:prstGeom>
           <a:solidFill>
@@ -7567,7 +7567,7 @@
         <p:spPr>
           <a:xfrm>
             <a:off x="9281160" y="2395728"/>
-            <a:ext cx="2139696" cy="1005840"/>
+            <a:ext cx="2139696" cy="1115568"/>
           </a:xfrm>
           <a:prstGeom prst="rect">
             <a:avLst/>
@@ -7609,11 +7609,11 @@
         <p:spPr>
           <a:xfrm>
             <a:off x="566928" y="3767328"/>
-            <a:ext cx="2615184" cy="2011680"/>
+            <a:ext cx="2615184" cy="2121408"/>
           </a:xfrm>
           <a:prstGeom prst="roundRect">
             <a:avLst>
-              <a:gd name="adj" fmla="val 2727"/>
+              <a:gd name="adj" fmla="val 2586"/>
             </a:avLst>
           </a:prstGeom>
           <a:solidFill>
@@ -7682,7 +7682,7 @@
         <p:spPr>
           <a:xfrm>
             <a:off x="804672" y="4608576"/>
-            <a:ext cx="2139696" cy="1005840"/>
+            <a:ext cx="2139696" cy="1115568"/>
           </a:xfrm>
           <a:prstGeom prst="rect">
             <a:avLst/>
@@ -7724,11 +7724,11 @@
         <p:spPr>
           <a:xfrm>
             <a:off x="3392424" y="3767328"/>
-            <a:ext cx="2615184" cy="2011680"/>
+            <a:ext cx="2615184" cy="2121408"/>
           </a:xfrm>
           <a:prstGeom prst="roundRect">
             <a:avLst>
-              <a:gd name="adj" fmla="val 2727"/>
+              <a:gd name="adj" fmla="val 2586"/>
             </a:avLst>
           </a:prstGeom>
           <a:solidFill>
@@ -7797,7 +7797,7 @@
         <p:spPr>
           <a:xfrm>
             <a:off x="3630168" y="4608576"/>
-            <a:ext cx="2139696" cy="1005840"/>
+            <a:ext cx="2139696" cy="1115568"/>
           </a:xfrm>
           <a:prstGeom prst="rect">
             <a:avLst/>
@@ -7839,11 +7839,11 @@
         <p:spPr>
           <a:xfrm>
             <a:off x="6217920" y="3767328"/>
-            <a:ext cx="2615184" cy="2011680"/>
+            <a:ext cx="2615184" cy="2121408"/>
           </a:xfrm>
           <a:prstGeom prst="roundRect">
             <a:avLst>
-              <a:gd name="adj" fmla="val 2727"/>
+              <a:gd name="adj" fmla="val 2586"/>
             </a:avLst>
           </a:prstGeom>
           <a:solidFill>
@@ -7912,7 +7912,7 @@
         <p:spPr>
           <a:xfrm>
             <a:off x="6455664" y="4608576"/>
-            <a:ext cx="2139696" cy="1005840"/>
+            <a:ext cx="2139696" cy="1115568"/>
           </a:xfrm>
           <a:prstGeom prst="rect">
             <a:avLst/>
@@ -7954,11 +7954,11 @@
         <p:spPr>
           <a:xfrm>
             <a:off x="9043416" y="3767328"/>
-            <a:ext cx="2615184" cy="2011680"/>
+            <a:ext cx="2615184" cy="2121408"/>
           </a:xfrm>
           <a:prstGeom prst="roundRect">
             <a:avLst>
-              <a:gd name="adj" fmla="val 2727"/>
+              <a:gd name="adj" fmla="val 2586"/>
             </a:avLst>
           </a:prstGeom>
           <a:solidFill>
@@ -8027,7 +8027,7 @@
         <p:spPr>
           <a:xfrm>
             <a:off x="9281160" y="4608576"/>
-            <a:ext cx="2139696" cy="1005840"/>
+            <a:ext cx="2139696" cy="1115568"/>
           </a:xfrm>
           <a:prstGeom prst="rect">
             <a:avLst/>
@@ -8068,8 +8068,8 @@
         </p:nvSpPr>
         <p:spPr>
           <a:xfrm>
-            <a:off x="566928" y="6327648"/>
-            <a:ext cx="11027664" cy="274320"/>
+            <a:off x="566928" y="6446520"/>
+            <a:ext cx="11027664" cy="155448"/>
           </a:xfrm>
           <a:prstGeom prst="rect">
             <a:avLst/>
@@ -14055,11 +14055,11 @@
         <p:spPr>
           <a:xfrm>
             <a:off x="566928" y="4407408"/>
-            <a:ext cx="6858000" cy="1828800"/>
+            <a:ext cx="6858000" cy="1938528"/>
           </a:xfrm>
           <a:prstGeom prst="roundRect">
             <a:avLst>
-              <a:gd name="adj" fmla="val 3000"/>
+              <a:gd name="adj" fmla="val 2830"/>
             </a:avLst>
           </a:prstGeom>
           <a:solidFill>
@@ -14121,7 +14121,7 @@
         <p:spPr>
           <a:xfrm>
             <a:off x="804672" y="4954016"/>
-            <a:ext cx="6382512" cy="1117600"/>
+            <a:ext cx="6382512" cy="1227328"/>
           </a:xfrm>
           <a:prstGeom prst="rect">
             <a:avLst/>
@@ -14163,11 +14163,11 @@
         <p:spPr>
           <a:xfrm>
             <a:off x="7699248" y="4407408"/>
-            <a:ext cx="3931920" cy="1828800"/>
+            <a:ext cx="3931920" cy="1938528"/>
           </a:xfrm>
           <a:prstGeom prst="roundRect">
             <a:avLst>
-              <a:gd name="adj" fmla="val 3000"/>
+              <a:gd name="adj" fmla="val 2830"/>
             </a:avLst>
           </a:prstGeom>
           <a:solidFill>
@@ -14275,7 +14275,7 @@
         <p:spPr>
           <a:xfrm>
             <a:off x="7936992" y="5228336"/>
-            <a:ext cx="3456432" cy="843280"/>
+            <a:ext cx="3456432" cy="953008"/>
           </a:xfrm>
           <a:prstGeom prst="rect">
             <a:avLst/>
@@ -15542,11 +15542,11 @@
         <p:spPr>
           <a:xfrm>
             <a:off x="566928" y="3840480"/>
-            <a:ext cx="3200400" cy="2231136"/>
+            <a:ext cx="3200400" cy="2304288"/>
           </a:xfrm>
           <a:prstGeom prst="roundRect">
             <a:avLst>
-              <a:gd name="adj" fmla="val 2459"/>
+              <a:gd name="adj" fmla="val 2381"/>
             </a:avLst>
           </a:prstGeom>
           <a:solidFill>
@@ -15654,7 +15654,7 @@
         <p:spPr>
           <a:xfrm>
             <a:off x="804672" y="4661408"/>
-            <a:ext cx="2724912" cy="1245616"/>
+            <a:ext cx="2724912" cy="1318768"/>
           </a:xfrm>
           <a:prstGeom prst="rect">
             <a:avLst/>
@@ -18394,11 +18394,11 @@
         <p:spPr>
           <a:xfrm>
             <a:off x="8101584" y="3767328"/>
-            <a:ext cx="3520440" cy="2304288"/>
+            <a:ext cx="3520440" cy="2432304"/>
           </a:xfrm>
           <a:prstGeom prst="roundRect">
             <a:avLst>
-              <a:gd name="adj" fmla="val 2381"/>
+              <a:gd name="adj" fmla="val 2256"/>
             </a:avLst>
           </a:prstGeom>
           <a:solidFill>
@@ -18460,7 +18460,7 @@
         <p:spPr>
           <a:xfrm>
             <a:off x="8339328" y="4296918"/>
-            <a:ext cx="3044952" cy="1610106"/>
+            <a:ext cx="3044952" cy="1738122"/>
           </a:xfrm>
           <a:prstGeom prst="rect">
             <a:avLst/>
@@ -19263,11 +19263,11 @@
         <p:spPr>
           <a:xfrm>
             <a:off x="566928" y="5394960"/>
-            <a:ext cx="11027664" cy="987552"/>
+            <a:ext cx="11027664" cy="1078992"/>
           </a:xfrm>
           <a:prstGeom prst="roundRect">
             <a:avLst>
-              <a:gd name="adj" fmla="val 5556"/>
+              <a:gd name="adj" fmla="val 5085"/>
             </a:avLst>
           </a:prstGeom>
           <a:solidFill>
@@ -19290,7 +19290,7 @@
         <p:spPr>
           <a:xfrm>
             <a:off x="804672" y="5596128"/>
-            <a:ext cx="10552176" cy="621792"/>
+            <a:ext cx="10552176" cy="713232"/>
           </a:xfrm>
           <a:prstGeom prst="rect">
             <a:avLst/>

--- a/KMIP_PKCS11_Overview_Deck.pptx
+++ b/KMIP_PKCS11_Overview_Deck.pptx
@@ -780,7 +780,7 @@
           <a:p>
             <a:r>
               <a:rPr lang="en-US" dirty="0"/>
-              <a:t>Group them: the first four are engineering we could start tomorrow, the middle two are design trade-offs with known costs, and the last two depend on suppliers rather than on us.</a:t>
+              <a:t>Group them: the red five are engineering we could start tomorrow — except the fifth, which is a reason to prefer a token that binds policy to the key. The amber three are trade-offs with known costs. The blue two depend on suppliers rather than on us. The last two red and amber cards came from reading Securosys and HashiCorp Vault in September.</a:t>
             </a:r>
             <a:endParaRPr lang="en-US" dirty="0"/>
           </a:p>
@@ -7149,11 +7149,11 @@
         <p:spPr>
           <a:xfrm>
             <a:off x="566928" y="1554480"/>
-            <a:ext cx="2615184" cy="2121408"/>
+            <a:ext cx="2037283" cy="2231136"/>
           </a:xfrm>
           <a:prstGeom prst="roundRect">
             <a:avLst>
-              <a:gd name="adj" fmla="val 2586"/>
+              <a:gd name="adj" fmla="val 2693"/>
             </a:avLst>
           </a:prstGeom>
           <a:solidFill>
@@ -7183,7 +7183,7 @@
         <p:spPr>
           <a:xfrm>
             <a:off x="804672" y="1755648"/>
-            <a:ext cx="2139696" cy="566928"/>
+            <a:ext cx="1561795" cy="475488"/>
           </a:xfrm>
           <a:prstGeom prst="rect">
             <a:avLst/>
@@ -7199,7 +7199,7 @@
               <a:buNone/>
             </a:pPr>
             <a:r>
-              <a:rPr lang="en-US" sz="1400" b="1" dirty="0">
+              <a:rPr lang="en-US" sz="1300" b="1" dirty="0">
                 <a:solidFill>
                   <a:srgbClr val="B3261E"/>
                 </a:solidFill>
@@ -7209,7 +7209,7 @@
               </a:rPr>
               <a:t>No REST API or console</a:t>
             </a:r>
-            <a:endParaRPr lang="en-US" sz="1400" dirty="0"/>
+            <a:endParaRPr lang="en-US" sz="1300" dirty="0"/>
           </a:p>
         </p:txBody>
       </p:sp>
@@ -7221,8 +7221,8 @@
         </p:nvSpPr>
         <p:spPr>
           <a:xfrm>
-            <a:off x="804672" y="2395728"/>
-            <a:ext cx="2139696" cy="1115568"/>
+            <a:off x="804672" y="2304288"/>
+            <a:ext cx="1561795" cy="1316736"/>
           </a:xfrm>
           <a:prstGeom prst="rect">
             <a:avLst/>
@@ -7241,7 +7241,7 @@
               <a:buNone/>
             </a:pPr>
             <a:r>
-              <a:rPr lang="en-US" sz="1150" dirty="0">
+              <a:rPr lang="en-US" sz="1100" dirty="0">
                 <a:solidFill>
                   <a:srgbClr val="4D5A68"/>
                 </a:solidFill>
@@ -7249,9 +7249,9 @@
                 <a:ea typeface="Calibri" pitchFamily="34" charset="-122"/>
                 <a:cs typeface="Calibri" pitchFamily="34" charset="-120"/>
               </a:rPr>
-              <a:t>Highest leverage: reporting, self-service, the console and most integrations are all clients of an API that does not exist.</a:t>
-            </a:r>
-            <a:endParaRPr lang="en-US" sz="1150" dirty="0"/>
+              <a:t>Reporting, the console, self-service and encryption as a service are all clients of it.</a:t>
+            </a:r>
+            <a:endParaRPr lang="en-US" sz="1100" dirty="0"/>
           </a:p>
         </p:txBody>
       </p:sp>
@@ -7263,12 +7263,12 @@
         </p:nvSpPr>
         <p:spPr>
           <a:xfrm>
-            <a:off x="3392424" y="1554480"/>
-            <a:ext cx="2615184" cy="2121408"/>
+            <a:off x="2814523" y="1554480"/>
+            <a:ext cx="2037283" cy="2231136"/>
           </a:xfrm>
           <a:prstGeom prst="roundRect">
             <a:avLst>
-              <a:gd name="adj" fmla="val 2586"/>
+              <a:gd name="adj" fmla="val 2693"/>
             </a:avLst>
           </a:prstGeom>
           <a:solidFill>
@@ -7297,8 +7297,8 @@
         </p:nvSpPr>
         <p:spPr>
           <a:xfrm>
-            <a:off x="3630168" y="1755648"/>
-            <a:ext cx="2139696" cy="566928"/>
+            <a:off x="3052267" y="1755648"/>
+            <a:ext cx="1561795" cy="475488"/>
           </a:xfrm>
           <a:prstGeom prst="rect">
             <a:avLst/>
@@ -7314,7 +7314,7 @@
               <a:buNone/>
             </a:pPr>
             <a:r>
-              <a:rPr lang="en-US" sz="1400" b="1" dirty="0">
+              <a:rPr lang="en-US" sz="1300" b="1" dirty="0">
                 <a:solidFill>
                   <a:srgbClr val="B3261E"/>
                 </a:solidFill>
@@ -7324,7 +7324,7 @@
               </a:rPr>
               <a:t>No multi-tenancy</a:t>
             </a:r>
-            <a:endParaRPr lang="en-US" sz="1400" dirty="0"/>
+            <a:endParaRPr lang="en-US" sz="1300" dirty="0"/>
           </a:p>
         </p:txBody>
       </p:sp>
@@ -7336,8 +7336,8 @@
         </p:nvSpPr>
         <p:spPr>
           <a:xfrm>
-            <a:off x="3630168" y="2395728"/>
-            <a:ext cx="2139696" cy="1115568"/>
+            <a:off x="3052267" y="2304288"/>
+            <a:ext cx="1561795" cy="1316736"/>
           </a:xfrm>
           <a:prstGeom prst="rect">
             <a:avLst/>
@@ -7356,7 +7356,7 @@
               <a:buNone/>
             </a:pPr>
             <a:r>
-              <a:rPr lang="en-US" sz="1150" dirty="0">
+              <a:rPr lang="en-US" sz="1100" dirty="0">
                 <a:solidFill>
                   <a:srgbClr val="4D5A68"/>
                 </a:solidFill>
@@ -7364,9 +7364,9 @@
                 <a:ea typeface="Calibri" pitchFamily="34" charset="-122"/>
                 <a:cs typeface="Calibri" pitchFamily="34" charset="-120"/>
               </a:rPr>
-              <a:t>Names, searches, quotas and audit are global. Isolation today means one deployment per tenant.</a:t>
-            </a:r>
-            <a:endParaRPr lang="en-US" sz="1150" dirty="0"/>
+              <a:t>Names, searches, quotas and audit are global. Isolation means one deployment per tenant.</a:t>
+            </a:r>
+            <a:endParaRPr lang="en-US" sz="1100" dirty="0"/>
           </a:p>
         </p:txBody>
       </p:sp>
@@ -7378,12 +7378,12 @@
         </p:nvSpPr>
         <p:spPr>
           <a:xfrm>
-            <a:off x="6217920" y="1554480"/>
-            <a:ext cx="2615184" cy="2121408"/>
+            <a:off x="5062118" y="1554480"/>
+            <a:ext cx="2037283" cy="2231136"/>
           </a:xfrm>
           <a:prstGeom prst="roundRect">
             <a:avLst>
-              <a:gd name="adj" fmla="val 2586"/>
+              <a:gd name="adj" fmla="val 2693"/>
             </a:avLst>
           </a:prstGeom>
           <a:solidFill>
@@ -7412,8 +7412,8 @@
         </p:nvSpPr>
         <p:spPr>
           <a:xfrm>
-            <a:off x="6455664" y="1755648"/>
-            <a:ext cx="2139696" cy="566928"/>
+            <a:off x="5299862" y="1755648"/>
+            <a:ext cx="1561795" cy="475488"/>
           </a:xfrm>
           <a:prstGeom prst="rect">
             <a:avLst/>
@@ -7429,7 +7429,7 @@
               <a:buNone/>
             </a:pPr>
             <a:r>
-              <a:rPr lang="en-US" sz="1400" b="1" dirty="0">
+              <a:rPr lang="en-US" sz="1300" b="1" dirty="0">
                 <a:solidFill>
                   <a:srgbClr val="B3261E"/>
                 </a:solidFill>
@@ -7439,7 +7439,7 @@
               </a:rPr>
               <a:t>SQLite only</a:t>
             </a:r>
-            <a:endParaRPr lang="en-US" sz="1400" dirty="0"/>
+            <a:endParaRPr lang="en-US" sz="1300" dirty="0"/>
           </a:p>
         </p:txBody>
       </p:sp>
@@ -7451,8 +7451,8 @@
         </p:nvSpPr>
         <p:spPr>
           <a:xfrm>
-            <a:off x="6455664" y="2395728"/>
-            <a:ext cx="2139696" cy="1115568"/>
+            <a:off x="5299862" y="2304288"/>
+            <a:ext cx="1561795" cy="1316736"/>
           </a:xfrm>
           <a:prstGeom prst="rect">
             <a:avLst/>
@@ -7471,7 +7471,7 @@
               <a:buNone/>
             </a:pPr>
             <a:r>
-              <a:rPr lang="en-US" sz="1150" dirty="0">
+              <a:rPr lang="en-US" sz="1100" dirty="0">
                 <a:solidFill>
                   <a:srgbClr val="4D5A68"/>
                 </a:solidFill>
@@ -7479,9 +7479,9 @@
                 <a:ea typeface="Calibri" pitchFamily="34" charset="-122"/>
                 <a:cs typeface="Calibri" pitchFamily="34" charset="-120"/>
               </a:rPr>
-              <a:t>No clustering, replication or DR — and the storage engine, not the protocol, is what blocks them.</a:t>
-            </a:r>
-            <a:endParaRPr lang="en-US" sz="1150" dirty="0"/>
+              <a:t>No clustering, replication or DR — the storage engine blocks them, not the protocol.</a:t>
+            </a:r>
+            <a:endParaRPr lang="en-US" sz="1100" dirty="0"/>
           </a:p>
         </p:txBody>
       </p:sp>
@@ -7493,12 +7493,12 @@
         </p:nvSpPr>
         <p:spPr>
           <a:xfrm>
-            <a:off x="9043416" y="1554480"/>
-            <a:ext cx="2615184" cy="2121408"/>
+            <a:off x="7309714" y="1554480"/>
+            <a:ext cx="2037283" cy="2231136"/>
           </a:xfrm>
           <a:prstGeom prst="roundRect">
             <a:avLst>
-              <a:gd name="adj" fmla="val 2586"/>
+              <a:gd name="adj" fmla="val 2693"/>
             </a:avLst>
           </a:prstGeom>
           <a:solidFill>
@@ -7527,8 +7527,8 @@
         </p:nvSpPr>
         <p:spPr>
           <a:xfrm>
-            <a:off x="9281160" y="1755648"/>
-            <a:ext cx="2139696" cy="566928"/>
+            <a:off x="7547458" y="1755648"/>
+            <a:ext cx="1561795" cy="475488"/>
           </a:xfrm>
           <a:prstGeom prst="rect">
             <a:avLst/>
@@ -7544,7 +7544,7 @@
               <a:buNone/>
             </a:pPr>
             <a:r>
-              <a:rPr lang="en-US" sz="1400" b="1" dirty="0">
+              <a:rPr lang="en-US" sz="1300" b="1" dirty="0">
                 <a:solidFill>
                   <a:srgbClr val="B3261E"/>
                 </a:solidFill>
@@ -7552,9 +7552,9 @@
                 <a:ea typeface="Cambria" pitchFamily="34" charset="-122"/>
                 <a:cs typeface="Cambria" pitchFamily="34" charset="-120"/>
               </a:rPr>
-              <a:t>No connection or rate limiting</a:t>
-            </a:r>
-            <a:endParaRPr lang="en-US" sz="1400" dirty="0"/>
+              <a:t>No rate limiting</a:t>
+            </a:r>
+            <a:endParaRPr lang="en-US" sz="1300" dirty="0"/>
           </a:p>
         </p:txBody>
       </p:sp>
@@ -7566,8 +7566,8 @@
         </p:nvSpPr>
         <p:spPr>
           <a:xfrm>
-            <a:off x="9281160" y="2395728"/>
-            <a:ext cx="2139696" cy="1115568"/>
+            <a:off x="7547458" y="2304288"/>
+            <a:ext cx="1561795" cy="1316736"/>
           </a:xfrm>
           <a:prstGeom prst="rect">
             <a:avLst/>
@@ -7586,7 +7586,7 @@
               <a:buNone/>
             </a:pPr>
             <a:r>
-              <a:rPr lang="en-US" sz="1150" dirty="0">
+              <a:rPr lang="en-US" sz="1100" dirty="0">
                 <a:solidFill>
                   <a:srgbClr val="4D5A68"/>
                 </a:solidFill>
@@ -7594,9 +7594,9 @@
                 <a:ea typeface="Calibri" pitchFamily="34" charset="-122"/>
                 <a:cs typeface="Calibri" pitchFamily="34" charset="-120"/>
               </a:rPr>
-              <a:t>The listener takes a backlog of 16 with no throttle. Flagged in the original review and never fixed.</a:t>
-            </a:r>
-            <a:endParaRPr lang="en-US" sz="1150" dirty="0"/>
+              <a:t>The listener takes a backlog of 16 with no throttle. Flagged in the first review.</a:t>
+            </a:r>
+            <a:endParaRPr lang="en-US" sz="1100" dirty="0"/>
           </a:p>
         </p:txBody>
       </p:sp>
@@ -7608,12 +7608,127 @@
         </p:nvSpPr>
         <p:spPr>
           <a:xfrm>
-            <a:off x="566928" y="3767328"/>
-            <a:ext cx="2615184" cy="2121408"/>
+            <a:off x="9557309" y="1554480"/>
+            <a:ext cx="2037283" cy="2231136"/>
           </a:xfrm>
           <a:prstGeom prst="roundRect">
             <a:avLst>
-              <a:gd name="adj" fmla="val 2586"/>
+              <a:gd name="adj" fmla="val 2693"/>
+            </a:avLst>
+          </a:prstGeom>
+          <a:solidFill>
+            <a:srgbClr val="F7E9E8"/>
+          </a:solidFill>
+          <a:ln w="12700">
+            <a:solidFill>
+              <a:srgbClr val="E8EFF6"/>
+            </a:solidFill>
+            <a:prstDash val="solid"/>
+          </a:ln>
+          <a:effectLst>
+            <a:outerShdw sx="100000" sy="100000" kx="0" ky="0" algn="bl" rotWithShape="0" blurRad="127000" dist="25400" dir="5400000">
+              <a:srgbClr val="8C9AA8">
+                <a:alpha val="22000"/>
+              </a:srgbClr>
+            </a:outerShdw>
+          </a:effectLst>
+        </p:spPr>
+      </p:sp>
+      <p:sp>
+        <p:nvSpPr>
+          <p:cNvPr id="17" name="Text 15"/>
+          <p:cNvSpPr txBox="1"/>
+          <p:nvPr/>
+        </p:nvSpPr>
+        <p:spPr>
+          <a:xfrm>
+            <a:off x="9795053" y="1755648"/>
+            <a:ext cx="1561795" cy="475488"/>
+          </a:xfrm>
+          <a:prstGeom prst="rect">
+            <a:avLst/>
+          </a:prstGeom>
+          <a:noFill/>
+          <a:ln/>
+        </p:spPr>
+        <p:txBody>
+          <a:bodyPr wrap="square" lIns="0" tIns="0" rIns="0" bIns="0" rtlCol="0" anchor="ctr"/>
+          <a:lstStyle/>
+          <a:p>
+            <a:pPr indent="0" marL="0">
+              <a:buNone/>
+            </a:pPr>
+            <a:r>
+              <a:rPr lang="en-US" sz="1300" b="1" dirty="0">
+                <a:solidFill>
+                  <a:srgbClr val="B3261E"/>
+                </a:solidFill>
+                <a:latin typeface="Cambria" pitchFamily="34" charset="0"/>
+                <a:ea typeface="Cambria" pitchFamily="34" charset="-122"/>
+                <a:cs typeface="Cambria" pitchFamily="34" charset="-120"/>
+              </a:rPr>
+              <a:t>Policy lives in the server</a:t>
+            </a:r>
+            <a:endParaRPr lang="en-US" sz="1300" dirty="0"/>
+          </a:p>
+        </p:txBody>
+      </p:sp>
+      <p:sp>
+        <p:nvSpPr>
+          <p:cNvPr id="18" name="Text 16"/>
+          <p:cNvSpPr txBox="1"/>
+          <p:nvPr/>
+        </p:nvSpPr>
+        <p:spPr>
+          <a:xfrm>
+            <a:off x="9795053" y="2304288"/>
+            <a:ext cx="1561795" cy="1316736"/>
+          </a:xfrm>
+          <a:prstGeom prst="rect">
+            <a:avLst/>
+          </a:prstGeom>
+          <a:noFill/>
+          <a:ln/>
+        </p:spPr>
+        <p:txBody>
+          <a:bodyPr wrap="square" lIns="0" tIns="0" rIns="0" bIns="0" rtlCol="0" anchor="t"/>
+          <a:lstStyle/>
+          <a:p>
+            <a:pPr indent="0" marL="0">
+              <a:lnSpc>
+                <a:spcPts val="1700"/>
+              </a:lnSpc>
+              <a:buNone/>
+            </a:pPr>
+            <a:r>
+              <a:rPr lang="en-US" sz="1100" dirty="0">
+                <a:solidFill>
+                  <a:srgbClr val="4D5A68"/>
+                </a:solidFill>
+                <a:latin typeface="Calibri" pitchFamily="34" charset="0"/>
+                <a:ea typeface="Calibri" pitchFamily="34" charset="-122"/>
+                <a:cs typeface="Calibri" pitchFamily="34" charset="-120"/>
+              </a:rPr>
+              <a:t>Dual control is enforced here, not inside the token. Own the server and you own the policy.</a:t>
+            </a:r>
+            <a:endParaRPr lang="en-US" sz="1100" dirty="0"/>
+          </a:p>
+        </p:txBody>
+      </p:sp>
+      <p:sp>
+        <p:nvSpPr>
+          <p:cNvPr id="19" name="Shape 17"/>
+          <p:cNvSpPr/>
+          <p:nvPr/>
+        </p:nvSpPr>
+        <p:spPr>
+          <a:xfrm>
+            <a:off x="566928" y="3931920"/>
+            <a:ext cx="2037283" cy="2231136"/>
+          </a:xfrm>
+          <a:prstGeom prst="roundRect">
+            <a:avLst>
+              <a:gd name="adj" fmla="val 2693"/>
             </a:avLst>
           </a:prstGeom>
           <a:solidFill>
@@ -7636,14 +7751,14 @@
       </p:sp>
       <p:sp>
         <p:nvSpPr>
-          <p:cNvPr id="17" name="Text 15"/>
-          <p:cNvSpPr txBox="1"/>
-          <p:nvPr/>
-        </p:nvSpPr>
-        <p:spPr>
-          <a:xfrm>
-            <a:off x="804672" y="3968496"/>
-            <a:ext cx="2139696" cy="566928"/>
+          <p:cNvPr id="20" name="Text 18"/>
+          <p:cNvSpPr txBox="1"/>
+          <p:nvPr/>
+        </p:nvSpPr>
+        <p:spPr>
+          <a:xfrm>
+            <a:off x="804672" y="4133088"/>
+            <a:ext cx="1561795" cy="475488"/>
           </a:xfrm>
           <a:prstGeom prst="rect">
             <a:avLst/>
@@ -7659,7 +7774,7 @@
               <a:buNone/>
             </a:pPr>
             <a:r>
-              <a:rPr lang="en-US" sz="1400" b="1" dirty="0">
+              <a:rPr lang="en-US" sz="1300" b="1" dirty="0">
                 <a:solidFill>
                   <a:srgbClr val="9A6410"/>
                 </a:solidFill>
@@ -7669,20 +7784,20 @@
               </a:rPr>
               <a:t>Scaling stops at ~1.5×</a:t>
             </a:r>
-            <a:endParaRPr lang="en-US" sz="1400" dirty="0"/>
-          </a:p>
-        </p:txBody>
-      </p:sp>
-      <p:sp>
-        <p:nvSpPr>
-          <p:cNvPr id="18" name="Text 16"/>
-          <p:cNvSpPr txBox="1"/>
-          <p:nvPr/>
-        </p:nvSpPr>
-        <p:spPr>
-          <a:xfrm>
-            <a:off x="804672" y="4608576"/>
-            <a:ext cx="2139696" cy="1115568"/>
+            <a:endParaRPr lang="en-US" sz="1300" dirty="0"/>
+          </a:p>
+        </p:txBody>
+      </p:sp>
+      <p:sp>
+        <p:nvSpPr>
+          <p:cNvPr id="21" name="Text 19"/>
+          <p:cNvSpPr txBox="1"/>
+          <p:nvPr/>
+        </p:nvSpPr>
+        <p:spPr>
+          <a:xfrm>
+            <a:off x="804672" y="4681728"/>
+            <a:ext cx="1561795" cy="1316736"/>
           </a:xfrm>
           <a:prstGeom prst="rect">
             <a:avLst/>
@@ -7701,7 +7816,7 @@
               <a:buNone/>
             </a:pPr>
             <a:r>
-              <a:rPr lang="en-US" sz="1150" dirty="0">
+              <a:rPr lang="en-US" sz="1100" dirty="0">
                 <a:solidFill>
                   <a:srgbClr val="4D5A68"/>
                 </a:solidFill>
@@ -7709,26 +7824,26 @@
                 <a:ea typeface="Calibri" pitchFamily="34" charset="-122"/>
                 <a:cs typeface="Calibri" pitchFamily="34" charset="-120"/>
               </a:rPr>
-              <a:t>Pre-fork workers help, but every audited operation serialises on one write lock. The price of tamper-evidence.</a:t>
-            </a:r>
-            <a:endParaRPr lang="en-US" sz="1150" dirty="0"/>
-          </a:p>
-        </p:txBody>
-      </p:sp>
-      <p:sp>
-        <p:nvSpPr>
-          <p:cNvPr id="19" name="Shape 17"/>
+              <a:t>Pre-fork workers help, but every audited operation serialises on one write lock.</a:t>
+            </a:r>
+            <a:endParaRPr lang="en-US" sz="1100" dirty="0"/>
+          </a:p>
+        </p:txBody>
+      </p:sp>
+      <p:sp>
+        <p:nvSpPr>
+          <p:cNvPr id="22" name="Shape 20"/>
           <p:cNvSpPr/>
           <p:nvPr/>
         </p:nvSpPr>
         <p:spPr>
           <a:xfrm>
-            <a:off x="3392424" y="3767328"/>
-            <a:ext cx="2615184" cy="2121408"/>
+            <a:off x="2814523" y="3931920"/>
+            <a:ext cx="2037283" cy="2231136"/>
           </a:xfrm>
           <a:prstGeom prst="roundRect">
             <a:avLst>
-              <a:gd name="adj" fmla="val 2586"/>
+              <a:gd name="adj" fmla="val 2693"/>
             </a:avLst>
           </a:prstGeom>
           <a:solidFill>
@@ -7751,14 +7866,14 @@
       </p:sp>
       <p:sp>
         <p:nvSpPr>
-          <p:cNvPr id="20" name="Text 18"/>
-          <p:cNvSpPr txBox="1"/>
-          <p:nvPr/>
-        </p:nvSpPr>
-        <p:spPr>
-          <a:xfrm>
-            <a:off x="3630168" y="3968496"/>
-            <a:ext cx="2139696" cy="566928"/>
+          <p:cNvPr id="23" name="Text 21"/>
+          <p:cNvSpPr txBox="1"/>
+          <p:nvPr/>
+        </p:nvSpPr>
+        <p:spPr>
+          <a:xfrm>
+            <a:off x="3052267" y="4133088"/>
+            <a:ext cx="1561795" cy="475488"/>
           </a:xfrm>
           <a:prstGeom prst="rect">
             <a:avLst/>
@@ -7774,7 +7889,7 @@
               <a:buNone/>
             </a:pPr>
             <a:r>
-              <a:rPr lang="en-US" sz="1400" b="1" dirty="0">
+              <a:rPr lang="en-US" sz="1300" b="1" dirty="0">
                 <a:solidFill>
                   <a:srgbClr val="9A6410"/>
                 </a:solidFill>
@@ -7782,22 +7897,22 @@
                 <a:ea typeface="Cambria" pitchFamily="34" charset="-122"/>
                 <a:cs typeface="Cambria" pitchFamily="34" charset="-120"/>
               </a:rPr>
-              <a:t>No SIEM export, no external anchor</a:t>
-            </a:r>
-            <a:endParaRPr lang="en-US" sz="1400" dirty="0"/>
-          </a:p>
-        </p:txBody>
-      </p:sp>
-      <p:sp>
-        <p:nvSpPr>
-          <p:cNvPr id="21" name="Text 19"/>
-          <p:cNvSpPr txBox="1"/>
-          <p:nvPr/>
-        </p:nvSpPr>
-        <p:spPr>
-          <a:xfrm>
-            <a:off x="3630168" y="4608576"/>
-            <a:ext cx="2139696" cy="1115568"/>
+              <a:t>No SIEM export or anchor</a:t>
+            </a:r>
+            <a:endParaRPr lang="en-US" sz="1300" dirty="0"/>
+          </a:p>
+        </p:txBody>
+      </p:sp>
+      <p:sp>
+        <p:nvSpPr>
+          <p:cNvPr id="24" name="Text 22"/>
+          <p:cNvSpPr txBox="1"/>
+          <p:nvPr/>
+        </p:nvSpPr>
+        <p:spPr>
+          <a:xfrm>
+            <a:off x="3052267" y="4681728"/>
+            <a:ext cx="1561795" cy="1316736"/>
           </a:xfrm>
           <a:prstGeom prst="rect">
             <a:avLst/>
@@ -7816,7 +7931,7 @@
               <a:buNone/>
             </a:pPr>
             <a:r>
-              <a:rPr lang="en-US" sz="1150" dirty="0">
+              <a:rPr lang="en-US" sz="1100" dirty="0">
                 <a:solidFill>
                   <a:srgbClr val="4D5A68"/>
                 </a:solidFill>
@@ -7826,24 +7941,139 @@
               </a:rPr>
               <a:t>Auditors ask for both first. A consistent rewrite of the local log leaves no trace.</a:t>
             </a:r>
-            <a:endParaRPr lang="en-US" sz="1150" dirty="0"/>
-          </a:p>
-        </p:txBody>
-      </p:sp>
-      <p:sp>
-        <p:nvSpPr>
-          <p:cNvPr id="22" name="Shape 20"/>
+            <a:endParaRPr lang="en-US" sz="1100" dirty="0"/>
+          </a:p>
+        </p:txBody>
+      </p:sp>
+      <p:sp>
+        <p:nvSpPr>
+          <p:cNvPr id="25" name="Shape 23"/>
           <p:cNvSpPr/>
           <p:nvPr/>
         </p:nvSpPr>
         <p:spPr>
           <a:xfrm>
-            <a:off x="6217920" y="3767328"/>
-            <a:ext cx="2615184" cy="2121408"/>
+            <a:off x="5062118" y="3931920"/>
+            <a:ext cx="2037283" cy="2231136"/>
           </a:xfrm>
           <a:prstGeom prst="roundRect">
             <a:avLst>
-              <a:gd name="adj" fmla="val 2586"/>
+              <a:gd name="adj" fmla="val 2693"/>
+            </a:avLst>
+          </a:prstGeom>
+          <a:solidFill>
+            <a:srgbClr val="FBF3E3"/>
+          </a:solidFill>
+          <a:ln w="12700">
+            <a:solidFill>
+              <a:srgbClr val="E8EFF6"/>
+            </a:solidFill>
+            <a:prstDash val="solid"/>
+          </a:ln>
+          <a:effectLst>
+            <a:outerShdw sx="100000" sy="100000" kx="0" ky="0" algn="bl" rotWithShape="0" blurRad="127000" dist="25400" dir="5400000">
+              <a:srgbClr val="8C9AA8">
+                <a:alpha val="22000"/>
+              </a:srgbClr>
+            </a:outerShdw>
+          </a:effectLst>
+        </p:spPr>
+      </p:sp>
+      <p:sp>
+        <p:nvSpPr>
+          <p:cNvPr id="26" name="Text 24"/>
+          <p:cNvSpPr txBox="1"/>
+          <p:nvPr/>
+        </p:nvSpPr>
+        <p:spPr>
+          <a:xfrm>
+            <a:off x="5299862" y="4133088"/>
+            <a:ext cx="1561795" cy="475488"/>
+          </a:xfrm>
+          <a:prstGeom prst="rect">
+            <a:avLst/>
+          </a:prstGeom>
+          <a:noFill/>
+          <a:ln/>
+        </p:spPr>
+        <p:txBody>
+          <a:bodyPr wrap="square" lIns="0" tIns="0" rIns="0" bIns="0" rtlCol="0" anchor="ctr"/>
+          <a:lstStyle/>
+          <a:p>
+            <a:pPr indent="0" marL="0">
+              <a:buNone/>
+            </a:pPr>
+            <a:r>
+              <a:rPr lang="en-US" sz="1300" b="1" dirty="0">
+                <a:solidFill>
+                  <a:srgbClr val="9A6410"/>
+                </a:solidFill>
+                <a:latin typeface="Cambria" pitchFamily="34" charset="0"/>
+                <a:ea typeface="Cambria" pitchFamily="34" charset="-122"/>
+                <a:cs typeface="Cambria" pitchFamily="34" charset="-120"/>
+              </a:rPr>
+              <a:t>Starts unsealed by one PIN</a:t>
+            </a:r>
+            <a:endParaRPr lang="en-US" sz="1300" dirty="0"/>
+          </a:p>
+        </p:txBody>
+      </p:sp>
+      <p:sp>
+        <p:nvSpPr>
+          <p:cNvPr id="27" name="Text 25"/>
+          <p:cNvSpPr txBox="1"/>
+          <p:nvPr/>
+        </p:nvSpPr>
+        <p:spPr>
+          <a:xfrm>
+            <a:off x="5299862" y="4681728"/>
+            <a:ext cx="1561795" cy="1316736"/>
+          </a:xfrm>
+          <a:prstGeom prst="rect">
+            <a:avLst/>
+          </a:prstGeom>
+          <a:noFill/>
+          <a:ln/>
+        </p:spPr>
+        <p:txBody>
+          <a:bodyPr wrap="square" lIns="0" tIns="0" rIns="0" bIns="0" rtlCol="0" anchor="t"/>
+          <a:lstStyle/>
+          <a:p>
+            <a:pPr indent="0" marL="0">
+              <a:lnSpc>
+                <a:spcPts val="1700"/>
+              </a:lnSpc>
+              <a:buNone/>
+            </a:pPr>
+            <a:r>
+              <a:rPr lang="en-US" sz="1100" dirty="0">
+                <a:solidFill>
+                  <a:srgbClr val="4D5A68"/>
+                </a:solidFill>
+                <a:latin typeface="Calibri" pitchFamily="34" charset="0"/>
+                <a:ea typeface="Calibri" pitchFamily="34" charset="-122"/>
+                <a:cs typeface="Calibri" pitchFamily="34" charset="-120"/>
+              </a:rPr>
+              <a:t>The store needs the token, so a stolen database is inert. But one PIN holder is the ceremony.</a:t>
+            </a:r>
+            <a:endParaRPr lang="en-US" sz="1100" dirty="0"/>
+          </a:p>
+        </p:txBody>
+      </p:sp>
+      <p:sp>
+        <p:nvSpPr>
+          <p:cNvPr id="28" name="Shape 26"/>
+          <p:cNvSpPr/>
+          <p:nvPr/>
+        </p:nvSpPr>
+        <p:spPr>
+          <a:xfrm>
+            <a:off x="7309714" y="3931920"/>
+            <a:ext cx="2037283" cy="2231136"/>
+          </a:xfrm>
+          <a:prstGeom prst="roundRect">
+            <a:avLst>
+              <a:gd name="adj" fmla="val 2693"/>
             </a:avLst>
           </a:prstGeom>
           <a:solidFill>
@@ -7866,14 +8096,14 @@
       </p:sp>
       <p:sp>
         <p:nvSpPr>
-          <p:cNvPr id="23" name="Text 21"/>
-          <p:cNvSpPr txBox="1"/>
-          <p:nvPr/>
-        </p:nvSpPr>
-        <p:spPr>
-          <a:xfrm>
-            <a:off x="6455664" y="3968496"/>
-            <a:ext cx="2139696" cy="566928"/>
+          <p:cNvPr id="29" name="Text 27"/>
+          <p:cNvSpPr txBox="1"/>
+          <p:nvPr/>
+        </p:nvSpPr>
+        <p:spPr>
+          <a:xfrm>
+            <a:off x="7547458" y="4133088"/>
+            <a:ext cx="1561795" cy="475488"/>
           </a:xfrm>
           <a:prstGeom prst="rect">
             <a:avLst/>
@@ -7889,7 +8119,7 @@
               <a:buNone/>
             </a:pPr>
             <a:r>
-              <a:rPr lang="en-US" sz="1400" b="1" dirty="0">
+              <a:rPr lang="en-US" sz="1300" b="1" dirty="0">
                 <a:solidFill>
                   <a:srgbClr val="1A3A5C"/>
                 </a:solidFill>
@@ -7899,20 +8129,20 @@
               </a:rPr>
               <a:t>Not FIPS or CC validated</a:t>
             </a:r>
-            <a:endParaRPr lang="en-US" sz="1400" dirty="0"/>
-          </a:p>
-        </p:txBody>
-      </p:sp>
-      <p:sp>
-        <p:nvSpPr>
-          <p:cNvPr id="24" name="Text 22"/>
-          <p:cNvSpPr txBox="1"/>
-          <p:nvPr/>
-        </p:nvSpPr>
-        <p:spPr>
-          <a:xfrm>
-            <a:off x="6455664" y="4608576"/>
-            <a:ext cx="2139696" cy="1115568"/>
+            <a:endParaRPr lang="en-US" sz="1300" dirty="0"/>
+          </a:p>
+        </p:txBody>
+      </p:sp>
+      <p:sp>
+        <p:nvSpPr>
+          <p:cNvPr id="30" name="Text 28"/>
+          <p:cNvSpPr txBox="1"/>
+          <p:nvPr/>
+        </p:nvSpPr>
+        <p:spPr>
+          <a:xfrm>
+            <a:off x="7547458" y="4681728"/>
+            <a:ext cx="1561795" cy="1316736"/>
           </a:xfrm>
           <a:prstGeom prst="rect">
             <a:avLst/>
@@ -7931,7 +8161,7 @@
               <a:buNone/>
             </a:pPr>
             <a:r>
-              <a:rPr lang="en-US" sz="1150" dirty="0">
+              <a:rPr lang="en-US" sz="1100" dirty="0">
                 <a:solidFill>
                   <a:srgbClr val="4D5A68"/>
                 </a:solidFill>
@@ -7941,24 +8171,24 @@
               </a:rPr>
               <a:t>Belongs to the token, not the code. Procurement, not engineering.</a:t>
             </a:r>
-            <a:endParaRPr lang="en-US" sz="1150" dirty="0"/>
-          </a:p>
-        </p:txBody>
-      </p:sp>
-      <p:sp>
-        <p:nvSpPr>
-          <p:cNvPr id="25" name="Shape 23"/>
+            <a:endParaRPr lang="en-US" sz="1100" dirty="0"/>
+          </a:p>
+        </p:txBody>
+      </p:sp>
+      <p:sp>
+        <p:nvSpPr>
+          <p:cNvPr id="31" name="Shape 29"/>
           <p:cNvSpPr/>
           <p:nvPr/>
         </p:nvSpPr>
         <p:spPr>
           <a:xfrm>
-            <a:off x="9043416" y="3767328"/>
-            <a:ext cx="2615184" cy="2121408"/>
+            <a:off x="9557309" y="3931920"/>
+            <a:ext cx="2037283" cy="2231136"/>
           </a:xfrm>
           <a:prstGeom prst="roundRect">
             <a:avLst>
-              <a:gd name="adj" fmla="val 2586"/>
+              <a:gd name="adj" fmla="val 2693"/>
             </a:avLst>
           </a:prstGeom>
           <a:solidFill>
@@ -7981,14 +8211,14 @@
       </p:sp>
       <p:sp>
         <p:nvSpPr>
-          <p:cNvPr id="26" name="Text 24"/>
-          <p:cNvSpPr txBox="1"/>
-          <p:nvPr/>
-        </p:nvSpPr>
-        <p:spPr>
-          <a:xfrm>
-            <a:off x="9281160" y="3968496"/>
-            <a:ext cx="2139696" cy="566928"/>
+          <p:cNvPr id="32" name="Text 30"/>
+          <p:cNvSpPr txBox="1"/>
+          <p:nvPr/>
+        </p:nvSpPr>
+        <p:spPr>
+          <a:xfrm>
+            <a:off x="9795053" y="4133088"/>
+            <a:ext cx="1561795" cy="475488"/>
           </a:xfrm>
           <a:prstGeom prst="rect">
             <a:avLst/>
@@ -8004,7 +8234,7 @@
               <a:buNone/>
             </a:pPr>
             <a:r>
-              <a:rPr lang="en-US" sz="1400" b="1" dirty="0">
+              <a:rPr lang="en-US" sz="1300" b="1" dirty="0">
                 <a:solidFill>
                   <a:srgbClr val="1A3A5C"/>
                 </a:solidFill>
@@ -8014,20 +8244,20 @@
               </a:rPr>
               <a:t>No post-quantum</a:t>
             </a:r>
-            <a:endParaRPr lang="en-US" sz="1400" dirty="0"/>
-          </a:p>
-        </p:txBody>
-      </p:sp>
-      <p:sp>
-        <p:nvSpPr>
-          <p:cNvPr id="27" name="Text 25"/>
-          <p:cNvSpPr txBox="1"/>
-          <p:nvPr/>
-        </p:nvSpPr>
-        <p:spPr>
-          <a:xfrm>
-            <a:off x="9281160" y="4608576"/>
-            <a:ext cx="2139696" cy="1115568"/>
+            <a:endParaRPr lang="en-US" sz="1300" dirty="0"/>
+          </a:p>
+        </p:txBody>
+      </p:sp>
+      <p:sp>
+        <p:nvSpPr>
+          <p:cNvPr id="33" name="Text 31"/>
+          <p:cNvSpPr txBox="1"/>
+          <p:nvPr/>
+        </p:nvSpPr>
+        <p:spPr>
+          <a:xfrm>
+            <a:off x="9795053" y="4681728"/>
+            <a:ext cx="1561795" cy="1316736"/>
           </a:xfrm>
           <a:prstGeom prst="rect">
             <a:avLst/>
@@ -8046,7 +8276,7 @@
               <a:buNone/>
             </a:pPr>
             <a:r>
-              <a:rPr lang="en-US" sz="1150" dirty="0">
+              <a:rPr lang="en-US" sz="1100" dirty="0">
                 <a:solidFill>
                   <a:srgbClr val="4D5A68"/>
                 </a:solidFill>
@@ -8054,15 +8284,15 @@
                 <a:ea typeface="Calibri" pitchFamily="34" charset="-122"/>
                 <a:cs typeface="Calibri" pitchFamily="34" charset="-120"/>
               </a:rPr>
-              <a:t>Needs both a PQC token and KMIP 3.0. Neither has shipped in a release yet.</a:t>
-            </a:r>
-            <a:endParaRPr lang="en-US" sz="1150" dirty="0"/>
-          </a:p>
-        </p:txBody>
-      </p:sp>
-      <p:sp>
-        <p:nvSpPr>
-          <p:cNvPr id="28" name="Text 26"/>
+              <a:t>Needs both a PQC token and KMIP 3.0. Neither has shipped in a release.</a:t>
+            </a:r>
+            <a:endParaRPr lang="en-US" sz="1100" dirty="0"/>
+          </a:p>
+        </p:txBody>
+      </p:sp>
+      <p:sp>
+        <p:nvSpPr>
+          <p:cNvPr id="34" name="Text 32"/>
           <p:cNvSpPr txBox="1"/>
           <p:nvPr/>
         </p:nvSpPr>

--- a/KMIP_PKCS11_Overview_Deck.pptx
+++ b/KMIP_PKCS11_Overview_Deck.pptx
@@ -868,7 +868,7 @@
           <a:p>
             <a:r>
               <a:rPr lang="en-US" dirty="0"/>
-              <a:t>Phases 0 to 5 used exactly this structure and all six gates were met, so the format is proven on this codebase rather than borrowed.</a:t>
+              <a:t>82 assessed features, 50 short of full coverage; these 14 steps close 34. Phases 0 to 5 used exactly this structure and all six gates were met, so the format is proven on this codebase rather than borrowed.</a:t>
             </a:r>
             <a:endParaRPr lang="en-US" dirty="0"/>
           </a:p>
@@ -956,7 +956,7 @@
           <a:p>
             <a:r>
               <a:rPr lang="en-US" dirty="0"/>
-              <a:t>6.1 is the one to insist on. It ships no feature and removes the risk that every later endpoint quietly bypasses dual control. If the roadmap gets cut, cut from the end, not from the front.</a:t>
+              <a:t>Step 1 is the one to insist on. It ships no feature and removes the risk that every later endpoint quietly bypasses dual control. If the plan gets cut, cut from the end, not from the front.</a:t>
             </a:r>
             <a:endParaRPr lang="en-US" dirty="0"/>
           </a:p>
@@ -1044,7 +1044,7 @@
           <a:p>
             <a:r>
               <a:rPr lang="en-US" dirty="0"/>
-              <a:t>Close on the discipline rather than the feature list: phases 0 to 5 earned their credibility by finding real defects through execution, and the same standard applies to everything above.</a:t>
+              <a:t>16 features stay open after step 14. The ones listed here are product decisions; the rest wait on a supplier, a procurement decision, an OASIS event or hardware this project cannot verify. Close on the discipline rather than the feature list.</a:t>
             </a:r>
             <a:endParaRPr lang="en-US" dirty="0"/>
           </a:p>
@@ -8433,7 +8433,7 @@
                 <a:ea typeface="Cambria" pitchFamily="34" charset="-122"/>
                 <a:cs typeface="Cambria" pitchFamily="34" charset="-120"/>
               </a:rPr>
-              <a:t>Five waves, in dependency order</a:t>
+              <a:t>5 stages, in dependency order</a:t>
             </a:r>
             <a:endParaRPr lang="en-US" sz="3400" dirty="0"/>
           </a:p>
@@ -8448,11 +8448,11 @@
         <p:spPr>
           <a:xfrm>
             <a:off x="566928" y="1591056"/>
-            <a:ext cx="1975104" cy="1920240"/>
+            <a:ext cx="1975104" cy="2084832"/>
           </a:xfrm>
           <a:prstGeom prst="roundRect">
             <a:avLst>
-              <a:gd name="adj" fmla="val 2857"/>
+              <a:gd name="adj" fmla="val 2778"/>
             </a:avLst>
           </a:prstGeom>
           <a:solidFill>
@@ -8506,7 +8506,7 @@
                 <a:ea typeface="Cambria" pitchFamily="34" charset="-122"/>
                 <a:cs typeface="Cambria" pitchFamily="34" charset="-120"/>
               </a:rPr>
-              <a:t>6</a:t>
+              <a:t>A</a:t>
             </a:r>
             <a:endParaRPr lang="en-US" sz="3400" dirty="0"/>
           </a:p>
@@ -8520,8 +8520,8 @@
         </p:nvSpPr>
         <p:spPr>
           <a:xfrm>
-            <a:off x="566928" y="2322576"/>
-            <a:ext cx="1975104" cy="329184"/>
+            <a:off x="640080" y="2304288"/>
+            <a:ext cx="1828800" cy="221234"/>
           </a:xfrm>
           <a:prstGeom prst="rect">
             <a:avLst/>
@@ -8537,7 +8537,7 @@
               <a:buNone/>
             </a:pPr>
             <a:r>
-              <a:rPr lang="en-US" sz="1500" b="1" dirty="0">
+              <a:rPr lang="en-US" sz="1300" b="1" dirty="0">
                 <a:solidFill>
                   <a:srgbClr val="FFFFFF"/>
                 </a:solidFill>
@@ -8545,9 +8545,9 @@
                 <a:ea typeface="Cambria" pitchFamily="34" charset="-122"/>
                 <a:cs typeface="Cambria" pitchFamily="34" charset="-120"/>
               </a:rPr>
-              <a:t>Control plane</a:t>
-            </a:r>
-            <a:endParaRPr lang="en-US" sz="1500" dirty="0"/>
+              <a:t>Foundation</a:t>
+            </a:r>
+            <a:endParaRPr lang="en-US" sz="1300" dirty="0"/>
           </a:p>
         </p:txBody>
       </p:sp>
@@ -8559,8 +8559,8 @@
         </p:nvSpPr>
         <p:spPr>
           <a:xfrm>
-            <a:off x="713232" y="2688336"/>
-            <a:ext cx="1682496" cy="1152144"/>
+            <a:off x="621792" y="2580386"/>
+            <a:ext cx="1865376" cy="182880"/>
           </a:xfrm>
           <a:prstGeom prst="rect">
             <a:avLst/>
@@ -8576,30 +8576,72 @@
               <a:buNone/>
             </a:pPr>
             <a:r>
-              <a:rPr lang="en-US" sz="1100" dirty="0">
-                <a:solidFill>
-                  <a:srgbClr val="C9DAEA"/>
+              <a:rPr lang="en-US" sz="1000" b="1" dirty="0">
+                <a:solidFill>
+                  <a:srgbClr val="C8952B"/>
                 </a:solidFill>
                 <a:latin typeface="Calibri" pitchFamily="34" charset="0"/>
                 <a:ea typeface="Calibri" pitchFamily="34" charset="-122"/>
                 <a:cs typeface="Calibri" pitchFamily="34" charset="-120"/>
               </a:rPr>
-              <a:t>Service layer, REST API, console</a:t>
-            </a:r>
-            <a:endParaRPr lang="en-US" sz="1100" dirty="0"/>
-          </a:p>
-        </p:txBody>
-      </p:sp>
-      <p:sp>
-        <p:nvSpPr>
-          <p:cNvPr id="8" name="Shape 6"/>
+              <a:t>Steps 1–2 · closes 2</a:t>
+            </a:r>
+            <a:endParaRPr lang="en-US" sz="1000" dirty="0"/>
+          </a:p>
+        </p:txBody>
+      </p:sp>
+      <p:sp>
+        <p:nvSpPr>
+          <p:cNvPr id="8" name="Text 6"/>
+          <p:cNvSpPr txBox="1"/>
+          <p:nvPr/>
+        </p:nvSpPr>
+        <p:spPr>
+          <a:xfrm>
+            <a:off x="694944" y="2799842"/>
+            <a:ext cx="1719072" cy="802894"/>
+          </a:xfrm>
+          <a:prstGeom prst="rect">
+            <a:avLst/>
+          </a:prstGeom>
+          <a:noFill/>
+          <a:ln/>
+        </p:spPr>
+        <p:txBody>
+          <a:bodyPr wrap="square" lIns="0" tIns="0" rIns="0" bIns="0" rtlCol="0" anchor="ctr"/>
+          <a:lstStyle/>
+          <a:p>
+            <a:pPr algn="ctr" indent="0" marL="0">
+              <a:lnSpc>
+                <a:spcPts val="1170"/>
+              </a:lnSpc>
+              <a:buNone/>
+            </a:pPr>
+            <a:r>
+              <a:rPr lang="en-US" sz="900" dirty="0">
+                <a:solidFill>
+                  <a:srgbClr val="C9DAEA"/>
+                </a:solidFill>
+                <a:latin typeface="Calibri" pitchFamily="34" charset="0"/>
+                <a:ea typeface="Calibri" pitchFamily="34" charset="-122"/>
+                <a:cs typeface="Calibri" pitchFamily="34" charset="-120"/>
+              </a:rPr>
+              <a:t>No new attack surface. Makes the rest safe to build.</a:t>
+            </a:r>
+            <a:endParaRPr lang="en-US" sz="900" dirty="0"/>
+          </a:p>
+        </p:txBody>
+      </p:sp>
+      <p:sp>
+        <p:nvSpPr>
+          <p:cNvPr id="9" name="Shape 7"/>
           <p:cNvSpPr/>
           <p:nvPr/>
         </p:nvSpPr>
         <p:spPr>
           <a:xfrm>
-            <a:off x="2569464" y="2468880"/>
-            <a:ext cx="237744" cy="164592"/>
+            <a:off x="2578608" y="2551176"/>
+            <a:ext cx="214884" cy="164592"/>
           </a:xfrm>
           <a:prstGeom prst="rightArrow">
             <a:avLst/>
@@ -8617,18 +8659,18 @@
       </p:sp>
       <p:sp>
         <p:nvSpPr>
-          <p:cNvPr id="9" name="Shape 7"/>
+          <p:cNvPr id="10" name="Shape 8"/>
           <p:cNvSpPr/>
           <p:nvPr/>
         </p:nvSpPr>
         <p:spPr>
           <a:xfrm>
-            <a:off x="2825496" y="1591056"/>
-            <a:ext cx="1975104" cy="1920240"/>
+            <a:off x="2830068" y="1591056"/>
+            <a:ext cx="1975104" cy="2084832"/>
           </a:xfrm>
           <a:prstGeom prst="roundRect">
             <a:avLst>
-              <a:gd name="adj" fmla="val 2857"/>
+              <a:gd name="adj" fmla="val 2778"/>
             </a:avLst>
           </a:prstGeom>
           <a:solidFill>
@@ -8651,13 +8693,13 @@
       </p:sp>
       <p:sp>
         <p:nvSpPr>
-          <p:cNvPr id="10" name="Text 8"/>
-          <p:cNvSpPr txBox="1"/>
-          <p:nvPr/>
-        </p:nvSpPr>
-        <p:spPr>
-          <a:xfrm>
-            <a:off x="2825496" y="1737360"/>
+          <p:cNvPr id="11" name="Text 9"/>
+          <p:cNvSpPr txBox="1"/>
+          <p:nvPr/>
+        </p:nvSpPr>
+        <p:spPr>
+          <a:xfrm>
+            <a:off x="2830068" y="1737360"/>
             <a:ext cx="1975104" cy="566928"/>
           </a:xfrm>
           <a:prstGeom prst="rect">
@@ -8682,7 +8724,7 @@
                 <a:ea typeface="Cambria" pitchFamily="34" charset="-122"/>
                 <a:cs typeface="Cambria" pitchFamily="34" charset="-120"/>
               </a:rPr>
-              <a:t>7</a:t>
+              <a:t>B</a:t>
             </a:r>
             <a:endParaRPr lang="en-US" sz="3400" dirty="0"/>
           </a:p>
@@ -8690,14 +8732,14 @@
       </p:sp>
       <p:sp>
         <p:nvSpPr>
-          <p:cNvPr id="11" name="Text 9"/>
-          <p:cNvSpPr txBox="1"/>
-          <p:nvPr/>
-        </p:nvSpPr>
-        <p:spPr>
-          <a:xfrm>
-            <a:off x="2825496" y="2322576"/>
-            <a:ext cx="1975104" cy="329184"/>
+          <p:cNvPr id="12" name="Text 10"/>
+          <p:cNvSpPr txBox="1"/>
+          <p:nvPr/>
+        </p:nvSpPr>
+        <p:spPr>
+          <a:xfrm>
+            <a:off x="2903220" y="2304288"/>
+            <a:ext cx="1828800" cy="442468"/>
           </a:xfrm>
           <a:prstGeom prst="rect">
             <a:avLst/>
@@ -8713,7 +8755,7 @@
               <a:buNone/>
             </a:pPr>
             <a:r>
-              <a:rPr lang="en-US" sz="1500" b="1" dirty="0">
+              <a:rPr lang="en-US" sz="1300" b="1" dirty="0">
                 <a:solidFill>
                   <a:srgbClr val="FFFFFF"/>
                 </a:solidFill>
@@ -8721,22 +8763,22 @@
                 <a:ea typeface="Cambria" pitchFamily="34" charset="-122"/>
                 <a:cs typeface="Cambria" pitchFamily="34" charset="-120"/>
               </a:rPr>
-              <a:t>Enterprise fit</a:t>
-            </a:r>
-            <a:endParaRPr lang="en-US" sz="1500" dirty="0"/>
-          </a:p>
-        </p:txBody>
-      </p:sp>
-      <p:sp>
-        <p:nvSpPr>
-          <p:cNvPr id="12" name="Text 10"/>
-          <p:cNvSpPr txBox="1"/>
-          <p:nvPr/>
-        </p:nvSpPr>
-        <p:spPr>
-          <a:xfrm>
-            <a:off x="2971800" y="2688336"/>
-            <a:ext cx="1682496" cy="1152144"/>
+              <a:t>The REST control plane</a:t>
+            </a:r>
+            <a:endParaRPr lang="en-US" sz="1300" dirty="0"/>
+          </a:p>
+        </p:txBody>
+      </p:sp>
+      <p:sp>
+        <p:nvSpPr>
+          <p:cNvPr id="13" name="Text 11"/>
+          <p:cNvSpPr txBox="1"/>
+          <p:nvPr/>
+        </p:nvSpPr>
+        <p:spPr>
+          <a:xfrm>
+            <a:off x="2884932" y="2801620"/>
+            <a:ext cx="1865376" cy="182880"/>
           </a:xfrm>
           <a:prstGeom prst="rect">
             <a:avLst/>
@@ -8752,30 +8794,72 @@
               <a:buNone/>
             </a:pPr>
             <a:r>
-              <a:rPr lang="en-US" sz="1100" dirty="0">
-                <a:solidFill>
-                  <a:srgbClr val="C9DAEA"/>
+              <a:rPr lang="en-US" sz="1000" b="1" dirty="0">
+                <a:solidFill>
+                  <a:srgbClr val="C8952B"/>
                 </a:solidFill>
                 <a:latin typeface="Calibri" pitchFamily="34" charset="0"/>
                 <a:ea typeface="Calibri" pitchFamily="34" charset="-122"/>
                 <a:cs typeface="Calibri" pitchFamily="34" charset="-120"/>
               </a:rPr>
-              <a:t>Directory identity, service accounts, SIEM, rate limiting</a:t>
-            </a:r>
-            <a:endParaRPr lang="en-US" sz="1100" dirty="0"/>
-          </a:p>
-        </p:txBody>
-      </p:sp>
-      <p:sp>
-        <p:nvSpPr>
-          <p:cNvPr id="13" name="Shape 11"/>
+              <a:t>Steps 3–7 · closes 12</a:t>
+            </a:r>
+            <a:endParaRPr lang="en-US" sz="1000" dirty="0"/>
+          </a:p>
+        </p:txBody>
+      </p:sp>
+      <p:sp>
+        <p:nvSpPr>
+          <p:cNvPr id="14" name="Text 12"/>
+          <p:cNvSpPr txBox="1"/>
+          <p:nvPr/>
+        </p:nvSpPr>
+        <p:spPr>
+          <a:xfrm>
+            <a:off x="2958084" y="3021076"/>
+            <a:ext cx="1719072" cy="581660"/>
+          </a:xfrm>
+          <a:prstGeom prst="rect">
+            <a:avLst/>
+          </a:prstGeom>
+          <a:noFill/>
+          <a:ln/>
+        </p:spPr>
+        <p:txBody>
+          <a:bodyPr wrap="square" lIns="0" tIns="0" rIns="0" bIns="0" rtlCol="0" anchor="ctr"/>
+          <a:lstStyle/>
+          <a:p>
+            <a:pPr algn="ctr" indent="0" marL="0">
+              <a:lnSpc>
+                <a:spcPts val="1170"/>
+              </a:lnSpc>
+              <a:buNone/>
+            </a:pPr>
+            <a:r>
+              <a:rPr lang="en-US" sz="900" dirty="0">
+                <a:solidFill>
+                  <a:srgbClr val="C9DAEA"/>
+                </a:solidFill>
+                <a:latin typeface="Calibri" pitchFamily="34" charset="0"/>
+                <a:ea typeface="Calibri" pitchFamily="34" charset="-122"/>
+                <a:cs typeface="Calibri" pitchFamily="34" charset="-120"/>
+              </a:rPr>
+              <a:t>The API, then the console that uses it.</a:t>
+            </a:r>
+            <a:endParaRPr lang="en-US" sz="900" dirty="0"/>
+          </a:p>
+        </p:txBody>
+      </p:sp>
+      <p:sp>
+        <p:nvSpPr>
+          <p:cNvPr id="15" name="Shape 13"/>
           <p:cNvSpPr/>
           <p:nvPr/>
         </p:nvSpPr>
         <p:spPr>
           <a:xfrm>
-            <a:off x="4828032" y="2468880"/>
-            <a:ext cx="237744" cy="164592"/>
+            <a:off x="4841748" y="2551176"/>
+            <a:ext cx="214884" cy="164592"/>
           </a:xfrm>
           <a:prstGeom prst="rightArrow">
             <a:avLst/>
@@ -8793,18 +8877,18 @@
       </p:sp>
       <p:sp>
         <p:nvSpPr>
-          <p:cNvPr id="14" name="Shape 12"/>
+          <p:cNvPr id="16" name="Shape 14"/>
           <p:cNvSpPr/>
           <p:nvPr/>
         </p:nvSpPr>
         <p:spPr>
           <a:xfrm>
-            <a:off x="5084064" y="1591056"/>
-            <a:ext cx="1975104" cy="1920240"/>
+            <a:off x="5093208" y="1591056"/>
+            <a:ext cx="1975104" cy="2084832"/>
           </a:xfrm>
           <a:prstGeom prst="roundRect">
             <a:avLst>
-              <a:gd name="adj" fmla="val 2857"/>
+              <a:gd name="adj" fmla="val 2778"/>
             </a:avLst>
           </a:prstGeom>
           <a:solidFill>
@@ -8827,13 +8911,13 @@
       </p:sp>
       <p:sp>
         <p:nvSpPr>
-          <p:cNvPr id="15" name="Text 13"/>
-          <p:cNvSpPr txBox="1"/>
-          <p:nvPr/>
-        </p:nvSpPr>
-        <p:spPr>
-          <a:xfrm>
-            <a:off x="5084064" y="1737360"/>
+          <p:cNvPr id="17" name="Text 15"/>
+          <p:cNvSpPr txBox="1"/>
+          <p:nvPr/>
+        </p:nvSpPr>
+        <p:spPr>
+          <a:xfrm>
+            <a:off x="5093208" y="1737360"/>
             <a:ext cx="1975104" cy="566928"/>
           </a:xfrm>
           <a:prstGeom prst="rect">
@@ -8858,7 +8942,7 @@
                 <a:ea typeface="Cambria" pitchFamily="34" charset="-122"/>
                 <a:cs typeface="Cambria" pitchFamily="34" charset="-120"/>
               </a:rPr>
-              <a:t>8</a:t>
+              <a:t>C</a:t>
             </a:r>
             <a:endParaRPr lang="en-US" sz="3400" dirty="0"/>
           </a:p>
@@ -8866,14 +8950,14 @@
       </p:sp>
       <p:sp>
         <p:nvSpPr>
-          <p:cNvPr id="16" name="Text 14"/>
-          <p:cNvSpPr txBox="1"/>
-          <p:nvPr/>
-        </p:nvSpPr>
-        <p:spPr>
-          <a:xfrm>
-            <a:off x="5084064" y="2322576"/>
-            <a:ext cx="1975104" cy="329184"/>
+          <p:cNvPr id="18" name="Text 16"/>
+          <p:cNvSpPr txBox="1"/>
+          <p:nvPr/>
+        </p:nvSpPr>
+        <p:spPr>
+          <a:xfrm>
+            <a:off x="5166360" y="2304288"/>
+            <a:ext cx="1828800" cy="221234"/>
           </a:xfrm>
           <a:prstGeom prst="rect">
             <a:avLst/>
@@ -8889,7 +8973,7 @@
               <a:buNone/>
             </a:pPr>
             <a:r>
-              <a:rPr lang="en-US" sz="1500" b="1" dirty="0">
+              <a:rPr lang="en-US" sz="1300" b="1" dirty="0">
                 <a:solidFill>
                   <a:srgbClr val="FFFFFF"/>
                 </a:solidFill>
@@ -8897,22 +8981,22 @@
                 <a:ea typeface="Cambria" pitchFamily="34" charset="-122"/>
                 <a:cs typeface="Cambria" pitchFamily="34" charset="-120"/>
               </a:rPr>
-              <a:t>Scale</a:t>
-            </a:r>
-            <a:endParaRPr lang="en-US" sz="1500" dirty="0"/>
-          </a:p>
-        </p:txBody>
-      </p:sp>
-      <p:sp>
-        <p:nvSpPr>
-          <p:cNvPr id="17" name="Text 15"/>
-          <p:cNvSpPr txBox="1"/>
-          <p:nvPr/>
-        </p:nvSpPr>
-        <p:spPr>
-          <a:xfrm>
-            <a:off x="5230368" y="2688336"/>
-            <a:ext cx="1682496" cy="1152144"/>
+              <a:t>Enterprise fit</a:t>
+            </a:r>
+            <a:endParaRPr lang="en-US" sz="1300" dirty="0"/>
+          </a:p>
+        </p:txBody>
+      </p:sp>
+      <p:sp>
+        <p:nvSpPr>
+          <p:cNvPr id="19" name="Text 17"/>
+          <p:cNvSpPr txBox="1"/>
+          <p:nvPr/>
+        </p:nvSpPr>
+        <p:spPr>
+          <a:xfrm>
+            <a:off x="5148072" y="2580386"/>
+            <a:ext cx="1865376" cy="182880"/>
           </a:xfrm>
           <a:prstGeom prst="rect">
             <a:avLst/>
@@ -8928,30 +9012,72 @@
               <a:buNone/>
             </a:pPr>
             <a:r>
-              <a:rPr lang="en-US" sz="1100" dirty="0">
-                <a:solidFill>
-                  <a:srgbClr val="C9DAEA"/>
+              <a:rPr lang="en-US" sz="1000" b="1" dirty="0">
+                <a:solidFill>
+                  <a:srgbClr val="C8952B"/>
                 </a:solidFill>
                 <a:latin typeface="Calibri" pitchFamily="34" charset="0"/>
                 <a:ea typeface="Calibri" pitchFamily="34" charset="-122"/>
                 <a:cs typeface="Calibri" pitchFamily="34" charset="-120"/>
               </a:rPr>
-              <a:t>PostgreSQL, HA clustering, DR, HSM failover</a:t>
-            </a:r>
-            <a:endParaRPr lang="en-US" sz="1100" dirty="0"/>
-          </a:p>
-        </p:txBody>
-      </p:sp>
-      <p:sp>
-        <p:nvSpPr>
-          <p:cNvPr id="18" name="Shape 16"/>
+              <a:t>Steps 8–9 · closes 9</a:t>
+            </a:r>
+            <a:endParaRPr lang="en-US" sz="1000" dirty="0"/>
+          </a:p>
+        </p:txBody>
+      </p:sp>
+      <p:sp>
+        <p:nvSpPr>
+          <p:cNvPr id="20" name="Text 18"/>
+          <p:cNvSpPr txBox="1"/>
+          <p:nvPr/>
+        </p:nvSpPr>
+        <p:spPr>
+          <a:xfrm>
+            <a:off x="5221224" y="2799842"/>
+            <a:ext cx="1719072" cy="802894"/>
+          </a:xfrm>
+          <a:prstGeom prst="rect">
+            <a:avLst/>
+          </a:prstGeom>
+          <a:noFill/>
+          <a:ln/>
+        </p:spPr>
+        <p:txBody>
+          <a:bodyPr wrap="square" lIns="0" tIns="0" rIns="0" bIns="0" rtlCol="0" anchor="ctr"/>
+          <a:lstStyle/>
+          <a:p>
+            <a:pPr algn="ctr" indent="0" marL="0">
+              <a:lnSpc>
+                <a:spcPts val="1170"/>
+              </a:lnSpc>
+              <a:buNone/>
+            </a:pPr>
+            <a:r>
+              <a:rPr lang="en-US" sz="900" dirty="0">
+                <a:solidFill>
+                  <a:srgbClr val="C9DAEA"/>
+                </a:solidFill>
+                <a:latin typeface="Calibri" pitchFamily="34" charset="0"/>
+                <a:ea typeface="Calibri" pitchFamily="34" charset="-122"/>
+                <a:cs typeface="Calibri" pitchFamily="34" charset="-120"/>
+              </a:rPr>
+              <a:t>What an auditor and a security team ask for.</a:t>
+            </a:r>
+            <a:endParaRPr lang="en-US" sz="900" dirty="0"/>
+          </a:p>
+        </p:txBody>
+      </p:sp>
+      <p:sp>
+        <p:nvSpPr>
+          <p:cNvPr id="21" name="Shape 19"/>
           <p:cNvSpPr/>
           <p:nvPr/>
         </p:nvSpPr>
         <p:spPr>
           <a:xfrm>
-            <a:off x="7086600" y="2468880"/>
-            <a:ext cx="237744" cy="164592"/>
+            <a:off x="7104888" y="2551176"/>
+            <a:ext cx="214884" cy="164592"/>
           </a:xfrm>
           <a:prstGeom prst="rightArrow">
             <a:avLst/>
@@ -8969,18 +9095,18 @@
       </p:sp>
       <p:sp>
         <p:nvSpPr>
-          <p:cNvPr id="19" name="Shape 17"/>
+          <p:cNvPr id="22" name="Shape 20"/>
           <p:cNvSpPr/>
           <p:nvPr/>
         </p:nvSpPr>
         <p:spPr>
           <a:xfrm>
-            <a:off x="7342632" y="1591056"/>
-            <a:ext cx="1975104" cy="1920240"/>
+            <a:off x="7356348" y="1591056"/>
+            <a:ext cx="1975104" cy="2084832"/>
           </a:xfrm>
           <a:prstGeom prst="roundRect">
             <a:avLst>
-              <a:gd name="adj" fmla="val 2857"/>
+              <a:gd name="adj" fmla="val 2778"/>
             </a:avLst>
           </a:prstGeom>
           <a:solidFill>
@@ -9003,13 +9129,13 @@
       </p:sp>
       <p:sp>
         <p:nvSpPr>
-          <p:cNvPr id="20" name="Text 18"/>
-          <p:cNvSpPr txBox="1"/>
-          <p:nvPr/>
-        </p:nvSpPr>
-        <p:spPr>
-          <a:xfrm>
-            <a:off x="7342632" y="1737360"/>
+          <p:cNvPr id="23" name="Text 21"/>
+          <p:cNvSpPr txBox="1"/>
+          <p:nvPr/>
+        </p:nvSpPr>
+        <p:spPr>
+          <a:xfrm>
+            <a:off x="7356348" y="1737360"/>
             <a:ext cx="1975104" cy="566928"/>
           </a:xfrm>
           <a:prstGeom prst="rect">
@@ -9034,7 +9160,7 @@
                 <a:ea typeface="Cambria" pitchFamily="34" charset="-122"/>
                 <a:cs typeface="Cambria" pitchFamily="34" charset="-120"/>
               </a:rPr>
-              <a:t>9</a:t>
+              <a:t>D</a:t>
             </a:r>
             <a:endParaRPr lang="en-US" sz="3400" dirty="0"/>
           </a:p>
@@ -9042,14 +9168,14 @@
       </p:sp>
       <p:sp>
         <p:nvSpPr>
-          <p:cNvPr id="21" name="Text 19"/>
-          <p:cNvSpPr txBox="1"/>
-          <p:nvPr/>
-        </p:nvSpPr>
-        <p:spPr>
-          <a:xfrm>
-            <a:off x="7342632" y="2322576"/>
-            <a:ext cx="1975104" cy="329184"/>
+          <p:cNvPr id="24" name="Text 22"/>
+          <p:cNvSpPr txBox="1"/>
+          <p:nvPr/>
+        </p:nvSpPr>
+        <p:spPr>
+          <a:xfrm>
+            <a:off x="7429500" y="2304288"/>
+            <a:ext cx="1828800" cy="442468"/>
           </a:xfrm>
           <a:prstGeom prst="rect">
             <a:avLst/>
@@ -9065,7 +9191,7 @@
               <a:buNone/>
             </a:pPr>
             <a:r>
-              <a:rPr lang="en-US" sz="1500" b="1" dirty="0">
+              <a:rPr lang="en-US" sz="1300" b="1" dirty="0">
                 <a:solidFill>
                   <a:srgbClr val="FFFFFF"/>
                 </a:solidFill>
@@ -9073,22 +9199,22 @@
                 <a:ea typeface="Cambria" pitchFamily="34" charset="-122"/>
                 <a:cs typeface="Cambria" pitchFamily="34" charset="-120"/>
               </a:rPr>
-              <a:t>Tenancy</a:t>
-            </a:r>
-            <a:endParaRPr lang="en-US" sz="1500" dirty="0"/>
-          </a:p>
-        </p:txBody>
-      </p:sp>
-      <p:sp>
-        <p:nvSpPr>
-          <p:cNvPr id="22" name="Text 20"/>
-          <p:cNvSpPr txBox="1"/>
-          <p:nvPr/>
-        </p:nvSpPr>
-        <p:spPr>
-          <a:xfrm>
-            <a:off x="7488936" y="2688336"/>
-            <a:ext cx="1682496" cy="1152144"/>
+              <a:t>Scale, availability and tenancy</a:t>
+            </a:r>
+            <a:endParaRPr lang="en-US" sz="1300" dirty="0"/>
+          </a:p>
+        </p:txBody>
+      </p:sp>
+      <p:sp>
+        <p:nvSpPr>
+          <p:cNvPr id="25" name="Text 23"/>
+          <p:cNvSpPr txBox="1"/>
+          <p:nvPr/>
+        </p:nvSpPr>
+        <p:spPr>
+          <a:xfrm>
+            <a:off x="7411212" y="2801620"/>
+            <a:ext cx="1865376" cy="182880"/>
           </a:xfrm>
           <a:prstGeom prst="rect">
             <a:avLst/>
@@ -9104,30 +9230,72 @@
               <a:buNone/>
             </a:pPr>
             <a:r>
-              <a:rPr lang="en-US" sz="1100" dirty="0">
-                <a:solidFill>
-                  <a:srgbClr val="C9DAEA"/>
+              <a:rPr lang="en-US" sz="1000" b="1" dirty="0">
+                <a:solidFill>
+                  <a:srgbClr val="C8952B"/>
                 </a:solidFill>
                 <a:latin typeface="Calibri" pitchFamily="34" charset="0"/>
                 <a:ea typeface="Calibri" pitchFamily="34" charset="-122"/>
                 <a:cs typeface="Calibri" pitchFamily="34" charset="-120"/>
               </a:rPr>
-              <a:t>Namespaces, quotas, per-tenant audit</a:t>
-            </a:r>
-            <a:endParaRPr lang="en-US" sz="1100" dirty="0"/>
-          </a:p>
-        </p:txBody>
-      </p:sp>
-      <p:sp>
-        <p:nvSpPr>
-          <p:cNvPr id="23" name="Shape 21"/>
+              <a:t>Steps 10–12 · closes 9</a:t>
+            </a:r>
+            <a:endParaRPr lang="en-US" sz="1000" dirty="0"/>
+          </a:p>
+        </p:txBody>
+      </p:sp>
+      <p:sp>
+        <p:nvSpPr>
+          <p:cNvPr id="26" name="Text 24"/>
+          <p:cNvSpPr txBox="1"/>
+          <p:nvPr/>
+        </p:nvSpPr>
+        <p:spPr>
+          <a:xfrm>
+            <a:off x="7484364" y="3021076"/>
+            <a:ext cx="1719072" cy="581660"/>
+          </a:xfrm>
+          <a:prstGeom prst="rect">
+            <a:avLst/>
+          </a:prstGeom>
+          <a:noFill/>
+          <a:ln/>
+        </p:spPr>
+        <p:txBody>
+          <a:bodyPr wrap="square" lIns="0" tIns="0" rIns="0" bIns="0" rtlCol="0" anchor="ctr"/>
+          <a:lstStyle/>
+          <a:p>
+            <a:pPr algn="ctr" indent="0" marL="0">
+              <a:lnSpc>
+                <a:spcPts val="1170"/>
+              </a:lnSpc>
+              <a:buNone/>
+            </a:pPr>
+            <a:r>
+              <a:rPr lang="en-US" sz="900" dirty="0">
+                <a:solidFill>
+                  <a:srgbClr val="C9DAEA"/>
+                </a:solidFill>
+                <a:latin typeface="Calibri" pitchFamily="34" charset="0"/>
+                <a:ea typeface="Calibri" pitchFamily="34" charset="-122"/>
+                <a:cs typeface="Calibri" pitchFamily="34" charset="-120"/>
+              </a:rPr>
+              <a:t>Needs infrastructure to verify.</a:t>
+            </a:r>
+            <a:endParaRPr lang="en-US" sz="900" dirty="0"/>
+          </a:p>
+        </p:txBody>
+      </p:sp>
+      <p:sp>
+        <p:nvSpPr>
+          <p:cNvPr id="27" name="Shape 25"/>
           <p:cNvSpPr/>
           <p:nvPr/>
         </p:nvSpPr>
         <p:spPr>
           <a:xfrm>
-            <a:off x="9345168" y="2468880"/>
-            <a:ext cx="237744" cy="164592"/>
+            <a:off x="9368028" y="2551176"/>
+            <a:ext cx="214884" cy="164592"/>
           </a:xfrm>
           <a:prstGeom prst="rightArrow">
             <a:avLst/>
@@ -9145,18 +9313,18 @@
       </p:sp>
       <p:sp>
         <p:nvSpPr>
-          <p:cNvPr id="24" name="Shape 22"/>
+          <p:cNvPr id="28" name="Shape 26"/>
           <p:cNvSpPr/>
           <p:nvPr/>
         </p:nvSpPr>
         <p:spPr>
           <a:xfrm>
-            <a:off x="9601200" y="1591056"/>
-            <a:ext cx="1975104" cy="1920240"/>
+            <a:off x="9619488" y="1591056"/>
+            <a:ext cx="1975104" cy="2084832"/>
           </a:xfrm>
           <a:prstGeom prst="roundRect">
             <a:avLst>
-              <a:gd name="adj" fmla="val 2857"/>
+              <a:gd name="adj" fmla="val 2778"/>
             </a:avLst>
           </a:prstGeom>
           <a:solidFill>
@@ -9179,13 +9347,13 @@
       </p:sp>
       <p:sp>
         <p:nvSpPr>
-          <p:cNvPr id="25" name="Text 23"/>
-          <p:cNvSpPr txBox="1"/>
-          <p:nvPr/>
-        </p:nvSpPr>
-        <p:spPr>
-          <a:xfrm>
-            <a:off x="9601200" y="1737360"/>
+          <p:cNvPr id="29" name="Text 27"/>
+          <p:cNvSpPr txBox="1"/>
+          <p:nvPr/>
+        </p:nvSpPr>
+        <p:spPr>
+          <a:xfrm>
+            <a:off x="9619488" y="1737360"/>
             <a:ext cx="1975104" cy="566928"/>
           </a:xfrm>
           <a:prstGeom prst="rect">
@@ -9210,7 +9378,7 @@
                 <a:ea typeface="Cambria" pitchFamily="34" charset="-122"/>
                 <a:cs typeface="Cambria" pitchFamily="34" charset="-120"/>
               </a:rPr>
-              <a:t>10</a:t>
+              <a:t>E</a:t>
             </a:r>
             <a:endParaRPr lang="en-US" sz="3400" dirty="0"/>
           </a:p>
@@ -9218,14 +9386,14 @@
       </p:sp>
       <p:sp>
         <p:nvSpPr>
-          <p:cNvPr id="26" name="Text 24"/>
-          <p:cNvSpPr txBox="1"/>
-          <p:nvPr/>
-        </p:nvSpPr>
-        <p:spPr>
-          <a:xfrm>
-            <a:off x="9601200" y="2322576"/>
-            <a:ext cx="1975104" cy="329184"/>
+          <p:cNvPr id="30" name="Text 28"/>
+          <p:cNvSpPr txBox="1"/>
+          <p:nvPr/>
+        </p:nvSpPr>
+        <p:spPr>
+          <a:xfrm>
+            <a:off x="9692640" y="2304288"/>
+            <a:ext cx="1828800" cy="442468"/>
           </a:xfrm>
           <a:prstGeom prst="rect">
             <a:avLst/>
@@ -9241,7 +9409,7 @@
               <a:buNone/>
             </a:pPr>
             <a:r>
-              <a:rPr lang="en-US" sz="1500" b="1" dirty="0">
+              <a:rPr lang="en-US" sz="1300" b="1" dirty="0">
                 <a:solidFill>
                   <a:srgbClr val="102437"/>
                 </a:solidFill>
@@ -9249,22 +9417,22 @@
                 <a:ea typeface="Cambria" pitchFamily="34" charset="-122"/>
                 <a:cs typeface="Cambria" pitchFamily="34" charset="-120"/>
               </a:rPr>
-              <a:t>Compliance</a:t>
-            </a:r>
-            <a:endParaRPr lang="en-US" sz="1500" dirty="0"/>
-          </a:p>
-        </p:txBody>
-      </p:sp>
-      <p:sp>
-        <p:nvSpPr>
-          <p:cNvPr id="27" name="Text 25"/>
-          <p:cNvSpPr txBox="1"/>
-          <p:nvPr/>
-        </p:nvSpPr>
-        <p:spPr>
-          <a:xfrm>
-            <a:off x="9747504" y="2688336"/>
-            <a:ext cx="1682496" cy="1152144"/>
+              <a:t>Protocol and estate reach</a:t>
+            </a:r>
+            <a:endParaRPr lang="en-US" sz="1300" dirty="0"/>
+          </a:p>
+        </p:txBody>
+      </p:sp>
+      <p:sp>
+        <p:nvSpPr>
+          <p:cNvPr id="31" name="Text 29"/>
+          <p:cNvSpPr txBox="1"/>
+          <p:nvPr/>
+        </p:nvSpPr>
+        <p:spPr>
+          <a:xfrm>
+            <a:off x="9674352" y="2801620"/>
+            <a:ext cx="1865376" cy="182880"/>
           </a:xfrm>
           <a:prstGeom prst="rect">
             <a:avLst/>
@@ -9280,23 +9448,65 @@
               <a:buNone/>
             </a:pPr>
             <a:r>
-              <a:rPr lang="en-US" sz="1100" dirty="0">
-                <a:solidFill>
-                  <a:srgbClr val="4A3A18"/>
+              <a:rPr lang="en-US" sz="1000" b="1" dirty="0">
+                <a:solidFill>
+                  <a:srgbClr val="6B5218"/>
                 </a:solidFill>
                 <a:latin typeface="Calibri" pitchFamily="34" charset="0"/>
                 <a:ea typeface="Calibri" pitchFamily="34" charset="-122"/>
                 <a:cs typeface="Calibri" pitchFamily="34" charset="-120"/>
               </a:rPr>
-              <a:t>Validated token, KMIP 3.0, post-quantum</a:t>
-            </a:r>
-            <a:endParaRPr lang="en-US" sz="1100" dirty="0"/>
-          </a:p>
-        </p:txBody>
-      </p:sp>
-      <p:sp>
-        <p:nvSpPr>
-          <p:cNvPr id="28" name="Shape 26"/>
+              <a:t>Steps 13–14 · closes 2</a:t>
+            </a:r>
+            <a:endParaRPr lang="en-US" sz="1000" dirty="0"/>
+          </a:p>
+        </p:txBody>
+      </p:sp>
+      <p:sp>
+        <p:nvSpPr>
+          <p:cNvPr id="32" name="Text 30"/>
+          <p:cNvSpPr txBox="1"/>
+          <p:nvPr/>
+        </p:nvSpPr>
+        <p:spPr>
+          <a:xfrm>
+            <a:off x="9747504" y="3021076"/>
+            <a:ext cx="1719072" cy="581660"/>
+          </a:xfrm>
+          <a:prstGeom prst="rect">
+            <a:avLst/>
+          </a:prstGeom>
+          <a:noFill/>
+          <a:ln/>
+        </p:spPr>
+        <p:txBody>
+          <a:bodyPr wrap="square" lIns="0" tIns="0" rIns="0" bIns="0" rtlCol="0" anchor="ctr"/>
+          <a:lstStyle/>
+          <a:p>
+            <a:pPr algn="ctr" indent="0" marL="0">
+              <a:lnSpc>
+                <a:spcPts val="1170"/>
+              </a:lnSpc>
+              <a:buNone/>
+            </a:pPr>
+            <a:r>
+              <a:rPr lang="en-US" sz="900" dirty="0">
+                <a:solidFill>
+                  <a:srgbClr val="4A3A18"/>
+                </a:solidFill>
+                <a:latin typeface="Calibri" pitchFamily="34" charset="0"/>
+                <a:ea typeface="Calibri" pitchFamily="34" charset="-122"/>
+                <a:cs typeface="Calibri" pitchFamily="34" charset="-120"/>
+              </a:rPr>
+              <a:t>Additive, independent of D, verifiable here.</a:t>
+            </a:r>
+            <a:endParaRPr lang="en-US" sz="900" dirty="0"/>
+          </a:p>
+        </p:txBody>
+      </p:sp>
+      <p:sp>
+        <p:nvSpPr>
+          <p:cNvPr id="33" name="Shape 31"/>
           <p:cNvSpPr/>
           <p:nvPr/>
         </p:nvSpPr>
@@ -9330,7 +9540,7 @@
       </p:sp>
       <p:sp>
         <p:nvSpPr>
-          <p:cNvPr id="29" name="Text 27"/>
+          <p:cNvPr id="34" name="Text 32"/>
           <p:cNvSpPr txBox="1"/>
           <p:nvPr/>
         </p:nvSpPr>
@@ -9361,7 +9571,7 @@
                 <a:ea typeface="Cambria" pitchFamily="34" charset="-122"/>
                 <a:cs typeface="Cambria" pitchFamily="34" charset="-120"/>
               </a:rPr>
-              <a:t>How the waves are ordered</a:t>
+              <a:t>How the stages are ordered</a:t>
             </a:r>
             <a:endParaRPr lang="en-US" sz="1600" dirty="0"/>
           </a:p>
@@ -9369,7 +9579,7 @@
       </p:sp>
       <p:sp>
         <p:nvSpPr>
-          <p:cNvPr id="30" name="Text 28"/>
+          <p:cNvPr id="35" name="Text 33"/>
           <p:cNvSpPr txBox="1"/>
           <p:nvPr/>
         </p:nvSpPr>
@@ -9407,7 +9617,7 @@
                 <a:ea typeface="Calibri" pitchFamily="34" charset="-122"/>
                 <a:cs typeface="Calibri" pitchFamily="34" charset="-120"/>
               </a:rPr>
-              <a:t>By what each unlocks, not by visibility</a:t>
+              <a:t>By dependency, not by what is most visible</a:t>
             </a:r>
             <a:endParaRPr lang="en-US" sz="1250" dirty="0"/>
           </a:p>
@@ -9431,7 +9641,7 @@
                 <a:ea typeface="Calibri" pitchFamily="34" charset="-122"/>
                 <a:cs typeface="Calibri" pitchFamily="34" charset="-120"/>
               </a:rPr>
-              <a:t>Wave 6 makes five other gaps addressable at once</a:t>
+              <a:t>Stage A ships no feature and unblocks everything after it</a:t>
             </a:r>
             <a:endParaRPr lang="en-US" sz="1250" dirty="0"/>
           </a:p>
@@ -9455,7 +9665,7 @@
                 <a:ea typeface="Calibri" pitchFamily="34" charset="-122"/>
                 <a:cs typeface="Calibri" pitchFamily="34" charset="-120"/>
               </a:rPr>
-              <a:t>Wave 8 is a prerequisite for 9, not a parallel track</a:t>
+              <a:t>Stage E is additive — it can run beside C or D</a:t>
             </a:r>
             <a:endParaRPr lang="en-US" sz="1250" dirty="0"/>
           </a:p>
@@ -9479,7 +9689,7 @@
                 <a:ea typeface="Calibri" pitchFamily="34" charset="-122"/>
                 <a:cs typeface="Calibri" pitchFamily="34" charset="-120"/>
               </a:rPr>
-              <a:t>Each wave ships independently and is useful alone</a:t>
+              <a:t>Each step ships independently and is useful alone</a:t>
             </a:r>
             <a:endParaRPr lang="en-US" sz="1250" dirty="0"/>
           </a:p>
@@ -9487,7 +9697,7 @@
       </p:sp>
       <p:sp>
         <p:nvSpPr>
-          <p:cNvPr id="31" name="Shape 29"/>
+          <p:cNvPr id="36" name="Shape 34"/>
           <p:cNvSpPr/>
           <p:nvPr/>
         </p:nvSpPr>
@@ -9521,7 +9731,7 @@
       </p:sp>
       <p:sp>
         <p:nvSpPr>
-          <p:cNvPr id="32" name="Text 30"/>
+          <p:cNvPr id="37" name="Text 35"/>
           <p:cNvSpPr txBox="1"/>
           <p:nvPr/>
         </p:nvSpPr>
@@ -9560,7 +9770,7 @@
       </p:sp>
       <p:sp>
         <p:nvSpPr>
-          <p:cNvPr id="33" name="Text 31"/>
+          <p:cNvPr id="38" name="Text 36"/>
           <p:cNvSpPr txBox="1"/>
           <p:nvPr/>
         </p:nvSpPr>
@@ -9591,7 +9801,7 @@
                 <a:ea typeface="Cambria" pitchFamily="34" charset="-122"/>
                 <a:cs typeface="Cambria" pitchFamily="34" charset="-120"/>
               </a:rPr>
-              <a:t>Every wave has a demonstrable gate</a:t>
+              <a:t>Every step has a demonstrable gate</a:t>
             </a:r>
             <a:endParaRPr lang="en-US" sz="1600" dirty="0"/>
           </a:p>
@@ -9599,7 +9809,7 @@
       </p:sp>
       <p:sp>
         <p:nvSpPr>
-          <p:cNvPr id="34" name="Text 32"/>
+          <p:cNvPr id="39" name="Text 37"/>
           <p:cNvSpPr txBox="1"/>
           <p:nvPr/>
         </p:nvSpPr>
@@ -9633,7 +9843,7 @@
                 <a:ea typeface="Calibri" pitchFamily="34" charset="-122"/>
                 <a:cs typeface="Calibri" pitchFamily="34" charset="-120"/>
               </a:rPr>
-              <a:t>Not a checklist — a condition someone can watch you meet. A wave is finished when its gate is demonstrated, not when its code is written.</a:t>
+              <a:t>Not a checklist — a condition someone can watch you meet. A step is finished when its gate is demonstrated, not when its code is written.</a:t>
             </a:r>
             <a:endParaRPr lang="en-US" sz="1250" dirty="0"/>
           </a:p>
@@ -9743,7 +9953,7 @@
                 <a:ea typeface="Cambria" pitchFamily="34" charset="-122"/>
                 <a:cs typeface="Cambria" pitchFamily="34" charset="-120"/>
               </a:rPr>
-              <a:t>Wave 6 and 7 — the control plane</a:t>
+              <a:t>All 14 steps</a:t>
             </a:r>
             <a:endParaRPr lang="en-US" sz="3400" dirty="0"/>
           </a:p>
@@ -9757,12 +9967,37 @@
         </p:nvSpPr>
         <p:spPr>
           <a:xfrm>
-            <a:off x="566928" y="1481328"/>
-            <a:ext cx="3520440" cy="2487168"/>
+            <a:off x="566928" y="1499616"/>
+            <a:ext cx="82296" cy="585216"/>
+          </a:xfrm>
+          <a:prstGeom prst="rect">
+            <a:avLst/>
+          </a:prstGeom>
+          <a:solidFill>
+            <a:srgbClr val="1A3A5C"/>
+          </a:solidFill>
+          <a:ln w="12700">
+            <a:solidFill>
+              <a:srgbClr val="1A3A5C"/>
+            </a:solidFill>
+            <a:prstDash val="solid"/>
+          </a:ln>
+        </p:spPr>
+      </p:sp>
+      <p:sp>
+        <p:nvSpPr>
+          <p:cNvPr id="5" name="Shape 3"/>
+          <p:cNvSpPr/>
+          <p:nvPr/>
+        </p:nvSpPr>
+        <p:spPr>
+          <a:xfrm>
+            <a:off x="649224" y="1499616"/>
+            <a:ext cx="5312664" cy="585216"/>
           </a:xfrm>
           <a:prstGeom prst="roundRect">
             <a:avLst>
-              <a:gd name="adj" fmla="val 2206"/>
+              <a:gd name="adj" fmla="val 6250"/>
             </a:avLst>
           </a:prstGeom>
           <a:solidFill>
@@ -9774,25 +10009,18 @@
             </a:solidFill>
             <a:prstDash val="solid"/>
           </a:ln>
-          <a:effectLst>
-            <a:outerShdw sx="100000" sy="100000" kx="0" ky="0" algn="bl" rotWithShape="0" blurRad="127000" dist="25400" dir="5400000">
-              <a:srgbClr val="8C9AA8">
-                <a:alpha val="22000"/>
-              </a:srgbClr>
-            </a:outerShdw>
-          </a:effectLst>
-        </p:spPr>
-      </p:sp>
-      <p:sp>
-        <p:nvSpPr>
-          <p:cNvPr id="5" name="Text 3"/>
-          <p:cNvSpPr txBox="1"/>
-          <p:nvPr/>
-        </p:nvSpPr>
-        <p:spPr>
-          <a:xfrm>
-            <a:off x="804672" y="1682496"/>
-            <a:ext cx="3044952" cy="201168"/>
+        </p:spPr>
+      </p:sp>
+      <p:sp>
+        <p:nvSpPr>
+          <p:cNvPr id="6" name="Text 4"/>
+          <p:cNvSpPr txBox="1"/>
+          <p:nvPr/>
+        </p:nvSpPr>
+        <p:spPr>
+          <a:xfrm>
+            <a:off x="768096" y="1499616"/>
+            <a:ext cx="365760" cy="585216"/>
           </a:xfrm>
           <a:prstGeom prst="rect">
             <a:avLst/>
@@ -9808,7 +10036,46 @@
               <a:buNone/>
             </a:pPr>
             <a:r>
-              <a:rPr lang="en-US" sz="1000" b="1" spc="160" kern="0" dirty="0">
+              <a:rPr lang="en-US" sz="1500" b="1" dirty="0">
+                <a:solidFill>
+                  <a:srgbClr val="C8952B"/>
+                </a:solidFill>
+                <a:latin typeface="Cambria" pitchFamily="34" charset="0"/>
+                <a:ea typeface="Cambria" pitchFamily="34" charset="-122"/>
+                <a:cs typeface="Cambria" pitchFamily="34" charset="-120"/>
+              </a:rPr>
+              <a:t>1</a:t>
+            </a:r>
+            <a:endParaRPr lang="en-US" sz="1500" dirty="0"/>
+          </a:p>
+        </p:txBody>
+      </p:sp>
+      <p:sp>
+        <p:nvSpPr>
+          <p:cNvPr id="7" name="Text 5"/>
+          <p:cNvSpPr txBox="1"/>
+          <p:nvPr/>
+        </p:nvSpPr>
+        <p:spPr>
+          <a:xfrm>
+            <a:off x="1188720" y="1499616"/>
+            <a:ext cx="3977640" cy="585216"/>
+          </a:xfrm>
+          <a:prstGeom prst="rect">
+            <a:avLst/>
+          </a:prstGeom>
+          <a:noFill/>
+          <a:ln/>
+        </p:spPr>
+        <p:txBody>
+          <a:bodyPr wrap="square" lIns="0" tIns="0" rIns="0" bIns="0" rtlCol="0" anchor="ctr"/>
+          <a:lstStyle/>
+          <a:p>
+            <a:pPr indent="0" marL="0">
+              <a:buNone/>
+            </a:pPr>
+            <a:r>
+              <a:rPr lang="en-US" sz="1150" dirty="0">
                 <a:solidFill>
                   <a:srgbClr val="1A3A5C"/>
                 </a:solidFill>
@@ -9816,129 +10083,48 @@
                 <a:ea typeface="Calibri" pitchFamily="34" charset="-122"/>
                 <a:cs typeface="Calibri" pitchFamily="34" charset="-120"/>
               </a:rPr>
-              <a:t>WAVE 6.1</a:t>
-            </a:r>
-            <a:endParaRPr lang="en-US" sz="1000" dirty="0"/>
-          </a:p>
-        </p:txBody>
-      </p:sp>
-      <p:sp>
-        <p:nvSpPr>
-          <p:cNvPr id="6" name="Text 4"/>
-          <p:cNvSpPr txBox="1"/>
-          <p:nvPr/>
-        </p:nvSpPr>
-        <p:spPr>
-          <a:xfrm>
-            <a:off x="804672" y="1956816"/>
-            <a:ext cx="3044952" cy="310896"/>
-          </a:xfrm>
-          <a:prstGeom prst="rect">
-            <a:avLst/>
-          </a:prstGeom>
-          <a:noFill/>
-          <a:ln/>
-        </p:spPr>
-        <p:txBody>
-          <a:bodyPr wrap="square" lIns="0" tIns="0" rIns="0" bIns="0" rtlCol="0" anchor="ctr"/>
-          <a:lstStyle/>
-          <a:p>
-            <a:pPr indent="0" marL="0">
-              <a:buNone/>
-            </a:pPr>
-            <a:r>
-              <a:rPr lang="en-US" sz="1500" b="1" dirty="0">
-                <a:solidFill>
-                  <a:srgbClr val="1A3A5C"/>
-                </a:solidFill>
-                <a:latin typeface="Cambria" pitchFamily="34" charset="0"/>
-                <a:ea typeface="Cambria" pitchFamily="34" charset="-122"/>
-                <a:cs typeface="Cambria" pitchFamily="34" charset="-120"/>
-              </a:rPr>
-              <a:t>Service layer extraction</a:t>
-            </a:r>
-            <a:endParaRPr lang="en-US" sz="1500" dirty="0"/>
-          </a:p>
-        </p:txBody>
-      </p:sp>
-      <p:sp>
-        <p:nvSpPr>
-          <p:cNvPr id="7" name="Text 5"/>
-          <p:cNvSpPr txBox="1"/>
-          <p:nvPr/>
-        </p:nvSpPr>
-        <p:spPr>
-          <a:xfrm>
-            <a:off x="804672" y="2340864"/>
-            <a:ext cx="3044952" cy="768096"/>
-          </a:xfrm>
-          <a:prstGeom prst="rect">
-            <a:avLst/>
-          </a:prstGeom>
-          <a:noFill/>
-          <a:ln/>
-        </p:spPr>
-        <p:txBody>
-          <a:bodyPr wrap="square" lIns="0" tIns="0" rIns="0" bIns="0" rtlCol="0" anchor="t"/>
-          <a:lstStyle/>
-          <a:p>
-            <a:pPr indent="0" marL="0">
-              <a:lnSpc>
-                <a:spcPts val="1700"/>
-              </a:lnSpc>
-              <a:buNone/>
-            </a:pPr>
-            <a:r>
-              <a:rPr lang="en-US" sz="1150" dirty="0">
-                <a:solidFill>
-                  <a:srgbClr val="4D5A68"/>
+              <a:t>Service layer and guard</a:t>
+            </a:r>
+            <a:endParaRPr lang="en-US" sz="1150" dirty="0"/>
+          </a:p>
+        </p:txBody>
+      </p:sp>
+      <p:sp>
+        <p:nvSpPr>
+          <p:cNvPr id="8" name="Text 6"/>
+          <p:cNvSpPr txBox="1"/>
+          <p:nvPr/>
+        </p:nvSpPr>
+        <p:spPr>
+          <a:xfrm>
+            <a:off x="5248656" y="1499616"/>
+            <a:ext cx="530352" cy="585216"/>
+          </a:xfrm>
+          <a:prstGeom prst="rect">
+            <a:avLst/>
+          </a:prstGeom>
+          <a:noFill/>
+          <a:ln/>
+        </p:spPr>
+        <p:txBody>
+          <a:bodyPr wrap="square" lIns="0" tIns="0" rIns="0" bIns="0" rtlCol="0" anchor="ctr"/>
+          <a:lstStyle/>
+          <a:p>
+            <a:pPr algn="r" indent="0" marL="0">
+              <a:buNone/>
+            </a:pPr>
+            <a:r>
+              <a:rPr lang="en-US" sz="1150" b="1" dirty="0">
+                <a:solidFill>
+                  <a:srgbClr val="7B8794"/>
                 </a:solidFill>
                 <a:latin typeface="Calibri" pitchFamily="34" charset="0"/>
                 <a:ea typeface="Calibri" pitchFamily="34" charset="-122"/>
                 <a:cs typeface="Calibri" pitchFamily="34" charset="-120"/>
               </a:rPr>
-              <a:t>Move authorization, dual control, audit and metrics out of the dispatcher into a guard both transports call.</a:t>
+              <a:t>—</a:t>
             </a:r>
             <a:endParaRPr lang="en-US" sz="1150" dirty="0"/>
-          </a:p>
-        </p:txBody>
-      </p:sp>
-      <p:sp>
-        <p:nvSpPr>
-          <p:cNvPr id="8" name="Text 6"/>
-          <p:cNvSpPr txBox="1"/>
-          <p:nvPr/>
-        </p:nvSpPr>
-        <p:spPr>
-          <a:xfrm>
-            <a:off x="804672" y="3346704"/>
-            <a:ext cx="3044952" cy="548640"/>
-          </a:xfrm>
-          <a:prstGeom prst="rect">
-            <a:avLst/>
-          </a:prstGeom>
-          <a:noFill/>
-          <a:ln/>
-        </p:spPr>
-        <p:txBody>
-          <a:bodyPr wrap="square" lIns="0" tIns="0" rIns="0" bIns="0" rtlCol="0" anchor="ctr"/>
-          <a:lstStyle/>
-          <a:p>
-            <a:pPr indent="0" marL="0">
-              <a:buNone/>
-            </a:pPr>
-            <a:r>
-              <a:rPr lang="en-US" sz="1050" i="1" dirty="0">
-                <a:solidFill>
-                  <a:srgbClr val="1F7A43"/>
-                </a:solidFill>
-                <a:latin typeface="Calibri" pitchFamily="34" charset="0"/>
-                <a:ea typeface="Calibri" pitchFamily="34" charset="-122"/>
-                <a:cs typeface="Calibri" pitchFamily="34" charset="-120"/>
-              </a:rPr>
-              <a:t>Gate: pure refactor — all 816 tests pass unchanged, no new surface.</a:t>
-            </a:r>
-            <a:endParaRPr lang="en-US" sz="1050" dirty="0"/>
           </a:p>
         </p:txBody>
       </p:sp>
@@ -9950,12 +10136,37 @@
         </p:nvSpPr>
         <p:spPr>
           <a:xfrm>
-            <a:off x="4334256" y="1481328"/>
-            <a:ext cx="3520440" cy="2487168"/>
+            <a:off x="566928" y="2157984"/>
+            <a:ext cx="82296" cy="585216"/>
+          </a:xfrm>
+          <a:prstGeom prst="rect">
+            <a:avLst/>
+          </a:prstGeom>
+          <a:solidFill>
+            <a:srgbClr val="1A3A5C"/>
+          </a:solidFill>
+          <a:ln w="12700">
+            <a:solidFill>
+              <a:srgbClr val="1A3A5C"/>
+            </a:solidFill>
+            <a:prstDash val="solid"/>
+          </a:ln>
+        </p:spPr>
+      </p:sp>
+      <p:sp>
+        <p:nvSpPr>
+          <p:cNvPr id="10" name="Shape 8"/>
+          <p:cNvSpPr/>
+          <p:nvPr/>
+        </p:nvSpPr>
+        <p:spPr>
+          <a:xfrm>
+            <a:off x="649224" y="2157984"/>
+            <a:ext cx="5312664" cy="585216"/>
           </a:xfrm>
           <a:prstGeom prst="roundRect">
             <a:avLst>
-              <a:gd name="adj" fmla="val 2206"/>
+              <a:gd name="adj" fmla="val 6250"/>
             </a:avLst>
           </a:prstGeom>
           <a:solidFill>
@@ -9967,25 +10178,18 @@
             </a:solidFill>
             <a:prstDash val="solid"/>
           </a:ln>
-          <a:effectLst>
-            <a:outerShdw sx="100000" sy="100000" kx="0" ky="0" algn="bl" rotWithShape="0" blurRad="127000" dist="25400" dir="5400000">
-              <a:srgbClr val="8C9AA8">
-                <a:alpha val="22000"/>
-              </a:srgbClr>
-            </a:outerShdw>
-          </a:effectLst>
-        </p:spPr>
-      </p:sp>
-      <p:sp>
-        <p:nvSpPr>
-          <p:cNvPr id="10" name="Text 8"/>
-          <p:cNvSpPr txBox="1"/>
-          <p:nvPr/>
-        </p:nvSpPr>
-        <p:spPr>
-          <a:xfrm>
-            <a:off x="4572000" y="1682496"/>
-            <a:ext cx="3044952" cy="201168"/>
+        </p:spPr>
+      </p:sp>
+      <p:sp>
+        <p:nvSpPr>
+          <p:cNvPr id="11" name="Text 9"/>
+          <p:cNvSpPr txBox="1"/>
+          <p:nvPr/>
+        </p:nvSpPr>
+        <p:spPr>
+          <a:xfrm>
+            <a:off x="768096" y="2157984"/>
+            <a:ext cx="365760" cy="585216"/>
           </a:xfrm>
           <a:prstGeom prst="rect">
             <a:avLst/>
@@ -10001,7 +10205,46 @@
               <a:buNone/>
             </a:pPr>
             <a:r>
-              <a:rPr lang="en-US" sz="1000" b="1" spc="160" kern="0" dirty="0">
+              <a:rPr lang="en-US" sz="1500" b="1" dirty="0">
+                <a:solidFill>
+                  <a:srgbClr val="C8952B"/>
+                </a:solidFill>
+                <a:latin typeface="Cambria" pitchFamily="34" charset="0"/>
+                <a:ea typeface="Cambria" pitchFamily="34" charset="-122"/>
+                <a:cs typeface="Cambria" pitchFamily="34" charset="-120"/>
+              </a:rPr>
+              <a:t>2</a:t>
+            </a:r>
+            <a:endParaRPr lang="en-US" sz="1500" dirty="0"/>
+          </a:p>
+        </p:txBody>
+      </p:sp>
+      <p:sp>
+        <p:nvSpPr>
+          <p:cNvPr id="12" name="Text 10"/>
+          <p:cNvSpPr txBox="1"/>
+          <p:nvPr/>
+        </p:nvSpPr>
+        <p:spPr>
+          <a:xfrm>
+            <a:off x="1188720" y="2157984"/>
+            <a:ext cx="3977640" cy="585216"/>
+          </a:xfrm>
+          <a:prstGeom prst="rect">
+            <a:avLst/>
+          </a:prstGeom>
+          <a:noFill/>
+          <a:ln/>
+        </p:spPr>
+        <p:txBody>
+          <a:bodyPr wrap="square" lIns="0" tIns="0" rIns="0" bIns="0" rtlCol="0" anchor="ctr"/>
+          <a:lstStyle/>
+          <a:p>
+            <a:pPr indent="0" marL="0">
+              <a:buNone/>
+            </a:pPr>
+            <a:r>
+              <a:rPr lang="en-US" sz="1150" dirty="0">
                 <a:solidFill>
                   <a:srgbClr val="1A3A5C"/>
                 </a:solidFill>
@@ -10009,129 +10252,48 @@
                 <a:ea typeface="Calibri" pitchFamily="34" charset="-122"/>
                 <a:cs typeface="Calibri" pitchFamily="34" charset="-120"/>
               </a:rPr>
-              <a:t>WAVE 6.2</a:t>
-            </a:r>
-            <a:endParaRPr lang="en-US" sz="1000" dirty="0"/>
-          </a:p>
-        </p:txBody>
-      </p:sp>
-      <p:sp>
-        <p:nvSpPr>
-          <p:cNvPr id="11" name="Text 9"/>
-          <p:cNvSpPr txBox="1"/>
-          <p:nvPr/>
-        </p:nvSpPr>
-        <p:spPr>
-          <a:xfrm>
-            <a:off x="4572000" y="1956816"/>
-            <a:ext cx="3044952" cy="310896"/>
-          </a:xfrm>
-          <a:prstGeom prst="rect">
-            <a:avLst/>
-          </a:prstGeom>
-          <a:noFill/>
-          <a:ln/>
-        </p:spPr>
-        <p:txBody>
-          <a:bodyPr wrap="square" lIns="0" tIns="0" rIns="0" bIns="0" rtlCol="0" anchor="ctr"/>
-          <a:lstStyle/>
-          <a:p>
-            <a:pPr indent="0" marL="0">
-              <a:buNone/>
-            </a:pPr>
-            <a:r>
-              <a:rPr lang="en-US" sz="1500" b="1" dirty="0">
-                <a:solidFill>
-                  <a:srgbClr val="1A3A5C"/>
-                </a:solidFill>
-                <a:latin typeface="Cambria" pitchFamily="34" charset="0"/>
-                <a:ea typeface="Cambria" pitchFamily="34" charset="-122"/>
-                <a:cs typeface="Cambria" pitchFamily="34" charset="-120"/>
-              </a:rPr>
-              <a:t>Read-only REST + sessions</a:t>
-            </a:r>
-            <a:endParaRPr lang="en-US" sz="1500" dirty="0"/>
-          </a:p>
-        </p:txBody>
-      </p:sp>
-      <p:sp>
-        <p:nvSpPr>
-          <p:cNvPr id="12" name="Text 10"/>
-          <p:cNvSpPr txBox="1"/>
-          <p:nvPr/>
-        </p:nvSpPr>
-        <p:spPr>
-          <a:xfrm>
-            <a:off x="4572000" y="2340864"/>
-            <a:ext cx="3044952" cy="768096"/>
-          </a:xfrm>
-          <a:prstGeom prst="rect">
-            <a:avLst/>
-          </a:prstGeom>
-          <a:noFill/>
-          <a:ln/>
-        </p:spPr>
-        <p:txBody>
-          <a:bodyPr wrap="square" lIns="0" tIns="0" rIns="0" bIns="0" rtlCol="0" anchor="t"/>
-          <a:lstStyle/>
-          <a:p>
-            <a:pPr indent="0" marL="0">
-              <a:lnSpc>
-                <a:spcPts val="1700"/>
-              </a:lnSpc>
-              <a:buNone/>
-            </a:pPr>
-            <a:r>
-              <a:rPr lang="en-US" sz="1150" dirty="0">
-                <a:solidFill>
-                  <a:srgbClr val="4D5A68"/>
+              <a:t>Query and reporting layer</a:t>
+            </a:r>
+            <a:endParaRPr lang="en-US" sz="1150" dirty="0"/>
+          </a:p>
+        </p:txBody>
+      </p:sp>
+      <p:sp>
+        <p:nvSpPr>
+          <p:cNvPr id="13" name="Text 11"/>
+          <p:cNvSpPr txBox="1"/>
+          <p:nvPr/>
+        </p:nvSpPr>
+        <p:spPr>
+          <a:xfrm>
+            <a:off x="5248656" y="2157984"/>
+            <a:ext cx="530352" cy="585216"/>
+          </a:xfrm>
+          <a:prstGeom prst="rect">
+            <a:avLst/>
+          </a:prstGeom>
+          <a:noFill/>
+          <a:ln/>
+        </p:spPr>
+        <p:txBody>
+          <a:bodyPr wrap="square" lIns="0" tIns="0" rIns="0" bIns="0" rtlCol="0" anchor="ctr"/>
+          <a:lstStyle/>
+          <a:p>
+            <a:pPr algn="r" indent="0" marL="0">
+              <a:buNone/>
+            </a:pPr>
+            <a:r>
+              <a:rPr lang="en-US" sz="1150" b="1" dirty="0">
+                <a:solidFill>
+                  <a:srgbClr val="1F7A43"/>
                 </a:solidFill>
                 <a:latin typeface="Calibri" pitchFamily="34" charset="0"/>
                 <a:ea typeface="Calibri" pitchFamily="34" charset="-122"/>
                 <a:cs typeface="Calibri" pitchFamily="34" charset="-120"/>
               </a:rPr>
-              <a:t>Login, tokens, key inventory with paging and sort, audit search, approval queue, expiry reports.</a:t>
+              <a:t>+2</a:t>
             </a:r>
             <a:endParaRPr lang="en-US" sz="1150" dirty="0"/>
-          </a:p>
-        </p:txBody>
-      </p:sp>
-      <p:sp>
-        <p:nvSpPr>
-          <p:cNvPr id="13" name="Text 11"/>
-          <p:cNvSpPr txBox="1"/>
-          <p:nvPr/>
-        </p:nvSpPr>
-        <p:spPr>
-          <a:xfrm>
-            <a:off x="4572000" y="3346704"/>
-            <a:ext cx="3044952" cy="548640"/>
-          </a:xfrm>
-          <a:prstGeom prst="rect">
-            <a:avLst/>
-          </a:prstGeom>
-          <a:noFill/>
-          <a:ln/>
-        </p:spPr>
-        <p:txBody>
-          <a:bodyPr wrap="square" lIns="0" tIns="0" rIns="0" bIns="0" rtlCol="0" anchor="ctr"/>
-          <a:lstStyle/>
-          <a:p>
-            <a:pPr indent="0" marL="0">
-              <a:buNone/>
-            </a:pPr>
-            <a:r>
-              <a:rPr lang="en-US" sz="1050" i="1" dirty="0">
-                <a:solidFill>
-                  <a:srgbClr val="1F7A43"/>
-                </a:solidFill>
-                <a:latin typeface="Calibri" pitchFamily="34" charset="0"/>
-                <a:ea typeface="Calibri" pitchFamily="34" charset="-122"/>
-                <a:cs typeface="Calibri" pitchFamily="34" charset="-120"/>
-              </a:rPr>
-              <a:t>Gate: a read-only console renders real data and can change nothing.</a:t>
-            </a:r>
-            <a:endParaRPr lang="en-US" sz="1050" dirty="0"/>
           </a:p>
         </p:txBody>
       </p:sp>
@@ -10143,12 +10305,37 @@
         </p:nvSpPr>
         <p:spPr>
           <a:xfrm>
-            <a:off x="8101584" y="1481328"/>
-            <a:ext cx="3520440" cy="2487168"/>
+            <a:off x="566928" y="2816352"/>
+            <a:ext cx="82296" cy="585216"/>
+          </a:xfrm>
+          <a:prstGeom prst="rect">
+            <a:avLst/>
+          </a:prstGeom>
+          <a:solidFill>
+            <a:srgbClr val="2E6DA4"/>
+          </a:solidFill>
+          <a:ln w="12700">
+            <a:solidFill>
+              <a:srgbClr val="2E6DA4"/>
+            </a:solidFill>
+            <a:prstDash val="solid"/>
+          </a:ln>
+        </p:spPr>
+      </p:sp>
+      <p:sp>
+        <p:nvSpPr>
+          <p:cNvPr id="15" name="Shape 13"/>
+          <p:cNvSpPr/>
+          <p:nvPr/>
+        </p:nvSpPr>
+        <p:spPr>
+          <a:xfrm>
+            <a:off x="649224" y="2816352"/>
+            <a:ext cx="5312664" cy="585216"/>
           </a:xfrm>
           <a:prstGeom prst="roundRect">
             <a:avLst>
-              <a:gd name="adj" fmla="val 2206"/>
+              <a:gd name="adj" fmla="val 6250"/>
             </a:avLst>
           </a:prstGeom>
           <a:solidFill>
@@ -10160,25 +10347,18 @@
             </a:solidFill>
             <a:prstDash val="solid"/>
           </a:ln>
-          <a:effectLst>
-            <a:outerShdw sx="100000" sy="100000" kx="0" ky="0" algn="bl" rotWithShape="0" blurRad="127000" dist="25400" dir="5400000">
-              <a:srgbClr val="8C9AA8">
-                <a:alpha val="22000"/>
-              </a:srgbClr>
-            </a:outerShdw>
-          </a:effectLst>
-        </p:spPr>
-      </p:sp>
-      <p:sp>
-        <p:nvSpPr>
-          <p:cNvPr id="15" name="Text 13"/>
-          <p:cNvSpPr txBox="1"/>
-          <p:nvPr/>
-        </p:nvSpPr>
-        <p:spPr>
-          <a:xfrm>
-            <a:off x="8339328" y="1682496"/>
-            <a:ext cx="3044952" cy="201168"/>
+        </p:spPr>
+      </p:sp>
+      <p:sp>
+        <p:nvSpPr>
+          <p:cNvPr id="16" name="Text 14"/>
+          <p:cNvSpPr txBox="1"/>
+          <p:nvPr/>
+        </p:nvSpPr>
+        <p:spPr>
+          <a:xfrm>
+            <a:off x="768096" y="2816352"/>
+            <a:ext cx="365760" cy="585216"/>
           </a:xfrm>
           <a:prstGeom prst="rect">
             <a:avLst/>
@@ -10194,7 +10374,46 @@
               <a:buNone/>
             </a:pPr>
             <a:r>
-              <a:rPr lang="en-US" sz="1000" b="1" spc="160" kern="0" dirty="0">
+              <a:rPr lang="en-US" sz="1500" b="1" dirty="0">
+                <a:solidFill>
+                  <a:srgbClr val="C8952B"/>
+                </a:solidFill>
+                <a:latin typeface="Cambria" pitchFamily="34" charset="0"/>
+                <a:ea typeface="Cambria" pitchFamily="34" charset="-122"/>
+                <a:cs typeface="Cambria" pitchFamily="34" charset="-120"/>
+              </a:rPr>
+              <a:t>3</a:t>
+            </a:r>
+            <a:endParaRPr lang="en-US" sz="1500" dirty="0"/>
+          </a:p>
+        </p:txBody>
+      </p:sp>
+      <p:sp>
+        <p:nvSpPr>
+          <p:cNvPr id="17" name="Text 15"/>
+          <p:cNvSpPr txBox="1"/>
+          <p:nvPr/>
+        </p:nvSpPr>
+        <p:spPr>
+          <a:xfrm>
+            <a:off x="1188720" y="2816352"/>
+            <a:ext cx="3977640" cy="585216"/>
+          </a:xfrm>
+          <a:prstGeom prst="rect">
+            <a:avLst/>
+          </a:prstGeom>
+          <a:noFill/>
+          <a:ln/>
+        </p:spPr>
+        <p:txBody>
+          <a:bodyPr wrap="square" lIns="0" tIns="0" rIns="0" bIns="0" rtlCol="0" anchor="ctr"/>
+          <a:lstStyle/>
+          <a:p>
+            <a:pPr indent="0" marL="0">
+              <a:buNone/>
+            </a:pPr>
+            <a:r>
+              <a:rPr lang="en-US" sz="1150" dirty="0">
                 <a:solidFill>
                   <a:srgbClr val="1A3A5C"/>
                 </a:solidFill>
@@ -10202,129 +10421,48 @@
                 <a:ea typeface="Calibri" pitchFamily="34" charset="-122"/>
                 <a:cs typeface="Calibri" pitchFamily="34" charset="-120"/>
               </a:rPr>
-              <a:t>WAVE 6.3</a:t>
-            </a:r>
-            <a:endParaRPr lang="en-US" sz="1000" dirty="0"/>
-          </a:p>
-        </p:txBody>
-      </p:sp>
-      <p:sp>
-        <p:nvSpPr>
-          <p:cNvPr id="16" name="Text 14"/>
-          <p:cNvSpPr txBox="1"/>
-          <p:nvPr/>
-        </p:nvSpPr>
-        <p:spPr>
-          <a:xfrm>
-            <a:off x="8339328" y="1956816"/>
-            <a:ext cx="3044952" cy="310896"/>
-          </a:xfrm>
-          <a:prstGeom prst="rect">
-            <a:avLst/>
-          </a:prstGeom>
-          <a:noFill/>
-          <a:ln/>
-        </p:spPr>
-        <p:txBody>
-          <a:bodyPr wrap="square" lIns="0" tIns="0" rIns="0" bIns="0" rtlCol="0" anchor="ctr"/>
-          <a:lstStyle/>
-          <a:p>
-            <a:pPr indent="0" marL="0">
-              <a:buNone/>
-            </a:pPr>
-            <a:r>
-              <a:rPr lang="en-US" sz="1500" b="1" dirty="0">
-                <a:solidFill>
-                  <a:srgbClr val="1A3A5C"/>
-                </a:solidFill>
-                <a:latin typeface="Cambria" pitchFamily="34" charset="0"/>
-                <a:ea typeface="Cambria" pitchFamily="34" charset="-122"/>
-                <a:cs typeface="Cambria" pitchFamily="34" charset="-120"/>
-              </a:rPr>
-              <a:t>Write endpoints</a:t>
-            </a:r>
-            <a:endParaRPr lang="en-US" sz="1500" dirty="0"/>
-          </a:p>
-        </p:txBody>
-      </p:sp>
-      <p:sp>
-        <p:nvSpPr>
-          <p:cNvPr id="17" name="Text 15"/>
-          <p:cNvSpPr txBox="1"/>
-          <p:nvPr/>
-        </p:nvSpPr>
-        <p:spPr>
-          <a:xfrm>
-            <a:off x="8339328" y="2340864"/>
-            <a:ext cx="3044952" cy="768096"/>
-          </a:xfrm>
-          <a:prstGeom prst="rect">
-            <a:avLst/>
-          </a:prstGeom>
-          <a:noFill/>
-          <a:ln/>
-        </p:spPr>
-        <p:txBody>
-          <a:bodyPr wrap="square" lIns="0" tIns="0" rIns="0" bIns="0" rtlCol="0" anchor="t"/>
-          <a:lstStyle/>
-          <a:p>
-            <a:pPr indent="0" marL="0">
-              <a:lnSpc>
-                <a:spcPts val="1700"/>
-              </a:lnSpc>
-              <a:buNone/>
-            </a:pPr>
-            <a:r>
-              <a:rPr lang="en-US" sz="1150" dirty="0">
-                <a:solidFill>
-                  <a:srgbClr val="4D5A68"/>
+              <a:t>HTTP transport, sessions and service accounts</a:t>
+            </a:r>
+            <a:endParaRPr lang="en-US" sz="1150" dirty="0"/>
+          </a:p>
+        </p:txBody>
+      </p:sp>
+      <p:sp>
+        <p:nvSpPr>
+          <p:cNvPr id="18" name="Text 16"/>
+          <p:cNvSpPr txBox="1"/>
+          <p:nvPr/>
+        </p:nvSpPr>
+        <p:spPr>
+          <a:xfrm>
+            <a:off x="5248656" y="2816352"/>
+            <a:ext cx="530352" cy="585216"/>
+          </a:xfrm>
+          <a:prstGeom prst="rect">
+            <a:avLst/>
+          </a:prstGeom>
+          <a:noFill/>
+          <a:ln/>
+        </p:spPr>
+        <p:txBody>
+          <a:bodyPr wrap="square" lIns="0" tIns="0" rIns="0" bIns="0" rtlCol="0" anchor="ctr"/>
+          <a:lstStyle/>
+          <a:p>
+            <a:pPr algn="r" indent="0" marL="0">
+              <a:buNone/>
+            </a:pPr>
+            <a:r>
+              <a:rPr lang="en-US" sz="1150" b="1" dirty="0">
+                <a:solidFill>
+                  <a:srgbClr val="1F7A43"/>
                 </a:solidFill>
                 <a:latin typeface="Calibri" pitchFamily="34" charset="0"/>
                 <a:ea typeface="Calibri" pitchFamily="34" charset="-122"/>
                 <a:cs typeface="Calibri" pitchFamily="34" charset="-120"/>
               </a:rPr>
-              <a:t>Key lifecycle, grants, groups, cryptoperiods — all through the guard, so governance applies automatically.</a:t>
+              <a:t>+3</a:t>
             </a:r>
             <a:endParaRPr lang="en-US" sz="1150" dirty="0"/>
-          </a:p>
-        </p:txBody>
-      </p:sp>
-      <p:sp>
-        <p:nvSpPr>
-          <p:cNvPr id="18" name="Text 16"/>
-          <p:cNvSpPr txBox="1"/>
-          <p:nvPr/>
-        </p:nvSpPr>
-        <p:spPr>
-          <a:xfrm>
-            <a:off x="8339328" y="3346704"/>
-            <a:ext cx="3044952" cy="548640"/>
-          </a:xfrm>
-          <a:prstGeom prst="rect">
-            <a:avLst/>
-          </a:prstGeom>
-          <a:noFill/>
-          <a:ln/>
-        </p:spPr>
-        <p:txBody>
-          <a:bodyPr wrap="square" lIns="0" tIns="0" rIns="0" bIns="0" rtlCol="0" anchor="ctr"/>
-          <a:lstStyle/>
-          <a:p>
-            <a:pPr indent="0" marL="0">
-              <a:buNone/>
-            </a:pPr>
-            <a:r>
-              <a:rPr lang="en-US" sz="1050" i="1" dirty="0">
-                <a:solidFill>
-                  <a:srgbClr val="1F7A43"/>
-                </a:solidFill>
-                <a:latin typeface="Calibri" pitchFamily="34" charset="0"/>
-                <a:ea typeface="Calibri" pitchFamily="34" charset="-122"/>
-                <a:cs typeface="Calibri" pitchFamily="34" charset="-120"/>
-              </a:rPr>
-              <a:t>Gate: a REST Destroy under dual control is refused exactly as the KMIP one is.</a:t>
-            </a:r>
-            <a:endParaRPr lang="en-US" sz="1050" dirty="0"/>
           </a:p>
         </p:txBody>
       </p:sp>
@@ -10336,12 +10474,37 @@
         </p:nvSpPr>
         <p:spPr>
           <a:xfrm>
-            <a:off x="566928" y="4096512"/>
-            <a:ext cx="3520440" cy="2487168"/>
+            <a:off x="566928" y="3474720"/>
+            <a:ext cx="82296" cy="585216"/>
+          </a:xfrm>
+          <a:prstGeom prst="rect">
+            <a:avLst/>
+          </a:prstGeom>
+          <a:solidFill>
+            <a:srgbClr val="2E6DA4"/>
+          </a:solidFill>
+          <a:ln w="12700">
+            <a:solidFill>
+              <a:srgbClr val="2E6DA4"/>
+            </a:solidFill>
+            <a:prstDash val="solid"/>
+          </a:ln>
+        </p:spPr>
+      </p:sp>
+      <p:sp>
+        <p:nvSpPr>
+          <p:cNvPr id="20" name="Shape 18"/>
+          <p:cNvSpPr/>
+          <p:nvPr/>
+        </p:nvSpPr>
+        <p:spPr>
+          <a:xfrm>
+            <a:off x="649224" y="3474720"/>
+            <a:ext cx="5312664" cy="585216"/>
           </a:xfrm>
           <a:prstGeom prst="roundRect">
             <a:avLst>
-              <a:gd name="adj" fmla="val 2206"/>
+              <a:gd name="adj" fmla="val 6250"/>
             </a:avLst>
           </a:prstGeom>
           <a:solidFill>
@@ -10353,25 +10516,18 @@
             </a:solidFill>
             <a:prstDash val="solid"/>
           </a:ln>
-          <a:effectLst>
-            <a:outerShdw sx="100000" sy="100000" kx="0" ky="0" algn="bl" rotWithShape="0" blurRad="127000" dist="25400" dir="5400000">
-              <a:srgbClr val="8C9AA8">
-                <a:alpha val="22000"/>
-              </a:srgbClr>
-            </a:outerShdw>
-          </a:effectLst>
-        </p:spPr>
-      </p:sp>
-      <p:sp>
-        <p:nvSpPr>
-          <p:cNvPr id="20" name="Text 18"/>
-          <p:cNvSpPr txBox="1"/>
-          <p:nvPr/>
-        </p:nvSpPr>
-        <p:spPr>
-          <a:xfrm>
-            <a:off x="804672" y="4297680"/>
-            <a:ext cx="3044952" cy="201168"/>
+        </p:spPr>
+      </p:sp>
+      <p:sp>
+        <p:nvSpPr>
+          <p:cNvPr id="21" name="Text 19"/>
+          <p:cNvSpPr txBox="1"/>
+          <p:nvPr/>
+        </p:nvSpPr>
+        <p:spPr>
+          <a:xfrm>
+            <a:off x="768096" y="3474720"/>
+            <a:ext cx="365760" cy="585216"/>
           </a:xfrm>
           <a:prstGeom prst="rect">
             <a:avLst/>
@@ -10387,137 +10543,95 @@
               <a:buNone/>
             </a:pPr>
             <a:r>
-              <a:rPr lang="en-US" sz="1000" b="1" spc="160" kern="0" dirty="0">
-                <a:solidFill>
-                  <a:srgbClr val="2E6DA4"/>
+              <a:rPr lang="en-US" sz="1500" b="1" dirty="0">
+                <a:solidFill>
+                  <a:srgbClr val="C8952B"/>
+                </a:solidFill>
+                <a:latin typeface="Cambria" pitchFamily="34" charset="0"/>
+                <a:ea typeface="Cambria" pitchFamily="34" charset="-122"/>
+                <a:cs typeface="Cambria" pitchFamily="34" charset="-120"/>
+              </a:rPr>
+              <a:t>4</a:t>
+            </a:r>
+            <a:endParaRPr lang="en-US" sz="1500" dirty="0"/>
+          </a:p>
+        </p:txBody>
+      </p:sp>
+      <p:sp>
+        <p:nvSpPr>
+          <p:cNvPr id="22" name="Text 20"/>
+          <p:cNvSpPr txBox="1"/>
+          <p:nvPr/>
+        </p:nvSpPr>
+        <p:spPr>
+          <a:xfrm>
+            <a:off x="1188720" y="3474720"/>
+            <a:ext cx="3977640" cy="585216"/>
+          </a:xfrm>
+          <a:prstGeom prst="rect">
+            <a:avLst/>
+          </a:prstGeom>
+          <a:noFill/>
+          <a:ln/>
+        </p:spPr>
+        <p:txBody>
+          <a:bodyPr wrap="square" lIns="0" tIns="0" rIns="0" bIns="0" rtlCol="0" anchor="ctr"/>
+          <a:lstStyle/>
+          <a:p>
+            <a:pPr indent="0" marL="0">
+              <a:buNone/>
+            </a:pPr>
+            <a:r>
+              <a:rPr lang="en-US" sz="1150" dirty="0">
+                <a:solidFill>
+                  <a:srgbClr val="1A3A5C"/>
                 </a:solidFill>
                 <a:latin typeface="Calibri" pitchFamily="34" charset="0"/>
                 <a:ea typeface="Calibri" pitchFamily="34" charset="-122"/>
                 <a:cs typeface="Calibri" pitchFamily="34" charset="-120"/>
               </a:rPr>
-              <a:t>WAVE 6.4</a:t>
-            </a:r>
-            <a:endParaRPr lang="en-US" sz="1000" dirty="0"/>
-          </a:p>
-        </p:txBody>
-      </p:sp>
-      <p:sp>
-        <p:nvSpPr>
-          <p:cNvPr id="21" name="Text 19"/>
-          <p:cNvSpPr txBox="1"/>
-          <p:nvPr/>
-        </p:nvSpPr>
-        <p:spPr>
-          <a:xfrm>
-            <a:off x="804672" y="4572000"/>
-            <a:ext cx="3044952" cy="310896"/>
-          </a:xfrm>
-          <a:prstGeom prst="rect">
-            <a:avLst/>
-          </a:prstGeom>
-          <a:noFill/>
-          <a:ln/>
-        </p:spPr>
-        <p:txBody>
-          <a:bodyPr wrap="square" lIns="0" tIns="0" rIns="0" bIns="0" rtlCol="0" anchor="ctr"/>
-          <a:lstStyle/>
-          <a:p>
-            <a:pPr indent="0" marL="0">
-              <a:buNone/>
-            </a:pPr>
-            <a:r>
-              <a:rPr lang="en-US" sz="1500" b="1" dirty="0">
-                <a:solidFill>
-                  <a:srgbClr val="1A3A5C"/>
-                </a:solidFill>
-                <a:latin typeface="Cambria" pitchFamily="34" charset="0"/>
-                <a:ea typeface="Cambria" pitchFamily="34" charset="-122"/>
-                <a:cs typeface="Cambria" pitchFamily="34" charset="-120"/>
-              </a:rPr>
-              <a:t>Console</a:t>
-            </a:r>
-            <a:endParaRPr lang="en-US" sz="1500" dirty="0"/>
-          </a:p>
-        </p:txBody>
-      </p:sp>
-      <p:sp>
-        <p:nvSpPr>
-          <p:cNvPr id="22" name="Text 20"/>
-          <p:cNvSpPr txBox="1"/>
-          <p:nvPr/>
-        </p:nvSpPr>
-        <p:spPr>
-          <a:xfrm>
-            <a:off x="804672" y="4956048"/>
-            <a:ext cx="3044952" cy="768096"/>
-          </a:xfrm>
-          <a:prstGeom prst="rect">
-            <a:avLst/>
-          </a:prstGeom>
-          <a:noFill/>
-          <a:ln/>
-        </p:spPr>
-        <p:txBody>
-          <a:bodyPr wrap="square" lIns="0" tIns="0" rIns="0" bIns="0" rtlCol="0" anchor="t"/>
-          <a:lstStyle/>
-          <a:p>
-            <a:pPr indent="0" marL="0">
-              <a:lnSpc>
-                <a:spcPts val="1700"/>
-              </a:lnSpc>
-              <a:buNone/>
-            </a:pPr>
-            <a:r>
-              <a:rPr lang="en-US" sz="1150" dirty="0">
-                <a:solidFill>
-                  <a:srgbClr val="4D5A68"/>
+              <a:t>Read endpoints</a:t>
+            </a:r>
+            <a:endParaRPr lang="en-US" sz="1150" dirty="0"/>
+          </a:p>
+        </p:txBody>
+      </p:sp>
+      <p:sp>
+        <p:nvSpPr>
+          <p:cNvPr id="23" name="Text 21"/>
+          <p:cNvSpPr txBox="1"/>
+          <p:nvPr/>
+        </p:nvSpPr>
+        <p:spPr>
+          <a:xfrm>
+            <a:off x="5248656" y="3474720"/>
+            <a:ext cx="530352" cy="585216"/>
+          </a:xfrm>
+          <a:prstGeom prst="rect">
+            <a:avLst/>
+          </a:prstGeom>
+          <a:noFill/>
+          <a:ln/>
+        </p:spPr>
+        <p:txBody>
+          <a:bodyPr wrap="square" lIns="0" tIns="0" rIns="0" bIns="0" rtlCol="0" anchor="ctr"/>
+          <a:lstStyle/>
+          <a:p>
+            <a:pPr algn="r" indent="0" marL="0">
+              <a:buNone/>
+            </a:pPr>
+            <a:r>
+              <a:rPr lang="en-US" sz="1150" b="1" dirty="0">
+                <a:solidFill>
+                  <a:srgbClr val="7B8794"/>
                 </a:solidFill>
                 <a:latin typeface="Calibri" pitchFamily="34" charset="0"/>
                 <a:ea typeface="Calibri" pitchFamily="34" charset="-122"/>
                 <a:cs typeface="Calibri" pitchFamily="34" charset="-120"/>
               </a:rPr>
-              <a:t>A single-page client of the API. No privileged back door; the console can do nothing the API forbids.</a:t>
+              <a:t>—</a:t>
             </a:r>
             <a:endParaRPr lang="en-US" sz="1150" dirty="0"/>
-          </a:p>
-        </p:txBody>
-      </p:sp>
-      <p:sp>
-        <p:nvSpPr>
-          <p:cNvPr id="23" name="Text 21"/>
-          <p:cNvSpPr txBox="1"/>
-          <p:nvPr/>
-        </p:nvSpPr>
-        <p:spPr>
-          <a:xfrm>
-            <a:off x="804672" y="5961888"/>
-            <a:ext cx="3044952" cy="548640"/>
-          </a:xfrm>
-          <a:prstGeom prst="rect">
-            <a:avLst/>
-          </a:prstGeom>
-          <a:noFill/>
-          <a:ln/>
-        </p:spPr>
-        <p:txBody>
-          <a:bodyPr wrap="square" lIns="0" tIns="0" rIns="0" bIns="0" rtlCol="0" anchor="ctr"/>
-          <a:lstStyle/>
-          <a:p>
-            <a:pPr indent="0" marL="0">
-              <a:buNone/>
-            </a:pPr>
-            <a:r>
-              <a:rPr lang="en-US" sz="1050" i="1" dirty="0">
-                <a:solidFill>
-                  <a:srgbClr val="1F7A43"/>
-                </a:solidFill>
-                <a:latin typeface="Calibri" pitchFamily="34" charset="0"/>
-                <a:ea typeface="Calibri" pitchFamily="34" charset="-122"/>
-                <a:cs typeface="Calibri" pitchFamily="34" charset="-120"/>
-              </a:rPr>
-              <a:t>Gate: an operator completes a full day's work without the CLI.</a:t>
-            </a:r>
-            <a:endParaRPr lang="en-US" sz="1050" dirty="0"/>
           </a:p>
         </p:txBody>
       </p:sp>
@@ -10529,12 +10643,37 @@
         </p:nvSpPr>
         <p:spPr>
           <a:xfrm>
-            <a:off x="4334256" y="4096512"/>
-            <a:ext cx="3520440" cy="2487168"/>
+            <a:off x="566928" y="4133088"/>
+            <a:ext cx="82296" cy="585216"/>
+          </a:xfrm>
+          <a:prstGeom prst="rect">
+            <a:avLst/>
+          </a:prstGeom>
+          <a:solidFill>
+            <a:srgbClr val="2E6DA4"/>
+          </a:solidFill>
+          <a:ln w="12700">
+            <a:solidFill>
+              <a:srgbClr val="2E6DA4"/>
+            </a:solidFill>
+            <a:prstDash val="solid"/>
+          </a:ln>
+        </p:spPr>
+      </p:sp>
+      <p:sp>
+        <p:nvSpPr>
+          <p:cNvPr id="25" name="Shape 23"/>
+          <p:cNvSpPr/>
+          <p:nvPr/>
+        </p:nvSpPr>
+        <p:spPr>
+          <a:xfrm>
+            <a:off x="649224" y="4133088"/>
+            <a:ext cx="5312664" cy="585216"/>
           </a:xfrm>
           <a:prstGeom prst="roundRect">
             <a:avLst>
-              <a:gd name="adj" fmla="val 2206"/>
+              <a:gd name="adj" fmla="val 6250"/>
             </a:avLst>
           </a:prstGeom>
           <a:solidFill>
@@ -10546,25 +10685,18 @@
             </a:solidFill>
             <a:prstDash val="solid"/>
           </a:ln>
-          <a:effectLst>
-            <a:outerShdw sx="100000" sy="100000" kx="0" ky="0" algn="bl" rotWithShape="0" blurRad="127000" dist="25400" dir="5400000">
-              <a:srgbClr val="8C9AA8">
-                <a:alpha val="22000"/>
-              </a:srgbClr>
-            </a:outerShdw>
-          </a:effectLst>
-        </p:spPr>
-      </p:sp>
-      <p:sp>
-        <p:nvSpPr>
-          <p:cNvPr id="25" name="Text 23"/>
-          <p:cNvSpPr txBox="1"/>
-          <p:nvPr/>
-        </p:nvSpPr>
-        <p:spPr>
-          <a:xfrm>
-            <a:off x="4572000" y="4297680"/>
-            <a:ext cx="3044952" cy="201168"/>
+        </p:spPr>
+      </p:sp>
+      <p:sp>
+        <p:nvSpPr>
+          <p:cNvPr id="26" name="Text 24"/>
+          <p:cNvSpPr txBox="1"/>
+          <p:nvPr/>
+        </p:nvSpPr>
+        <p:spPr>
+          <a:xfrm>
+            <a:off x="768096" y="4133088"/>
+            <a:ext cx="365760" cy="585216"/>
           </a:xfrm>
           <a:prstGeom prst="rect">
             <a:avLst/>
@@ -10580,137 +10712,95 @@
               <a:buNone/>
             </a:pPr>
             <a:r>
-              <a:rPr lang="en-US" sz="1000" b="1" spc="160" kern="0" dirty="0">
-                <a:solidFill>
-                  <a:srgbClr val="2E6DA4"/>
+              <a:rPr lang="en-US" sz="1500" b="1" dirty="0">
+                <a:solidFill>
+                  <a:srgbClr val="C8952B"/>
+                </a:solidFill>
+                <a:latin typeface="Cambria" pitchFamily="34" charset="0"/>
+                <a:ea typeface="Cambria" pitchFamily="34" charset="-122"/>
+                <a:cs typeface="Cambria" pitchFamily="34" charset="-120"/>
+              </a:rPr>
+              <a:t>5</a:t>
+            </a:r>
+            <a:endParaRPr lang="en-US" sz="1500" dirty="0"/>
+          </a:p>
+        </p:txBody>
+      </p:sp>
+      <p:sp>
+        <p:nvSpPr>
+          <p:cNvPr id="27" name="Text 25"/>
+          <p:cNvSpPr txBox="1"/>
+          <p:nvPr/>
+        </p:nvSpPr>
+        <p:spPr>
+          <a:xfrm>
+            <a:off x="1188720" y="4133088"/>
+            <a:ext cx="3977640" cy="585216"/>
+          </a:xfrm>
+          <a:prstGeom prst="rect">
+            <a:avLst/>
+          </a:prstGeom>
+          <a:noFill/>
+          <a:ln/>
+        </p:spPr>
+        <p:txBody>
+          <a:bodyPr wrap="square" lIns="0" tIns="0" rIns="0" bIns="0" rtlCol="0" anchor="ctr"/>
+          <a:lstStyle/>
+          <a:p>
+            <a:pPr indent="0" marL="0">
+              <a:buNone/>
+            </a:pPr>
+            <a:r>
+              <a:rPr lang="en-US" sz="1150" dirty="0">
+                <a:solidFill>
+                  <a:srgbClr val="1A3A5C"/>
                 </a:solidFill>
                 <a:latin typeface="Calibri" pitchFamily="34" charset="0"/>
                 <a:ea typeface="Calibri" pitchFamily="34" charset="-122"/>
                 <a:cs typeface="Calibri" pitchFamily="34" charset="-120"/>
               </a:rPr>
-              <a:t>WAVE 7.1</a:t>
-            </a:r>
-            <a:endParaRPr lang="en-US" sz="1000" dirty="0"/>
-          </a:p>
-        </p:txBody>
-      </p:sp>
-      <p:sp>
-        <p:nvSpPr>
-          <p:cNvPr id="26" name="Text 24"/>
-          <p:cNvSpPr txBox="1"/>
-          <p:nvPr/>
-        </p:nvSpPr>
-        <p:spPr>
-          <a:xfrm>
-            <a:off x="4572000" y="4572000"/>
-            <a:ext cx="3044952" cy="510540"/>
-          </a:xfrm>
-          <a:prstGeom prst="rect">
-            <a:avLst/>
-          </a:prstGeom>
-          <a:noFill/>
-          <a:ln/>
-        </p:spPr>
-        <p:txBody>
-          <a:bodyPr wrap="square" lIns="0" tIns="0" rIns="0" bIns="0" rtlCol="0" anchor="ctr"/>
-          <a:lstStyle/>
-          <a:p>
-            <a:pPr indent="0" marL="0">
-              <a:buNone/>
-            </a:pPr>
-            <a:r>
-              <a:rPr lang="en-US" sz="1500" b="1" dirty="0">
-                <a:solidFill>
-                  <a:srgbClr val="1A3A5C"/>
-                </a:solidFill>
-                <a:latin typeface="Cambria" pitchFamily="34" charset="0"/>
-                <a:ea typeface="Cambria" pitchFamily="34" charset="-122"/>
-                <a:cs typeface="Cambria" pitchFamily="34" charset="-120"/>
-              </a:rPr>
-              <a:t>Directory identity + service accounts</a:t>
-            </a:r>
-            <a:endParaRPr lang="en-US" sz="1500" dirty="0"/>
-          </a:p>
-        </p:txBody>
-      </p:sp>
-      <p:sp>
-        <p:nvSpPr>
-          <p:cNvPr id="27" name="Text 25"/>
-          <p:cNvSpPr txBox="1"/>
-          <p:nvPr/>
-        </p:nvSpPr>
-        <p:spPr>
-          <a:xfrm>
-            <a:off x="4572000" y="5155692"/>
-            <a:ext cx="3044952" cy="768096"/>
-          </a:xfrm>
-          <a:prstGeom prst="rect">
-            <a:avLst/>
-          </a:prstGeom>
-          <a:noFill/>
-          <a:ln/>
-        </p:spPr>
-        <p:txBody>
-          <a:bodyPr wrap="square" lIns="0" tIns="0" rIns="0" bIns="0" rtlCol="0" anchor="t"/>
-          <a:lstStyle/>
-          <a:p>
-            <a:pPr indent="0" marL="0">
-              <a:lnSpc>
-                <a:spcPts val="1700"/>
-              </a:lnSpc>
-              <a:buNone/>
-            </a:pPr>
-            <a:r>
-              <a:rPr lang="en-US" sz="1150" dirty="0">
-                <a:solidFill>
-                  <a:srgbClr val="4D5A68"/>
+              <a:t>Write endpoints, and the governance gaps</a:t>
+            </a:r>
+            <a:endParaRPr lang="en-US" sz="1150" dirty="0"/>
+          </a:p>
+        </p:txBody>
+      </p:sp>
+      <p:sp>
+        <p:nvSpPr>
+          <p:cNvPr id="28" name="Text 26"/>
+          <p:cNvSpPr txBox="1"/>
+          <p:nvPr/>
+        </p:nvSpPr>
+        <p:spPr>
+          <a:xfrm>
+            <a:off x="5248656" y="4133088"/>
+            <a:ext cx="530352" cy="585216"/>
+          </a:xfrm>
+          <a:prstGeom prst="rect">
+            <a:avLst/>
+          </a:prstGeom>
+          <a:noFill/>
+          <a:ln/>
+        </p:spPr>
+        <p:txBody>
+          <a:bodyPr wrap="square" lIns="0" tIns="0" rIns="0" bIns="0" rtlCol="0" anchor="ctr"/>
+          <a:lstStyle/>
+          <a:p>
+            <a:pPr algn="r" indent="0" marL="0">
+              <a:buNone/>
+            </a:pPr>
+            <a:r>
+              <a:rPr lang="en-US" sz="1150" b="1" dirty="0">
+                <a:solidFill>
+                  <a:srgbClr val="1F7A43"/>
                 </a:solidFill>
                 <a:latin typeface="Calibri" pitchFamily="34" charset="0"/>
                 <a:ea typeface="Calibri" pitchFamily="34" charset="-122"/>
                 <a:cs typeface="Calibri" pitchFamily="34" charset="-120"/>
               </a:rPr>
-              <a:t>OIDC or LDAP at the edge resolving to provisioned identities, and revocable machine credentials.</a:t>
+              <a:t>+4</a:t>
             </a:r>
             <a:endParaRPr lang="en-US" sz="1150" dirty="0"/>
-          </a:p>
-        </p:txBody>
-      </p:sp>
-      <p:sp>
-        <p:nvSpPr>
-          <p:cNvPr id="28" name="Text 26"/>
-          <p:cNvSpPr txBox="1"/>
-          <p:nvPr/>
-        </p:nvSpPr>
-        <p:spPr>
-          <a:xfrm>
-            <a:off x="4572000" y="5961888"/>
-            <a:ext cx="3044952" cy="548640"/>
-          </a:xfrm>
-          <a:prstGeom prst="rect">
-            <a:avLst/>
-          </a:prstGeom>
-          <a:noFill/>
-          <a:ln/>
-        </p:spPr>
-        <p:txBody>
-          <a:bodyPr wrap="square" lIns="0" tIns="0" rIns="0" bIns="0" rtlCol="0" anchor="ctr"/>
-          <a:lstStyle/>
-          <a:p>
-            <a:pPr indent="0" marL="0">
-              <a:buNone/>
-            </a:pPr>
-            <a:r>
-              <a:rPr lang="en-US" sz="1050" i="1" dirty="0">
-                <a:solidFill>
-                  <a:srgbClr val="1F7A43"/>
-                </a:solidFill>
-                <a:latin typeface="Calibri" pitchFamily="34" charset="0"/>
-                <a:ea typeface="Calibri" pitchFamily="34" charset="-122"/>
-                <a:cs typeface="Calibri" pitchFamily="34" charset="-120"/>
-              </a:rPr>
-              <a:t>Gate: a user logs in with corporate credentials; a leaked token is revoked in one action.</a:t>
-            </a:r>
-            <a:endParaRPr lang="en-US" sz="1050" dirty="0"/>
           </a:p>
         </p:txBody>
       </p:sp>
@@ -10722,12 +10812,37 @@
         </p:nvSpPr>
         <p:spPr>
           <a:xfrm>
-            <a:off x="8101584" y="4096512"/>
-            <a:ext cx="3520440" cy="2487168"/>
+            <a:off x="566928" y="4791456"/>
+            <a:ext cx="82296" cy="585216"/>
+          </a:xfrm>
+          <a:prstGeom prst="rect">
+            <a:avLst/>
+          </a:prstGeom>
+          <a:solidFill>
+            <a:srgbClr val="2E6DA4"/>
+          </a:solidFill>
+          <a:ln w="12700">
+            <a:solidFill>
+              <a:srgbClr val="2E6DA4"/>
+            </a:solidFill>
+            <a:prstDash val="solid"/>
+          </a:ln>
+        </p:spPr>
+      </p:sp>
+      <p:sp>
+        <p:nvSpPr>
+          <p:cNvPr id="30" name="Shape 28"/>
+          <p:cNvSpPr/>
+          <p:nvPr/>
+        </p:nvSpPr>
+        <p:spPr>
+          <a:xfrm>
+            <a:off x="649224" y="4791456"/>
+            <a:ext cx="5312664" cy="585216"/>
           </a:xfrm>
           <a:prstGeom prst="roundRect">
             <a:avLst>
-              <a:gd name="adj" fmla="val 2206"/>
+              <a:gd name="adj" fmla="val 6250"/>
             </a:avLst>
           </a:prstGeom>
           <a:solidFill>
@@ -10739,25 +10854,18 @@
             </a:solidFill>
             <a:prstDash val="solid"/>
           </a:ln>
-          <a:effectLst>
-            <a:outerShdw sx="100000" sy="100000" kx="0" ky="0" algn="bl" rotWithShape="0" blurRad="127000" dist="25400" dir="5400000">
-              <a:srgbClr val="8C9AA8">
-                <a:alpha val="22000"/>
-              </a:srgbClr>
-            </a:outerShdw>
-          </a:effectLst>
-        </p:spPr>
-      </p:sp>
-      <p:sp>
-        <p:nvSpPr>
-          <p:cNvPr id="30" name="Text 28"/>
-          <p:cNvSpPr txBox="1"/>
-          <p:nvPr/>
-        </p:nvSpPr>
-        <p:spPr>
-          <a:xfrm>
-            <a:off x="8339328" y="4297680"/>
-            <a:ext cx="3044952" cy="201168"/>
+        </p:spPr>
+      </p:sp>
+      <p:sp>
+        <p:nvSpPr>
+          <p:cNvPr id="31" name="Text 29"/>
+          <p:cNvSpPr txBox="1"/>
+          <p:nvPr/>
+        </p:nvSpPr>
+        <p:spPr>
+          <a:xfrm>
+            <a:off x="768096" y="4791456"/>
+            <a:ext cx="365760" cy="585216"/>
           </a:xfrm>
           <a:prstGeom prst="rect">
             <a:avLst/>
@@ -10773,30 +10881,160 @@
               <a:buNone/>
             </a:pPr>
             <a:r>
-              <a:rPr lang="en-US" sz="1000" b="1" spc="160" kern="0" dirty="0">
-                <a:solidFill>
-                  <a:srgbClr val="2E6DA4"/>
+              <a:rPr lang="en-US" sz="1500" b="1" dirty="0">
+                <a:solidFill>
+                  <a:srgbClr val="C8952B"/>
+                </a:solidFill>
+                <a:latin typeface="Cambria" pitchFamily="34" charset="0"/>
+                <a:ea typeface="Cambria" pitchFamily="34" charset="-122"/>
+                <a:cs typeface="Cambria" pitchFamily="34" charset="-120"/>
+              </a:rPr>
+              <a:t>6</a:t>
+            </a:r>
+            <a:endParaRPr lang="en-US" sz="1500" dirty="0"/>
+          </a:p>
+        </p:txBody>
+      </p:sp>
+      <p:sp>
+        <p:nvSpPr>
+          <p:cNvPr id="32" name="Text 30"/>
+          <p:cNvSpPr txBox="1"/>
+          <p:nvPr/>
+        </p:nvSpPr>
+        <p:spPr>
+          <a:xfrm>
+            <a:off x="1188720" y="4791456"/>
+            <a:ext cx="3977640" cy="585216"/>
+          </a:xfrm>
+          <a:prstGeom prst="rect">
+            <a:avLst/>
+          </a:prstGeom>
+          <a:noFill/>
+          <a:ln/>
+        </p:spPr>
+        <p:txBody>
+          <a:bodyPr wrap="square" lIns="0" tIns="0" rIns="0" bIns="0" rtlCol="0" anchor="ctr"/>
+          <a:lstStyle/>
+          <a:p>
+            <a:pPr indent="0" marL="0">
+              <a:buNone/>
+            </a:pPr>
+            <a:r>
+              <a:rPr lang="en-US" sz="1150" dirty="0">
+                <a:solidFill>
+                  <a:srgbClr val="1A3A5C"/>
                 </a:solidFill>
                 <a:latin typeface="Calibri" pitchFamily="34" charset="0"/>
                 <a:ea typeface="Calibri" pitchFamily="34" charset="-122"/>
                 <a:cs typeface="Calibri" pitchFamily="34" charset="-120"/>
               </a:rPr>
-              <a:t>WAVE 7.2</a:t>
-            </a:r>
-            <a:endParaRPr lang="en-US" sz="1000" dirty="0"/>
-          </a:p>
-        </p:txBody>
-      </p:sp>
-      <p:sp>
-        <p:nvSpPr>
-          <p:cNvPr id="31" name="Text 29"/>
-          <p:cNvSpPr txBox="1"/>
-          <p:nvPr/>
-        </p:nvSpPr>
-        <p:spPr>
-          <a:xfrm>
-            <a:off x="8339328" y="4572000"/>
-            <a:ext cx="3044952" cy="310896"/>
+              <a:t>Administration, OpenAPI, separation of duties</a:t>
+            </a:r>
+            <a:endParaRPr lang="en-US" sz="1150" dirty="0"/>
+          </a:p>
+        </p:txBody>
+      </p:sp>
+      <p:sp>
+        <p:nvSpPr>
+          <p:cNvPr id="33" name="Text 31"/>
+          <p:cNvSpPr txBox="1"/>
+          <p:nvPr/>
+        </p:nvSpPr>
+        <p:spPr>
+          <a:xfrm>
+            <a:off x="5248656" y="4791456"/>
+            <a:ext cx="530352" cy="585216"/>
+          </a:xfrm>
+          <a:prstGeom prst="rect">
+            <a:avLst/>
+          </a:prstGeom>
+          <a:noFill/>
+          <a:ln/>
+        </p:spPr>
+        <p:txBody>
+          <a:bodyPr wrap="square" lIns="0" tIns="0" rIns="0" bIns="0" rtlCol="0" anchor="ctr"/>
+          <a:lstStyle/>
+          <a:p>
+            <a:pPr algn="r" indent="0" marL="0">
+              <a:buNone/>
+            </a:pPr>
+            <a:r>
+              <a:rPr lang="en-US" sz="1150" b="1" dirty="0">
+                <a:solidFill>
+                  <a:srgbClr val="1F7A43"/>
+                </a:solidFill>
+                <a:latin typeface="Calibri" pitchFamily="34" charset="0"/>
+                <a:ea typeface="Calibri" pitchFamily="34" charset="-122"/>
+                <a:cs typeface="Calibri" pitchFamily="34" charset="-120"/>
+              </a:rPr>
+              <a:t>+3</a:t>
+            </a:r>
+            <a:endParaRPr lang="en-US" sz="1150" dirty="0"/>
+          </a:p>
+        </p:txBody>
+      </p:sp>
+      <p:sp>
+        <p:nvSpPr>
+          <p:cNvPr id="34" name="Shape 32"/>
+          <p:cNvSpPr/>
+          <p:nvPr/>
+        </p:nvSpPr>
+        <p:spPr>
+          <a:xfrm>
+            <a:off x="566928" y="5449824"/>
+            <a:ext cx="82296" cy="585216"/>
+          </a:xfrm>
+          <a:prstGeom prst="rect">
+            <a:avLst/>
+          </a:prstGeom>
+          <a:solidFill>
+            <a:srgbClr val="2E6DA4"/>
+          </a:solidFill>
+          <a:ln w="12700">
+            <a:solidFill>
+              <a:srgbClr val="2E6DA4"/>
+            </a:solidFill>
+            <a:prstDash val="solid"/>
+          </a:ln>
+        </p:spPr>
+      </p:sp>
+      <p:sp>
+        <p:nvSpPr>
+          <p:cNvPr id="35" name="Shape 33"/>
+          <p:cNvSpPr/>
+          <p:nvPr/>
+        </p:nvSpPr>
+        <p:spPr>
+          <a:xfrm>
+            <a:off x="649224" y="5449824"/>
+            <a:ext cx="5312664" cy="585216"/>
+          </a:xfrm>
+          <a:prstGeom prst="roundRect">
+            <a:avLst>
+              <a:gd name="adj" fmla="val 6250"/>
+            </a:avLst>
+          </a:prstGeom>
+          <a:solidFill>
+            <a:srgbClr val="E8EFF6"/>
+          </a:solidFill>
+          <a:ln w="12700">
+            <a:solidFill>
+              <a:srgbClr val="E8EFF6"/>
+            </a:solidFill>
+            <a:prstDash val="solid"/>
+          </a:ln>
+        </p:spPr>
+      </p:sp>
+      <p:sp>
+        <p:nvSpPr>
+          <p:cNvPr id="36" name="Text 34"/>
+          <p:cNvSpPr txBox="1"/>
+          <p:nvPr/>
+        </p:nvSpPr>
+        <p:spPr>
+          <a:xfrm>
+            <a:off x="768096" y="5449824"/>
+            <a:ext cx="365760" cy="585216"/>
           </a:xfrm>
           <a:prstGeom prst="rect">
             <a:avLst/>
@@ -10814,13 +11052,13 @@
             <a:r>
               <a:rPr lang="en-US" sz="1500" b="1" dirty="0">
                 <a:solidFill>
-                  <a:srgbClr val="1A3A5C"/>
+                  <a:srgbClr val="C8952B"/>
                 </a:solidFill>
                 <a:latin typeface="Cambria" pitchFamily="34" charset="0"/>
                 <a:ea typeface="Cambria" pitchFamily="34" charset="-122"/>
                 <a:cs typeface="Cambria" pitchFamily="34" charset="-120"/>
               </a:rPr>
-              <a:t>Hardening and SIEM</a:t>
+              <a:t>7</a:t>
             </a:r>
             <a:endParaRPr lang="en-US" sz="1500" dirty="0"/>
           </a:p>
@@ -10828,41 +11066,38 @@
       </p:sp>
       <p:sp>
         <p:nvSpPr>
-          <p:cNvPr id="32" name="Text 30"/>
-          <p:cNvSpPr txBox="1"/>
-          <p:nvPr/>
-        </p:nvSpPr>
-        <p:spPr>
-          <a:xfrm>
-            <a:off x="8339328" y="4956048"/>
-            <a:ext cx="3044952" cy="768096"/>
-          </a:xfrm>
-          <a:prstGeom prst="rect">
-            <a:avLst/>
-          </a:prstGeom>
-          <a:noFill/>
-          <a:ln/>
-        </p:spPr>
-        <p:txBody>
-          <a:bodyPr wrap="square" lIns="0" tIns="0" rIns="0" bIns="0" rtlCol="0" anchor="t"/>
+          <p:cNvPr id="37" name="Text 35"/>
+          <p:cNvSpPr txBox="1"/>
+          <p:nvPr/>
+        </p:nvSpPr>
+        <p:spPr>
+          <a:xfrm>
+            <a:off x="1188720" y="5449824"/>
+            <a:ext cx="3977640" cy="585216"/>
+          </a:xfrm>
+          <a:prstGeom prst="rect">
+            <a:avLst/>
+          </a:prstGeom>
+          <a:noFill/>
+          <a:ln/>
+        </p:spPr>
+        <p:txBody>
+          <a:bodyPr wrap="square" lIns="0" tIns="0" rIns="0" bIns="0" rtlCol="0" anchor="ctr"/>
           <a:lstStyle/>
           <a:p>
             <a:pPr indent="0" marL="0">
-              <a:lnSpc>
-                <a:spcPts val="1700"/>
-              </a:lnSpc>
               <a:buNone/>
             </a:pPr>
             <a:r>
               <a:rPr lang="en-US" sz="1150" dirty="0">
                 <a:solidFill>
-                  <a:srgbClr val="4D5A68"/>
+                  <a:srgbClr val="1A3A5C"/>
                 </a:solidFill>
                 <a:latin typeface="Calibri" pitchFamily="34" charset="0"/>
                 <a:ea typeface="Calibri" pitchFamily="34" charset="-122"/>
                 <a:cs typeface="Calibri" pitchFamily="34" charset="-120"/>
               </a:rPr>
-              <a:t>Connection caps and per-identity rate limiting; audit shipped as syslog or CEF.</a:t>
+              <a:t>Web console and self-service</a:t>
             </a:r>
             <a:endParaRPr lang="en-US" sz="1150" dirty="0"/>
           </a:p>
@@ -10870,30 +11105,30 @@
       </p:sp>
       <p:sp>
         <p:nvSpPr>
-          <p:cNvPr id="33" name="Text 31"/>
-          <p:cNvSpPr txBox="1"/>
-          <p:nvPr/>
-        </p:nvSpPr>
-        <p:spPr>
-          <a:xfrm>
-            <a:off x="8339328" y="5961888"/>
-            <a:ext cx="3044952" cy="548640"/>
-          </a:xfrm>
-          <a:prstGeom prst="rect">
-            <a:avLst/>
-          </a:prstGeom>
-          <a:noFill/>
-          <a:ln/>
-        </p:spPr>
-        <p:txBody>
-          <a:bodyPr wrap="square" lIns="0" tIns="0" rIns="0" bIns="0" rtlCol="0" anchor="ctr"/>
-          <a:lstStyle/>
-          <a:p>
-            <a:pPr indent="0" marL="0">
-              <a:buNone/>
-            </a:pPr>
-            <a:r>
-              <a:rPr lang="en-US" sz="1050" i="1" dirty="0">
+          <p:cNvPr id="38" name="Text 36"/>
+          <p:cNvSpPr txBox="1"/>
+          <p:nvPr/>
+        </p:nvSpPr>
+        <p:spPr>
+          <a:xfrm>
+            <a:off x="5248656" y="5449824"/>
+            <a:ext cx="530352" cy="585216"/>
+          </a:xfrm>
+          <a:prstGeom prst="rect">
+            <a:avLst/>
+          </a:prstGeom>
+          <a:noFill/>
+          <a:ln/>
+        </p:spPr>
+        <p:txBody>
+          <a:bodyPr wrap="square" lIns="0" tIns="0" rIns="0" bIns="0" rtlCol="0" anchor="ctr"/>
+          <a:lstStyle/>
+          <a:p>
+            <a:pPr algn="r" indent="0" marL="0">
+              <a:buNone/>
+            </a:pPr>
+            <a:r>
+              <a:rPr lang="en-US" sz="1150" b="1" dirty="0">
                 <a:solidFill>
                   <a:srgbClr val="1F7A43"/>
                 </a:solidFill>
@@ -10901,9 +11136,1231 @@
                 <a:ea typeface="Calibri" pitchFamily="34" charset="-122"/>
                 <a:cs typeface="Calibri" pitchFamily="34" charset="-120"/>
               </a:rPr>
-              <a:t>Gate: the listener survives a flood; entries appear in the SIEM within a minute.</a:t>
-            </a:r>
-            <a:endParaRPr lang="en-US" sz="1050" dirty="0"/>
+              <a:t>+2</a:t>
+            </a:r>
+            <a:endParaRPr lang="en-US" sz="1150" dirty="0"/>
+          </a:p>
+        </p:txBody>
+      </p:sp>
+      <p:sp>
+        <p:nvSpPr>
+          <p:cNvPr id="39" name="Shape 37"/>
+          <p:cNvSpPr/>
+          <p:nvPr/>
+        </p:nvSpPr>
+        <p:spPr>
+          <a:xfrm>
+            <a:off x="6199632" y="1499616"/>
+            <a:ext cx="82296" cy="585216"/>
+          </a:xfrm>
+          <a:prstGeom prst="rect">
+            <a:avLst/>
+          </a:prstGeom>
+          <a:solidFill>
+            <a:srgbClr val="5A7184"/>
+          </a:solidFill>
+          <a:ln w="12700">
+            <a:solidFill>
+              <a:srgbClr val="5A7184"/>
+            </a:solidFill>
+            <a:prstDash val="solid"/>
+          </a:ln>
+        </p:spPr>
+      </p:sp>
+      <p:sp>
+        <p:nvSpPr>
+          <p:cNvPr id="40" name="Shape 38"/>
+          <p:cNvSpPr/>
+          <p:nvPr/>
+        </p:nvSpPr>
+        <p:spPr>
+          <a:xfrm>
+            <a:off x="6281928" y="1499616"/>
+            <a:ext cx="5312664" cy="585216"/>
+          </a:xfrm>
+          <a:prstGeom prst="roundRect">
+            <a:avLst>
+              <a:gd name="adj" fmla="val 6250"/>
+            </a:avLst>
+          </a:prstGeom>
+          <a:solidFill>
+            <a:srgbClr val="E8EFF6"/>
+          </a:solidFill>
+          <a:ln w="12700">
+            <a:solidFill>
+              <a:srgbClr val="E8EFF6"/>
+            </a:solidFill>
+            <a:prstDash val="solid"/>
+          </a:ln>
+        </p:spPr>
+      </p:sp>
+      <p:sp>
+        <p:nvSpPr>
+          <p:cNvPr id="41" name="Text 39"/>
+          <p:cNvSpPr txBox="1"/>
+          <p:nvPr/>
+        </p:nvSpPr>
+        <p:spPr>
+          <a:xfrm>
+            <a:off x="6400800" y="1499616"/>
+            <a:ext cx="365760" cy="585216"/>
+          </a:xfrm>
+          <a:prstGeom prst="rect">
+            <a:avLst/>
+          </a:prstGeom>
+          <a:noFill/>
+          <a:ln/>
+        </p:spPr>
+        <p:txBody>
+          <a:bodyPr wrap="square" lIns="0" tIns="0" rIns="0" bIns="0" rtlCol="0" anchor="ctr"/>
+          <a:lstStyle/>
+          <a:p>
+            <a:pPr indent="0" marL="0">
+              <a:buNone/>
+            </a:pPr>
+            <a:r>
+              <a:rPr lang="en-US" sz="1500" b="1" dirty="0">
+                <a:solidFill>
+                  <a:srgbClr val="C8952B"/>
+                </a:solidFill>
+                <a:latin typeface="Cambria" pitchFamily="34" charset="0"/>
+                <a:ea typeface="Cambria" pitchFamily="34" charset="-122"/>
+                <a:cs typeface="Cambria" pitchFamily="34" charset="-120"/>
+              </a:rPr>
+              <a:t>8</a:t>
+            </a:r>
+            <a:endParaRPr lang="en-US" sz="1500" dirty="0"/>
+          </a:p>
+        </p:txBody>
+      </p:sp>
+      <p:sp>
+        <p:nvSpPr>
+          <p:cNvPr id="42" name="Text 40"/>
+          <p:cNvSpPr txBox="1"/>
+          <p:nvPr/>
+        </p:nvSpPr>
+        <p:spPr>
+          <a:xfrm>
+            <a:off x="6821424" y="1499616"/>
+            <a:ext cx="3977640" cy="585216"/>
+          </a:xfrm>
+          <a:prstGeom prst="rect">
+            <a:avLst/>
+          </a:prstGeom>
+          <a:noFill/>
+          <a:ln/>
+        </p:spPr>
+        <p:txBody>
+          <a:bodyPr wrap="square" lIns="0" tIns="0" rIns="0" bIns="0" rtlCol="0" anchor="ctr"/>
+          <a:lstStyle/>
+          <a:p>
+            <a:pPr indent="0" marL="0">
+              <a:buNone/>
+            </a:pPr>
+            <a:r>
+              <a:rPr lang="en-US" sz="1150" dirty="0">
+                <a:solidFill>
+                  <a:srgbClr val="1A3A5C"/>
+                </a:solidFill>
+                <a:latin typeface="Calibri" pitchFamily="34" charset="0"/>
+                <a:ea typeface="Calibri" pitchFamily="34" charset="-122"/>
+                <a:cs typeface="Calibri" pitchFamily="34" charset="-120"/>
+              </a:rPr>
+              <a:t>Enterprise identity and policy</a:t>
+            </a:r>
+            <a:endParaRPr lang="en-US" sz="1150" dirty="0"/>
+          </a:p>
+        </p:txBody>
+      </p:sp>
+      <p:sp>
+        <p:nvSpPr>
+          <p:cNvPr id="43" name="Text 41"/>
+          <p:cNvSpPr txBox="1"/>
+          <p:nvPr/>
+        </p:nvSpPr>
+        <p:spPr>
+          <a:xfrm>
+            <a:off x="10881360" y="1499616"/>
+            <a:ext cx="530352" cy="585216"/>
+          </a:xfrm>
+          <a:prstGeom prst="rect">
+            <a:avLst/>
+          </a:prstGeom>
+          <a:noFill/>
+          <a:ln/>
+        </p:spPr>
+        <p:txBody>
+          <a:bodyPr wrap="square" lIns="0" tIns="0" rIns="0" bIns="0" rtlCol="0" anchor="ctr"/>
+          <a:lstStyle/>
+          <a:p>
+            <a:pPr algn="r" indent="0" marL="0">
+              <a:buNone/>
+            </a:pPr>
+            <a:r>
+              <a:rPr lang="en-US" sz="1150" b="1" dirty="0">
+                <a:solidFill>
+                  <a:srgbClr val="1F7A43"/>
+                </a:solidFill>
+                <a:latin typeface="Calibri" pitchFamily="34" charset="0"/>
+                <a:ea typeface="Calibri" pitchFamily="34" charset="-122"/>
+                <a:cs typeface="Calibri" pitchFamily="34" charset="-120"/>
+              </a:rPr>
+              <a:t>+2</a:t>
+            </a:r>
+            <a:endParaRPr lang="en-US" sz="1150" dirty="0"/>
+          </a:p>
+        </p:txBody>
+      </p:sp>
+      <p:sp>
+        <p:nvSpPr>
+          <p:cNvPr id="44" name="Shape 42"/>
+          <p:cNvSpPr/>
+          <p:nvPr/>
+        </p:nvSpPr>
+        <p:spPr>
+          <a:xfrm>
+            <a:off x="6199632" y="2157984"/>
+            <a:ext cx="82296" cy="585216"/>
+          </a:xfrm>
+          <a:prstGeom prst="rect">
+            <a:avLst/>
+          </a:prstGeom>
+          <a:solidFill>
+            <a:srgbClr val="5A7184"/>
+          </a:solidFill>
+          <a:ln w="12700">
+            <a:solidFill>
+              <a:srgbClr val="5A7184"/>
+            </a:solidFill>
+            <a:prstDash val="solid"/>
+          </a:ln>
+        </p:spPr>
+      </p:sp>
+      <p:sp>
+        <p:nvSpPr>
+          <p:cNvPr id="45" name="Shape 43"/>
+          <p:cNvSpPr/>
+          <p:nvPr/>
+        </p:nvSpPr>
+        <p:spPr>
+          <a:xfrm>
+            <a:off x="6281928" y="2157984"/>
+            <a:ext cx="5312664" cy="585216"/>
+          </a:xfrm>
+          <a:prstGeom prst="roundRect">
+            <a:avLst>
+              <a:gd name="adj" fmla="val 6250"/>
+            </a:avLst>
+          </a:prstGeom>
+          <a:solidFill>
+            <a:srgbClr val="E8EFF6"/>
+          </a:solidFill>
+          <a:ln w="12700">
+            <a:solidFill>
+              <a:srgbClr val="E8EFF6"/>
+            </a:solidFill>
+            <a:prstDash val="solid"/>
+          </a:ln>
+        </p:spPr>
+      </p:sp>
+      <p:sp>
+        <p:nvSpPr>
+          <p:cNvPr id="46" name="Text 44"/>
+          <p:cNvSpPr txBox="1"/>
+          <p:nvPr/>
+        </p:nvSpPr>
+        <p:spPr>
+          <a:xfrm>
+            <a:off x="6400800" y="2157984"/>
+            <a:ext cx="365760" cy="585216"/>
+          </a:xfrm>
+          <a:prstGeom prst="rect">
+            <a:avLst/>
+          </a:prstGeom>
+          <a:noFill/>
+          <a:ln/>
+        </p:spPr>
+        <p:txBody>
+          <a:bodyPr wrap="square" lIns="0" tIns="0" rIns="0" bIns="0" rtlCol="0" anchor="ctr"/>
+          <a:lstStyle/>
+          <a:p>
+            <a:pPr indent="0" marL="0">
+              <a:buNone/>
+            </a:pPr>
+            <a:r>
+              <a:rPr lang="en-US" sz="1500" b="1" dirty="0">
+                <a:solidFill>
+                  <a:srgbClr val="C8952B"/>
+                </a:solidFill>
+                <a:latin typeface="Cambria" pitchFamily="34" charset="0"/>
+                <a:ea typeface="Cambria" pitchFamily="34" charset="-122"/>
+                <a:cs typeface="Cambria" pitchFamily="34" charset="-120"/>
+              </a:rPr>
+              <a:t>9</a:t>
+            </a:r>
+            <a:endParaRPr lang="en-US" sz="1500" dirty="0"/>
+          </a:p>
+        </p:txBody>
+      </p:sp>
+      <p:sp>
+        <p:nvSpPr>
+          <p:cNvPr id="47" name="Text 45"/>
+          <p:cNvSpPr txBox="1"/>
+          <p:nvPr/>
+        </p:nvSpPr>
+        <p:spPr>
+          <a:xfrm>
+            <a:off x="6821424" y="2157984"/>
+            <a:ext cx="3977640" cy="585216"/>
+          </a:xfrm>
+          <a:prstGeom prst="rect">
+            <a:avLst/>
+          </a:prstGeom>
+          <a:noFill/>
+          <a:ln/>
+        </p:spPr>
+        <p:txBody>
+          <a:bodyPr wrap="square" lIns="0" tIns="0" rIns="0" bIns="0" rtlCol="0" anchor="ctr"/>
+          <a:lstStyle/>
+          <a:p>
+            <a:pPr indent="0" marL="0">
+              <a:buNone/>
+            </a:pPr>
+            <a:r>
+              <a:rPr lang="en-US" sz="1150" dirty="0">
+                <a:solidFill>
+                  <a:srgbClr val="1A3A5C"/>
+                </a:solidFill>
+                <a:latin typeface="Calibri" pitchFamily="34" charset="0"/>
+                <a:ea typeface="Calibri" pitchFamily="34" charset="-122"/>
+                <a:cs typeface="Calibri" pitchFamily="34" charset="-120"/>
+              </a:rPr>
+              <a:t>Audit externalisation, compliance and ceremony</a:t>
+            </a:r>
+            <a:endParaRPr lang="en-US" sz="1150" dirty="0"/>
+          </a:p>
+        </p:txBody>
+      </p:sp>
+      <p:sp>
+        <p:nvSpPr>
+          <p:cNvPr id="48" name="Text 46"/>
+          <p:cNvSpPr txBox="1"/>
+          <p:nvPr/>
+        </p:nvSpPr>
+        <p:spPr>
+          <a:xfrm>
+            <a:off x="10881360" y="2157984"/>
+            <a:ext cx="530352" cy="585216"/>
+          </a:xfrm>
+          <a:prstGeom prst="rect">
+            <a:avLst/>
+          </a:prstGeom>
+          <a:noFill/>
+          <a:ln/>
+        </p:spPr>
+        <p:txBody>
+          <a:bodyPr wrap="square" lIns="0" tIns="0" rIns="0" bIns="0" rtlCol="0" anchor="ctr"/>
+          <a:lstStyle/>
+          <a:p>
+            <a:pPr algn="r" indent="0" marL="0">
+              <a:buNone/>
+            </a:pPr>
+            <a:r>
+              <a:rPr lang="en-US" sz="1150" b="1" dirty="0">
+                <a:solidFill>
+                  <a:srgbClr val="1F7A43"/>
+                </a:solidFill>
+                <a:latin typeface="Calibri" pitchFamily="34" charset="0"/>
+                <a:ea typeface="Calibri" pitchFamily="34" charset="-122"/>
+                <a:cs typeface="Calibri" pitchFamily="34" charset="-120"/>
+              </a:rPr>
+              <a:t>+7</a:t>
+            </a:r>
+            <a:endParaRPr lang="en-US" sz="1150" dirty="0"/>
+          </a:p>
+        </p:txBody>
+      </p:sp>
+      <p:sp>
+        <p:nvSpPr>
+          <p:cNvPr id="49" name="Shape 47"/>
+          <p:cNvSpPr/>
+          <p:nvPr/>
+        </p:nvSpPr>
+        <p:spPr>
+          <a:xfrm>
+            <a:off x="6199632" y="2816352"/>
+            <a:ext cx="82296" cy="585216"/>
+          </a:xfrm>
+          <a:prstGeom prst="rect">
+            <a:avLst/>
+          </a:prstGeom>
+          <a:solidFill>
+            <a:srgbClr val="6B8299"/>
+          </a:solidFill>
+          <a:ln w="12700">
+            <a:solidFill>
+              <a:srgbClr val="6B8299"/>
+            </a:solidFill>
+            <a:prstDash val="solid"/>
+          </a:ln>
+        </p:spPr>
+      </p:sp>
+      <p:sp>
+        <p:nvSpPr>
+          <p:cNvPr id="50" name="Shape 48"/>
+          <p:cNvSpPr/>
+          <p:nvPr/>
+        </p:nvSpPr>
+        <p:spPr>
+          <a:xfrm>
+            <a:off x="6281928" y="2816352"/>
+            <a:ext cx="5312664" cy="585216"/>
+          </a:xfrm>
+          <a:prstGeom prst="roundRect">
+            <a:avLst>
+              <a:gd name="adj" fmla="val 6250"/>
+            </a:avLst>
+          </a:prstGeom>
+          <a:solidFill>
+            <a:srgbClr val="E8EFF6"/>
+          </a:solidFill>
+          <a:ln w="12700">
+            <a:solidFill>
+              <a:srgbClr val="E8EFF6"/>
+            </a:solidFill>
+            <a:prstDash val="solid"/>
+          </a:ln>
+        </p:spPr>
+      </p:sp>
+      <p:sp>
+        <p:nvSpPr>
+          <p:cNvPr id="51" name="Text 49"/>
+          <p:cNvSpPr txBox="1"/>
+          <p:nvPr/>
+        </p:nvSpPr>
+        <p:spPr>
+          <a:xfrm>
+            <a:off x="6400800" y="2816352"/>
+            <a:ext cx="365760" cy="585216"/>
+          </a:xfrm>
+          <a:prstGeom prst="rect">
+            <a:avLst/>
+          </a:prstGeom>
+          <a:noFill/>
+          <a:ln/>
+        </p:spPr>
+        <p:txBody>
+          <a:bodyPr wrap="square" lIns="0" tIns="0" rIns="0" bIns="0" rtlCol="0" anchor="ctr"/>
+          <a:lstStyle/>
+          <a:p>
+            <a:pPr indent="0" marL="0">
+              <a:buNone/>
+            </a:pPr>
+            <a:r>
+              <a:rPr lang="en-US" sz="1500" b="1" dirty="0">
+                <a:solidFill>
+                  <a:srgbClr val="C8952B"/>
+                </a:solidFill>
+                <a:latin typeface="Cambria" pitchFamily="34" charset="0"/>
+                <a:ea typeface="Cambria" pitchFamily="34" charset="-122"/>
+                <a:cs typeface="Cambria" pitchFamily="34" charset="-120"/>
+              </a:rPr>
+              <a:t>10</a:t>
+            </a:r>
+            <a:endParaRPr lang="en-US" sz="1500" dirty="0"/>
+          </a:p>
+        </p:txBody>
+      </p:sp>
+      <p:sp>
+        <p:nvSpPr>
+          <p:cNvPr id="52" name="Text 50"/>
+          <p:cNvSpPr txBox="1"/>
+          <p:nvPr/>
+        </p:nvSpPr>
+        <p:spPr>
+          <a:xfrm>
+            <a:off x="6821424" y="2816352"/>
+            <a:ext cx="3977640" cy="585216"/>
+          </a:xfrm>
+          <a:prstGeom prst="rect">
+            <a:avLst/>
+          </a:prstGeom>
+          <a:noFill/>
+          <a:ln/>
+        </p:spPr>
+        <p:txBody>
+          <a:bodyPr wrap="square" lIns="0" tIns="0" rIns="0" bIns="0" rtlCol="0" anchor="ctr"/>
+          <a:lstStyle/>
+          <a:p>
+            <a:pPr indent="0" marL="0">
+              <a:buNone/>
+            </a:pPr>
+            <a:r>
+              <a:rPr lang="en-US" sz="1150" dirty="0">
+                <a:solidFill>
+                  <a:srgbClr val="1A3A5C"/>
+                </a:solidFill>
+                <a:latin typeface="Calibri" pitchFamily="34" charset="0"/>
+                <a:ea typeface="Calibri" pitchFamily="34" charset="-122"/>
+                <a:cs typeface="Calibri" pitchFamily="34" charset="-120"/>
+              </a:rPr>
+              <a:t>Storage abstraction and PostgreSQL</a:t>
+            </a:r>
+            <a:endParaRPr lang="en-US" sz="1150" dirty="0"/>
+          </a:p>
+        </p:txBody>
+      </p:sp>
+      <p:sp>
+        <p:nvSpPr>
+          <p:cNvPr id="53" name="Text 51"/>
+          <p:cNvSpPr txBox="1"/>
+          <p:nvPr/>
+        </p:nvSpPr>
+        <p:spPr>
+          <a:xfrm>
+            <a:off x="10881360" y="2816352"/>
+            <a:ext cx="530352" cy="585216"/>
+          </a:xfrm>
+          <a:prstGeom prst="rect">
+            <a:avLst/>
+          </a:prstGeom>
+          <a:noFill/>
+          <a:ln/>
+        </p:spPr>
+        <p:txBody>
+          <a:bodyPr wrap="square" lIns="0" tIns="0" rIns="0" bIns="0" rtlCol="0" anchor="ctr"/>
+          <a:lstStyle/>
+          <a:p>
+            <a:pPr algn="r" indent="0" marL="0">
+              <a:buNone/>
+            </a:pPr>
+            <a:r>
+              <a:rPr lang="en-US" sz="1150" b="1" dirty="0">
+                <a:solidFill>
+                  <a:srgbClr val="1F7A43"/>
+                </a:solidFill>
+                <a:latin typeface="Calibri" pitchFamily="34" charset="0"/>
+                <a:ea typeface="Calibri" pitchFamily="34" charset="-122"/>
+                <a:cs typeface="Calibri" pitchFamily="34" charset="-120"/>
+              </a:rPr>
+              <a:t>+1</a:t>
+            </a:r>
+            <a:endParaRPr lang="en-US" sz="1150" dirty="0"/>
+          </a:p>
+        </p:txBody>
+      </p:sp>
+      <p:sp>
+        <p:nvSpPr>
+          <p:cNvPr id="54" name="Shape 52"/>
+          <p:cNvSpPr/>
+          <p:nvPr/>
+        </p:nvSpPr>
+        <p:spPr>
+          <a:xfrm>
+            <a:off x="6199632" y="3474720"/>
+            <a:ext cx="82296" cy="585216"/>
+          </a:xfrm>
+          <a:prstGeom prst="rect">
+            <a:avLst/>
+          </a:prstGeom>
+          <a:solidFill>
+            <a:srgbClr val="6B8299"/>
+          </a:solidFill>
+          <a:ln w="12700">
+            <a:solidFill>
+              <a:srgbClr val="6B8299"/>
+            </a:solidFill>
+            <a:prstDash val="solid"/>
+          </a:ln>
+        </p:spPr>
+      </p:sp>
+      <p:sp>
+        <p:nvSpPr>
+          <p:cNvPr id="55" name="Shape 53"/>
+          <p:cNvSpPr/>
+          <p:nvPr/>
+        </p:nvSpPr>
+        <p:spPr>
+          <a:xfrm>
+            <a:off x="6281928" y="3474720"/>
+            <a:ext cx="5312664" cy="585216"/>
+          </a:xfrm>
+          <a:prstGeom prst="roundRect">
+            <a:avLst>
+              <a:gd name="adj" fmla="val 6250"/>
+            </a:avLst>
+          </a:prstGeom>
+          <a:solidFill>
+            <a:srgbClr val="E8EFF6"/>
+          </a:solidFill>
+          <a:ln w="12700">
+            <a:solidFill>
+              <a:srgbClr val="E8EFF6"/>
+            </a:solidFill>
+            <a:prstDash val="solid"/>
+          </a:ln>
+        </p:spPr>
+      </p:sp>
+      <p:sp>
+        <p:nvSpPr>
+          <p:cNvPr id="56" name="Text 54"/>
+          <p:cNvSpPr txBox="1"/>
+          <p:nvPr/>
+        </p:nvSpPr>
+        <p:spPr>
+          <a:xfrm>
+            <a:off x="6400800" y="3474720"/>
+            <a:ext cx="365760" cy="585216"/>
+          </a:xfrm>
+          <a:prstGeom prst="rect">
+            <a:avLst/>
+          </a:prstGeom>
+          <a:noFill/>
+          <a:ln/>
+        </p:spPr>
+        <p:txBody>
+          <a:bodyPr wrap="square" lIns="0" tIns="0" rIns="0" bIns="0" rtlCol="0" anchor="ctr"/>
+          <a:lstStyle/>
+          <a:p>
+            <a:pPr indent="0" marL="0">
+              <a:buNone/>
+            </a:pPr>
+            <a:r>
+              <a:rPr lang="en-US" sz="1500" b="1" dirty="0">
+                <a:solidFill>
+                  <a:srgbClr val="C8952B"/>
+                </a:solidFill>
+                <a:latin typeface="Cambria" pitchFamily="34" charset="0"/>
+                <a:ea typeface="Cambria" pitchFamily="34" charset="-122"/>
+                <a:cs typeface="Cambria" pitchFamily="34" charset="-120"/>
+              </a:rPr>
+              <a:t>11</a:t>
+            </a:r>
+            <a:endParaRPr lang="en-US" sz="1500" dirty="0"/>
+          </a:p>
+        </p:txBody>
+      </p:sp>
+      <p:sp>
+        <p:nvSpPr>
+          <p:cNvPr id="57" name="Text 55"/>
+          <p:cNvSpPr txBox="1"/>
+          <p:nvPr/>
+        </p:nvSpPr>
+        <p:spPr>
+          <a:xfrm>
+            <a:off x="6821424" y="3474720"/>
+            <a:ext cx="3977640" cy="585216"/>
+          </a:xfrm>
+          <a:prstGeom prst="rect">
+            <a:avLst/>
+          </a:prstGeom>
+          <a:noFill/>
+          <a:ln/>
+        </p:spPr>
+        <p:txBody>
+          <a:bodyPr wrap="square" lIns="0" tIns="0" rIns="0" bIns="0" rtlCol="0" anchor="ctr"/>
+          <a:lstStyle/>
+          <a:p>
+            <a:pPr indent="0" marL="0">
+              <a:buNone/>
+            </a:pPr>
+            <a:r>
+              <a:rPr lang="en-US" sz="1150" dirty="0">
+                <a:solidFill>
+                  <a:srgbClr val="1A3A5C"/>
+                </a:solidFill>
+                <a:latin typeface="Calibri" pitchFamily="34" charset="0"/>
+                <a:ea typeface="Calibri" pitchFamily="34" charset="-122"/>
+                <a:cs typeface="Calibri" pitchFamily="34" charset="-120"/>
+              </a:rPr>
+              <a:t>High availability, failover and deployment</a:t>
+            </a:r>
+            <a:endParaRPr lang="en-US" sz="1150" dirty="0"/>
+          </a:p>
+        </p:txBody>
+      </p:sp>
+      <p:sp>
+        <p:nvSpPr>
+          <p:cNvPr id="58" name="Text 56"/>
+          <p:cNvSpPr txBox="1"/>
+          <p:nvPr/>
+        </p:nvSpPr>
+        <p:spPr>
+          <a:xfrm>
+            <a:off x="10881360" y="3474720"/>
+            <a:ext cx="530352" cy="585216"/>
+          </a:xfrm>
+          <a:prstGeom prst="rect">
+            <a:avLst/>
+          </a:prstGeom>
+          <a:noFill/>
+          <a:ln/>
+        </p:spPr>
+        <p:txBody>
+          <a:bodyPr wrap="square" lIns="0" tIns="0" rIns="0" bIns="0" rtlCol="0" anchor="ctr"/>
+          <a:lstStyle/>
+          <a:p>
+            <a:pPr algn="r" indent="0" marL="0">
+              <a:buNone/>
+            </a:pPr>
+            <a:r>
+              <a:rPr lang="en-US" sz="1150" b="1" dirty="0">
+                <a:solidFill>
+                  <a:srgbClr val="1F7A43"/>
+                </a:solidFill>
+                <a:latin typeface="Calibri" pitchFamily="34" charset="0"/>
+                <a:ea typeface="Calibri" pitchFamily="34" charset="-122"/>
+                <a:cs typeface="Calibri" pitchFamily="34" charset="-120"/>
+              </a:rPr>
+              <a:t>+6</a:t>
+            </a:r>
+            <a:endParaRPr lang="en-US" sz="1150" dirty="0"/>
+          </a:p>
+        </p:txBody>
+      </p:sp>
+      <p:sp>
+        <p:nvSpPr>
+          <p:cNvPr id="59" name="Shape 57"/>
+          <p:cNvSpPr/>
+          <p:nvPr/>
+        </p:nvSpPr>
+        <p:spPr>
+          <a:xfrm>
+            <a:off x="6199632" y="4133088"/>
+            <a:ext cx="82296" cy="585216"/>
+          </a:xfrm>
+          <a:prstGeom prst="rect">
+            <a:avLst/>
+          </a:prstGeom>
+          <a:solidFill>
+            <a:srgbClr val="6B8299"/>
+          </a:solidFill>
+          <a:ln w="12700">
+            <a:solidFill>
+              <a:srgbClr val="6B8299"/>
+            </a:solidFill>
+            <a:prstDash val="solid"/>
+          </a:ln>
+        </p:spPr>
+      </p:sp>
+      <p:sp>
+        <p:nvSpPr>
+          <p:cNvPr id="60" name="Shape 58"/>
+          <p:cNvSpPr/>
+          <p:nvPr/>
+        </p:nvSpPr>
+        <p:spPr>
+          <a:xfrm>
+            <a:off x="6281928" y="4133088"/>
+            <a:ext cx="5312664" cy="585216"/>
+          </a:xfrm>
+          <a:prstGeom prst="roundRect">
+            <a:avLst>
+              <a:gd name="adj" fmla="val 6250"/>
+            </a:avLst>
+          </a:prstGeom>
+          <a:solidFill>
+            <a:srgbClr val="E8EFF6"/>
+          </a:solidFill>
+          <a:ln w="12700">
+            <a:solidFill>
+              <a:srgbClr val="E8EFF6"/>
+            </a:solidFill>
+            <a:prstDash val="solid"/>
+          </a:ln>
+        </p:spPr>
+      </p:sp>
+      <p:sp>
+        <p:nvSpPr>
+          <p:cNvPr id="61" name="Text 59"/>
+          <p:cNvSpPr txBox="1"/>
+          <p:nvPr/>
+        </p:nvSpPr>
+        <p:spPr>
+          <a:xfrm>
+            <a:off x="6400800" y="4133088"/>
+            <a:ext cx="365760" cy="585216"/>
+          </a:xfrm>
+          <a:prstGeom prst="rect">
+            <a:avLst/>
+          </a:prstGeom>
+          <a:noFill/>
+          <a:ln/>
+        </p:spPr>
+        <p:txBody>
+          <a:bodyPr wrap="square" lIns="0" tIns="0" rIns="0" bIns="0" rtlCol="0" anchor="ctr"/>
+          <a:lstStyle/>
+          <a:p>
+            <a:pPr indent="0" marL="0">
+              <a:buNone/>
+            </a:pPr>
+            <a:r>
+              <a:rPr lang="en-US" sz="1500" b="1" dirty="0">
+                <a:solidFill>
+                  <a:srgbClr val="C8952B"/>
+                </a:solidFill>
+                <a:latin typeface="Cambria" pitchFamily="34" charset="0"/>
+                <a:ea typeface="Cambria" pitchFamily="34" charset="-122"/>
+                <a:cs typeface="Cambria" pitchFamily="34" charset="-120"/>
+              </a:rPr>
+              <a:t>12</a:t>
+            </a:r>
+            <a:endParaRPr lang="en-US" sz="1500" dirty="0"/>
+          </a:p>
+        </p:txBody>
+      </p:sp>
+      <p:sp>
+        <p:nvSpPr>
+          <p:cNvPr id="62" name="Text 60"/>
+          <p:cNvSpPr txBox="1"/>
+          <p:nvPr/>
+        </p:nvSpPr>
+        <p:spPr>
+          <a:xfrm>
+            <a:off x="6821424" y="4133088"/>
+            <a:ext cx="3977640" cy="585216"/>
+          </a:xfrm>
+          <a:prstGeom prst="rect">
+            <a:avLst/>
+          </a:prstGeom>
+          <a:noFill/>
+          <a:ln/>
+        </p:spPr>
+        <p:txBody>
+          <a:bodyPr wrap="square" lIns="0" tIns="0" rIns="0" bIns="0" rtlCol="0" anchor="ctr"/>
+          <a:lstStyle/>
+          <a:p>
+            <a:pPr indent="0" marL="0">
+              <a:buNone/>
+            </a:pPr>
+            <a:r>
+              <a:rPr lang="en-US" sz="1150" dirty="0">
+                <a:solidFill>
+                  <a:srgbClr val="1A3A5C"/>
+                </a:solidFill>
+                <a:latin typeface="Calibri" pitchFamily="34" charset="0"/>
+                <a:ea typeface="Calibri" pitchFamily="34" charset="-122"/>
+                <a:cs typeface="Calibri" pitchFamily="34" charset="-120"/>
+              </a:rPr>
+              <a:t>Multi-tenancy</a:t>
+            </a:r>
+            <a:endParaRPr lang="en-US" sz="1150" dirty="0"/>
+          </a:p>
+        </p:txBody>
+      </p:sp>
+      <p:sp>
+        <p:nvSpPr>
+          <p:cNvPr id="63" name="Text 61"/>
+          <p:cNvSpPr txBox="1"/>
+          <p:nvPr/>
+        </p:nvSpPr>
+        <p:spPr>
+          <a:xfrm>
+            <a:off x="10881360" y="4133088"/>
+            <a:ext cx="530352" cy="585216"/>
+          </a:xfrm>
+          <a:prstGeom prst="rect">
+            <a:avLst/>
+          </a:prstGeom>
+          <a:noFill/>
+          <a:ln/>
+        </p:spPr>
+        <p:txBody>
+          <a:bodyPr wrap="square" lIns="0" tIns="0" rIns="0" bIns="0" rtlCol="0" anchor="ctr"/>
+          <a:lstStyle/>
+          <a:p>
+            <a:pPr algn="r" indent="0" marL="0">
+              <a:buNone/>
+            </a:pPr>
+            <a:r>
+              <a:rPr lang="en-US" sz="1150" b="1" dirty="0">
+                <a:solidFill>
+                  <a:srgbClr val="1F7A43"/>
+                </a:solidFill>
+                <a:latin typeface="Calibri" pitchFamily="34" charset="0"/>
+                <a:ea typeface="Calibri" pitchFamily="34" charset="-122"/>
+                <a:cs typeface="Calibri" pitchFamily="34" charset="-120"/>
+              </a:rPr>
+              <a:t>+2</a:t>
+            </a:r>
+            <a:endParaRPr lang="en-US" sz="1150" dirty="0"/>
+          </a:p>
+        </p:txBody>
+      </p:sp>
+      <p:sp>
+        <p:nvSpPr>
+          <p:cNvPr id="64" name="Shape 62"/>
+          <p:cNvSpPr/>
+          <p:nvPr/>
+        </p:nvSpPr>
+        <p:spPr>
+          <a:xfrm>
+            <a:off x="6199632" y="4791456"/>
+            <a:ext cx="82296" cy="585216"/>
+          </a:xfrm>
+          <a:prstGeom prst="rect">
+            <a:avLst/>
+          </a:prstGeom>
+          <a:solidFill>
+            <a:srgbClr val="C8952B"/>
+          </a:solidFill>
+          <a:ln w="12700">
+            <a:solidFill>
+              <a:srgbClr val="C8952B"/>
+            </a:solidFill>
+            <a:prstDash val="solid"/>
+          </a:ln>
+        </p:spPr>
+      </p:sp>
+      <p:sp>
+        <p:nvSpPr>
+          <p:cNvPr id="65" name="Shape 63"/>
+          <p:cNvSpPr/>
+          <p:nvPr/>
+        </p:nvSpPr>
+        <p:spPr>
+          <a:xfrm>
+            <a:off x="6281928" y="4791456"/>
+            <a:ext cx="5312664" cy="585216"/>
+          </a:xfrm>
+          <a:prstGeom prst="roundRect">
+            <a:avLst>
+              <a:gd name="adj" fmla="val 6250"/>
+            </a:avLst>
+          </a:prstGeom>
+          <a:solidFill>
+            <a:srgbClr val="E8EFF6"/>
+          </a:solidFill>
+          <a:ln w="12700">
+            <a:solidFill>
+              <a:srgbClr val="E8EFF6"/>
+            </a:solidFill>
+            <a:prstDash val="solid"/>
+          </a:ln>
+        </p:spPr>
+      </p:sp>
+      <p:sp>
+        <p:nvSpPr>
+          <p:cNvPr id="66" name="Text 64"/>
+          <p:cNvSpPr txBox="1"/>
+          <p:nvPr/>
+        </p:nvSpPr>
+        <p:spPr>
+          <a:xfrm>
+            <a:off x="6400800" y="4791456"/>
+            <a:ext cx="365760" cy="585216"/>
+          </a:xfrm>
+          <a:prstGeom prst="rect">
+            <a:avLst/>
+          </a:prstGeom>
+          <a:noFill/>
+          <a:ln/>
+        </p:spPr>
+        <p:txBody>
+          <a:bodyPr wrap="square" lIns="0" tIns="0" rIns="0" bIns="0" rtlCol="0" anchor="ctr"/>
+          <a:lstStyle/>
+          <a:p>
+            <a:pPr indent="0" marL="0">
+              <a:buNone/>
+            </a:pPr>
+            <a:r>
+              <a:rPr lang="en-US" sz="1500" b="1" dirty="0">
+                <a:solidFill>
+                  <a:srgbClr val="C8952B"/>
+                </a:solidFill>
+                <a:latin typeface="Cambria" pitchFamily="34" charset="0"/>
+                <a:ea typeface="Cambria" pitchFamily="34" charset="-122"/>
+                <a:cs typeface="Cambria" pitchFamily="34" charset="-120"/>
+              </a:rPr>
+              <a:t>13</a:t>
+            </a:r>
+            <a:endParaRPr lang="en-US" sz="1500" dirty="0"/>
+          </a:p>
+        </p:txBody>
+      </p:sp>
+      <p:sp>
+        <p:nvSpPr>
+          <p:cNvPr id="67" name="Text 65"/>
+          <p:cNvSpPr txBox="1"/>
+          <p:nvPr/>
+        </p:nvSpPr>
+        <p:spPr>
+          <a:xfrm>
+            <a:off x="6821424" y="4791456"/>
+            <a:ext cx="3977640" cy="585216"/>
+          </a:xfrm>
+          <a:prstGeom prst="rect">
+            <a:avLst/>
+          </a:prstGeom>
+          <a:noFill/>
+          <a:ln/>
+        </p:spPr>
+        <p:txBody>
+          <a:bodyPr wrap="square" lIns="0" tIns="0" rIns="0" bIns="0" rtlCol="0" anchor="ctr"/>
+          <a:lstStyle/>
+          <a:p>
+            <a:pPr indent="0" marL="0">
+              <a:buNone/>
+            </a:pPr>
+            <a:r>
+              <a:rPr lang="en-US" sz="1150" dirty="0">
+                <a:solidFill>
+                  <a:srgbClr val="1A3A5C"/>
+                </a:solidFill>
+                <a:latin typeface="Calibri" pitchFamily="34" charset="0"/>
+                <a:ea typeface="Calibri" pitchFamily="34" charset="-122"/>
+                <a:cs typeface="Calibri" pitchFamily="34" charset="-120"/>
+              </a:rPr>
+              <a:t>KMIP JSON and XML encodings</a:t>
+            </a:r>
+            <a:endParaRPr lang="en-US" sz="1150" dirty="0"/>
+          </a:p>
+        </p:txBody>
+      </p:sp>
+      <p:sp>
+        <p:nvSpPr>
+          <p:cNvPr id="68" name="Text 66"/>
+          <p:cNvSpPr txBox="1"/>
+          <p:nvPr/>
+        </p:nvSpPr>
+        <p:spPr>
+          <a:xfrm>
+            <a:off x="10881360" y="4791456"/>
+            <a:ext cx="530352" cy="585216"/>
+          </a:xfrm>
+          <a:prstGeom prst="rect">
+            <a:avLst/>
+          </a:prstGeom>
+          <a:noFill/>
+          <a:ln/>
+        </p:spPr>
+        <p:txBody>
+          <a:bodyPr wrap="square" lIns="0" tIns="0" rIns="0" bIns="0" rtlCol="0" anchor="ctr"/>
+          <a:lstStyle/>
+          <a:p>
+            <a:pPr algn="r" indent="0" marL="0">
+              <a:buNone/>
+            </a:pPr>
+            <a:r>
+              <a:rPr lang="en-US" sz="1150" b="1" dirty="0">
+                <a:solidFill>
+                  <a:srgbClr val="1F7A43"/>
+                </a:solidFill>
+                <a:latin typeface="Calibri" pitchFamily="34" charset="0"/>
+                <a:ea typeface="Calibri" pitchFamily="34" charset="-122"/>
+                <a:cs typeface="Calibri" pitchFamily="34" charset="-120"/>
+              </a:rPr>
+              <a:t>+1</a:t>
+            </a:r>
+            <a:endParaRPr lang="en-US" sz="1150" dirty="0"/>
+          </a:p>
+        </p:txBody>
+      </p:sp>
+      <p:sp>
+        <p:nvSpPr>
+          <p:cNvPr id="69" name="Shape 67"/>
+          <p:cNvSpPr/>
+          <p:nvPr/>
+        </p:nvSpPr>
+        <p:spPr>
+          <a:xfrm>
+            <a:off x="6199632" y="5449824"/>
+            <a:ext cx="82296" cy="585216"/>
+          </a:xfrm>
+          <a:prstGeom prst="rect">
+            <a:avLst/>
+          </a:prstGeom>
+          <a:solidFill>
+            <a:srgbClr val="C8952B"/>
+          </a:solidFill>
+          <a:ln w="12700">
+            <a:solidFill>
+              <a:srgbClr val="C8952B"/>
+            </a:solidFill>
+            <a:prstDash val="solid"/>
+          </a:ln>
+        </p:spPr>
+      </p:sp>
+      <p:sp>
+        <p:nvSpPr>
+          <p:cNvPr id="70" name="Shape 68"/>
+          <p:cNvSpPr/>
+          <p:nvPr/>
+        </p:nvSpPr>
+        <p:spPr>
+          <a:xfrm>
+            <a:off x="6281928" y="5449824"/>
+            <a:ext cx="5312664" cy="585216"/>
+          </a:xfrm>
+          <a:prstGeom prst="roundRect">
+            <a:avLst>
+              <a:gd name="adj" fmla="val 6250"/>
+            </a:avLst>
+          </a:prstGeom>
+          <a:solidFill>
+            <a:srgbClr val="E8EFF6"/>
+          </a:solidFill>
+          <a:ln w="12700">
+            <a:solidFill>
+              <a:srgbClr val="E8EFF6"/>
+            </a:solidFill>
+            <a:prstDash val="solid"/>
+          </a:ln>
+        </p:spPr>
+      </p:sp>
+      <p:sp>
+        <p:nvSpPr>
+          <p:cNvPr id="71" name="Text 69"/>
+          <p:cNvSpPr txBox="1"/>
+          <p:nvPr/>
+        </p:nvSpPr>
+        <p:spPr>
+          <a:xfrm>
+            <a:off x="6400800" y="5449824"/>
+            <a:ext cx="365760" cy="585216"/>
+          </a:xfrm>
+          <a:prstGeom prst="rect">
+            <a:avLst/>
+          </a:prstGeom>
+          <a:noFill/>
+          <a:ln/>
+        </p:spPr>
+        <p:txBody>
+          <a:bodyPr wrap="square" lIns="0" tIns="0" rIns="0" bIns="0" rtlCol="0" anchor="ctr"/>
+          <a:lstStyle/>
+          <a:p>
+            <a:pPr indent="0" marL="0">
+              <a:buNone/>
+            </a:pPr>
+            <a:r>
+              <a:rPr lang="en-US" sz="1500" b="1" dirty="0">
+                <a:solidFill>
+                  <a:srgbClr val="C8952B"/>
+                </a:solidFill>
+                <a:latin typeface="Cambria" pitchFamily="34" charset="0"/>
+                <a:ea typeface="Cambria" pitchFamily="34" charset="-122"/>
+                <a:cs typeface="Cambria" pitchFamily="34" charset="-120"/>
+              </a:rPr>
+              <a:t>14</a:t>
+            </a:r>
+            <a:endParaRPr lang="en-US" sz="1500" dirty="0"/>
+          </a:p>
+        </p:txBody>
+      </p:sp>
+      <p:sp>
+        <p:nvSpPr>
+          <p:cNvPr id="72" name="Text 70"/>
+          <p:cNvSpPr txBox="1"/>
+          <p:nvPr/>
+        </p:nvSpPr>
+        <p:spPr>
+          <a:xfrm>
+            <a:off x="6821424" y="5449824"/>
+            <a:ext cx="3977640" cy="585216"/>
+          </a:xfrm>
+          <a:prstGeom prst="rect">
+            <a:avLst/>
+          </a:prstGeom>
+          <a:noFill/>
+          <a:ln/>
+        </p:spPr>
+        <p:txBody>
+          <a:bodyPr wrap="square" lIns="0" tIns="0" rIns="0" bIns="0" rtlCol="0" anchor="ctr"/>
+          <a:lstStyle/>
+          <a:p>
+            <a:pPr indent="0" marL="0">
+              <a:buNone/>
+            </a:pPr>
+            <a:r>
+              <a:rPr lang="en-US" sz="1150" dirty="0">
+                <a:solidFill>
+                  <a:srgbClr val="1A3A5C"/>
+                </a:solidFill>
+                <a:latin typeface="Calibri" pitchFamily="34" charset="0"/>
+                <a:ea typeface="Calibri" pitchFamily="34" charset="-122"/>
+                <a:cs typeface="Calibri" pitchFamily="34" charset="-120"/>
+              </a:rPr>
+              <a:t>Certificate discovery and expiry monitoring</a:t>
+            </a:r>
+            <a:endParaRPr lang="en-US" sz="1150" dirty="0"/>
+          </a:p>
+        </p:txBody>
+      </p:sp>
+      <p:sp>
+        <p:nvSpPr>
+          <p:cNvPr id="73" name="Text 71"/>
+          <p:cNvSpPr txBox="1"/>
+          <p:nvPr/>
+        </p:nvSpPr>
+        <p:spPr>
+          <a:xfrm>
+            <a:off x="10881360" y="5449824"/>
+            <a:ext cx="530352" cy="585216"/>
+          </a:xfrm>
+          <a:prstGeom prst="rect">
+            <a:avLst/>
+          </a:prstGeom>
+          <a:noFill/>
+          <a:ln/>
+        </p:spPr>
+        <p:txBody>
+          <a:bodyPr wrap="square" lIns="0" tIns="0" rIns="0" bIns="0" rtlCol="0" anchor="ctr"/>
+          <a:lstStyle/>
+          <a:p>
+            <a:pPr algn="r" indent="0" marL="0">
+              <a:buNone/>
+            </a:pPr>
+            <a:r>
+              <a:rPr lang="en-US" sz="1150" b="1" dirty="0">
+                <a:solidFill>
+                  <a:srgbClr val="1F7A43"/>
+                </a:solidFill>
+                <a:latin typeface="Calibri" pitchFamily="34" charset="0"/>
+                <a:ea typeface="Calibri" pitchFamily="34" charset="-122"/>
+                <a:cs typeface="Calibri" pitchFamily="34" charset="-120"/>
+              </a:rPr>
+              <a:t>+1</a:t>
+            </a:r>
+            <a:endParaRPr lang="en-US" sz="1150" dirty="0"/>
+          </a:p>
+        </p:txBody>
+      </p:sp>
+      <p:sp>
+        <p:nvSpPr>
+          <p:cNvPr id="74" name="Text 72"/>
+          <p:cNvSpPr txBox="1"/>
+          <p:nvPr/>
+        </p:nvSpPr>
+        <p:spPr>
+          <a:xfrm>
+            <a:off x="566928" y="6291072"/>
+            <a:ext cx="11027664" cy="310896"/>
+          </a:xfrm>
+          <a:prstGeom prst="rect">
+            <a:avLst/>
+          </a:prstGeom>
+          <a:noFill/>
+          <a:ln/>
+        </p:spPr>
+        <p:txBody>
+          <a:bodyPr wrap="square" lIns="0" tIns="0" rIns="0" bIns="0" rtlCol="0" anchor="ctr"/>
+          <a:lstStyle/>
+          <a:p>
+            <a:pPr indent="0" marL="0">
+              <a:buNone/>
+            </a:pPr>
+            <a:r>
+              <a:rPr lang="en-US" sz="1000" i="1" dirty="0">
+                <a:solidFill>
+                  <a:srgbClr val="7B8794"/>
+                </a:solidFill>
+                <a:latin typeface="Calibri" pitchFamily="34" charset="0"/>
+                <a:ea typeface="Calibri" pitchFamily="34" charset="-122"/>
+                <a:cs typeface="Calibri" pitchFamily="34" charset="-120"/>
+              </a:rPr>
+              <a:t>A Foundation   ·   B The REST control plane   ·   C Enterprise fit   ·   D Scale, availability and tenancy   ·   E Protocol and estate reach      +n is the gap-matrix features that step closes.</a:t>
+            </a:r>
+            <a:endParaRPr lang="en-US" sz="1000" dirty="0"/>
           </a:p>
         </p:txBody>
       </p:sp>
@@ -11011,7 +12468,7 @@
                 <a:ea typeface="Cambria" pitchFamily="34" charset="-122"/>
                 <a:cs typeface="Cambria" pitchFamily="34" charset="-120"/>
               </a:rPr>
-              <a:t>Wave 8 to 10 — and what stays out</a:t>
+              <a:t>Stages C to E — and what stays out</a:t>
             </a:r>
             <a:endParaRPr lang="en-US" sz="3400" dirty="0"/>
           </a:p>
@@ -11077,7 +12534,7 @@
                 <a:ea typeface="Cambria" pitchFamily="34" charset="-122"/>
                 <a:cs typeface="Cambria" pitchFamily="34" charset="-120"/>
               </a:rPr>
-              <a:t>8</a:t>
+              <a:t>C</a:t>
             </a:r>
             <a:endParaRPr lang="en-US" sz="2200" dirty="0"/>
           </a:p>
@@ -11092,7 +12549,7 @@
         <p:spPr>
           <a:xfrm>
             <a:off x="1481328" y="1554480"/>
-            <a:ext cx="3840480" cy="365760"/>
+            <a:ext cx="3840480" cy="713232"/>
           </a:xfrm>
           <a:prstGeom prst="rect">
             <a:avLst/>
@@ -11116,7 +12573,7 @@
                 <a:ea typeface="Cambria" pitchFamily="34" charset="-122"/>
                 <a:cs typeface="Cambria" pitchFamily="34" charset="-120"/>
               </a:rPr>
-              <a:t>Scale and availability</a:t>
+              <a:t>Enterprise fit</a:t>
             </a:r>
             <a:endParaRPr lang="en-US" sz="1700" dirty="0"/>
           </a:p>
@@ -11130,8 +12587,8 @@
         </p:nvSpPr>
         <p:spPr>
           <a:xfrm>
-            <a:off x="5413248" y="1554480"/>
-            <a:ext cx="6217920" cy="1097280"/>
+            <a:off x="1481328" y="2231136"/>
+            <a:ext cx="3840480" cy="310896"/>
           </a:xfrm>
           <a:prstGeom prst="rect">
             <a:avLst/>
@@ -11144,35 +12601,94 @@
           <a:lstStyle/>
           <a:p>
             <a:pPr indent="0" marL="0">
-              <a:lnSpc>
-                <a:spcPts val="1600"/>
-              </a:lnSpc>
-              <a:buNone/>
-            </a:pPr>
-            <a:r>
-              <a:rPr lang="en-US" sz="1200" dirty="0">
-                <a:solidFill>
-                  <a:srgbClr val="9DB8D4"/>
+              <a:buNone/>
+            </a:pPr>
+            <a:r>
+              <a:rPr lang="en-US" sz="1050" i="1" dirty="0">
+                <a:solidFill>
+                  <a:srgbClr val="7B94AE"/>
                 </a:solidFill>
                 <a:latin typeface="Calibri" pitchFamily="34" charset="0"/>
                 <a:ea typeface="Calibri" pitchFamily="34" charset="-122"/>
                 <a:cs typeface="Calibri" pitchFamily="34" charset="-120"/>
               </a:rPr>
-              <a:t>A PostgreSQL backend is the prerequisite: SQLite has no multi-writer story, so clustering, replication and DR all wait behind it. HSM failover follows, once a second token exists to test against.</a:t>
+              <a:t>What an auditor and a security team ask for.</a:t>
+            </a:r>
+            <a:endParaRPr lang="en-US" sz="1050" dirty="0"/>
+          </a:p>
+        </p:txBody>
+      </p:sp>
+      <p:sp>
+        <p:nvSpPr>
+          <p:cNvPr id="8" name="Text 6"/>
+          <p:cNvSpPr txBox="1"/>
+          <p:nvPr/>
+        </p:nvSpPr>
+        <p:spPr>
+          <a:xfrm>
+            <a:off x="5413248" y="1554480"/>
+            <a:ext cx="6126480" cy="1060704"/>
+          </a:xfrm>
+          <a:prstGeom prst="rect">
+            <a:avLst/>
+          </a:prstGeom>
+          <a:noFill/>
+          <a:ln/>
+        </p:spPr>
+        <p:txBody>
+          <a:bodyPr wrap="square" lIns="0" tIns="0" rIns="0" bIns="0" rtlCol="0" anchor="ctr"/>
+          <a:lstStyle/>
+          <a:p>
+            <a:pPr indent="0" marL="0">
+              <a:lnSpc>
+                <a:spcPts val="1700"/>
+              </a:lnSpc>
+              <a:buNone/>
+            </a:pPr>
+            <a:r>
+              <a:rPr lang="en-US" sz="1200" dirty="0">
+                <a:solidFill>
+                  <a:srgbClr val="9DB8D4"/>
+                </a:solidFill>
+                <a:latin typeface="Calibri" pitchFamily="34" charset="0"/>
+                <a:ea typeface="Calibri" pitchFamily="34" charset="-122"/>
+                <a:cs typeface="Calibri" pitchFamily="34" charset="-120"/>
+              </a:rPr>
+              <a:t>8.  Enterprise identity and policy</a:t>
             </a:r>
             <a:endParaRPr lang="en-US" sz="1200" dirty="0"/>
           </a:p>
-        </p:txBody>
-      </p:sp>
-      <p:sp>
-        <p:nvSpPr>
-          <p:cNvPr id="8" name="Shape 6"/>
+          <a:p>
+            <a:pPr indent="0" marL="0">
+              <a:lnSpc>
+                <a:spcPts val="1700"/>
+              </a:lnSpc>
+              <a:buNone/>
+            </a:pPr>
+            <a:r>
+              <a:rPr lang="en-US" sz="1200" dirty="0">
+                <a:solidFill>
+                  <a:srgbClr val="9DB8D4"/>
+                </a:solidFill>
+                <a:latin typeface="Calibri" pitchFamily="34" charset="0"/>
+                <a:ea typeface="Calibri" pitchFamily="34" charset="-122"/>
+                <a:cs typeface="Calibri" pitchFamily="34" charset="-120"/>
+              </a:rPr>
+              <a:t>9.  Audit externalisation, compliance and ceremony</a:t>
+            </a:r>
+            <a:endParaRPr lang="en-US" sz="1200" dirty="0"/>
+          </a:p>
+        </p:txBody>
+      </p:sp>
+      <p:sp>
+        <p:nvSpPr>
+          <p:cNvPr id="9" name="Shape 7"/>
           <p:cNvSpPr/>
           <p:nvPr/>
         </p:nvSpPr>
         <p:spPr>
           <a:xfrm>
-            <a:off x="566928" y="2816352"/>
+            <a:off x="566928" y="2798064"/>
             <a:ext cx="658368" cy="658368"/>
           </a:xfrm>
           <a:prstGeom prst="roundRect">
@@ -11193,13 +12709,13 @@
       </p:sp>
       <p:sp>
         <p:nvSpPr>
-          <p:cNvPr id="9" name="Text 7"/>
-          <p:cNvSpPr txBox="1"/>
-          <p:nvPr/>
-        </p:nvSpPr>
-        <p:spPr>
-          <a:xfrm>
-            <a:off x="566928" y="2816352"/>
+          <p:cNvPr id="10" name="Text 8"/>
+          <p:cNvSpPr txBox="1"/>
+          <p:nvPr/>
+        </p:nvSpPr>
+        <p:spPr>
+          <a:xfrm>
+            <a:off x="566928" y="2798064"/>
             <a:ext cx="658368" cy="658368"/>
           </a:xfrm>
           <a:prstGeom prst="rect">
@@ -11224,7 +12740,7 @@
                 <a:ea typeface="Cambria" pitchFamily="34" charset="-122"/>
                 <a:cs typeface="Cambria" pitchFamily="34" charset="-120"/>
               </a:rPr>
-              <a:t>9</a:t>
+              <a:t>D</a:t>
             </a:r>
             <a:endParaRPr lang="en-US" sz="2200" dirty="0"/>
           </a:p>
@@ -11232,14 +12748,14 @@
       </p:sp>
       <p:sp>
         <p:nvSpPr>
-          <p:cNvPr id="10" name="Text 8"/>
-          <p:cNvSpPr txBox="1"/>
-          <p:nvPr/>
-        </p:nvSpPr>
-        <p:spPr>
-          <a:xfrm>
-            <a:off x="1481328" y="2798064"/>
-            <a:ext cx="3840480" cy="365760"/>
+          <p:cNvPr id="11" name="Text 9"/>
+          <p:cNvSpPr txBox="1"/>
+          <p:nvPr/>
+        </p:nvSpPr>
+        <p:spPr>
+          <a:xfrm>
+            <a:off x="1481328" y="2779776"/>
+            <a:ext cx="3840480" cy="713232"/>
           </a:xfrm>
           <a:prstGeom prst="rect">
             <a:avLst/>
@@ -11263,7 +12779,7 @@
                 <a:ea typeface="Cambria" pitchFamily="34" charset="-122"/>
                 <a:cs typeface="Cambria" pitchFamily="34" charset="-120"/>
               </a:rPr>
-              <a:t>Multi-tenancy</a:t>
+              <a:t>Scale, availability and tenancy</a:t>
             </a:r>
             <a:endParaRPr lang="en-US" sz="1700" dirty="0"/>
           </a:p>
@@ -11271,14 +12787,14 @@
       </p:sp>
       <p:sp>
         <p:nvSpPr>
-          <p:cNvPr id="11" name="Text 9"/>
-          <p:cNvSpPr txBox="1"/>
-          <p:nvPr/>
-        </p:nvSpPr>
-        <p:spPr>
-          <a:xfrm>
-            <a:off x="5413248" y="2798064"/>
-            <a:ext cx="6217920" cy="1097280"/>
+          <p:cNvPr id="12" name="Text 10"/>
+          <p:cNvSpPr txBox="1"/>
+          <p:nvPr/>
+        </p:nvSpPr>
+        <p:spPr>
+          <a:xfrm>
+            <a:off x="1481328" y="3456432"/>
+            <a:ext cx="3840480" cy="310896"/>
           </a:xfrm>
           <a:prstGeom prst="rect">
             <a:avLst/>
@@ -11291,35 +12807,114 @@
           <a:lstStyle/>
           <a:p>
             <a:pPr indent="0" marL="0">
-              <a:lnSpc>
-                <a:spcPts val="1600"/>
-              </a:lnSpc>
-              <a:buNone/>
-            </a:pPr>
-            <a:r>
-              <a:rPr lang="en-US" sz="1200" dirty="0">
-                <a:solidFill>
-                  <a:srgbClr val="9DB8D4"/>
+              <a:buNone/>
+            </a:pPr>
+            <a:r>
+              <a:rPr lang="en-US" sz="1050" i="1" dirty="0">
+                <a:solidFill>
+                  <a:srgbClr val="7B94AE"/>
                 </a:solidFill>
                 <a:latin typeface="Calibri" pitchFamily="34" charset="0"/>
                 <a:ea typeface="Calibri" pitchFamily="34" charset="-122"/>
                 <a:cs typeface="Calibri" pitchFamily="34" charset="-120"/>
               </a:rPr>
-              <a:t>A tenant boundary reaches into every query, the audit log and the CLI — a wave of its own, not a flag. Worth building when there is a second tenant to serve; until then one deployment per tenant is a real answer.</a:t>
+              <a:t>Needs infrastructure to verify.</a:t>
+            </a:r>
+            <a:endParaRPr lang="en-US" sz="1050" dirty="0"/>
+          </a:p>
+        </p:txBody>
+      </p:sp>
+      <p:sp>
+        <p:nvSpPr>
+          <p:cNvPr id="13" name="Text 11"/>
+          <p:cNvSpPr txBox="1"/>
+          <p:nvPr/>
+        </p:nvSpPr>
+        <p:spPr>
+          <a:xfrm>
+            <a:off x="5413248" y="2779776"/>
+            <a:ext cx="6126480" cy="1060704"/>
+          </a:xfrm>
+          <a:prstGeom prst="rect">
+            <a:avLst/>
+          </a:prstGeom>
+          <a:noFill/>
+          <a:ln/>
+        </p:spPr>
+        <p:txBody>
+          <a:bodyPr wrap="square" lIns="0" tIns="0" rIns="0" bIns="0" rtlCol="0" anchor="ctr"/>
+          <a:lstStyle/>
+          <a:p>
+            <a:pPr indent="0" marL="0">
+              <a:lnSpc>
+                <a:spcPts val="1700"/>
+              </a:lnSpc>
+              <a:buNone/>
+            </a:pPr>
+            <a:r>
+              <a:rPr lang="en-US" sz="1200" dirty="0">
+                <a:solidFill>
+                  <a:srgbClr val="9DB8D4"/>
+                </a:solidFill>
+                <a:latin typeface="Calibri" pitchFamily="34" charset="0"/>
+                <a:ea typeface="Calibri" pitchFamily="34" charset="-122"/>
+                <a:cs typeface="Calibri" pitchFamily="34" charset="-120"/>
+              </a:rPr>
+              <a:t>10.  Storage abstraction and PostgreSQL</a:t>
             </a:r>
             <a:endParaRPr lang="en-US" sz="1200" dirty="0"/>
           </a:p>
-        </p:txBody>
-      </p:sp>
-      <p:sp>
-        <p:nvSpPr>
-          <p:cNvPr id="12" name="Shape 10"/>
+          <a:p>
+            <a:pPr indent="0" marL="0">
+              <a:lnSpc>
+                <a:spcPts val="1700"/>
+              </a:lnSpc>
+              <a:buNone/>
+            </a:pPr>
+            <a:r>
+              <a:rPr lang="en-US" sz="1200" dirty="0">
+                <a:solidFill>
+                  <a:srgbClr val="9DB8D4"/>
+                </a:solidFill>
+                <a:latin typeface="Calibri" pitchFamily="34" charset="0"/>
+                <a:ea typeface="Calibri" pitchFamily="34" charset="-122"/>
+                <a:cs typeface="Calibri" pitchFamily="34" charset="-120"/>
+              </a:rPr>
+              <a:t>11.  High availability, failover and deployment</a:t>
+            </a:r>
+            <a:endParaRPr lang="en-US" sz="1200" dirty="0"/>
+          </a:p>
+          <a:p>
+            <a:pPr indent="0" marL="0">
+              <a:lnSpc>
+                <a:spcPts val="1700"/>
+              </a:lnSpc>
+              <a:buNone/>
+            </a:pPr>
+            <a:r>
+              <a:rPr lang="en-US" sz="1200" dirty="0">
+                <a:solidFill>
+                  <a:srgbClr val="9DB8D4"/>
+                </a:solidFill>
+                <a:latin typeface="Calibri" pitchFamily="34" charset="0"/>
+                <a:ea typeface="Calibri" pitchFamily="34" charset="-122"/>
+                <a:cs typeface="Calibri" pitchFamily="34" charset="-120"/>
+              </a:rPr>
+              <a:t>12.  Multi-tenancy</a:t>
+            </a:r>
+            <a:endParaRPr lang="en-US" sz="1200" dirty="0"/>
+          </a:p>
+        </p:txBody>
+      </p:sp>
+      <p:sp>
+        <p:nvSpPr>
+          <p:cNvPr id="14" name="Shape 12"/>
           <p:cNvSpPr/>
           <p:nvPr/>
         </p:nvSpPr>
         <p:spPr>
           <a:xfrm>
-            <a:off x="566928" y="4059936"/>
+            <a:off x="566928" y="4023360"/>
             <a:ext cx="658368" cy="658368"/>
           </a:xfrm>
           <a:prstGeom prst="roundRect">
@@ -11340,13 +12935,13 @@
       </p:sp>
       <p:sp>
         <p:nvSpPr>
-          <p:cNvPr id="13" name="Text 11"/>
-          <p:cNvSpPr txBox="1"/>
-          <p:nvPr/>
-        </p:nvSpPr>
-        <p:spPr>
-          <a:xfrm>
-            <a:off x="566928" y="4059936"/>
+          <p:cNvPr id="15" name="Text 13"/>
+          <p:cNvSpPr txBox="1"/>
+          <p:nvPr/>
+        </p:nvSpPr>
+        <p:spPr>
+          <a:xfrm>
+            <a:off x="566928" y="4023360"/>
             <a:ext cx="658368" cy="658368"/>
           </a:xfrm>
           <a:prstGeom prst="rect">
@@ -11371,7 +12966,7 @@
                 <a:ea typeface="Cambria" pitchFamily="34" charset="-122"/>
                 <a:cs typeface="Cambria" pitchFamily="34" charset="-120"/>
               </a:rPr>
-              <a:t>10</a:t>
+              <a:t>E</a:t>
             </a:r>
             <a:endParaRPr lang="en-US" sz="2200" dirty="0"/>
           </a:p>
@@ -11379,14 +12974,14 @@
       </p:sp>
       <p:sp>
         <p:nvSpPr>
-          <p:cNvPr id="14" name="Text 12"/>
-          <p:cNvSpPr txBox="1"/>
-          <p:nvPr/>
-        </p:nvSpPr>
-        <p:spPr>
-          <a:xfrm>
-            <a:off x="1481328" y="4041648"/>
-            <a:ext cx="3840480" cy="365760"/>
+          <p:cNvPr id="16" name="Text 14"/>
+          <p:cNvSpPr txBox="1"/>
+          <p:nvPr/>
+        </p:nvSpPr>
+        <p:spPr>
+          <a:xfrm>
+            <a:off x="1481328" y="4005072"/>
+            <a:ext cx="3840480" cy="713232"/>
           </a:xfrm>
           <a:prstGeom prst="rect">
             <a:avLst/>
@@ -11410,7 +13005,7 @@
                 <a:ea typeface="Cambria" pitchFamily="34" charset="-122"/>
                 <a:cs typeface="Cambria" pitchFamily="34" charset="-120"/>
               </a:rPr>
-              <a:t>Compliance and post-quantum</a:t>
+              <a:t>Protocol and estate reach</a:t>
             </a:r>
             <a:endParaRPr lang="en-US" sz="1700" dirty="0"/>
           </a:p>
@@ -11418,14 +13013,14 @@
       </p:sp>
       <p:sp>
         <p:nvSpPr>
-          <p:cNvPr id="15" name="Text 13"/>
-          <p:cNvSpPr txBox="1"/>
-          <p:nvPr/>
-        </p:nvSpPr>
-        <p:spPr>
-          <a:xfrm>
-            <a:off x="5413248" y="4041648"/>
-            <a:ext cx="6217920" cy="1097280"/>
+          <p:cNvPr id="17" name="Text 15"/>
+          <p:cNvSpPr txBox="1"/>
+          <p:nvPr/>
+        </p:nvSpPr>
+        <p:spPr>
+          <a:xfrm>
+            <a:off x="1481328" y="4681728"/>
+            <a:ext cx="3840480" cy="310896"/>
           </a:xfrm>
           <a:prstGeom prst="rect">
             <a:avLst/>
@@ -11438,36 +13033,33 @@
           <a:lstStyle/>
           <a:p>
             <a:pPr indent="0" marL="0">
-              <a:lnSpc>
-                <a:spcPts val="1600"/>
-              </a:lnSpc>
-              <a:buNone/>
-            </a:pPr>
-            <a:r>
-              <a:rPr lang="en-US" sz="1200" dirty="0">
-                <a:solidFill>
-                  <a:srgbClr val="9DB8D4"/>
+              <a:buNone/>
+            </a:pPr>
+            <a:r>
+              <a:rPr lang="en-US" sz="1050" i="1" dirty="0">
+                <a:solidFill>
+                  <a:srgbClr val="7B94AE"/>
                 </a:solidFill>
                 <a:latin typeface="Calibri" pitchFamily="34" charset="0"/>
                 <a:ea typeface="Calibri" pitchFamily="34" charset="-122"/>
                 <a:cs typeface="Calibri" pitchFamily="34" charset="-120"/>
               </a:rPr>
-              <a:t>Swap in a validated token and run the suite against it. Adopt KMIP 3.0 and the PQC algorithms once a token ships them in a release — vendor-range enums would work locally and interoperate with nothing.</a:t>
-            </a:r>
-            <a:endParaRPr lang="en-US" sz="1200" dirty="0"/>
-          </a:p>
-        </p:txBody>
-      </p:sp>
-      <p:sp>
-        <p:nvSpPr>
-          <p:cNvPr id="16" name="Text 14"/>
-          <p:cNvSpPr txBox="1"/>
-          <p:nvPr/>
-        </p:nvSpPr>
-        <p:spPr>
-          <a:xfrm>
-            <a:off x="566928" y="5358384"/>
-            <a:ext cx="5120640" cy="292608"/>
+              <a:t>Additive, independent of D, verifiable here.</a:t>
+            </a:r>
+            <a:endParaRPr lang="en-US" sz="1050" dirty="0"/>
+          </a:p>
+        </p:txBody>
+      </p:sp>
+      <p:sp>
+        <p:nvSpPr>
+          <p:cNvPr id="18" name="Text 16"/>
+          <p:cNvSpPr txBox="1"/>
+          <p:nvPr/>
+        </p:nvSpPr>
+        <p:spPr>
+          <a:xfrm>
+            <a:off x="5413248" y="4005072"/>
+            <a:ext cx="6126480" cy="1060704"/>
           </a:xfrm>
           <a:prstGeom prst="rect">
             <a:avLst/>
@@ -11480,17 +13072,79 @@
           <a:lstStyle/>
           <a:p>
             <a:pPr indent="0" marL="0">
-              <a:buNone/>
-            </a:pPr>
-            <a:r>
-              <a:rPr lang="en-US" sz="1050" b="1" spc="160" kern="0" dirty="0">
-                <a:solidFill>
-                  <a:srgbClr val="C8952B"/>
+              <a:lnSpc>
+                <a:spcPts val="1700"/>
+              </a:lnSpc>
+              <a:buNone/>
+            </a:pPr>
+            <a:r>
+              <a:rPr lang="en-US" sz="1200" dirty="0">
+                <a:solidFill>
+                  <a:srgbClr val="9DB8D4"/>
                 </a:solidFill>
                 <a:latin typeface="Calibri" pitchFamily="34" charset="0"/>
                 <a:ea typeface="Calibri" pitchFamily="34" charset="-122"/>
                 <a:cs typeface="Calibri" pitchFamily="34" charset="-120"/>
               </a:rPr>
+              <a:t>13.  KMIP JSON and XML encodings</a:t>
+            </a:r>
+            <a:endParaRPr lang="en-US" sz="1200" dirty="0"/>
+          </a:p>
+          <a:p>
+            <a:pPr indent="0" marL="0">
+              <a:lnSpc>
+                <a:spcPts val="1700"/>
+              </a:lnSpc>
+              <a:buNone/>
+            </a:pPr>
+            <a:r>
+              <a:rPr lang="en-US" sz="1200" dirty="0">
+                <a:solidFill>
+                  <a:srgbClr val="9DB8D4"/>
+                </a:solidFill>
+                <a:latin typeface="Calibri" pitchFamily="34" charset="0"/>
+                <a:ea typeface="Calibri" pitchFamily="34" charset="-122"/>
+                <a:cs typeface="Calibri" pitchFamily="34" charset="-120"/>
+              </a:rPr>
+              <a:t>14.  Certificate discovery and expiry monitoring</a:t>
+            </a:r>
+            <a:endParaRPr lang="en-US" sz="1200" dirty="0"/>
+          </a:p>
+        </p:txBody>
+      </p:sp>
+      <p:sp>
+        <p:nvSpPr>
+          <p:cNvPr id="19" name="Text 17"/>
+          <p:cNvSpPr txBox="1"/>
+          <p:nvPr/>
+        </p:nvSpPr>
+        <p:spPr>
+          <a:xfrm>
+            <a:off x="566928" y="5285232"/>
+            <a:ext cx="5120640" cy="274320"/>
+          </a:xfrm>
+          <a:prstGeom prst="rect">
+            <a:avLst/>
+          </a:prstGeom>
+          <a:noFill/>
+          <a:ln/>
+        </p:spPr>
+        <p:txBody>
+          <a:bodyPr wrap="square" lIns="0" tIns="0" rIns="0" bIns="0" rtlCol="0" anchor="ctr"/>
+          <a:lstStyle/>
+          <a:p>
+            <a:pPr indent="0" marL="0">
+              <a:buNone/>
+            </a:pPr>
+            <a:r>
+              <a:rPr lang="en-US" sz="1050" b="1" spc="160" kern="0" dirty="0">
+                <a:solidFill>
+                  <a:srgbClr val="C8952B"/>
+                </a:solidFill>
+                <a:latin typeface="Calibri" pitchFamily="34" charset="0"/>
+                <a:ea typeface="Calibri" pitchFamily="34" charset="-122"/>
+                <a:cs typeface="Calibri" pitchFamily="34" charset="-120"/>
+              </a:rPr>
               <a:t>Deliberately out of scope</a:t>
             </a:r>
             <a:endParaRPr lang="en-US" sz="1050" dirty="0"/>
@@ -11499,14 +13153,14 @@
       </p:sp>
       <p:sp>
         <p:nvSpPr>
-          <p:cNvPr id="17" name="Text 15"/>
-          <p:cNvSpPr txBox="1"/>
-          <p:nvPr/>
-        </p:nvSpPr>
-        <p:spPr>
-          <a:xfrm>
-            <a:off x="566928" y="5614416"/>
-            <a:ext cx="5486400" cy="896112"/>
+          <p:cNvPr id="20" name="Text 18"/>
+          <p:cNvSpPr txBox="1"/>
+          <p:nvPr/>
+        </p:nvSpPr>
+        <p:spPr>
+          <a:xfrm>
+            <a:off x="566928" y="5541264"/>
+            <a:ext cx="5303520" cy="950976"/>
           </a:xfrm>
           <a:prstGeom prst="rect">
             <a:avLst/>
@@ -11520,13 +13174,13 @@
           <a:p>
             <a:pPr marL="342900" indent="-342900">
               <a:spcAft>
-                <a:spcPts val="300"/>
+                <a:spcPts val="200"/>
               </a:spcAft>
               <a:buSzPct val="100000"/>
               <a:buChar char="•"/>
             </a:pPr>
             <a:r>
-              <a:rPr lang="en-US" sz="1150" dirty="0">
+              <a:rPr lang="en-US" sz="1100" dirty="0">
                 <a:solidFill>
                   <a:srgbClr val="9DB8D4"/>
                 </a:solidFill>
@@ -11534,20 +13188,20 @@
                 <a:ea typeface="Calibri" pitchFamily="34" charset="-122"/>
                 <a:cs typeface="Calibri" pitchFamily="34" charset="-120"/>
               </a:rPr>
-              <a:t>Tokenization and FPE — a separate product, not a KMS feature.</a:t>
-            </a:r>
-            <a:endParaRPr lang="en-US" sz="1150" dirty="0"/>
+              <a:t>Secrets management</a:t>
+            </a:r>
+            <a:endParaRPr lang="en-US" sz="1100" dirty="0"/>
           </a:p>
           <a:p>
             <a:pPr marL="342900" indent="-342900">
               <a:spcAft>
-                <a:spcPts val="300"/>
+                <a:spcPts val="200"/>
               </a:spcAft>
               <a:buSzPct val="100000"/>
               <a:buChar char="•"/>
             </a:pPr>
             <a:r>
-              <a:rPr lang="en-US" sz="1150" dirty="0">
+              <a:rPr lang="en-US" sz="1100" dirty="0">
                 <a:solidFill>
                   <a:srgbClr val="9DB8D4"/>
                 </a:solidFill>
@@ -11555,20 +13209,20 @@
                 <a:ea typeface="Calibri" pitchFamily="34" charset="-122"/>
                 <a:cs typeface="Calibri" pitchFamily="34" charset="-120"/>
               </a:rPr>
-              <a:t>Being a certificate authority — front it with a real CA instead.</a:t>
-            </a:r>
-            <a:endParaRPr lang="en-US" sz="1150" dirty="0"/>
+              <a:t>Certificate lifecycle</a:t>
+            </a:r>
+            <a:endParaRPr lang="en-US" sz="1100" dirty="0"/>
           </a:p>
           <a:p>
             <a:pPr marL="342900" indent="-342900">
               <a:spcAft>
-                <a:spcPts val="300"/>
+                <a:spcPts val="200"/>
               </a:spcAft>
               <a:buSzPct val="100000"/>
               <a:buChar char="•"/>
             </a:pPr>
             <a:r>
-              <a:rPr lang="en-US" sz="1150" dirty="0">
+              <a:rPr lang="en-US" sz="1100" dirty="0">
                 <a:solidFill>
                   <a:srgbClr val="9DB8D4"/>
                 </a:solidFill>
@@ -11576,26 +13230,47 @@
                 <a:ea typeface="Calibri" pitchFamily="34" charset="-122"/>
                 <a:cs typeface="Calibri" pitchFamily="34" charset="-120"/>
               </a:rPr>
-              <a:t>A PKCS#11 provider for applications — only if demand appears.</a:t>
-            </a:r>
-            <a:endParaRPr lang="en-US" sz="1150" dirty="0"/>
-          </a:p>
-        </p:txBody>
-      </p:sp>
-      <p:sp>
-        <p:nvSpPr>
-          <p:cNvPr id="18" name="Shape 16"/>
+              <a:t>PKCS#11 provider for applications</a:t>
+            </a:r>
+            <a:endParaRPr lang="en-US" sz="1100" dirty="0"/>
+          </a:p>
+          <a:p>
+            <a:pPr marL="342900" indent="-342900">
+              <a:spcAft>
+                <a:spcPts val="200"/>
+              </a:spcAft>
+              <a:buSzPct val="100000"/>
+              <a:buChar char="•"/>
+            </a:pPr>
+            <a:r>
+              <a:rPr lang="en-US" sz="1100" dirty="0">
+                <a:solidFill>
+                  <a:srgbClr val="9DB8D4"/>
+                </a:solidFill>
+                <a:latin typeface="Calibri" pitchFamily="34" charset="0"/>
+                <a:ea typeface="Calibri" pitchFamily="34" charset="-122"/>
+                <a:cs typeface="Calibri" pitchFamily="34" charset="-120"/>
+              </a:rPr>
+              <a:t>Tokenization / format-preserving encryption</a:t>
+            </a:r>
+            <a:endParaRPr lang="en-US" sz="1100" dirty="0"/>
+          </a:p>
+        </p:txBody>
+      </p:sp>
+      <p:sp>
+        <p:nvSpPr>
+          <p:cNvPr id="21" name="Shape 19"/>
           <p:cNvSpPr/>
           <p:nvPr/>
         </p:nvSpPr>
         <p:spPr>
           <a:xfrm>
-            <a:off x="6236208" y="5303520"/>
-            <a:ext cx="5394960" cy="1170432"/>
+            <a:off x="6236208" y="5266944"/>
+            <a:ext cx="5394960" cy="1207008"/>
           </a:xfrm>
           <a:prstGeom prst="roundRect">
             <a:avLst>
-              <a:gd name="adj" fmla="val 4688"/>
+              <a:gd name="adj" fmla="val 4545"/>
             </a:avLst>
           </a:prstGeom>
           <a:solidFill>
@@ -11611,13 +13286,13 @@
       </p:sp>
       <p:sp>
         <p:nvSpPr>
-          <p:cNvPr id="19" name="Text 17"/>
-          <p:cNvSpPr txBox="1"/>
-          <p:nvPr/>
-        </p:nvSpPr>
-        <p:spPr>
-          <a:xfrm>
-            <a:off x="6473952" y="5504688"/>
+          <p:cNvPr id="22" name="Text 20"/>
+          <p:cNvSpPr txBox="1"/>
+          <p:nvPr/>
+        </p:nvSpPr>
+        <p:spPr>
+          <a:xfrm>
+            <a:off x="6473952" y="5468112"/>
             <a:ext cx="4919472" cy="822960"/>
           </a:xfrm>
           <a:prstGeom prst="rect">
@@ -11645,7 +13320,7 @@
                 <a:ea typeface="Cambria" pitchFamily="34" charset="-122"/>
                 <a:cs typeface="Cambria" pitchFamily="34" charset="-120"/>
               </a:rPr>
-              <a:t>Nothing ships that cannot be demonstrated. Where something could not be tested here, the roadmap says so rather than counting it as done.</a:t>
+              <a:t>Nothing ships that cannot be demonstrated. Where something could not be tested here, the plan says so rather than counting it as done.</a:t>
             </a:r>
             <a:endParaRPr lang="en-US" sz="1350" dirty="0"/>
           </a:p>

--- a/KMIP_PKCS11_Overview_Deck.pptx
+++ b/KMIP_PKCS11_Overview_Deck.pptx
@@ -868,7 +868,7 @@
           <a:p>
             <a:r>
               <a:rPr lang="en-US" dirty="0"/>
-              <a:t>82 assessed features, 50 short of full coverage; these 14 steps close 34. Phases 0 to 5 used exactly this structure and all six gates were met, so the format is proven on this codebase rather than borrowed.</a:t>
+              <a:t>82 assessed features, 50 short of full coverage; these 26 steps close 50. Phases 0 to 5 used exactly this structure and all six gates were met, so the format is proven on this codebase rather than borrowed.</a:t>
             </a:r>
             <a:endParaRPr lang="en-US" dirty="0"/>
           </a:p>
@@ -1044,7 +1044,7 @@
           <a:p>
             <a:r>
               <a:rPr lang="en-US" dirty="0"/>
-              <a:t>16 features stay open after step 14. The ones listed here are product decisions; the rest wait on a supplier, a procurement decision, an OASIS event or hardware this project cannot verify. Close on the discipline rather than the feature list.</a:t>
+              <a:t>Close on the boundary rather than the feature list. The previous revision deferred sixteen features; this one routes all of them and names what each blocked step is waiting for instead. That is a more useful statement and a more demanding one.</a:t>
             </a:r>
             <a:endParaRPr lang="en-US" dirty="0"/>
           </a:p>
@@ -8433,7 +8433,7 @@
                 <a:ea typeface="Cambria" pitchFamily="34" charset="-122"/>
                 <a:cs typeface="Cambria" pitchFamily="34" charset="-120"/>
               </a:rPr>
-              <a:t>5 stages, in dependency order</a:t>
+              <a:t>9 stages, in dependency order</a:t>
             </a:r>
             <a:endParaRPr lang="en-US" sz="3400" dirty="0"/>
           </a:p>
@@ -8447,1077 +8447,12 @@
         </p:nvSpPr>
         <p:spPr>
           <a:xfrm>
-            <a:off x="566928" y="1591056"/>
-            <a:ext cx="1975104" cy="2084832"/>
+            <a:off x="566928" y="1481328"/>
+            <a:ext cx="3517392" cy="1024128"/>
           </a:xfrm>
           <a:prstGeom prst="roundRect">
             <a:avLst>
-              <a:gd name="adj" fmla="val 2778"/>
-            </a:avLst>
-          </a:prstGeom>
-          <a:solidFill>
-            <a:srgbClr val="1A3A5C"/>
-          </a:solidFill>
-          <a:ln w="12700">
-            <a:solidFill>
-              <a:srgbClr val="1A3A5C"/>
-            </a:solidFill>
-            <a:prstDash val="solid"/>
-          </a:ln>
-          <a:effectLst>
-            <a:outerShdw sx="100000" sy="100000" kx="0" ky="0" algn="bl" rotWithShape="0" blurRad="127000" dist="25400" dir="5400000">
-              <a:srgbClr val="8C9AA8">
-                <a:alpha val="22000"/>
-              </a:srgbClr>
-            </a:outerShdw>
-          </a:effectLst>
-        </p:spPr>
-      </p:sp>
-      <p:sp>
-        <p:nvSpPr>
-          <p:cNvPr id="5" name="Text 3"/>
-          <p:cNvSpPr txBox="1"/>
-          <p:nvPr/>
-        </p:nvSpPr>
-        <p:spPr>
-          <a:xfrm>
-            <a:off x="566928" y="1737360"/>
-            <a:ext cx="1975104" cy="566928"/>
-          </a:xfrm>
-          <a:prstGeom prst="rect">
-            <a:avLst/>
-          </a:prstGeom>
-          <a:noFill/>
-          <a:ln/>
-        </p:spPr>
-        <p:txBody>
-          <a:bodyPr wrap="square" lIns="0" tIns="0" rIns="0" bIns="0" rtlCol="0" anchor="ctr"/>
-          <a:lstStyle/>
-          <a:p>
-            <a:pPr algn="ctr" indent="0" marL="0">
-              <a:buNone/>
-            </a:pPr>
-            <a:r>
-              <a:rPr lang="en-US" sz="3400" b="1" dirty="0">
-                <a:solidFill>
-                  <a:srgbClr val="9DB8D4"/>
-                </a:solidFill>
-                <a:latin typeface="Cambria" pitchFamily="34" charset="0"/>
-                <a:ea typeface="Cambria" pitchFamily="34" charset="-122"/>
-                <a:cs typeface="Cambria" pitchFamily="34" charset="-120"/>
-              </a:rPr>
-              <a:t>A</a:t>
-            </a:r>
-            <a:endParaRPr lang="en-US" sz="3400" dirty="0"/>
-          </a:p>
-        </p:txBody>
-      </p:sp>
-      <p:sp>
-        <p:nvSpPr>
-          <p:cNvPr id="6" name="Text 4"/>
-          <p:cNvSpPr txBox="1"/>
-          <p:nvPr/>
-        </p:nvSpPr>
-        <p:spPr>
-          <a:xfrm>
-            <a:off x="640080" y="2304288"/>
-            <a:ext cx="1828800" cy="221234"/>
-          </a:xfrm>
-          <a:prstGeom prst="rect">
-            <a:avLst/>
-          </a:prstGeom>
-          <a:noFill/>
-          <a:ln/>
-        </p:spPr>
-        <p:txBody>
-          <a:bodyPr wrap="square" lIns="0" tIns="0" rIns="0" bIns="0" rtlCol="0" anchor="ctr"/>
-          <a:lstStyle/>
-          <a:p>
-            <a:pPr algn="ctr" indent="0" marL="0">
-              <a:buNone/>
-            </a:pPr>
-            <a:r>
-              <a:rPr lang="en-US" sz="1300" b="1" dirty="0">
-                <a:solidFill>
-                  <a:srgbClr val="FFFFFF"/>
-                </a:solidFill>
-                <a:latin typeface="Cambria" pitchFamily="34" charset="0"/>
-                <a:ea typeface="Cambria" pitchFamily="34" charset="-122"/>
-                <a:cs typeface="Cambria" pitchFamily="34" charset="-120"/>
-              </a:rPr>
-              <a:t>Foundation</a:t>
-            </a:r>
-            <a:endParaRPr lang="en-US" sz="1300" dirty="0"/>
-          </a:p>
-        </p:txBody>
-      </p:sp>
-      <p:sp>
-        <p:nvSpPr>
-          <p:cNvPr id="7" name="Text 5"/>
-          <p:cNvSpPr txBox="1"/>
-          <p:nvPr/>
-        </p:nvSpPr>
-        <p:spPr>
-          <a:xfrm>
-            <a:off x="621792" y="2580386"/>
-            <a:ext cx="1865376" cy="182880"/>
-          </a:xfrm>
-          <a:prstGeom prst="rect">
-            <a:avLst/>
-          </a:prstGeom>
-          <a:noFill/>
-          <a:ln/>
-        </p:spPr>
-        <p:txBody>
-          <a:bodyPr wrap="square" lIns="0" tIns="0" rIns="0" bIns="0" rtlCol="0" anchor="ctr"/>
-          <a:lstStyle/>
-          <a:p>
-            <a:pPr algn="ctr" indent="0" marL="0">
-              <a:buNone/>
-            </a:pPr>
-            <a:r>
-              <a:rPr lang="en-US" sz="1000" b="1" dirty="0">
-                <a:solidFill>
-                  <a:srgbClr val="C8952B"/>
-                </a:solidFill>
-                <a:latin typeface="Calibri" pitchFamily="34" charset="0"/>
-                <a:ea typeface="Calibri" pitchFamily="34" charset="-122"/>
-                <a:cs typeface="Calibri" pitchFamily="34" charset="-120"/>
-              </a:rPr>
-              <a:t>Steps 1–2 · closes 2</a:t>
-            </a:r>
-            <a:endParaRPr lang="en-US" sz="1000" dirty="0"/>
-          </a:p>
-        </p:txBody>
-      </p:sp>
-      <p:sp>
-        <p:nvSpPr>
-          <p:cNvPr id="8" name="Text 6"/>
-          <p:cNvSpPr txBox="1"/>
-          <p:nvPr/>
-        </p:nvSpPr>
-        <p:spPr>
-          <a:xfrm>
-            <a:off x="694944" y="2799842"/>
-            <a:ext cx="1719072" cy="802894"/>
-          </a:xfrm>
-          <a:prstGeom prst="rect">
-            <a:avLst/>
-          </a:prstGeom>
-          <a:noFill/>
-          <a:ln/>
-        </p:spPr>
-        <p:txBody>
-          <a:bodyPr wrap="square" lIns="0" tIns="0" rIns="0" bIns="0" rtlCol="0" anchor="ctr"/>
-          <a:lstStyle/>
-          <a:p>
-            <a:pPr algn="ctr" indent="0" marL="0">
-              <a:lnSpc>
-                <a:spcPts val="1170"/>
-              </a:lnSpc>
-              <a:buNone/>
-            </a:pPr>
-            <a:r>
-              <a:rPr lang="en-US" sz="900" dirty="0">
-                <a:solidFill>
-                  <a:srgbClr val="C9DAEA"/>
-                </a:solidFill>
-                <a:latin typeface="Calibri" pitchFamily="34" charset="0"/>
-                <a:ea typeface="Calibri" pitchFamily="34" charset="-122"/>
-                <a:cs typeface="Calibri" pitchFamily="34" charset="-120"/>
-              </a:rPr>
-              <a:t>No new attack surface. Makes the rest safe to build.</a:t>
-            </a:r>
-            <a:endParaRPr lang="en-US" sz="900" dirty="0"/>
-          </a:p>
-        </p:txBody>
-      </p:sp>
-      <p:sp>
-        <p:nvSpPr>
-          <p:cNvPr id="9" name="Shape 7"/>
-          <p:cNvSpPr/>
-          <p:nvPr/>
-        </p:nvSpPr>
-        <p:spPr>
-          <a:xfrm>
-            <a:off x="2578608" y="2551176"/>
-            <a:ext cx="214884" cy="164592"/>
-          </a:xfrm>
-          <a:prstGeom prst="rightArrow">
-            <a:avLst/>
-          </a:prstGeom>
-          <a:solidFill>
-            <a:srgbClr val="2E6DA4"/>
-          </a:solidFill>
-          <a:ln w="12700">
-            <a:solidFill>
-              <a:srgbClr val="2E6DA4"/>
-            </a:solidFill>
-            <a:prstDash val="solid"/>
-          </a:ln>
-        </p:spPr>
-      </p:sp>
-      <p:sp>
-        <p:nvSpPr>
-          <p:cNvPr id="10" name="Shape 8"/>
-          <p:cNvSpPr/>
-          <p:nvPr/>
-        </p:nvSpPr>
-        <p:spPr>
-          <a:xfrm>
-            <a:off x="2830068" y="1591056"/>
-            <a:ext cx="1975104" cy="2084832"/>
-          </a:xfrm>
-          <a:prstGeom prst="roundRect">
-            <a:avLst>
-              <a:gd name="adj" fmla="val 2778"/>
-            </a:avLst>
-          </a:prstGeom>
-          <a:solidFill>
-            <a:srgbClr val="2E6DA4"/>
-          </a:solidFill>
-          <a:ln w="12700">
-            <a:solidFill>
-              <a:srgbClr val="2E6DA4"/>
-            </a:solidFill>
-            <a:prstDash val="solid"/>
-          </a:ln>
-          <a:effectLst>
-            <a:outerShdw sx="100000" sy="100000" kx="0" ky="0" algn="bl" rotWithShape="0" blurRad="127000" dist="25400" dir="5400000">
-              <a:srgbClr val="8C9AA8">
-                <a:alpha val="22000"/>
-              </a:srgbClr>
-            </a:outerShdw>
-          </a:effectLst>
-        </p:spPr>
-      </p:sp>
-      <p:sp>
-        <p:nvSpPr>
-          <p:cNvPr id="11" name="Text 9"/>
-          <p:cNvSpPr txBox="1"/>
-          <p:nvPr/>
-        </p:nvSpPr>
-        <p:spPr>
-          <a:xfrm>
-            <a:off x="2830068" y="1737360"/>
-            <a:ext cx="1975104" cy="566928"/>
-          </a:xfrm>
-          <a:prstGeom prst="rect">
-            <a:avLst/>
-          </a:prstGeom>
-          <a:noFill/>
-          <a:ln/>
-        </p:spPr>
-        <p:txBody>
-          <a:bodyPr wrap="square" lIns="0" tIns="0" rIns="0" bIns="0" rtlCol="0" anchor="ctr"/>
-          <a:lstStyle/>
-          <a:p>
-            <a:pPr algn="ctr" indent="0" marL="0">
-              <a:buNone/>
-            </a:pPr>
-            <a:r>
-              <a:rPr lang="en-US" sz="3400" b="1" dirty="0">
-                <a:solidFill>
-                  <a:srgbClr val="9DB8D4"/>
-                </a:solidFill>
-                <a:latin typeface="Cambria" pitchFamily="34" charset="0"/>
-                <a:ea typeface="Cambria" pitchFamily="34" charset="-122"/>
-                <a:cs typeface="Cambria" pitchFamily="34" charset="-120"/>
-              </a:rPr>
-              <a:t>B</a:t>
-            </a:r>
-            <a:endParaRPr lang="en-US" sz="3400" dirty="0"/>
-          </a:p>
-        </p:txBody>
-      </p:sp>
-      <p:sp>
-        <p:nvSpPr>
-          <p:cNvPr id="12" name="Text 10"/>
-          <p:cNvSpPr txBox="1"/>
-          <p:nvPr/>
-        </p:nvSpPr>
-        <p:spPr>
-          <a:xfrm>
-            <a:off x="2903220" y="2304288"/>
-            <a:ext cx="1828800" cy="442468"/>
-          </a:xfrm>
-          <a:prstGeom prst="rect">
-            <a:avLst/>
-          </a:prstGeom>
-          <a:noFill/>
-          <a:ln/>
-        </p:spPr>
-        <p:txBody>
-          <a:bodyPr wrap="square" lIns="0" tIns="0" rIns="0" bIns="0" rtlCol="0" anchor="ctr"/>
-          <a:lstStyle/>
-          <a:p>
-            <a:pPr algn="ctr" indent="0" marL="0">
-              <a:buNone/>
-            </a:pPr>
-            <a:r>
-              <a:rPr lang="en-US" sz="1300" b="1" dirty="0">
-                <a:solidFill>
-                  <a:srgbClr val="FFFFFF"/>
-                </a:solidFill>
-                <a:latin typeface="Cambria" pitchFamily="34" charset="0"/>
-                <a:ea typeface="Cambria" pitchFamily="34" charset="-122"/>
-                <a:cs typeface="Cambria" pitchFamily="34" charset="-120"/>
-              </a:rPr>
-              <a:t>The REST control plane</a:t>
-            </a:r>
-            <a:endParaRPr lang="en-US" sz="1300" dirty="0"/>
-          </a:p>
-        </p:txBody>
-      </p:sp>
-      <p:sp>
-        <p:nvSpPr>
-          <p:cNvPr id="13" name="Text 11"/>
-          <p:cNvSpPr txBox="1"/>
-          <p:nvPr/>
-        </p:nvSpPr>
-        <p:spPr>
-          <a:xfrm>
-            <a:off x="2884932" y="2801620"/>
-            <a:ext cx="1865376" cy="182880"/>
-          </a:xfrm>
-          <a:prstGeom prst="rect">
-            <a:avLst/>
-          </a:prstGeom>
-          <a:noFill/>
-          <a:ln/>
-        </p:spPr>
-        <p:txBody>
-          <a:bodyPr wrap="square" lIns="0" tIns="0" rIns="0" bIns="0" rtlCol="0" anchor="ctr"/>
-          <a:lstStyle/>
-          <a:p>
-            <a:pPr algn="ctr" indent="0" marL="0">
-              <a:buNone/>
-            </a:pPr>
-            <a:r>
-              <a:rPr lang="en-US" sz="1000" b="1" dirty="0">
-                <a:solidFill>
-                  <a:srgbClr val="C8952B"/>
-                </a:solidFill>
-                <a:latin typeface="Calibri" pitchFamily="34" charset="0"/>
-                <a:ea typeface="Calibri" pitchFamily="34" charset="-122"/>
-                <a:cs typeface="Calibri" pitchFamily="34" charset="-120"/>
-              </a:rPr>
-              <a:t>Steps 3–7 · closes 12</a:t>
-            </a:r>
-            <a:endParaRPr lang="en-US" sz="1000" dirty="0"/>
-          </a:p>
-        </p:txBody>
-      </p:sp>
-      <p:sp>
-        <p:nvSpPr>
-          <p:cNvPr id="14" name="Text 12"/>
-          <p:cNvSpPr txBox="1"/>
-          <p:nvPr/>
-        </p:nvSpPr>
-        <p:spPr>
-          <a:xfrm>
-            <a:off x="2958084" y="3021076"/>
-            <a:ext cx="1719072" cy="581660"/>
-          </a:xfrm>
-          <a:prstGeom prst="rect">
-            <a:avLst/>
-          </a:prstGeom>
-          <a:noFill/>
-          <a:ln/>
-        </p:spPr>
-        <p:txBody>
-          <a:bodyPr wrap="square" lIns="0" tIns="0" rIns="0" bIns="0" rtlCol="0" anchor="ctr"/>
-          <a:lstStyle/>
-          <a:p>
-            <a:pPr algn="ctr" indent="0" marL="0">
-              <a:lnSpc>
-                <a:spcPts val="1170"/>
-              </a:lnSpc>
-              <a:buNone/>
-            </a:pPr>
-            <a:r>
-              <a:rPr lang="en-US" sz="900" dirty="0">
-                <a:solidFill>
-                  <a:srgbClr val="C9DAEA"/>
-                </a:solidFill>
-                <a:latin typeface="Calibri" pitchFamily="34" charset="0"/>
-                <a:ea typeface="Calibri" pitchFamily="34" charset="-122"/>
-                <a:cs typeface="Calibri" pitchFamily="34" charset="-120"/>
-              </a:rPr>
-              <a:t>The API, then the console that uses it.</a:t>
-            </a:r>
-            <a:endParaRPr lang="en-US" sz="900" dirty="0"/>
-          </a:p>
-        </p:txBody>
-      </p:sp>
-      <p:sp>
-        <p:nvSpPr>
-          <p:cNvPr id="15" name="Shape 13"/>
-          <p:cNvSpPr/>
-          <p:nvPr/>
-        </p:nvSpPr>
-        <p:spPr>
-          <a:xfrm>
-            <a:off x="4841748" y="2551176"/>
-            <a:ext cx="214884" cy="164592"/>
-          </a:xfrm>
-          <a:prstGeom prst="rightArrow">
-            <a:avLst/>
-          </a:prstGeom>
-          <a:solidFill>
-            <a:srgbClr val="2E6DA4"/>
-          </a:solidFill>
-          <a:ln w="12700">
-            <a:solidFill>
-              <a:srgbClr val="2E6DA4"/>
-            </a:solidFill>
-            <a:prstDash val="solid"/>
-          </a:ln>
-        </p:spPr>
-      </p:sp>
-      <p:sp>
-        <p:nvSpPr>
-          <p:cNvPr id="16" name="Shape 14"/>
-          <p:cNvSpPr/>
-          <p:nvPr/>
-        </p:nvSpPr>
-        <p:spPr>
-          <a:xfrm>
-            <a:off x="5093208" y="1591056"/>
-            <a:ext cx="1975104" cy="2084832"/>
-          </a:xfrm>
-          <a:prstGeom prst="roundRect">
-            <a:avLst>
-              <a:gd name="adj" fmla="val 2778"/>
-            </a:avLst>
-          </a:prstGeom>
-          <a:solidFill>
-            <a:srgbClr val="5A7184"/>
-          </a:solidFill>
-          <a:ln w="12700">
-            <a:solidFill>
-              <a:srgbClr val="5A7184"/>
-            </a:solidFill>
-            <a:prstDash val="solid"/>
-          </a:ln>
-          <a:effectLst>
-            <a:outerShdw sx="100000" sy="100000" kx="0" ky="0" algn="bl" rotWithShape="0" blurRad="127000" dist="25400" dir="5400000">
-              <a:srgbClr val="8C9AA8">
-                <a:alpha val="22000"/>
-              </a:srgbClr>
-            </a:outerShdw>
-          </a:effectLst>
-        </p:spPr>
-      </p:sp>
-      <p:sp>
-        <p:nvSpPr>
-          <p:cNvPr id="17" name="Text 15"/>
-          <p:cNvSpPr txBox="1"/>
-          <p:nvPr/>
-        </p:nvSpPr>
-        <p:spPr>
-          <a:xfrm>
-            <a:off x="5093208" y="1737360"/>
-            <a:ext cx="1975104" cy="566928"/>
-          </a:xfrm>
-          <a:prstGeom prst="rect">
-            <a:avLst/>
-          </a:prstGeom>
-          <a:noFill/>
-          <a:ln/>
-        </p:spPr>
-        <p:txBody>
-          <a:bodyPr wrap="square" lIns="0" tIns="0" rIns="0" bIns="0" rtlCol="0" anchor="ctr"/>
-          <a:lstStyle/>
-          <a:p>
-            <a:pPr algn="ctr" indent="0" marL="0">
-              <a:buNone/>
-            </a:pPr>
-            <a:r>
-              <a:rPr lang="en-US" sz="3400" b="1" dirty="0">
-                <a:solidFill>
-                  <a:srgbClr val="9DB8D4"/>
-                </a:solidFill>
-                <a:latin typeface="Cambria" pitchFamily="34" charset="0"/>
-                <a:ea typeface="Cambria" pitchFamily="34" charset="-122"/>
-                <a:cs typeface="Cambria" pitchFamily="34" charset="-120"/>
-              </a:rPr>
-              <a:t>C</a:t>
-            </a:r>
-            <a:endParaRPr lang="en-US" sz="3400" dirty="0"/>
-          </a:p>
-        </p:txBody>
-      </p:sp>
-      <p:sp>
-        <p:nvSpPr>
-          <p:cNvPr id="18" name="Text 16"/>
-          <p:cNvSpPr txBox="1"/>
-          <p:nvPr/>
-        </p:nvSpPr>
-        <p:spPr>
-          <a:xfrm>
-            <a:off x="5166360" y="2304288"/>
-            <a:ext cx="1828800" cy="221234"/>
-          </a:xfrm>
-          <a:prstGeom prst="rect">
-            <a:avLst/>
-          </a:prstGeom>
-          <a:noFill/>
-          <a:ln/>
-        </p:spPr>
-        <p:txBody>
-          <a:bodyPr wrap="square" lIns="0" tIns="0" rIns="0" bIns="0" rtlCol="0" anchor="ctr"/>
-          <a:lstStyle/>
-          <a:p>
-            <a:pPr algn="ctr" indent="0" marL="0">
-              <a:buNone/>
-            </a:pPr>
-            <a:r>
-              <a:rPr lang="en-US" sz="1300" b="1" dirty="0">
-                <a:solidFill>
-                  <a:srgbClr val="FFFFFF"/>
-                </a:solidFill>
-                <a:latin typeface="Cambria" pitchFamily="34" charset="0"/>
-                <a:ea typeface="Cambria" pitchFamily="34" charset="-122"/>
-                <a:cs typeface="Cambria" pitchFamily="34" charset="-120"/>
-              </a:rPr>
-              <a:t>Enterprise fit</a:t>
-            </a:r>
-            <a:endParaRPr lang="en-US" sz="1300" dirty="0"/>
-          </a:p>
-        </p:txBody>
-      </p:sp>
-      <p:sp>
-        <p:nvSpPr>
-          <p:cNvPr id="19" name="Text 17"/>
-          <p:cNvSpPr txBox="1"/>
-          <p:nvPr/>
-        </p:nvSpPr>
-        <p:spPr>
-          <a:xfrm>
-            <a:off x="5148072" y="2580386"/>
-            <a:ext cx="1865376" cy="182880"/>
-          </a:xfrm>
-          <a:prstGeom prst="rect">
-            <a:avLst/>
-          </a:prstGeom>
-          <a:noFill/>
-          <a:ln/>
-        </p:spPr>
-        <p:txBody>
-          <a:bodyPr wrap="square" lIns="0" tIns="0" rIns="0" bIns="0" rtlCol="0" anchor="ctr"/>
-          <a:lstStyle/>
-          <a:p>
-            <a:pPr algn="ctr" indent="0" marL="0">
-              <a:buNone/>
-            </a:pPr>
-            <a:r>
-              <a:rPr lang="en-US" sz="1000" b="1" dirty="0">
-                <a:solidFill>
-                  <a:srgbClr val="C8952B"/>
-                </a:solidFill>
-                <a:latin typeface="Calibri" pitchFamily="34" charset="0"/>
-                <a:ea typeface="Calibri" pitchFamily="34" charset="-122"/>
-                <a:cs typeface="Calibri" pitchFamily="34" charset="-120"/>
-              </a:rPr>
-              <a:t>Steps 8–9 · closes 9</a:t>
-            </a:r>
-            <a:endParaRPr lang="en-US" sz="1000" dirty="0"/>
-          </a:p>
-        </p:txBody>
-      </p:sp>
-      <p:sp>
-        <p:nvSpPr>
-          <p:cNvPr id="20" name="Text 18"/>
-          <p:cNvSpPr txBox="1"/>
-          <p:nvPr/>
-        </p:nvSpPr>
-        <p:spPr>
-          <a:xfrm>
-            <a:off x="5221224" y="2799842"/>
-            <a:ext cx="1719072" cy="802894"/>
-          </a:xfrm>
-          <a:prstGeom prst="rect">
-            <a:avLst/>
-          </a:prstGeom>
-          <a:noFill/>
-          <a:ln/>
-        </p:spPr>
-        <p:txBody>
-          <a:bodyPr wrap="square" lIns="0" tIns="0" rIns="0" bIns="0" rtlCol="0" anchor="ctr"/>
-          <a:lstStyle/>
-          <a:p>
-            <a:pPr algn="ctr" indent="0" marL="0">
-              <a:lnSpc>
-                <a:spcPts val="1170"/>
-              </a:lnSpc>
-              <a:buNone/>
-            </a:pPr>
-            <a:r>
-              <a:rPr lang="en-US" sz="900" dirty="0">
-                <a:solidFill>
-                  <a:srgbClr val="C9DAEA"/>
-                </a:solidFill>
-                <a:latin typeface="Calibri" pitchFamily="34" charset="0"/>
-                <a:ea typeface="Calibri" pitchFamily="34" charset="-122"/>
-                <a:cs typeface="Calibri" pitchFamily="34" charset="-120"/>
-              </a:rPr>
-              <a:t>What an auditor and a security team ask for.</a:t>
-            </a:r>
-            <a:endParaRPr lang="en-US" sz="900" dirty="0"/>
-          </a:p>
-        </p:txBody>
-      </p:sp>
-      <p:sp>
-        <p:nvSpPr>
-          <p:cNvPr id="21" name="Shape 19"/>
-          <p:cNvSpPr/>
-          <p:nvPr/>
-        </p:nvSpPr>
-        <p:spPr>
-          <a:xfrm>
-            <a:off x="7104888" y="2551176"/>
-            <a:ext cx="214884" cy="164592"/>
-          </a:xfrm>
-          <a:prstGeom prst="rightArrow">
-            <a:avLst/>
-          </a:prstGeom>
-          <a:solidFill>
-            <a:srgbClr val="2E6DA4"/>
-          </a:solidFill>
-          <a:ln w="12700">
-            <a:solidFill>
-              <a:srgbClr val="2E6DA4"/>
-            </a:solidFill>
-            <a:prstDash val="solid"/>
-          </a:ln>
-        </p:spPr>
-      </p:sp>
-      <p:sp>
-        <p:nvSpPr>
-          <p:cNvPr id="22" name="Shape 20"/>
-          <p:cNvSpPr/>
-          <p:nvPr/>
-        </p:nvSpPr>
-        <p:spPr>
-          <a:xfrm>
-            <a:off x="7356348" y="1591056"/>
-            <a:ext cx="1975104" cy="2084832"/>
-          </a:xfrm>
-          <a:prstGeom prst="roundRect">
-            <a:avLst>
-              <a:gd name="adj" fmla="val 2778"/>
-            </a:avLst>
-          </a:prstGeom>
-          <a:solidFill>
-            <a:srgbClr val="6B8299"/>
-          </a:solidFill>
-          <a:ln w="12700">
-            <a:solidFill>
-              <a:srgbClr val="6B8299"/>
-            </a:solidFill>
-            <a:prstDash val="solid"/>
-          </a:ln>
-          <a:effectLst>
-            <a:outerShdw sx="100000" sy="100000" kx="0" ky="0" algn="bl" rotWithShape="0" blurRad="127000" dist="25400" dir="5400000">
-              <a:srgbClr val="8C9AA8">
-                <a:alpha val="22000"/>
-              </a:srgbClr>
-            </a:outerShdw>
-          </a:effectLst>
-        </p:spPr>
-      </p:sp>
-      <p:sp>
-        <p:nvSpPr>
-          <p:cNvPr id="23" name="Text 21"/>
-          <p:cNvSpPr txBox="1"/>
-          <p:nvPr/>
-        </p:nvSpPr>
-        <p:spPr>
-          <a:xfrm>
-            <a:off x="7356348" y="1737360"/>
-            <a:ext cx="1975104" cy="566928"/>
-          </a:xfrm>
-          <a:prstGeom prst="rect">
-            <a:avLst/>
-          </a:prstGeom>
-          <a:noFill/>
-          <a:ln/>
-        </p:spPr>
-        <p:txBody>
-          <a:bodyPr wrap="square" lIns="0" tIns="0" rIns="0" bIns="0" rtlCol="0" anchor="ctr"/>
-          <a:lstStyle/>
-          <a:p>
-            <a:pPr algn="ctr" indent="0" marL="0">
-              <a:buNone/>
-            </a:pPr>
-            <a:r>
-              <a:rPr lang="en-US" sz="3400" b="1" dirty="0">
-                <a:solidFill>
-                  <a:srgbClr val="9DB8D4"/>
-                </a:solidFill>
-                <a:latin typeface="Cambria" pitchFamily="34" charset="0"/>
-                <a:ea typeface="Cambria" pitchFamily="34" charset="-122"/>
-                <a:cs typeface="Cambria" pitchFamily="34" charset="-120"/>
-              </a:rPr>
-              <a:t>D</a:t>
-            </a:r>
-            <a:endParaRPr lang="en-US" sz="3400" dirty="0"/>
-          </a:p>
-        </p:txBody>
-      </p:sp>
-      <p:sp>
-        <p:nvSpPr>
-          <p:cNvPr id="24" name="Text 22"/>
-          <p:cNvSpPr txBox="1"/>
-          <p:nvPr/>
-        </p:nvSpPr>
-        <p:spPr>
-          <a:xfrm>
-            <a:off x="7429500" y="2304288"/>
-            <a:ext cx="1828800" cy="442468"/>
-          </a:xfrm>
-          <a:prstGeom prst="rect">
-            <a:avLst/>
-          </a:prstGeom>
-          <a:noFill/>
-          <a:ln/>
-        </p:spPr>
-        <p:txBody>
-          <a:bodyPr wrap="square" lIns="0" tIns="0" rIns="0" bIns="0" rtlCol="0" anchor="ctr"/>
-          <a:lstStyle/>
-          <a:p>
-            <a:pPr algn="ctr" indent="0" marL="0">
-              <a:buNone/>
-            </a:pPr>
-            <a:r>
-              <a:rPr lang="en-US" sz="1300" b="1" dirty="0">
-                <a:solidFill>
-                  <a:srgbClr val="FFFFFF"/>
-                </a:solidFill>
-                <a:latin typeface="Cambria" pitchFamily="34" charset="0"/>
-                <a:ea typeface="Cambria" pitchFamily="34" charset="-122"/>
-                <a:cs typeface="Cambria" pitchFamily="34" charset="-120"/>
-              </a:rPr>
-              <a:t>Scale, availability and tenancy</a:t>
-            </a:r>
-            <a:endParaRPr lang="en-US" sz="1300" dirty="0"/>
-          </a:p>
-        </p:txBody>
-      </p:sp>
-      <p:sp>
-        <p:nvSpPr>
-          <p:cNvPr id="25" name="Text 23"/>
-          <p:cNvSpPr txBox="1"/>
-          <p:nvPr/>
-        </p:nvSpPr>
-        <p:spPr>
-          <a:xfrm>
-            <a:off x="7411212" y="2801620"/>
-            <a:ext cx="1865376" cy="182880"/>
-          </a:xfrm>
-          <a:prstGeom prst="rect">
-            <a:avLst/>
-          </a:prstGeom>
-          <a:noFill/>
-          <a:ln/>
-        </p:spPr>
-        <p:txBody>
-          <a:bodyPr wrap="square" lIns="0" tIns="0" rIns="0" bIns="0" rtlCol="0" anchor="ctr"/>
-          <a:lstStyle/>
-          <a:p>
-            <a:pPr algn="ctr" indent="0" marL="0">
-              <a:buNone/>
-            </a:pPr>
-            <a:r>
-              <a:rPr lang="en-US" sz="1000" b="1" dirty="0">
-                <a:solidFill>
-                  <a:srgbClr val="C8952B"/>
-                </a:solidFill>
-                <a:latin typeface="Calibri" pitchFamily="34" charset="0"/>
-                <a:ea typeface="Calibri" pitchFamily="34" charset="-122"/>
-                <a:cs typeface="Calibri" pitchFamily="34" charset="-120"/>
-              </a:rPr>
-              <a:t>Steps 10–12 · closes 9</a:t>
-            </a:r>
-            <a:endParaRPr lang="en-US" sz="1000" dirty="0"/>
-          </a:p>
-        </p:txBody>
-      </p:sp>
-      <p:sp>
-        <p:nvSpPr>
-          <p:cNvPr id="26" name="Text 24"/>
-          <p:cNvSpPr txBox="1"/>
-          <p:nvPr/>
-        </p:nvSpPr>
-        <p:spPr>
-          <a:xfrm>
-            <a:off x="7484364" y="3021076"/>
-            <a:ext cx="1719072" cy="581660"/>
-          </a:xfrm>
-          <a:prstGeom prst="rect">
-            <a:avLst/>
-          </a:prstGeom>
-          <a:noFill/>
-          <a:ln/>
-        </p:spPr>
-        <p:txBody>
-          <a:bodyPr wrap="square" lIns="0" tIns="0" rIns="0" bIns="0" rtlCol="0" anchor="ctr"/>
-          <a:lstStyle/>
-          <a:p>
-            <a:pPr algn="ctr" indent="0" marL="0">
-              <a:lnSpc>
-                <a:spcPts val="1170"/>
-              </a:lnSpc>
-              <a:buNone/>
-            </a:pPr>
-            <a:r>
-              <a:rPr lang="en-US" sz="900" dirty="0">
-                <a:solidFill>
-                  <a:srgbClr val="C9DAEA"/>
-                </a:solidFill>
-                <a:latin typeface="Calibri" pitchFamily="34" charset="0"/>
-                <a:ea typeface="Calibri" pitchFamily="34" charset="-122"/>
-                <a:cs typeface="Calibri" pitchFamily="34" charset="-120"/>
-              </a:rPr>
-              <a:t>Needs infrastructure to verify.</a:t>
-            </a:r>
-            <a:endParaRPr lang="en-US" sz="900" dirty="0"/>
-          </a:p>
-        </p:txBody>
-      </p:sp>
-      <p:sp>
-        <p:nvSpPr>
-          <p:cNvPr id="27" name="Shape 25"/>
-          <p:cNvSpPr/>
-          <p:nvPr/>
-        </p:nvSpPr>
-        <p:spPr>
-          <a:xfrm>
-            <a:off x="9368028" y="2551176"/>
-            <a:ext cx="214884" cy="164592"/>
-          </a:xfrm>
-          <a:prstGeom prst="rightArrow">
-            <a:avLst/>
-          </a:prstGeom>
-          <a:solidFill>
-            <a:srgbClr val="2E6DA4"/>
-          </a:solidFill>
-          <a:ln w="12700">
-            <a:solidFill>
-              <a:srgbClr val="2E6DA4"/>
-            </a:solidFill>
-            <a:prstDash val="solid"/>
-          </a:ln>
-        </p:spPr>
-      </p:sp>
-      <p:sp>
-        <p:nvSpPr>
-          <p:cNvPr id="28" name="Shape 26"/>
-          <p:cNvSpPr/>
-          <p:nvPr/>
-        </p:nvSpPr>
-        <p:spPr>
-          <a:xfrm>
-            <a:off x="9619488" y="1591056"/>
-            <a:ext cx="1975104" cy="2084832"/>
-          </a:xfrm>
-          <a:prstGeom prst="roundRect">
-            <a:avLst>
-              <a:gd name="adj" fmla="val 2778"/>
-            </a:avLst>
-          </a:prstGeom>
-          <a:solidFill>
-            <a:srgbClr val="C8952B"/>
-          </a:solidFill>
-          <a:ln w="12700">
-            <a:solidFill>
-              <a:srgbClr val="C8952B"/>
-            </a:solidFill>
-            <a:prstDash val="solid"/>
-          </a:ln>
-          <a:effectLst>
-            <a:outerShdw sx="100000" sy="100000" kx="0" ky="0" algn="bl" rotWithShape="0" blurRad="127000" dist="25400" dir="5400000">
-              <a:srgbClr val="8C9AA8">
-                <a:alpha val="22000"/>
-              </a:srgbClr>
-            </a:outerShdw>
-          </a:effectLst>
-        </p:spPr>
-      </p:sp>
-      <p:sp>
-        <p:nvSpPr>
-          <p:cNvPr id="29" name="Text 27"/>
-          <p:cNvSpPr txBox="1"/>
-          <p:nvPr/>
-        </p:nvSpPr>
-        <p:spPr>
-          <a:xfrm>
-            <a:off x="9619488" y="1737360"/>
-            <a:ext cx="1975104" cy="566928"/>
-          </a:xfrm>
-          <a:prstGeom prst="rect">
-            <a:avLst/>
-          </a:prstGeom>
-          <a:noFill/>
-          <a:ln/>
-        </p:spPr>
-        <p:txBody>
-          <a:bodyPr wrap="square" lIns="0" tIns="0" rIns="0" bIns="0" rtlCol="0" anchor="ctr"/>
-          <a:lstStyle/>
-          <a:p>
-            <a:pPr algn="ctr" indent="0" marL="0">
-              <a:buNone/>
-            </a:pPr>
-            <a:r>
-              <a:rPr lang="en-US" sz="3400" b="1" dirty="0">
-                <a:solidFill>
-                  <a:srgbClr val="102437"/>
-                </a:solidFill>
-                <a:latin typeface="Cambria" pitchFamily="34" charset="0"/>
-                <a:ea typeface="Cambria" pitchFamily="34" charset="-122"/>
-                <a:cs typeface="Cambria" pitchFamily="34" charset="-120"/>
-              </a:rPr>
-              <a:t>E</a:t>
-            </a:r>
-            <a:endParaRPr lang="en-US" sz="3400" dirty="0"/>
-          </a:p>
-        </p:txBody>
-      </p:sp>
-      <p:sp>
-        <p:nvSpPr>
-          <p:cNvPr id="30" name="Text 28"/>
-          <p:cNvSpPr txBox="1"/>
-          <p:nvPr/>
-        </p:nvSpPr>
-        <p:spPr>
-          <a:xfrm>
-            <a:off x="9692640" y="2304288"/>
-            <a:ext cx="1828800" cy="442468"/>
-          </a:xfrm>
-          <a:prstGeom prst="rect">
-            <a:avLst/>
-          </a:prstGeom>
-          <a:noFill/>
-          <a:ln/>
-        </p:spPr>
-        <p:txBody>
-          <a:bodyPr wrap="square" lIns="0" tIns="0" rIns="0" bIns="0" rtlCol="0" anchor="ctr"/>
-          <a:lstStyle/>
-          <a:p>
-            <a:pPr algn="ctr" indent="0" marL="0">
-              <a:buNone/>
-            </a:pPr>
-            <a:r>
-              <a:rPr lang="en-US" sz="1300" b="1" dirty="0">
-                <a:solidFill>
-                  <a:srgbClr val="102437"/>
-                </a:solidFill>
-                <a:latin typeface="Cambria" pitchFamily="34" charset="0"/>
-                <a:ea typeface="Cambria" pitchFamily="34" charset="-122"/>
-                <a:cs typeface="Cambria" pitchFamily="34" charset="-120"/>
-              </a:rPr>
-              <a:t>Protocol and estate reach</a:t>
-            </a:r>
-            <a:endParaRPr lang="en-US" sz="1300" dirty="0"/>
-          </a:p>
-        </p:txBody>
-      </p:sp>
-      <p:sp>
-        <p:nvSpPr>
-          <p:cNvPr id="31" name="Text 29"/>
-          <p:cNvSpPr txBox="1"/>
-          <p:nvPr/>
-        </p:nvSpPr>
-        <p:spPr>
-          <a:xfrm>
-            <a:off x="9674352" y="2801620"/>
-            <a:ext cx="1865376" cy="182880"/>
-          </a:xfrm>
-          <a:prstGeom prst="rect">
-            <a:avLst/>
-          </a:prstGeom>
-          <a:noFill/>
-          <a:ln/>
-        </p:spPr>
-        <p:txBody>
-          <a:bodyPr wrap="square" lIns="0" tIns="0" rIns="0" bIns="0" rtlCol="0" anchor="ctr"/>
-          <a:lstStyle/>
-          <a:p>
-            <a:pPr algn="ctr" indent="0" marL="0">
-              <a:buNone/>
-            </a:pPr>
-            <a:r>
-              <a:rPr lang="en-US" sz="1000" b="1" dirty="0">
-                <a:solidFill>
-                  <a:srgbClr val="6B5218"/>
-                </a:solidFill>
-                <a:latin typeface="Calibri" pitchFamily="34" charset="0"/>
-                <a:ea typeface="Calibri" pitchFamily="34" charset="-122"/>
-                <a:cs typeface="Calibri" pitchFamily="34" charset="-120"/>
-              </a:rPr>
-              <a:t>Steps 13–14 · closes 2</a:t>
-            </a:r>
-            <a:endParaRPr lang="en-US" sz="1000" dirty="0"/>
-          </a:p>
-        </p:txBody>
-      </p:sp>
-      <p:sp>
-        <p:nvSpPr>
-          <p:cNvPr id="32" name="Text 30"/>
-          <p:cNvSpPr txBox="1"/>
-          <p:nvPr/>
-        </p:nvSpPr>
-        <p:spPr>
-          <a:xfrm>
-            <a:off x="9747504" y="3021076"/>
-            <a:ext cx="1719072" cy="581660"/>
-          </a:xfrm>
-          <a:prstGeom prst="rect">
-            <a:avLst/>
-          </a:prstGeom>
-          <a:noFill/>
-          <a:ln/>
-        </p:spPr>
-        <p:txBody>
-          <a:bodyPr wrap="square" lIns="0" tIns="0" rIns="0" bIns="0" rtlCol="0" anchor="ctr"/>
-          <a:lstStyle/>
-          <a:p>
-            <a:pPr algn="ctr" indent="0" marL="0">
-              <a:lnSpc>
-                <a:spcPts val="1170"/>
-              </a:lnSpc>
-              <a:buNone/>
-            </a:pPr>
-            <a:r>
-              <a:rPr lang="en-US" sz="900" dirty="0">
-                <a:solidFill>
-                  <a:srgbClr val="4A3A18"/>
-                </a:solidFill>
-                <a:latin typeface="Calibri" pitchFamily="34" charset="0"/>
-                <a:ea typeface="Calibri" pitchFamily="34" charset="-122"/>
-                <a:cs typeface="Calibri" pitchFamily="34" charset="-120"/>
-              </a:rPr>
-              <a:t>Additive, independent of D, verifiable here.</a:t>
-            </a:r>
-            <a:endParaRPr lang="en-US" sz="900" dirty="0"/>
-          </a:p>
-        </p:txBody>
-      </p:sp>
-      <p:sp>
-        <p:nvSpPr>
-          <p:cNvPr id="33" name="Shape 31"/>
-          <p:cNvSpPr/>
-          <p:nvPr/>
-        </p:nvSpPr>
-        <p:spPr>
-          <a:xfrm>
-            <a:off x="566928" y="4224528"/>
-            <a:ext cx="5394960" cy="2084832"/>
-          </a:xfrm>
-          <a:prstGeom prst="roundRect">
-            <a:avLst>
-              <a:gd name="adj" fmla="val 2632"/>
+              <a:gd name="adj" fmla="val 5357"/>
             </a:avLst>
           </a:prstGeom>
           <a:solidFill>
@@ -9540,179 +8475,164 @@
       </p:sp>
       <p:sp>
         <p:nvSpPr>
-          <p:cNvPr id="34" name="Text 32"/>
-          <p:cNvSpPr txBox="1"/>
-          <p:nvPr/>
-        </p:nvSpPr>
-        <p:spPr>
-          <a:xfrm>
-            <a:off x="804672" y="4425696"/>
-            <a:ext cx="4919472" cy="272288"/>
-          </a:xfrm>
-          <a:prstGeom prst="rect">
-            <a:avLst/>
-          </a:prstGeom>
-          <a:noFill/>
-          <a:ln/>
-        </p:spPr>
-        <p:txBody>
-          <a:bodyPr wrap="square" lIns="0" tIns="0" rIns="0" bIns="0" rtlCol="0" anchor="ctr"/>
-          <a:lstStyle/>
-          <a:p>
-            <a:pPr indent="0" marL="0">
-              <a:buNone/>
-            </a:pPr>
-            <a:r>
-              <a:rPr lang="en-US" sz="1600" b="1" dirty="0">
-                <a:solidFill>
-                  <a:srgbClr val="1A3A5C"/>
+          <p:cNvPr id="5" name="Shape 3"/>
+          <p:cNvSpPr/>
+          <p:nvPr/>
+        </p:nvSpPr>
+        <p:spPr>
+          <a:xfrm>
+            <a:off x="566928" y="1481328"/>
+            <a:ext cx="91440" cy="1024128"/>
+          </a:xfrm>
+          <a:prstGeom prst="rect">
+            <a:avLst/>
+          </a:prstGeom>
+          <a:solidFill>
+            <a:srgbClr val="1A3A5C"/>
+          </a:solidFill>
+          <a:ln w="12700">
+            <a:solidFill>
+              <a:srgbClr val="1A3A5C"/>
+            </a:solidFill>
+            <a:prstDash val="solid"/>
+          </a:ln>
+        </p:spPr>
+      </p:sp>
+      <p:sp>
+        <p:nvSpPr>
+          <p:cNvPr id="6" name="Text 4"/>
+          <p:cNvSpPr txBox="1"/>
+          <p:nvPr/>
+        </p:nvSpPr>
+        <p:spPr>
+          <a:xfrm>
+            <a:off x="749808" y="1609344"/>
+            <a:ext cx="530352" cy="566928"/>
+          </a:xfrm>
+          <a:prstGeom prst="rect">
+            <a:avLst/>
+          </a:prstGeom>
+          <a:noFill/>
+          <a:ln/>
+        </p:spPr>
+        <p:txBody>
+          <a:bodyPr wrap="square" lIns="0" tIns="0" rIns="0" bIns="0" rtlCol="0" anchor="ctr"/>
+          <a:lstStyle/>
+          <a:p>
+            <a:pPr algn="ctr" indent="0" marL="0">
+              <a:buNone/>
+            </a:pPr>
+            <a:r>
+              <a:rPr lang="en-US" sz="3000" b="1" dirty="0">
+                <a:solidFill>
+                  <a:srgbClr val="2E6DA4"/>
                 </a:solidFill>
                 <a:latin typeface="Cambria" pitchFamily="34" charset="0"/>
                 <a:ea typeface="Cambria" pitchFamily="34" charset="-122"/>
                 <a:cs typeface="Cambria" pitchFamily="34" charset="-120"/>
               </a:rPr>
-              <a:t>How the stages are ordered</a:t>
-            </a:r>
-            <a:endParaRPr lang="en-US" sz="1600" dirty="0"/>
-          </a:p>
-        </p:txBody>
-      </p:sp>
-      <p:sp>
-        <p:nvSpPr>
-          <p:cNvPr id="35" name="Text 33"/>
-          <p:cNvSpPr txBox="1"/>
-          <p:nvPr/>
-        </p:nvSpPr>
-        <p:spPr>
-          <a:xfrm>
-            <a:off x="804672" y="4771136"/>
-            <a:ext cx="4919472" cy="1373632"/>
-          </a:xfrm>
-          <a:prstGeom prst="rect">
-            <a:avLst/>
-          </a:prstGeom>
-          <a:noFill/>
-          <a:ln/>
-        </p:spPr>
-        <p:txBody>
-          <a:bodyPr wrap="square" lIns="0" tIns="0" rIns="0" bIns="0" rtlCol="0" anchor="t"/>
-          <a:lstStyle/>
-          <a:p>
-            <a:pPr marL="342900" indent="-342900">
-              <a:lnSpc>
-                <a:spcPts val="1700"/>
-              </a:lnSpc>
-              <a:spcAft>
-                <a:spcPts val="600"/>
-              </a:spcAft>
-              <a:buSzPct val="100000"/>
-              <a:buChar char="•"/>
-            </a:pPr>
-            <a:r>
-              <a:rPr lang="en-US" sz="1250" dirty="0">
-                <a:solidFill>
-                  <a:srgbClr val="4D5A68"/>
+              <a:t>A</a:t>
+            </a:r>
+            <a:endParaRPr lang="en-US" sz="3000" dirty="0"/>
+          </a:p>
+        </p:txBody>
+      </p:sp>
+      <p:sp>
+        <p:nvSpPr>
+          <p:cNvPr id="7" name="Text 5"/>
+          <p:cNvSpPr txBox="1"/>
+          <p:nvPr/>
+        </p:nvSpPr>
+        <p:spPr>
+          <a:xfrm>
+            <a:off x="1371600" y="1645920"/>
+            <a:ext cx="2548128" cy="221234"/>
+          </a:xfrm>
+          <a:prstGeom prst="rect">
+            <a:avLst/>
+          </a:prstGeom>
+          <a:noFill/>
+          <a:ln/>
+        </p:spPr>
+        <p:txBody>
+          <a:bodyPr wrap="square" lIns="0" tIns="0" rIns="0" bIns="0" rtlCol="0" anchor="ctr"/>
+          <a:lstStyle/>
+          <a:p>
+            <a:pPr indent="0" marL="0">
+              <a:buNone/>
+            </a:pPr>
+            <a:r>
+              <a:rPr lang="en-US" sz="1300" b="1" dirty="0">
+                <a:solidFill>
+                  <a:srgbClr val="1A3A5C"/>
+                </a:solidFill>
+                <a:latin typeface="Cambria" pitchFamily="34" charset="0"/>
+                <a:ea typeface="Cambria" pitchFamily="34" charset="-122"/>
+                <a:cs typeface="Cambria" pitchFamily="34" charset="-120"/>
+              </a:rPr>
+              <a:t>Foundation</a:t>
+            </a:r>
+            <a:endParaRPr lang="en-US" sz="1300" dirty="0"/>
+          </a:p>
+        </p:txBody>
+      </p:sp>
+      <p:sp>
+        <p:nvSpPr>
+          <p:cNvPr id="8" name="Text 6"/>
+          <p:cNvSpPr txBox="1"/>
+          <p:nvPr/>
+        </p:nvSpPr>
+        <p:spPr>
+          <a:xfrm>
+            <a:off x="1371600" y="1903730"/>
+            <a:ext cx="2548128" cy="201168"/>
+          </a:xfrm>
+          <a:prstGeom prst="rect">
+            <a:avLst/>
+          </a:prstGeom>
+          <a:noFill/>
+          <a:ln/>
+        </p:spPr>
+        <p:txBody>
+          <a:bodyPr wrap="square" lIns="0" tIns="0" rIns="0" bIns="0" rtlCol="0" anchor="ctr"/>
+          <a:lstStyle/>
+          <a:p>
+            <a:pPr indent="0" marL="0">
+              <a:buNone/>
+            </a:pPr>
+            <a:r>
+              <a:rPr lang="en-US" sz="950" b="1" dirty="0">
+                <a:solidFill>
+                  <a:srgbClr val="1F7A43"/>
                 </a:solidFill>
                 <a:latin typeface="Calibri" pitchFamily="34" charset="0"/>
                 <a:ea typeface="Calibri" pitchFamily="34" charset="-122"/>
                 <a:cs typeface="Calibri" pitchFamily="34" charset="-120"/>
               </a:rPr>
-              <a:t>By dependency, not by what is most visible</a:t>
-            </a:r>
-            <a:endParaRPr lang="en-US" sz="1250" dirty="0"/>
-          </a:p>
-          <a:p>
-            <a:pPr marL="342900" indent="-342900">
-              <a:lnSpc>
-                <a:spcPts val="1700"/>
-              </a:lnSpc>
-              <a:spcAft>
-                <a:spcPts val="600"/>
-              </a:spcAft>
-              <a:buSzPct val="100000"/>
-              <a:buChar char="•"/>
-            </a:pPr>
-            <a:r>
-              <a:rPr lang="en-US" sz="1250" dirty="0">
-                <a:solidFill>
-                  <a:srgbClr val="4D5A68"/>
-                </a:solidFill>
-                <a:latin typeface="Calibri" pitchFamily="34" charset="0"/>
-                <a:ea typeface="Calibri" pitchFamily="34" charset="-122"/>
-                <a:cs typeface="Calibri" pitchFamily="34" charset="-120"/>
-              </a:rPr>
-              <a:t>Stage A ships no feature and unblocks everything after it</a:t>
-            </a:r>
-            <a:endParaRPr lang="en-US" sz="1250" dirty="0"/>
-          </a:p>
-          <a:p>
-            <a:pPr marL="342900" indent="-342900">
-              <a:lnSpc>
-                <a:spcPts val="1700"/>
-              </a:lnSpc>
-              <a:spcAft>
-                <a:spcPts val="600"/>
-              </a:spcAft>
-              <a:buSzPct val="100000"/>
-              <a:buChar char="•"/>
-            </a:pPr>
-            <a:r>
-              <a:rPr lang="en-US" sz="1250" dirty="0">
-                <a:solidFill>
-                  <a:srgbClr val="4D5A68"/>
-                </a:solidFill>
-                <a:latin typeface="Calibri" pitchFamily="34" charset="0"/>
-                <a:ea typeface="Calibri" pitchFamily="34" charset="-122"/>
-                <a:cs typeface="Calibri" pitchFamily="34" charset="-120"/>
-              </a:rPr>
-              <a:t>Stage E is additive — it can run beside C or D</a:t>
-            </a:r>
-            <a:endParaRPr lang="en-US" sz="1250" dirty="0"/>
-          </a:p>
-          <a:p>
-            <a:pPr marL="342900" indent="-342900">
-              <a:lnSpc>
-                <a:spcPts val="1700"/>
-              </a:lnSpc>
-              <a:spcAft>
-                <a:spcPts val="600"/>
-              </a:spcAft>
-              <a:buSzPct val="100000"/>
-              <a:buChar char="•"/>
-            </a:pPr>
-            <a:r>
-              <a:rPr lang="en-US" sz="1250" dirty="0">
-                <a:solidFill>
-                  <a:srgbClr val="4D5A68"/>
-                </a:solidFill>
-                <a:latin typeface="Calibri" pitchFamily="34" charset="0"/>
-                <a:ea typeface="Calibri" pitchFamily="34" charset="-122"/>
-                <a:cs typeface="Calibri" pitchFamily="34" charset="-120"/>
-              </a:rPr>
-              <a:t>Each step ships independently and is useful alone</a:t>
-            </a:r>
-            <a:endParaRPr lang="en-US" sz="1250" dirty="0"/>
-          </a:p>
-        </p:txBody>
-      </p:sp>
-      <p:sp>
-        <p:nvSpPr>
-          <p:cNvPr id="36" name="Shape 34"/>
+              <a:t>Steps 1–2  ·  closes 2</a:t>
+            </a:r>
+            <a:endParaRPr lang="en-US" sz="950" dirty="0"/>
+          </a:p>
+        </p:txBody>
+      </p:sp>
+      <p:sp>
+        <p:nvSpPr>
+          <p:cNvPr id="9" name="Shape 7"/>
           <p:cNvSpPr/>
           <p:nvPr/>
         </p:nvSpPr>
         <p:spPr>
           <a:xfrm>
-            <a:off x="6236208" y="4224528"/>
-            <a:ext cx="5394960" cy="2084832"/>
+            <a:off x="4322064" y="1481328"/>
+            <a:ext cx="3517392" cy="1024128"/>
           </a:xfrm>
           <a:prstGeom prst="roundRect">
             <a:avLst>
-              <a:gd name="adj" fmla="val 2632"/>
+              <a:gd name="adj" fmla="val 5357"/>
             </a:avLst>
           </a:prstGeom>
           <a:solidFill>
-            <a:srgbClr val="FBF3E3"/>
+            <a:srgbClr val="E8EFF6"/>
           </a:solidFill>
           <a:ln w="12700">
             <a:solidFill>
@@ -9731,92 +8651,1454 @@
       </p:sp>
       <p:sp>
         <p:nvSpPr>
-          <p:cNvPr id="37" name="Text 35"/>
-          <p:cNvSpPr txBox="1"/>
-          <p:nvPr/>
-        </p:nvSpPr>
-        <p:spPr>
-          <a:xfrm>
-            <a:off x="6473952" y="4425696"/>
-            <a:ext cx="4919472" cy="201168"/>
-          </a:xfrm>
-          <a:prstGeom prst="rect">
-            <a:avLst/>
-          </a:prstGeom>
-          <a:noFill/>
-          <a:ln/>
-        </p:spPr>
-        <p:txBody>
-          <a:bodyPr wrap="square" lIns="0" tIns="0" rIns="0" bIns="0" rtlCol="0" anchor="ctr"/>
-          <a:lstStyle/>
-          <a:p>
-            <a:pPr indent="0" marL="0">
-              <a:buNone/>
-            </a:pPr>
-            <a:r>
-              <a:rPr lang="en-US" sz="1000" b="1" spc="160" kern="0" dirty="0">
-                <a:solidFill>
-                  <a:srgbClr val="9A6410"/>
+          <p:cNvPr id="10" name="Shape 8"/>
+          <p:cNvSpPr/>
+          <p:nvPr/>
+        </p:nvSpPr>
+        <p:spPr>
+          <a:xfrm>
+            <a:off x="4322064" y="1481328"/>
+            <a:ext cx="91440" cy="1024128"/>
+          </a:xfrm>
+          <a:prstGeom prst="rect">
+            <a:avLst/>
+          </a:prstGeom>
+          <a:solidFill>
+            <a:srgbClr val="1A3A5C"/>
+          </a:solidFill>
+          <a:ln w="12700">
+            <a:solidFill>
+              <a:srgbClr val="1A3A5C"/>
+            </a:solidFill>
+            <a:prstDash val="solid"/>
+          </a:ln>
+        </p:spPr>
+      </p:sp>
+      <p:sp>
+        <p:nvSpPr>
+          <p:cNvPr id="11" name="Text 9"/>
+          <p:cNvSpPr txBox="1"/>
+          <p:nvPr/>
+        </p:nvSpPr>
+        <p:spPr>
+          <a:xfrm>
+            <a:off x="4504944" y="1609344"/>
+            <a:ext cx="530352" cy="566928"/>
+          </a:xfrm>
+          <a:prstGeom prst="rect">
+            <a:avLst/>
+          </a:prstGeom>
+          <a:noFill/>
+          <a:ln/>
+        </p:spPr>
+        <p:txBody>
+          <a:bodyPr wrap="square" lIns="0" tIns="0" rIns="0" bIns="0" rtlCol="0" anchor="ctr"/>
+          <a:lstStyle/>
+          <a:p>
+            <a:pPr algn="ctr" indent="0" marL="0">
+              <a:buNone/>
+            </a:pPr>
+            <a:r>
+              <a:rPr lang="en-US" sz="3000" b="1" dirty="0">
+                <a:solidFill>
+                  <a:srgbClr val="2E6DA4"/>
+                </a:solidFill>
+                <a:latin typeface="Cambria" pitchFamily="34" charset="0"/>
+                <a:ea typeface="Cambria" pitchFamily="34" charset="-122"/>
+                <a:cs typeface="Cambria" pitchFamily="34" charset="-120"/>
+              </a:rPr>
+              <a:t>B</a:t>
+            </a:r>
+            <a:endParaRPr lang="en-US" sz="3000" dirty="0"/>
+          </a:p>
+        </p:txBody>
+      </p:sp>
+      <p:sp>
+        <p:nvSpPr>
+          <p:cNvPr id="12" name="Text 10"/>
+          <p:cNvSpPr txBox="1"/>
+          <p:nvPr/>
+        </p:nvSpPr>
+        <p:spPr>
+          <a:xfrm>
+            <a:off x="5126736" y="1645920"/>
+            <a:ext cx="2548128" cy="221234"/>
+          </a:xfrm>
+          <a:prstGeom prst="rect">
+            <a:avLst/>
+          </a:prstGeom>
+          <a:noFill/>
+          <a:ln/>
+        </p:spPr>
+        <p:txBody>
+          <a:bodyPr wrap="square" lIns="0" tIns="0" rIns="0" bIns="0" rtlCol="0" anchor="ctr"/>
+          <a:lstStyle/>
+          <a:p>
+            <a:pPr indent="0" marL="0">
+              <a:buNone/>
+            </a:pPr>
+            <a:r>
+              <a:rPr lang="en-US" sz="1300" b="1" dirty="0">
+                <a:solidFill>
+                  <a:srgbClr val="1A3A5C"/>
+                </a:solidFill>
+                <a:latin typeface="Cambria" pitchFamily="34" charset="0"/>
+                <a:ea typeface="Cambria" pitchFamily="34" charset="-122"/>
+                <a:cs typeface="Cambria" pitchFamily="34" charset="-120"/>
+              </a:rPr>
+              <a:t>The REST control plane</a:t>
+            </a:r>
+            <a:endParaRPr lang="en-US" sz="1300" dirty="0"/>
+          </a:p>
+        </p:txBody>
+      </p:sp>
+      <p:sp>
+        <p:nvSpPr>
+          <p:cNvPr id="13" name="Text 11"/>
+          <p:cNvSpPr txBox="1"/>
+          <p:nvPr/>
+        </p:nvSpPr>
+        <p:spPr>
+          <a:xfrm>
+            <a:off x="5126736" y="1903730"/>
+            <a:ext cx="2548128" cy="201168"/>
+          </a:xfrm>
+          <a:prstGeom prst="rect">
+            <a:avLst/>
+          </a:prstGeom>
+          <a:noFill/>
+          <a:ln/>
+        </p:spPr>
+        <p:txBody>
+          <a:bodyPr wrap="square" lIns="0" tIns="0" rIns="0" bIns="0" rtlCol="0" anchor="ctr"/>
+          <a:lstStyle/>
+          <a:p>
+            <a:pPr indent="0" marL="0">
+              <a:buNone/>
+            </a:pPr>
+            <a:r>
+              <a:rPr lang="en-US" sz="950" b="1" dirty="0">
+                <a:solidFill>
+                  <a:srgbClr val="1F7A43"/>
                 </a:solidFill>
                 <a:latin typeface="Calibri" pitchFamily="34" charset="0"/>
                 <a:ea typeface="Calibri" pitchFamily="34" charset="-122"/>
                 <a:cs typeface="Calibri" pitchFamily="34" charset="-120"/>
               </a:rPr>
-              <a:t>THE RULE THAT MADE PHASES 0–5 WORK</a:t>
-            </a:r>
-            <a:endParaRPr lang="en-US" sz="1000" dirty="0"/>
-          </a:p>
-        </p:txBody>
-      </p:sp>
-      <p:sp>
-        <p:nvSpPr>
-          <p:cNvPr id="38" name="Text 36"/>
-          <p:cNvSpPr txBox="1"/>
-          <p:nvPr/>
-        </p:nvSpPr>
-        <p:spPr>
-          <a:xfrm>
-            <a:off x="6473952" y="4700016"/>
-            <a:ext cx="4919472" cy="272288"/>
-          </a:xfrm>
-          <a:prstGeom prst="rect">
-            <a:avLst/>
-          </a:prstGeom>
-          <a:noFill/>
-          <a:ln/>
-        </p:spPr>
-        <p:txBody>
-          <a:bodyPr wrap="square" lIns="0" tIns="0" rIns="0" bIns="0" rtlCol="0" anchor="ctr"/>
-          <a:lstStyle/>
-          <a:p>
-            <a:pPr indent="0" marL="0">
-              <a:buNone/>
-            </a:pPr>
-            <a:r>
-              <a:rPr lang="en-US" sz="1600" b="1" dirty="0">
-                <a:solidFill>
-                  <a:srgbClr val="1A3A5C"/>
+              <a:t>Steps 3–7  ·  closes 12</a:t>
+            </a:r>
+            <a:endParaRPr lang="en-US" sz="950" dirty="0"/>
+          </a:p>
+        </p:txBody>
+      </p:sp>
+      <p:sp>
+        <p:nvSpPr>
+          <p:cNvPr id="14" name="Shape 12"/>
+          <p:cNvSpPr/>
+          <p:nvPr/>
+        </p:nvSpPr>
+        <p:spPr>
+          <a:xfrm>
+            <a:off x="8077200" y="1481328"/>
+            <a:ext cx="3517392" cy="1024128"/>
+          </a:xfrm>
+          <a:prstGeom prst="roundRect">
+            <a:avLst>
+              <a:gd name="adj" fmla="val 5357"/>
+            </a:avLst>
+          </a:prstGeom>
+          <a:solidFill>
+            <a:srgbClr val="E8EFF6"/>
+          </a:solidFill>
+          <a:ln w="12700">
+            <a:solidFill>
+              <a:srgbClr val="E8EFF6"/>
+            </a:solidFill>
+            <a:prstDash val="solid"/>
+          </a:ln>
+          <a:effectLst>
+            <a:outerShdw sx="100000" sy="100000" kx="0" ky="0" algn="bl" rotWithShape="0" blurRad="127000" dist="25400" dir="5400000">
+              <a:srgbClr val="8C9AA8">
+                <a:alpha val="22000"/>
+              </a:srgbClr>
+            </a:outerShdw>
+          </a:effectLst>
+        </p:spPr>
+      </p:sp>
+      <p:sp>
+        <p:nvSpPr>
+          <p:cNvPr id="15" name="Shape 13"/>
+          <p:cNvSpPr/>
+          <p:nvPr/>
+        </p:nvSpPr>
+        <p:spPr>
+          <a:xfrm>
+            <a:off x="8077200" y="1481328"/>
+            <a:ext cx="91440" cy="1024128"/>
+          </a:xfrm>
+          <a:prstGeom prst="rect">
+            <a:avLst/>
+          </a:prstGeom>
+          <a:solidFill>
+            <a:srgbClr val="1A3A5C"/>
+          </a:solidFill>
+          <a:ln w="12700">
+            <a:solidFill>
+              <a:srgbClr val="1A3A5C"/>
+            </a:solidFill>
+            <a:prstDash val="solid"/>
+          </a:ln>
+        </p:spPr>
+      </p:sp>
+      <p:sp>
+        <p:nvSpPr>
+          <p:cNvPr id="16" name="Text 14"/>
+          <p:cNvSpPr txBox="1"/>
+          <p:nvPr/>
+        </p:nvSpPr>
+        <p:spPr>
+          <a:xfrm>
+            <a:off x="8260080" y="1609344"/>
+            <a:ext cx="530352" cy="566928"/>
+          </a:xfrm>
+          <a:prstGeom prst="rect">
+            <a:avLst/>
+          </a:prstGeom>
+          <a:noFill/>
+          <a:ln/>
+        </p:spPr>
+        <p:txBody>
+          <a:bodyPr wrap="square" lIns="0" tIns="0" rIns="0" bIns="0" rtlCol="0" anchor="ctr"/>
+          <a:lstStyle/>
+          <a:p>
+            <a:pPr algn="ctr" indent="0" marL="0">
+              <a:buNone/>
+            </a:pPr>
+            <a:r>
+              <a:rPr lang="en-US" sz="3000" b="1" dirty="0">
+                <a:solidFill>
+                  <a:srgbClr val="2E6DA4"/>
                 </a:solidFill>
                 <a:latin typeface="Cambria" pitchFamily="34" charset="0"/>
                 <a:ea typeface="Cambria" pitchFamily="34" charset="-122"/>
                 <a:cs typeface="Cambria" pitchFamily="34" charset="-120"/>
               </a:rPr>
-              <a:t>Every step has a demonstrable gate</a:t>
-            </a:r>
-            <a:endParaRPr lang="en-US" sz="1600" dirty="0"/>
-          </a:p>
-        </p:txBody>
-      </p:sp>
-      <p:sp>
-        <p:nvSpPr>
-          <p:cNvPr id="39" name="Text 37"/>
-          <p:cNvSpPr txBox="1"/>
-          <p:nvPr/>
-        </p:nvSpPr>
-        <p:spPr>
-          <a:xfrm>
-            <a:off x="6473952" y="5045456"/>
-            <a:ext cx="4919472" cy="1099312"/>
+              <a:t>C</a:t>
+            </a:r>
+            <a:endParaRPr lang="en-US" sz="3000" dirty="0"/>
+          </a:p>
+        </p:txBody>
+      </p:sp>
+      <p:sp>
+        <p:nvSpPr>
+          <p:cNvPr id="17" name="Text 15"/>
+          <p:cNvSpPr txBox="1"/>
+          <p:nvPr/>
+        </p:nvSpPr>
+        <p:spPr>
+          <a:xfrm>
+            <a:off x="8881872" y="1645920"/>
+            <a:ext cx="2548128" cy="221234"/>
+          </a:xfrm>
+          <a:prstGeom prst="rect">
+            <a:avLst/>
+          </a:prstGeom>
+          <a:noFill/>
+          <a:ln/>
+        </p:spPr>
+        <p:txBody>
+          <a:bodyPr wrap="square" lIns="0" tIns="0" rIns="0" bIns="0" rtlCol="0" anchor="ctr"/>
+          <a:lstStyle/>
+          <a:p>
+            <a:pPr indent="0" marL="0">
+              <a:buNone/>
+            </a:pPr>
+            <a:r>
+              <a:rPr lang="en-US" sz="1300" b="1" dirty="0">
+                <a:solidFill>
+                  <a:srgbClr val="1A3A5C"/>
+                </a:solidFill>
+                <a:latin typeface="Cambria" pitchFamily="34" charset="0"/>
+                <a:ea typeface="Cambria" pitchFamily="34" charset="-122"/>
+                <a:cs typeface="Cambria" pitchFamily="34" charset="-120"/>
+              </a:rPr>
+              <a:t>Enterprise fit</a:t>
+            </a:r>
+            <a:endParaRPr lang="en-US" sz="1300" dirty="0"/>
+          </a:p>
+        </p:txBody>
+      </p:sp>
+      <p:sp>
+        <p:nvSpPr>
+          <p:cNvPr id="18" name="Text 16"/>
+          <p:cNvSpPr txBox="1"/>
+          <p:nvPr/>
+        </p:nvSpPr>
+        <p:spPr>
+          <a:xfrm>
+            <a:off x="8881872" y="1903730"/>
+            <a:ext cx="2548128" cy="201168"/>
+          </a:xfrm>
+          <a:prstGeom prst="rect">
+            <a:avLst/>
+          </a:prstGeom>
+          <a:noFill/>
+          <a:ln/>
+        </p:spPr>
+        <p:txBody>
+          <a:bodyPr wrap="square" lIns="0" tIns="0" rIns="0" bIns="0" rtlCol="0" anchor="ctr"/>
+          <a:lstStyle/>
+          <a:p>
+            <a:pPr indent="0" marL="0">
+              <a:buNone/>
+            </a:pPr>
+            <a:r>
+              <a:rPr lang="en-US" sz="950" b="1" dirty="0">
+                <a:solidFill>
+                  <a:srgbClr val="1F7A43"/>
+                </a:solidFill>
+                <a:latin typeface="Calibri" pitchFamily="34" charset="0"/>
+                <a:ea typeface="Calibri" pitchFamily="34" charset="-122"/>
+                <a:cs typeface="Calibri" pitchFamily="34" charset="-120"/>
+              </a:rPr>
+              <a:t>Steps 8–9  ·  closes 9</a:t>
+            </a:r>
+            <a:endParaRPr lang="en-US" sz="950" dirty="0"/>
+          </a:p>
+        </p:txBody>
+      </p:sp>
+      <p:sp>
+        <p:nvSpPr>
+          <p:cNvPr id="19" name="Shape 17"/>
+          <p:cNvSpPr/>
+          <p:nvPr/>
+        </p:nvSpPr>
+        <p:spPr>
+          <a:xfrm>
+            <a:off x="566928" y="2651760"/>
+            <a:ext cx="3517392" cy="1024128"/>
+          </a:xfrm>
+          <a:prstGeom prst="roundRect">
+            <a:avLst>
+              <a:gd name="adj" fmla="val 5357"/>
+            </a:avLst>
+          </a:prstGeom>
+          <a:solidFill>
+            <a:srgbClr val="E8EFF6"/>
+          </a:solidFill>
+          <a:ln w="12700">
+            <a:solidFill>
+              <a:srgbClr val="E8EFF6"/>
+            </a:solidFill>
+            <a:prstDash val="solid"/>
+          </a:ln>
+          <a:effectLst>
+            <a:outerShdw sx="100000" sy="100000" kx="0" ky="0" algn="bl" rotWithShape="0" blurRad="127000" dist="25400" dir="5400000">
+              <a:srgbClr val="8C9AA8">
+                <a:alpha val="22000"/>
+              </a:srgbClr>
+            </a:outerShdw>
+          </a:effectLst>
+        </p:spPr>
+      </p:sp>
+      <p:sp>
+        <p:nvSpPr>
+          <p:cNvPr id="20" name="Shape 18"/>
+          <p:cNvSpPr/>
+          <p:nvPr/>
+        </p:nvSpPr>
+        <p:spPr>
+          <a:xfrm>
+            <a:off x="566928" y="2651760"/>
+            <a:ext cx="91440" cy="1024128"/>
+          </a:xfrm>
+          <a:prstGeom prst="rect">
+            <a:avLst/>
+          </a:prstGeom>
+          <a:solidFill>
+            <a:srgbClr val="1A3A5C"/>
+          </a:solidFill>
+          <a:ln w="12700">
+            <a:solidFill>
+              <a:srgbClr val="1A3A5C"/>
+            </a:solidFill>
+            <a:prstDash val="solid"/>
+          </a:ln>
+        </p:spPr>
+      </p:sp>
+      <p:sp>
+        <p:nvSpPr>
+          <p:cNvPr id="21" name="Text 19"/>
+          <p:cNvSpPr txBox="1"/>
+          <p:nvPr/>
+        </p:nvSpPr>
+        <p:spPr>
+          <a:xfrm>
+            <a:off x="749808" y="2779776"/>
+            <a:ext cx="530352" cy="566928"/>
+          </a:xfrm>
+          <a:prstGeom prst="rect">
+            <a:avLst/>
+          </a:prstGeom>
+          <a:noFill/>
+          <a:ln/>
+        </p:spPr>
+        <p:txBody>
+          <a:bodyPr wrap="square" lIns="0" tIns="0" rIns="0" bIns="0" rtlCol="0" anchor="ctr"/>
+          <a:lstStyle/>
+          <a:p>
+            <a:pPr algn="ctr" indent="0" marL="0">
+              <a:buNone/>
+            </a:pPr>
+            <a:r>
+              <a:rPr lang="en-US" sz="3000" b="1" dirty="0">
+                <a:solidFill>
+                  <a:srgbClr val="2E6DA4"/>
+                </a:solidFill>
+                <a:latin typeface="Cambria" pitchFamily="34" charset="0"/>
+                <a:ea typeface="Cambria" pitchFamily="34" charset="-122"/>
+                <a:cs typeface="Cambria" pitchFamily="34" charset="-120"/>
+              </a:rPr>
+              <a:t>D</a:t>
+            </a:r>
+            <a:endParaRPr lang="en-US" sz="3000" dirty="0"/>
+          </a:p>
+        </p:txBody>
+      </p:sp>
+      <p:sp>
+        <p:nvSpPr>
+          <p:cNvPr id="22" name="Text 20"/>
+          <p:cNvSpPr txBox="1"/>
+          <p:nvPr/>
+        </p:nvSpPr>
+        <p:spPr>
+          <a:xfrm>
+            <a:off x="1371600" y="2816352"/>
+            <a:ext cx="2548128" cy="442468"/>
+          </a:xfrm>
+          <a:prstGeom prst="rect">
+            <a:avLst/>
+          </a:prstGeom>
+          <a:noFill/>
+          <a:ln/>
+        </p:spPr>
+        <p:txBody>
+          <a:bodyPr wrap="square" lIns="0" tIns="0" rIns="0" bIns="0" rtlCol="0" anchor="ctr"/>
+          <a:lstStyle/>
+          <a:p>
+            <a:pPr indent="0" marL="0">
+              <a:buNone/>
+            </a:pPr>
+            <a:r>
+              <a:rPr lang="en-US" sz="1300" b="1" dirty="0">
+                <a:solidFill>
+                  <a:srgbClr val="1A3A5C"/>
+                </a:solidFill>
+                <a:latin typeface="Cambria" pitchFamily="34" charset="0"/>
+                <a:ea typeface="Cambria" pitchFamily="34" charset="-122"/>
+                <a:cs typeface="Cambria" pitchFamily="34" charset="-120"/>
+              </a:rPr>
+              <a:t>Scale, availability and tenancy</a:t>
+            </a:r>
+            <a:endParaRPr lang="en-US" sz="1300" dirty="0"/>
+          </a:p>
+        </p:txBody>
+      </p:sp>
+      <p:sp>
+        <p:nvSpPr>
+          <p:cNvPr id="23" name="Text 21"/>
+          <p:cNvSpPr txBox="1"/>
+          <p:nvPr/>
+        </p:nvSpPr>
+        <p:spPr>
+          <a:xfrm>
+            <a:off x="1371600" y="3295396"/>
+            <a:ext cx="2548128" cy="201168"/>
+          </a:xfrm>
+          <a:prstGeom prst="rect">
+            <a:avLst/>
+          </a:prstGeom>
+          <a:noFill/>
+          <a:ln/>
+        </p:spPr>
+        <p:txBody>
+          <a:bodyPr wrap="square" lIns="0" tIns="0" rIns="0" bIns="0" rtlCol="0" anchor="ctr"/>
+          <a:lstStyle/>
+          <a:p>
+            <a:pPr indent="0" marL="0">
+              <a:buNone/>
+            </a:pPr>
+            <a:r>
+              <a:rPr lang="en-US" sz="950" b="1" dirty="0">
+                <a:solidFill>
+                  <a:srgbClr val="1F7A43"/>
+                </a:solidFill>
+                <a:latin typeface="Calibri" pitchFamily="34" charset="0"/>
+                <a:ea typeface="Calibri" pitchFamily="34" charset="-122"/>
+                <a:cs typeface="Calibri" pitchFamily="34" charset="-120"/>
+              </a:rPr>
+              <a:t>Steps 10–12  ·  closes 9</a:t>
+            </a:r>
+            <a:endParaRPr lang="en-US" sz="950" dirty="0"/>
+          </a:p>
+        </p:txBody>
+      </p:sp>
+      <p:sp>
+        <p:nvSpPr>
+          <p:cNvPr id="24" name="Shape 22"/>
+          <p:cNvSpPr/>
+          <p:nvPr/>
+        </p:nvSpPr>
+        <p:spPr>
+          <a:xfrm>
+            <a:off x="4322064" y="2651760"/>
+            <a:ext cx="3517392" cy="1024128"/>
+          </a:xfrm>
+          <a:prstGeom prst="roundRect">
+            <a:avLst>
+              <a:gd name="adj" fmla="val 5357"/>
+            </a:avLst>
+          </a:prstGeom>
+          <a:solidFill>
+            <a:srgbClr val="E8EFF6"/>
+          </a:solidFill>
+          <a:ln w="12700">
+            <a:solidFill>
+              <a:srgbClr val="E8EFF6"/>
+            </a:solidFill>
+            <a:prstDash val="solid"/>
+          </a:ln>
+          <a:effectLst>
+            <a:outerShdw sx="100000" sy="100000" kx="0" ky="0" algn="bl" rotWithShape="0" blurRad="127000" dist="25400" dir="5400000">
+              <a:srgbClr val="8C9AA8">
+                <a:alpha val="22000"/>
+              </a:srgbClr>
+            </a:outerShdw>
+          </a:effectLst>
+        </p:spPr>
+      </p:sp>
+      <p:sp>
+        <p:nvSpPr>
+          <p:cNvPr id="25" name="Shape 23"/>
+          <p:cNvSpPr/>
+          <p:nvPr/>
+        </p:nvSpPr>
+        <p:spPr>
+          <a:xfrm>
+            <a:off x="4322064" y="2651760"/>
+            <a:ext cx="91440" cy="1024128"/>
+          </a:xfrm>
+          <a:prstGeom prst="rect">
+            <a:avLst/>
+          </a:prstGeom>
+          <a:solidFill>
+            <a:srgbClr val="1A3A5C"/>
+          </a:solidFill>
+          <a:ln w="12700">
+            <a:solidFill>
+              <a:srgbClr val="1A3A5C"/>
+            </a:solidFill>
+            <a:prstDash val="solid"/>
+          </a:ln>
+        </p:spPr>
+      </p:sp>
+      <p:sp>
+        <p:nvSpPr>
+          <p:cNvPr id="26" name="Text 24"/>
+          <p:cNvSpPr txBox="1"/>
+          <p:nvPr/>
+        </p:nvSpPr>
+        <p:spPr>
+          <a:xfrm>
+            <a:off x="4504944" y="2779776"/>
+            <a:ext cx="530352" cy="566928"/>
+          </a:xfrm>
+          <a:prstGeom prst="rect">
+            <a:avLst/>
+          </a:prstGeom>
+          <a:noFill/>
+          <a:ln/>
+        </p:spPr>
+        <p:txBody>
+          <a:bodyPr wrap="square" lIns="0" tIns="0" rIns="0" bIns="0" rtlCol="0" anchor="ctr"/>
+          <a:lstStyle/>
+          <a:p>
+            <a:pPr algn="ctr" indent="0" marL="0">
+              <a:buNone/>
+            </a:pPr>
+            <a:r>
+              <a:rPr lang="en-US" sz="3000" b="1" dirty="0">
+                <a:solidFill>
+                  <a:srgbClr val="2E6DA4"/>
+                </a:solidFill>
+                <a:latin typeface="Cambria" pitchFamily="34" charset="0"/>
+                <a:ea typeface="Cambria" pitchFamily="34" charset="-122"/>
+                <a:cs typeface="Cambria" pitchFamily="34" charset="-120"/>
+              </a:rPr>
+              <a:t>E</a:t>
+            </a:r>
+            <a:endParaRPr lang="en-US" sz="3000" dirty="0"/>
+          </a:p>
+        </p:txBody>
+      </p:sp>
+      <p:sp>
+        <p:nvSpPr>
+          <p:cNvPr id="27" name="Text 25"/>
+          <p:cNvSpPr txBox="1"/>
+          <p:nvPr/>
+        </p:nvSpPr>
+        <p:spPr>
+          <a:xfrm>
+            <a:off x="5126736" y="2816352"/>
+            <a:ext cx="2548128" cy="442468"/>
+          </a:xfrm>
+          <a:prstGeom prst="rect">
+            <a:avLst/>
+          </a:prstGeom>
+          <a:noFill/>
+          <a:ln/>
+        </p:spPr>
+        <p:txBody>
+          <a:bodyPr wrap="square" lIns="0" tIns="0" rIns="0" bIns="0" rtlCol="0" anchor="ctr"/>
+          <a:lstStyle/>
+          <a:p>
+            <a:pPr indent="0" marL="0">
+              <a:buNone/>
+            </a:pPr>
+            <a:r>
+              <a:rPr lang="en-US" sz="1300" b="1" dirty="0">
+                <a:solidFill>
+                  <a:srgbClr val="1A3A5C"/>
+                </a:solidFill>
+                <a:latin typeface="Cambria" pitchFamily="34" charset="0"/>
+                <a:ea typeface="Cambria" pitchFamily="34" charset="-122"/>
+                <a:cs typeface="Cambria" pitchFamily="34" charset="-120"/>
+              </a:rPr>
+              <a:t>Protocol and estate reach</a:t>
+            </a:r>
+            <a:endParaRPr lang="en-US" sz="1300" dirty="0"/>
+          </a:p>
+        </p:txBody>
+      </p:sp>
+      <p:sp>
+        <p:nvSpPr>
+          <p:cNvPr id="28" name="Text 26"/>
+          <p:cNvSpPr txBox="1"/>
+          <p:nvPr/>
+        </p:nvSpPr>
+        <p:spPr>
+          <a:xfrm>
+            <a:off x="5126736" y="3295396"/>
+            <a:ext cx="2548128" cy="201168"/>
+          </a:xfrm>
+          <a:prstGeom prst="rect">
+            <a:avLst/>
+          </a:prstGeom>
+          <a:noFill/>
+          <a:ln/>
+        </p:spPr>
+        <p:txBody>
+          <a:bodyPr wrap="square" lIns="0" tIns="0" rIns="0" bIns="0" rtlCol="0" anchor="ctr"/>
+          <a:lstStyle/>
+          <a:p>
+            <a:pPr indent="0" marL="0">
+              <a:buNone/>
+            </a:pPr>
+            <a:r>
+              <a:rPr lang="en-US" sz="950" b="1" dirty="0">
+                <a:solidFill>
+                  <a:srgbClr val="1F7A43"/>
+                </a:solidFill>
+                <a:latin typeface="Calibri" pitchFamily="34" charset="0"/>
+                <a:ea typeface="Calibri" pitchFamily="34" charset="-122"/>
+                <a:cs typeface="Calibri" pitchFamily="34" charset="-120"/>
+              </a:rPr>
+              <a:t>Steps 13–14  ·  closes 2</a:t>
+            </a:r>
+            <a:endParaRPr lang="en-US" sz="950" dirty="0"/>
+          </a:p>
+        </p:txBody>
+      </p:sp>
+      <p:sp>
+        <p:nvSpPr>
+          <p:cNvPr id="29" name="Shape 27"/>
+          <p:cNvSpPr/>
+          <p:nvPr/>
+        </p:nvSpPr>
+        <p:spPr>
+          <a:xfrm>
+            <a:off x="8077200" y="2651760"/>
+            <a:ext cx="3517392" cy="1024128"/>
+          </a:xfrm>
+          <a:prstGeom prst="roundRect">
+            <a:avLst>
+              <a:gd name="adj" fmla="val 5357"/>
+            </a:avLst>
+          </a:prstGeom>
+          <a:solidFill>
+            <a:srgbClr val="E8EFF6"/>
+          </a:solidFill>
+          <a:ln w="12700">
+            <a:solidFill>
+              <a:srgbClr val="E8EFF6"/>
+            </a:solidFill>
+            <a:prstDash val="solid"/>
+          </a:ln>
+          <a:effectLst>
+            <a:outerShdw sx="100000" sy="100000" kx="0" ky="0" algn="bl" rotWithShape="0" blurRad="127000" dist="25400" dir="5400000">
+              <a:srgbClr val="8C9AA8">
+                <a:alpha val="22000"/>
+              </a:srgbClr>
+            </a:outerShdw>
+          </a:effectLst>
+        </p:spPr>
+      </p:sp>
+      <p:sp>
+        <p:nvSpPr>
+          <p:cNvPr id="30" name="Shape 28"/>
+          <p:cNvSpPr/>
+          <p:nvPr/>
+        </p:nvSpPr>
+        <p:spPr>
+          <a:xfrm>
+            <a:off x="8077200" y="2651760"/>
+            <a:ext cx="91440" cy="1024128"/>
+          </a:xfrm>
+          <a:prstGeom prst="rect">
+            <a:avLst/>
+          </a:prstGeom>
+          <a:solidFill>
+            <a:srgbClr val="1A3A5C"/>
+          </a:solidFill>
+          <a:ln w="12700">
+            <a:solidFill>
+              <a:srgbClr val="1A3A5C"/>
+            </a:solidFill>
+            <a:prstDash val="solid"/>
+          </a:ln>
+        </p:spPr>
+      </p:sp>
+      <p:sp>
+        <p:nvSpPr>
+          <p:cNvPr id="31" name="Text 29"/>
+          <p:cNvSpPr txBox="1"/>
+          <p:nvPr/>
+        </p:nvSpPr>
+        <p:spPr>
+          <a:xfrm>
+            <a:off x="8260080" y="2779776"/>
+            <a:ext cx="530352" cy="566928"/>
+          </a:xfrm>
+          <a:prstGeom prst="rect">
+            <a:avLst/>
+          </a:prstGeom>
+          <a:noFill/>
+          <a:ln/>
+        </p:spPr>
+        <p:txBody>
+          <a:bodyPr wrap="square" lIns="0" tIns="0" rIns="0" bIns="0" rtlCol="0" anchor="ctr"/>
+          <a:lstStyle/>
+          <a:p>
+            <a:pPr algn="ctr" indent="0" marL="0">
+              <a:buNone/>
+            </a:pPr>
+            <a:r>
+              <a:rPr lang="en-US" sz="3000" b="1" dirty="0">
+                <a:solidFill>
+                  <a:srgbClr val="2E6DA4"/>
+                </a:solidFill>
+                <a:latin typeface="Cambria" pitchFamily="34" charset="0"/>
+                <a:ea typeface="Cambria" pitchFamily="34" charset="-122"/>
+                <a:cs typeface="Cambria" pitchFamily="34" charset="-120"/>
+              </a:rPr>
+              <a:t>F</a:t>
+            </a:r>
+            <a:endParaRPr lang="en-US" sz="3000" dirty="0"/>
+          </a:p>
+        </p:txBody>
+      </p:sp>
+      <p:sp>
+        <p:nvSpPr>
+          <p:cNvPr id="32" name="Text 30"/>
+          <p:cNvSpPr txBox="1"/>
+          <p:nvPr/>
+        </p:nvSpPr>
+        <p:spPr>
+          <a:xfrm>
+            <a:off x="8881872" y="2816352"/>
+            <a:ext cx="2548128" cy="442468"/>
+          </a:xfrm>
+          <a:prstGeom prst="rect">
+            <a:avLst/>
+          </a:prstGeom>
+          <a:noFill/>
+          <a:ln/>
+        </p:spPr>
+        <p:txBody>
+          <a:bodyPr wrap="square" lIns="0" tIns="0" rIns="0" bIns="0" rtlCol="0" anchor="ctr"/>
+          <a:lstStyle/>
+          <a:p>
+            <a:pPr indent="0" marL="0">
+              <a:buNone/>
+            </a:pPr>
+            <a:r>
+              <a:rPr lang="en-US" sz="1300" b="1" dirty="0">
+                <a:solidFill>
+                  <a:srgbClr val="1A3A5C"/>
+                </a:solidFill>
+                <a:latin typeface="Cambria" pitchFamily="34" charset="0"/>
+                <a:ea typeface="Cambria" pitchFamily="34" charset="-122"/>
+                <a:cs typeface="Cambria" pitchFamily="34" charset="-120"/>
+              </a:rPr>
+              <a:t>Cloud and application reach</a:t>
+            </a:r>
+            <a:endParaRPr lang="en-US" sz="1300" dirty="0"/>
+          </a:p>
+        </p:txBody>
+      </p:sp>
+      <p:sp>
+        <p:nvSpPr>
+          <p:cNvPr id="33" name="Text 31"/>
+          <p:cNvSpPr txBox="1"/>
+          <p:nvPr/>
+        </p:nvSpPr>
+        <p:spPr>
+          <a:xfrm>
+            <a:off x="8881872" y="3295396"/>
+            <a:ext cx="2548128" cy="201168"/>
+          </a:xfrm>
+          <a:prstGeom prst="rect">
+            <a:avLst/>
+          </a:prstGeom>
+          <a:noFill/>
+          <a:ln/>
+        </p:spPr>
+        <p:txBody>
+          <a:bodyPr wrap="square" lIns="0" tIns="0" rIns="0" bIns="0" rtlCol="0" anchor="ctr"/>
+          <a:lstStyle/>
+          <a:p>
+            <a:pPr indent="0" marL="0">
+              <a:buNone/>
+            </a:pPr>
+            <a:r>
+              <a:rPr lang="en-US" sz="950" b="1" dirty="0">
+                <a:solidFill>
+                  <a:srgbClr val="1F7A43"/>
+                </a:solidFill>
+                <a:latin typeface="Calibri" pitchFamily="34" charset="0"/>
+                <a:ea typeface="Calibri" pitchFamily="34" charset="-122"/>
+                <a:cs typeface="Calibri" pitchFamily="34" charset="-120"/>
+              </a:rPr>
+              <a:t>Steps 15–18  ·  closes 4</a:t>
+            </a:r>
+            <a:endParaRPr lang="en-US" sz="950" dirty="0"/>
+          </a:p>
+        </p:txBody>
+      </p:sp>
+      <p:sp>
+        <p:nvSpPr>
+          <p:cNvPr id="34" name="Shape 32"/>
+          <p:cNvSpPr/>
+          <p:nvPr/>
+        </p:nvSpPr>
+        <p:spPr>
+          <a:xfrm>
+            <a:off x="566928" y="3822192"/>
+            <a:ext cx="3517392" cy="1024128"/>
+          </a:xfrm>
+          <a:prstGeom prst="roundRect">
+            <a:avLst>
+              <a:gd name="adj" fmla="val 5357"/>
+            </a:avLst>
+          </a:prstGeom>
+          <a:solidFill>
+            <a:srgbClr val="E8EFF6"/>
+          </a:solidFill>
+          <a:ln w="12700">
+            <a:solidFill>
+              <a:srgbClr val="E8EFF6"/>
+            </a:solidFill>
+            <a:prstDash val="solid"/>
+          </a:ln>
+          <a:effectLst>
+            <a:outerShdw sx="100000" sy="100000" kx="0" ky="0" algn="bl" rotWithShape="0" blurRad="127000" dist="25400" dir="5400000">
+              <a:srgbClr val="8C9AA8">
+                <a:alpha val="22000"/>
+              </a:srgbClr>
+            </a:outerShdw>
+          </a:effectLst>
+        </p:spPr>
+      </p:sp>
+      <p:sp>
+        <p:nvSpPr>
+          <p:cNvPr id="35" name="Shape 33"/>
+          <p:cNvSpPr/>
+          <p:nvPr/>
+        </p:nvSpPr>
+        <p:spPr>
+          <a:xfrm>
+            <a:off x="566928" y="3822192"/>
+            <a:ext cx="91440" cy="1024128"/>
+          </a:xfrm>
+          <a:prstGeom prst="rect">
+            <a:avLst/>
+          </a:prstGeom>
+          <a:solidFill>
+            <a:srgbClr val="9A6410"/>
+          </a:solidFill>
+          <a:ln w="12700">
+            <a:solidFill>
+              <a:srgbClr val="9A6410"/>
+            </a:solidFill>
+            <a:prstDash val="solid"/>
+          </a:ln>
+        </p:spPr>
+      </p:sp>
+      <p:sp>
+        <p:nvSpPr>
+          <p:cNvPr id="36" name="Text 34"/>
+          <p:cNvSpPr txBox="1"/>
+          <p:nvPr/>
+        </p:nvSpPr>
+        <p:spPr>
+          <a:xfrm>
+            <a:off x="749808" y="3950208"/>
+            <a:ext cx="530352" cy="566928"/>
+          </a:xfrm>
+          <a:prstGeom prst="rect">
+            <a:avLst/>
+          </a:prstGeom>
+          <a:noFill/>
+          <a:ln/>
+        </p:spPr>
+        <p:txBody>
+          <a:bodyPr wrap="square" lIns="0" tIns="0" rIns="0" bIns="0" rtlCol="0" anchor="ctr"/>
+          <a:lstStyle/>
+          <a:p>
+            <a:pPr algn="ctr" indent="0" marL="0">
+              <a:buNone/>
+            </a:pPr>
+            <a:r>
+              <a:rPr lang="en-US" sz="3000" b="1" dirty="0">
+                <a:solidFill>
+                  <a:srgbClr val="9A6410"/>
+                </a:solidFill>
+                <a:latin typeface="Cambria" pitchFamily="34" charset="0"/>
+                <a:ea typeface="Cambria" pitchFamily="34" charset="-122"/>
+                <a:cs typeface="Cambria" pitchFamily="34" charset="-120"/>
+              </a:rPr>
+              <a:t>G</a:t>
+            </a:r>
+            <a:endParaRPr lang="en-US" sz="3000" dirty="0"/>
+          </a:p>
+        </p:txBody>
+      </p:sp>
+      <p:sp>
+        <p:nvSpPr>
+          <p:cNvPr id="37" name="Text 35"/>
+          <p:cNvSpPr txBox="1"/>
+          <p:nvPr/>
+        </p:nvSpPr>
+        <p:spPr>
+          <a:xfrm>
+            <a:off x="1371600" y="3986784"/>
+            <a:ext cx="2548128" cy="442468"/>
+          </a:xfrm>
+          <a:prstGeom prst="rect">
+            <a:avLst/>
+          </a:prstGeom>
+          <a:noFill/>
+          <a:ln/>
+        </p:spPr>
+        <p:txBody>
+          <a:bodyPr wrap="square" lIns="0" tIns="0" rIns="0" bIns="0" rtlCol="0" anchor="ctr"/>
+          <a:lstStyle/>
+          <a:p>
+            <a:pPr indent="0" marL="0">
+              <a:buNone/>
+            </a:pPr>
+            <a:r>
+              <a:rPr lang="en-US" sz="1300" b="1" dirty="0">
+                <a:solidFill>
+                  <a:srgbClr val="1A3A5C"/>
+                </a:solidFill>
+                <a:latin typeface="Cambria" pitchFamily="34" charset="0"/>
+                <a:ea typeface="Cambria" pitchFamily="34" charset="-122"/>
+                <a:cs typeface="Cambria" pitchFamily="34" charset="-120"/>
+              </a:rPr>
+              <a:t>Interoperability and adjacent products</a:t>
+            </a:r>
+            <a:endParaRPr lang="en-US" sz="1300" dirty="0"/>
+          </a:p>
+        </p:txBody>
+      </p:sp>
+      <p:sp>
+        <p:nvSpPr>
+          <p:cNvPr id="38" name="Text 36"/>
+          <p:cNvSpPr txBox="1"/>
+          <p:nvPr/>
+        </p:nvSpPr>
+        <p:spPr>
+          <a:xfrm>
+            <a:off x="1371600" y="4465828"/>
+            <a:ext cx="2548128" cy="201168"/>
+          </a:xfrm>
+          <a:prstGeom prst="rect">
+            <a:avLst/>
+          </a:prstGeom>
+          <a:noFill/>
+          <a:ln/>
+        </p:spPr>
+        <p:txBody>
+          <a:bodyPr wrap="square" lIns="0" tIns="0" rIns="0" bIns="0" rtlCol="0" anchor="ctr"/>
+          <a:lstStyle/>
+          <a:p>
+            <a:pPr indent="0" marL="0">
+              <a:buNone/>
+            </a:pPr>
+            <a:r>
+              <a:rPr lang="en-US" sz="950" b="1" dirty="0">
+                <a:solidFill>
+                  <a:srgbClr val="9A6410"/>
+                </a:solidFill>
+                <a:latin typeface="Calibri" pitchFamily="34" charset="0"/>
+                <a:ea typeface="Calibri" pitchFamily="34" charset="-122"/>
+                <a:cs typeface="Calibri" pitchFamily="34" charset="-120"/>
+              </a:rPr>
+              <a:t>Steps 19–22  ·  closes 5  ·  4 gated</a:t>
+            </a:r>
+            <a:endParaRPr lang="en-US" sz="950" dirty="0"/>
+          </a:p>
+        </p:txBody>
+      </p:sp>
+      <p:sp>
+        <p:nvSpPr>
+          <p:cNvPr id="39" name="Shape 37"/>
+          <p:cNvSpPr/>
+          <p:nvPr/>
+        </p:nvSpPr>
+        <p:spPr>
+          <a:xfrm>
+            <a:off x="4322064" y="3822192"/>
+            <a:ext cx="3517392" cy="1024128"/>
+          </a:xfrm>
+          <a:prstGeom prst="roundRect">
+            <a:avLst>
+              <a:gd name="adj" fmla="val 5357"/>
+            </a:avLst>
+          </a:prstGeom>
+          <a:solidFill>
+            <a:srgbClr val="E8EFF6"/>
+          </a:solidFill>
+          <a:ln w="12700">
+            <a:solidFill>
+              <a:srgbClr val="E8EFF6"/>
+            </a:solidFill>
+            <a:prstDash val="solid"/>
+          </a:ln>
+          <a:effectLst>
+            <a:outerShdw sx="100000" sy="100000" kx="0" ky="0" algn="bl" rotWithShape="0" blurRad="127000" dist="25400" dir="5400000">
+              <a:srgbClr val="8C9AA8">
+                <a:alpha val="22000"/>
+              </a:srgbClr>
+            </a:outerShdw>
+          </a:effectLst>
+        </p:spPr>
+      </p:sp>
+      <p:sp>
+        <p:nvSpPr>
+          <p:cNvPr id="40" name="Shape 38"/>
+          <p:cNvSpPr/>
+          <p:nvPr/>
+        </p:nvSpPr>
+        <p:spPr>
+          <a:xfrm>
+            <a:off x="4322064" y="3822192"/>
+            <a:ext cx="91440" cy="1024128"/>
+          </a:xfrm>
+          <a:prstGeom prst="rect">
+            <a:avLst/>
+          </a:prstGeom>
+          <a:solidFill>
+            <a:srgbClr val="1A3A5C"/>
+          </a:solidFill>
+          <a:ln w="12700">
+            <a:solidFill>
+              <a:srgbClr val="1A3A5C"/>
+            </a:solidFill>
+            <a:prstDash val="solid"/>
+          </a:ln>
+        </p:spPr>
+      </p:sp>
+      <p:sp>
+        <p:nvSpPr>
+          <p:cNvPr id="41" name="Text 39"/>
+          <p:cNvSpPr txBox="1"/>
+          <p:nvPr/>
+        </p:nvSpPr>
+        <p:spPr>
+          <a:xfrm>
+            <a:off x="4504944" y="3950208"/>
+            <a:ext cx="530352" cy="566928"/>
+          </a:xfrm>
+          <a:prstGeom prst="rect">
+            <a:avLst/>
+          </a:prstGeom>
+          <a:noFill/>
+          <a:ln/>
+        </p:spPr>
+        <p:txBody>
+          <a:bodyPr wrap="square" lIns="0" tIns="0" rIns="0" bIns="0" rtlCol="0" anchor="ctr"/>
+          <a:lstStyle/>
+          <a:p>
+            <a:pPr algn="ctr" indent="0" marL="0">
+              <a:buNone/>
+            </a:pPr>
+            <a:r>
+              <a:rPr lang="en-US" sz="3000" b="1" dirty="0">
+                <a:solidFill>
+                  <a:srgbClr val="2E6DA4"/>
+                </a:solidFill>
+                <a:latin typeface="Cambria" pitchFamily="34" charset="0"/>
+                <a:ea typeface="Cambria" pitchFamily="34" charset="-122"/>
+                <a:cs typeface="Cambria" pitchFamily="34" charset="-120"/>
+              </a:rPr>
+              <a:t>H</a:t>
+            </a:r>
+            <a:endParaRPr lang="en-US" sz="3000" dirty="0"/>
+          </a:p>
+        </p:txBody>
+      </p:sp>
+      <p:sp>
+        <p:nvSpPr>
+          <p:cNvPr id="42" name="Text 40"/>
+          <p:cNvSpPr txBox="1"/>
+          <p:nvPr/>
+        </p:nvSpPr>
+        <p:spPr>
+          <a:xfrm>
+            <a:off x="5126736" y="3986784"/>
+            <a:ext cx="2548128" cy="442468"/>
+          </a:xfrm>
+          <a:prstGeom prst="rect">
+            <a:avLst/>
+          </a:prstGeom>
+          <a:noFill/>
+          <a:ln/>
+        </p:spPr>
+        <p:txBody>
+          <a:bodyPr wrap="square" lIns="0" tIns="0" rIns="0" bIns="0" rtlCol="0" anchor="ctr"/>
+          <a:lstStyle/>
+          <a:p>
+            <a:pPr indent="0" marL="0">
+              <a:buNone/>
+            </a:pPr>
+            <a:r>
+              <a:rPr lang="en-US" sz="1300" b="1" dirty="0">
+                <a:solidFill>
+                  <a:srgbClr val="1A3A5C"/>
+                </a:solidFill>
+                <a:latin typeface="Cambria" pitchFamily="34" charset="0"/>
+                <a:ea typeface="Cambria" pitchFamily="34" charset="-122"/>
+                <a:cs typeface="Cambria" pitchFamily="34" charset="-120"/>
+              </a:rPr>
+              <a:t>Protocol 3.0 and post-quantum</a:t>
+            </a:r>
+            <a:endParaRPr lang="en-US" sz="1300" dirty="0"/>
+          </a:p>
+        </p:txBody>
+      </p:sp>
+      <p:sp>
+        <p:nvSpPr>
+          <p:cNvPr id="43" name="Text 41"/>
+          <p:cNvSpPr txBox="1"/>
+          <p:nvPr/>
+        </p:nvSpPr>
+        <p:spPr>
+          <a:xfrm>
+            <a:off x="5126736" y="4465828"/>
+            <a:ext cx="2548128" cy="201168"/>
+          </a:xfrm>
+          <a:prstGeom prst="rect">
+            <a:avLst/>
+          </a:prstGeom>
+          <a:noFill/>
+          <a:ln/>
+        </p:spPr>
+        <p:txBody>
+          <a:bodyPr wrap="square" lIns="0" tIns="0" rIns="0" bIns="0" rtlCol="0" anchor="ctr"/>
+          <a:lstStyle/>
+          <a:p>
+            <a:pPr indent="0" marL="0">
+              <a:buNone/>
+            </a:pPr>
+            <a:r>
+              <a:rPr lang="en-US" sz="950" b="1" dirty="0">
+                <a:solidFill>
+                  <a:srgbClr val="9A6410"/>
+                </a:solidFill>
+                <a:latin typeface="Calibri" pitchFamily="34" charset="0"/>
+                <a:ea typeface="Calibri" pitchFamily="34" charset="-122"/>
+                <a:cs typeface="Calibri" pitchFamily="34" charset="-120"/>
+              </a:rPr>
+              <a:t>Steps 23–24  ·  closes 3  ·  1 gated</a:t>
+            </a:r>
+            <a:endParaRPr lang="en-US" sz="950" dirty="0"/>
+          </a:p>
+        </p:txBody>
+      </p:sp>
+      <p:sp>
+        <p:nvSpPr>
+          <p:cNvPr id="44" name="Shape 42"/>
+          <p:cNvSpPr/>
+          <p:nvPr/>
+        </p:nvSpPr>
+        <p:spPr>
+          <a:xfrm>
+            <a:off x="8077200" y="3822192"/>
+            <a:ext cx="3517392" cy="1024128"/>
+          </a:xfrm>
+          <a:prstGeom prst="roundRect">
+            <a:avLst>
+              <a:gd name="adj" fmla="val 5357"/>
+            </a:avLst>
+          </a:prstGeom>
+          <a:solidFill>
+            <a:srgbClr val="E8EFF6"/>
+          </a:solidFill>
+          <a:ln w="12700">
+            <a:solidFill>
+              <a:srgbClr val="E8EFF6"/>
+            </a:solidFill>
+            <a:prstDash val="solid"/>
+          </a:ln>
+          <a:effectLst>
+            <a:outerShdw sx="100000" sy="100000" kx="0" ky="0" algn="bl" rotWithShape="0" blurRad="127000" dist="25400" dir="5400000">
+              <a:srgbClr val="8C9AA8">
+                <a:alpha val="22000"/>
+              </a:srgbClr>
+            </a:outerShdw>
+          </a:effectLst>
+        </p:spPr>
+      </p:sp>
+      <p:sp>
+        <p:nvSpPr>
+          <p:cNvPr id="45" name="Shape 43"/>
+          <p:cNvSpPr/>
+          <p:nvPr/>
+        </p:nvSpPr>
+        <p:spPr>
+          <a:xfrm>
+            <a:off x="8077200" y="3822192"/>
+            <a:ext cx="91440" cy="1024128"/>
+          </a:xfrm>
+          <a:prstGeom prst="rect">
+            <a:avLst/>
+          </a:prstGeom>
+          <a:solidFill>
+            <a:srgbClr val="9A6410"/>
+          </a:solidFill>
+          <a:ln w="12700">
+            <a:solidFill>
+              <a:srgbClr val="9A6410"/>
+            </a:solidFill>
+            <a:prstDash val="solid"/>
+          </a:ln>
+        </p:spPr>
+      </p:sp>
+      <p:sp>
+        <p:nvSpPr>
+          <p:cNvPr id="46" name="Text 44"/>
+          <p:cNvSpPr txBox="1"/>
+          <p:nvPr/>
+        </p:nvSpPr>
+        <p:spPr>
+          <a:xfrm>
+            <a:off x="8260080" y="3950208"/>
+            <a:ext cx="530352" cy="566928"/>
+          </a:xfrm>
+          <a:prstGeom prst="rect">
+            <a:avLst/>
+          </a:prstGeom>
+          <a:noFill/>
+          <a:ln/>
+        </p:spPr>
+        <p:txBody>
+          <a:bodyPr wrap="square" lIns="0" tIns="0" rIns="0" bIns="0" rtlCol="0" anchor="ctr"/>
+          <a:lstStyle/>
+          <a:p>
+            <a:pPr algn="ctr" indent="0" marL="0">
+              <a:buNone/>
+            </a:pPr>
+            <a:r>
+              <a:rPr lang="en-US" sz="3000" b="1" dirty="0">
+                <a:solidFill>
+                  <a:srgbClr val="9A6410"/>
+                </a:solidFill>
+                <a:latin typeface="Cambria" pitchFamily="34" charset="0"/>
+                <a:ea typeface="Cambria" pitchFamily="34" charset="-122"/>
+                <a:cs typeface="Cambria" pitchFamily="34" charset="-120"/>
+              </a:rPr>
+              <a:t>I</a:t>
+            </a:r>
+            <a:endParaRPr lang="en-US" sz="3000" dirty="0"/>
+          </a:p>
+        </p:txBody>
+      </p:sp>
+      <p:sp>
+        <p:nvSpPr>
+          <p:cNvPr id="47" name="Text 45"/>
+          <p:cNvSpPr txBox="1"/>
+          <p:nvPr/>
+        </p:nvSpPr>
+        <p:spPr>
+          <a:xfrm>
+            <a:off x="8881872" y="3986784"/>
+            <a:ext cx="2548128" cy="442468"/>
+          </a:xfrm>
+          <a:prstGeom prst="rect">
+            <a:avLst/>
+          </a:prstGeom>
+          <a:noFill/>
+          <a:ln/>
+        </p:spPr>
+        <p:txBody>
+          <a:bodyPr wrap="square" lIns="0" tIns="0" rIns="0" bIns="0" rtlCol="0" anchor="ctr"/>
+          <a:lstStyle/>
+          <a:p>
+            <a:pPr indent="0" marL="0">
+              <a:buNone/>
+            </a:pPr>
+            <a:r>
+              <a:rPr lang="en-US" sz="1300" b="1" dirty="0">
+                <a:solidFill>
+                  <a:srgbClr val="1A3A5C"/>
+                </a:solidFill>
+                <a:latin typeface="Cambria" pitchFamily="34" charset="0"/>
+                <a:ea typeface="Cambria" pitchFamily="34" charset="-122"/>
+                <a:cs typeface="Cambria" pitchFamily="34" charset="-120"/>
+              </a:rPr>
+              <a:t>Assurance on real hardware</a:t>
+            </a:r>
+            <a:endParaRPr lang="en-US" sz="1300" dirty="0"/>
+          </a:p>
+        </p:txBody>
+      </p:sp>
+      <p:sp>
+        <p:nvSpPr>
+          <p:cNvPr id="48" name="Text 46"/>
+          <p:cNvSpPr txBox="1"/>
+          <p:nvPr/>
+        </p:nvSpPr>
+        <p:spPr>
+          <a:xfrm>
+            <a:off x="8881872" y="4465828"/>
+            <a:ext cx="2548128" cy="201168"/>
+          </a:xfrm>
+          <a:prstGeom prst="rect">
+            <a:avLst/>
+          </a:prstGeom>
+          <a:noFill/>
+          <a:ln/>
+        </p:spPr>
+        <p:txBody>
+          <a:bodyPr wrap="square" lIns="0" tIns="0" rIns="0" bIns="0" rtlCol="0" anchor="ctr"/>
+          <a:lstStyle/>
+          <a:p>
+            <a:pPr indent="0" marL="0">
+              <a:buNone/>
+            </a:pPr>
+            <a:r>
+              <a:rPr lang="en-US" sz="950" b="1" dirty="0">
+                <a:solidFill>
+                  <a:srgbClr val="9A6410"/>
+                </a:solidFill>
+                <a:latin typeface="Calibri" pitchFamily="34" charset="0"/>
+                <a:ea typeface="Calibri" pitchFamily="34" charset="-122"/>
+                <a:cs typeface="Calibri" pitchFamily="34" charset="-120"/>
+              </a:rPr>
+              <a:t>Steps 25–26  ·  closes 4  ·  2 gated</a:t>
+            </a:r>
+            <a:endParaRPr lang="en-US" sz="950" dirty="0"/>
+          </a:p>
+        </p:txBody>
+      </p:sp>
+      <p:sp>
+        <p:nvSpPr>
+          <p:cNvPr id="49" name="Shape 47"/>
+          <p:cNvSpPr/>
+          <p:nvPr/>
+        </p:nvSpPr>
+        <p:spPr>
+          <a:xfrm>
+            <a:off x="566928" y="4974336"/>
+            <a:ext cx="5394960" cy="1280160"/>
+          </a:xfrm>
+          <a:prstGeom prst="roundRect">
+            <a:avLst>
+              <a:gd name="adj" fmla="val 4286"/>
+            </a:avLst>
+          </a:prstGeom>
+          <a:solidFill>
+            <a:srgbClr val="E8EFF6"/>
+          </a:solidFill>
+          <a:ln w="12700">
+            <a:solidFill>
+              <a:srgbClr val="E8EFF6"/>
+            </a:solidFill>
+            <a:prstDash val="solid"/>
+          </a:ln>
+        </p:spPr>
+      </p:sp>
+      <p:sp>
+        <p:nvSpPr>
+          <p:cNvPr id="50" name="Text 48"/>
+          <p:cNvSpPr txBox="1"/>
+          <p:nvPr/>
+        </p:nvSpPr>
+        <p:spPr>
+          <a:xfrm>
+            <a:off x="804672" y="5175504"/>
+            <a:ext cx="4919472" cy="274320"/>
+          </a:xfrm>
+          <a:prstGeom prst="rect">
+            <a:avLst/>
+          </a:prstGeom>
+          <a:noFill/>
+          <a:ln/>
+        </p:spPr>
+        <p:txBody>
+          <a:bodyPr wrap="square" lIns="0" tIns="0" rIns="0" bIns="0" rtlCol="0" anchor="ctr"/>
+          <a:lstStyle/>
+          <a:p>
+            <a:pPr indent="0" marL="0">
+              <a:buNone/>
+            </a:pPr>
+            <a:r>
+              <a:rPr lang="en-US" sz="1400" b="1" dirty="0">
+                <a:solidFill>
+                  <a:srgbClr val="1A3A5C"/>
+                </a:solidFill>
+                <a:latin typeface="Cambria" pitchFamily="34" charset="0"/>
+                <a:ea typeface="Cambria" pitchFamily="34" charset="-122"/>
+                <a:cs typeface="Cambria" pitchFamily="34" charset="-120"/>
+              </a:rPr>
+              <a:t>Routed is not schedulable</a:t>
+            </a:r>
+            <a:endParaRPr lang="en-US" sz="1400" dirty="0"/>
+          </a:p>
+        </p:txBody>
+      </p:sp>
+      <p:sp>
+        <p:nvSpPr>
+          <p:cNvPr id="51" name="Text 49"/>
+          <p:cNvSpPr txBox="1"/>
+          <p:nvPr/>
+        </p:nvSpPr>
+        <p:spPr>
+          <a:xfrm>
+            <a:off x="804672" y="5522976"/>
+            <a:ext cx="4919472" cy="566928"/>
           </a:xfrm>
           <a:prstGeom prst="rect">
             <a:avLst/>
@@ -9835,7 +10117,7 @@
               <a:buNone/>
             </a:pPr>
             <a:r>
-              <a:rPr lang="en-US" sz="1250" dirty="0">
+              <a:rPr lang="en-US" sz="1100" dirty="0">
                 <a:solidFill>
                   <a:srgbClr val="4D5A68"/>
                 </a:solidFill>
@@ -9843,9 +10125,117 @@
                 <a:ea typeface="Calibri" pitchFamily="34" charset="-122"/>
                 <a:cs typeface="Calibri" pitchFamily="34" charset="-120"/>
               </a:rPr>
-              <a:t>Not a checklist — a condition someone can watch you meet. A step is finished when its gate is demonstrated, not when its code is written.</a:t>
-            </a:r>
-            <a:endParaRPr lang="en-US" sz="1250" dirty="0"/>
+              <a:t>All 50 open features have a step. 19 of 26 steps can start now; 7 wait on hardware, a product or an external event.</a:t>
+            </a:r>
+            <a:endParaRPr lang="en-US" sz="1100" dirty="0"/>
+          </a:p>
+        </p:txBody>
+      </p:sp>
+      <p:sp>
+        <p:nvSpPr>
+          <p:cNvPr id="52" name="Shape 50"/>
+          <p:cNvSpPr/>
+          <p:nvPr/>
+        </p:nvSpPr>
+        <p:spPr>
+          <a:xfrm>
+            <a:off x="6236208" y="4974336"/>
+            <a:ext cx="5394960" cy="1280160"/>
+          </a:xfrm>
+          <a:prstGeom prst="roundRect">
+            <a:avLst>
+              <a:gd name="adj" fmla="val 4286"/>
+            </a:avLst>
+          </a:prstGeom>
+          <a:solidFill>
+            <a:srgbClr val="FBF3E3"/>
+          </a:solidFill>
+          <a:ln w="12700">
+            <a:solidFill>
+              <a:srgbClr val="E8EFF6"/>
+            </a:solidFill>
+            <a:prstDash val="solid"/>
+          </a:ln>
+        </p:spPr>
+      </p:sp>
+      <p:sp>
+        <p:nvSpPr>
+          <p:cNvPr id="53" name="Text 51"/>
+          <p:cNvSpPr txBox="1"/>
+          <p:nvPr/>
+        </p:nvSpPr>
+        <p:spPr>
+          <a:xfrm>
+            <a:off x="6473952" y="5175504"/>
+            <a:ext cx="4919472" cy="274320"/>
+          </a:xfrm>
+          <a:prstGeom prst="rect">
+            <a:avLst/>
+          </a:prstGeom>
+          <a:noFill/>
+          <a:ln/>
+        </p:spPr>
+        <p:txBody>
+          <a:bodyPr wrap="square" lIns="0" tIns="0" rIns="0" bIns="0" rtlCol="0" anchor="ctr"/>
+          <a:lstStyle/>
+          <a:p>
+            <a:pPr indent="0" marL="0">
+              <a:buNone/>
+            </a:pPr>
+            <a:r>
+              <a:rPr lang="en-US" sz="1400" b="1" dirty="0">
+                <a:solidFill>
+                  <a:srgbClr val="1A3A5C"/>
+                </a:solidFill>
+                <a:latin typeface="Cambria" pitchFamily="34" charset="0"/>
+                <a:ea typeface="Cambria" pitchFamily="34" charset="-122"/>
+                <a:cs typeface="Cambria" pitchFamily="34" charset="-120"/>
+              </a:rPr>
+              <a:t>Every step has a demonstrable gate</a:t>
+            </a:r>
+            <a:endParaRPr lang="en-US" sz="1400" dirty="0"/>
+          </a:p>
+        </p:txBody>
+      </p:sp>
+      <p:sp>
+        <p:nvSpPr>
+          <p:cNvPr id="54" name="Text 52"/>
+          <p:cNvSpPr txBox="1"/>
+          <p:nvPr/>
+        </p:nvSpPr>
+        <p:spPr>
+          <a:xfrm>
+            <a:off x="6473952" y="5522976"/>
+            <a:ext cx="4919472" cy="566928"/>
+          </a:xfrm>
+          <a:prstGeom prst="rect">
+            <a:avLst/>
+          </a:prstGeom>
+          <a:noFill/>
+          <a:ln/>
+        </p:spPr>
+        <p:txBody>
+          <a:bodyPr wrap="square" lIns="0" tIns="0" rIns="0" bIns="0" rtlCol="0" anchor="t"/>
+          <a:lstStyle/>
+          <a:p>
+            <a:pPr indent="0" marL="0">
+              <a:lnSpc>
+                <a:spcPts val="1700"/>
+              </a:lnSpc>
+              <a:buNone/>
+            </a:pPr>
+            <a:r>
+              <a:rPr lang="en-US" sz="1100" dirty="0">
+                <a:solidFill>
+                  <a:srgbClr val="4D5A68"/>
+                </a:solidFill>
+                <a:latin typeface="Calibri" pitchFamily="34" charset="0"/>
+                <a:ea typeface="Calibri" pitchFamily="34" charset="-122"/>
+                <a:cs typeface="Calibri" pitchFamily="34" charset="-120"/>
+              </a:rPr>
+              <a:t>A condition someone can watch you meet, not a checklist. Demonstrated, not written.</a:t>
+            </a:r>
+            <a:endParaRPr lang="en-US" sz="1100" dirty="0"/>
           </a:p>
         </p:txBody>
       </p:sp>
@@ -9953,7 +10343,7 @@
                 <a:ea typeface="Cambria" pitchFamily="34" charset="-122"/>
                 <a:cs typeface="Cambria" pitchFamily="34" charset="-120"/>
               </a:rPr>
-              <a:t>All 14 steps</a:t>
+              <a:t>All 26 steps</a:t>
             </a:r>
             <a:endParaRPr lang="en-US" sz="3400" dirty="0"/>
           </a:p>
@@ -9967,8 +10357,8 @@
         </p:nvSpPr>
         <p:spPr>
           <a:xfrm>
-            <a:off x="566928" y="1499616"/>
-            <a:ext cx="82296" cy="585216"/>
+            <a:off x="566928" y="1444752"/>
+            <a:ext cx="82296" cy="420624"/>
           </a:xfrm>
           <a:prstGeom prst="rect">
             <a:avLst/>
@@ -9992,12 +10382,12 @@
         </p:nvSpPr>
         <p:spPr>
           <a:xfrm>
-            <a:off x="649224" y="1499616"/>
-            <a:ext cx="5312664" cy="585216"/>
+            <a:off x="649224" y="1444752"/>
+            <a:ext cx="3435096" cy="420624"/>
           </a:xfrm>
           <a:prstGeom prst="roundRect">
             <a:avLst>
-              <a:gd name="adj" fmla="val 6250"/>
+              <a:gd name="adj" fmla="val 8696"/>
             </a:avLst>
           </a:prstGeom>
           <a:solidFill>
@@ -10019,24 +10409,24 @@
         </p:nvSpPr>
         <p:spPr>
           <a:xfrm>
-            <a:off x="768096" y="1499616"/>
-            <a:ext cx="365760" cy="585216"/>
-          </a:xfrm>
-          <a:prstGeom prst="rect">
-            <a:avLst/>
-          </a:prstGeom>
-          <a:noFill/>
-          <a:ln/>
-        </p:spPr>
-        <p:txBody>
-          <a:bodyPr wrap="square" lIns="0" tIns="0" rIns="0" bIns="0" rtlCol="0" anchor="ctr"/>
-          <a:lstStyle/>
-          <a:p>
-            <a:pPr indent="0" marL="0">
-              <a:buNone/>
-            </a:pPr>
-            <a:r>
-              <a:rPr lang="en-US" sz="1500" b="1" dirty="0">
+            <a:off x="713232" y="1444752"/>
+            <a:ext cx="310896" cy="420624"/>
+          </a:xfrm>
+          <a:prstGeom prst="rect">
+            <a:avLst/>
+          </a:prstGeom>
+          <a:noFill/>
+          <a:ln/>
+        </p:spPr>
+        <p:txBody>
+          <a:bodyPr wrap="square" lIns="0" tIns="0" rIns="0" bIns="0" rtlCol="0" anchor="ctr"/>
+          <a:lstStyle/>
+          <a:p>
+            <a:pPr indent="0" marL="0">
+              <a:buNone/>
+            </a:pPr>
+            <a:r>
+              <a:rPr lang="en-US" sz="1200" b="1" dirty="0">
                 <a:solidFill>
                   <a:srgbClr val="C8952B"/>
                 </a:solidFill>
@@ -10046,7 +10436,7 @@
               </a:rPr>
               <a:t>1</a:t>
             </a:r>
-            <a:endParaRPr lang="en-US" sz="1500" dirty="0"/>
+            <a:endParaRPr lang="en-US" sz="1200" dirty="0"/>
           </a:p>
         </p:txBody>
       </p:sp>
@@ -10058,24 +10448,24 @@
         </p:nvSpPr>
         <p:spPr>
           <a:xfrm>
-            <a:off x="1188720" y="1499616"/>
-            <a:ext cx="3977640" cy="585216"/>
-          </a:xfrm>
-          <a:prstGeom prst="rect">
-            <a:avLst/>
-          </a:prstGeom>
-          <a:noFill/>
-          <a:ln/>
-        </p:spPr>
-        <p:txBody>
-          <a:bodyPr wrap="square" lIns="0" tIns="0" rIns="0" bIns="0" rtlCol="0" anchor="ctr"/>
-          <a:lstStyle/>
-          <a:p>
-            <a:pPr indent="0" marL="0">
-              <a:buNone/>
-            </a:pPr>
-            <a:r>
-              <a:rPr lang="en-US" sz="1150" dirty="0">
+            <a:off x="1060704" y="1444752"/>
+            <a:ext cx="2420112" cy="420624"/>
+          </a:xfrm>
+          <a:prstGeom prst="rect">
+            <a:avLst/>
+          </a:prstGeom>
+          <a:noFill/>
+          <a:ln/>
+        </p:spPr>
+        <p:txBody>
+          <a:bodyPr wrap="square" lIns="0" tIns="0" rIns="0" bIns="0" rtlCol="0" anchor="ctr"/>
+          <a:lstStyle/>
+          <a:p>
+            <a:pPr indent="0" marL="0">
+              <a:buNone/>
+            </a:pPr>
+            <a:r>
+              <a:rPr lang="en-US" sz="950" dirty="0">
                 <a:solidFill>
                   <a:srgbClr val="1A3A5C"/>
                 </a:solidFill>
@@ -10085,7 +10475,7 @@
               </a:rPr>
               <a:t>Service layer and guard</a:t>
             </a:r>
-            <a:endParaRPr lang="en-US" sz="1150" dirty="0"/>
+            <a:endParaRPr lang="en-US" sz="950" dirty="0"/>
           </a:p>
         </p:txBody>
       </p:sp>
@@ -10097,8 +10487,8 @@
         </p:nvSpPr>
         <p:spPr>
           <a:xfrm>
-            <a:off x="5248656" y="1499616"/>
-            <a:ext cx="530352" cy="585216"/>
+            <a:off x="3517392" y="1444752"/>
+            <a:ext cx="420624" cy="420624"/>
           </a:xfrm>
           <a:prstGeom prst="rect">
             <a:avLst/>
@@ -10114,7 +10504,7 @@
               <a:buNone/>
             </a:pPr>
             <a:r>
-              <a:rPr lang="en-US" sz="1150" b="1" dirty="0">
+              <a:rPr lang="en-US" sz="950" b="1" dirty="0">
                 <a:solidFill>
                   <a:srgbClr val="7B8794"/>
                 </a:solidFill>
@@ -10124,7 +10514,7 @@
               </a:rPr>
               <a:t>—</a:t>
             </a:r>
-            <a:endParaRPr lang="en-US" sz="1150" dirty="0"/>
+            <a:endParaRPr lang="en-US" sz="950" dirty="0"/>
           </a:p>
         </p:txBody>
       </p:sp>
@@ -10136,8 +10526,8 @@
         </p:nvSpPr>
         <p:spPr>
           <a:xfrm>
-            <a:off x="566928" y="2157984"/>
-            <a:ext cx="82296" cy="585216"/>
+            <a:off x="566928" y="1924812"/>
+            <a:ext cx="82296" cy="420624"/>
           </a:xfrm>
           <a:prstGeom prst="rect">
             <a:avLst/>
@@ -10161,12 +10551,12 @@
         </p:nvSpPr>
         <p:spPr>
           <a:xfrm>
-            <a:off x="649224" y="2157984"/>
-            <a:ext cx="5312664" cy="585216"/>
+            <a:off x="649224" y="1924812"/>
+            <a:ext cx="3435096" cy="420624"/>
           </a:xfrm>
           <a:prstGeom prst="roundRect">
             <a:avLst>
-              <a:gd name="adj" fmla="val 6250"/>
+              <a:gd name="adj" fmla="val 8696"/>
             </a:avLst>
           </a:prstGeom>
           <a:solidFill>
@@ -10188,24 +10578,24 @@
         </p:nvSpPr>
         <p:spPr>
           <a:xfrm>
-            <a:off x="768096" y="2157984"/>
-            <a:ext cx="365760" cy="585216"/>
-          </a:xfrm>
-          <a:prstGeom prst="rect">
-            <a:avLst/>
-          </a:prstGeom>
-          <a:noFill/>
-          <a:ln/>
-        </p:spPr>
-        <p:txBody>
-          <a:bodyPr wrap="square" lIns="0" tIns="0" rIns="0" bIns="0" rtlCol="0" anchor="ctr"/>
-          <a:lstStyle/>
-          <a:p>
-            <a:pPr indent="0" marL="0">
-              <a:buNone/>
-            </a:pPr>
-            <a:r>
-              <a:rPr lang="en-US" sz="1500" b="1" dirty="0">
+            <a:off x="713232" y="1924812"/>
+            <a:ext cx="310896" cy="420624"/>
+          </a:xfrm>
+          <a:prstGeom prst="rect">
+            <a:avLst/>
+          </a:prstGeom>
+          <a:noFill/>
+          <a:ln/>
+        </p:spPr>
+        <p:txBody>
+          <a:bodyPr wrap="square" lIns="0" tIns="0" rIns="0" bIns="0" rtlCol="0" anchor="ctr"/>
+          <a:lstStyle/>
+          <a:p>
+            <a:pPr indent="0" marL="0">
+              <a:buNone/>
+            </a:pPr>
+            <a:r>
+              <a:rPr lang="en-US" sz="1200" b="1" dirty="0">
                 <a:solidFill>
                   <a:srgbClr val="C8952B"/>
                 </a:solidFill>
@@ -10215,7 +10605,7 @@
               </a:rPr>
               <a:t>2</a:t>
             </a:r>
-            <a:endParaRPr lang="en-US" sz="1500" dirty="0"/>
+            <a:endParaRPr lang="en-US" sz="1200" dirty="0"/>
           </a:p>
         </p:txBody>
       </p:sp>
@@ -10227,24 +10617,24 @@
         </p:nvSpPr>
         <p:spPr>
           <a:xfrm>
-            <a:off x="1188720" y="2157984"/>
-            <a:ext cx="3977640" cy="585216"/>
-          </a:xfrm>
-          <a:prstGeom prst="rect">
-            <a:avLst/>
-          </a:prstGeom>
-          <a:noFill/>
-          <a:ln/>
-        </p:spPr>
-        <p:txBody>
-          <a:bodyPr wrap="square" lIns="0" tIns="0" rIns="0" bIns="0" rtlCol="0" anchor="ctr"/>
-          <a:lstStyle/>
-          <a:p>
-            <a:pPr indent="0" marL="0">
-              <a:buNone/>
-            </a:pPr>
-            <a:r>
-              <a:rPr lang="en-US" sz="1150" dirty="0">
+            <a:off x="1060704" y="1924812"/>
+            <a:ext cx="2420112" cy="420624"/>
+          </a:xfrm>
+          <a:prstGeom prst="rect">
+            <a:avLst/>
+          </a:prstGeom>
+          <a:noFill/>
+          <a:ln/>
+        </p:spPr>
+        <p:txBody>
+          <a:bodyPr wrap="square" lIns="0" tIns="0" rIns="0" bIns="0" rtlCol="0" anchor="ctr"/>
+          <a:lstStyle/>
+          <a:p>
+            <a:pPr indent="0" marL="0">
+              <a:buNone/>
+            </a:pPr>
+            <a:r>
+              <a:rPr lang="en-US" sz="950" dirty="0">
                 <a:solidFill>
                   <a:srgbClr val="1A3A5C"/>
                 </a:solidFill>
@@ -10254,7 +10644,7 @@
               </a:rPr>
               <a:t>Query and reporting layer</a:t>
             </a:r>
-            <a:endParaRPr lang="en-US" sz="1150" dirty="0"/>
+            <a:endParaRPr lang="en-US" sz="950" dirty="0"/>
           </a:p>
         </p:txBody>
       </p:sp>
@@ -10266,8 +10656,8 @@
         </p:nvSpPr>
         <p:spPr>
           <a:xfrm>
-            <a:off x="5248656" y="2157984"/>
-            <a:ext cx="530352" cy="585216"/>
+            <a:off x="3517392" y="1924812"/>
+            <a:ext cx="420624" cy="420624"/>
           </a:xfrm>
           <a:prstGeom prst="rect">
             <a:avLst/>
@@ -10283,7 +10673,7 @@
               <a:buNone/>
             </a:pPr>
             <a:r>
-              <a:rPr lang="en-US" sz="1150" b="1" dirty="0">
+              <a:rPr lang="en-US" sz="950" b="1" dirty="0">
                 <a:solidFill>
                   <a:srgbClr val="1F7A43"/>
                 </a:solidFill>
@@ -10293,7 +10683,7 @@
               </a:rPr>
               <a:t>+2</a:t>
             </a:r>
-            <a:endParaRPr lang="en-US" sz="1150" dirty="0"/>
+            <a:endParaRPr lang="en-US" sz="950" dirty="0"/>
           </a:p>
         </p:txBody>
       </p:sp>
@@ -10305,8 +10695,8 @@
         </p:nvSpPr>
         <p:spPr>
           <a:xfrm>
-            <a:off x="566928" y="2816352"/>
-            <a:ext cx="82296" cy="585216"/>
+            <a:off x="566928" y="2404872"/>
+            <a:ext cx="82296" cy="420624"/>
           </a:xfrm>
           <a:prstGeom prst="rect">
             <a:avLst/>
@@ -10330,12 +10720,12 @@
         </p:nvSpPr>
         <p:spPr>
           <a:xfrm>
-            <a:off x="649224" y="2816352"/>
-            <a:ext cx="5312664" cy="585216"/>
+            <a:off x="649224" y="2404872"/>
+            <a:ext cx="3435096" cy="420624"/>
           </a:xfrm>
           <a:prstGeom prst="roundRect">
             <a:avLst>
-              <a:gd name="adj" fmla="val 6250"/>
+              <a:gd name="adj" fmla="val 8696"/>
             </a:avLst>
           </a:prstGeom>
           <a:solidFill>
@@ -10357,24 +10747,24 @@
         </p:nvSpPr>
         <p:spPr>
           <a:xfrm>
-            <a:off x="768096" y="2816352"/>
-            <a:ext cx="365760" cy="585216"/>
-          </a:xfrm>
-          <a:prstGeom prst="rect">
-            <a:avLst/>
-          </a:prstGeom>
-          <a:noFill/>
-          <a:ln/>
-        </p:spPr>
-        <p:txBody>
-          <a:bodyPr wrap="square" lIns="0" tIns="0" rIns="0" bIns="0" rtlCol="0" anchor="ctr"/>
-          <a:lstStyle/>
-          <a:p>
-            <a:pPr indent="0" marL="0">
-              <a:buNone/>
-            </a:pPr>
-            <a:r>
-              <a:rPr lang="en-US" sz="1500" b="1" dirty="0">
+            <a:off x="713232" y="2404872"/>
+            <a:ext cx="310896" cy="420624"/>
+          </a:xfrm>
+          <a:prstGeom prst="rect">
+            <a:avLst/>
+          </a:prstGeom>
+          <a:noFill/>
+          <a:ln/>
+        </p:spPr>
+        <p:txBody>
+          <a:bodyPr wrap="square" lIns="0" tIns="0" rIns="0" bIns="0" rtlCol="0" anchor="ctr"/>
+          <a:lstStyle/>
+          <a:p>
+            <a:pPr indent="0" marL="0">
+              <a:buNone/>
+            </a:pPr>
+            <a:r>
+              <a:rPr lang="en-US" sz="1200" b="1" dirty="0">
                 <a:solidFill>
                   <a:srgbClr val="C8952B"/>
                 </a:solidFill>
@@ -10384,7 +10774,7 @@
               </a:rPr>
               <a:t>3</a:t>
             </a:r>
-            <a:endParaRPr lang="en-US" sz="1500" dirty="0"/>
+            <a:endParaRPr lang="en-US" sz="1200" dirty="0"/>
           </a:p>
         </p:txBody>
       </p:sp>
@@ -10396,24 +10786,24 @@
         </p:nvSpPr>
         <p:spPr>
           <a:xfrm>
-            <a:off x="1188720" y="2816352"/>
-            <a:ext cx="3977640" cy="585216"/>
-          </a:xfrm>
-          <a:prstGeom prst="rect">
-            <a:avLst/>
-          </a:prstGeom>
-          <a:noFill/>
-          <a:ln/>
-        </p:spPr>
-        <p:txBody>
-          <a:bodyPr wrap="square" lIns="0" tIns="0" rIns="0" bIns="0" rtlCol="0" anchor="ctr"/>
-          <a:lstStyle/>
-          <a:p>
-            <a:pPr indent="0" marL="0">
-              <a:buNone/>
-            </a:pPr>
-            <a:r>
-              <a:rPr lang="en-US" sz="1150" dirty="0">
+            <a:off x="1060704" y="2404872"/>
+            <a:ext cx="2420112" cy="420624"/>
+          </a:xfrm>
+          <a:prstGeom prst="rect">
+            <a:avLst/>
+          </a:prstGeom>
+          <a:noFill/>
+          <a:ln/>
+        </p:spPr>
+        <p:txBody>
+          <a:bodyPr wrap="square" lIns="0" tIns="0" rIns="0" bIns="0" rtlCol="0" anchor="ctr"/>
+          <a:lstStyle/>
+          <a:p>
+            <a:pPr indent="0" marL="0">
+              <a:buNone/>
+            </a:pPr>
+            <a:r>
+              <a:rPr lang="en-US" sz="950" dirty="0">
                 <a:solidFill>
                   <a:srgbClr val="1A3A5C"/>
                 </a:solidFill>
@@ -10423,7 +10813,7 @@
               </a:rPr>
               <a:t>HTTP transport, sessions and service accounts</a:t>
             </a:r>
-            <a:endParaRPr lang="en-US" sz="1150" dirty="0"/>
+            <a:endParaRPr lang="en-US" sz="950" dirty="0"/>
           </a:p>
         </p:txBody>
       </p:sp>
@@ -10435,8 +10825,8 @@
         </p:nvSpPr>
         <p:spPr>
           <a:xfrm>
-            <a:off x="5248656" y="2816352"/>
-            <a:ext cx="530352" cy="585216"/>
+            <a:off x="3517392" y="2404872"/>
+            <a:ext cx="420624" cy="420624"/>
           </a:xfrm>
           <a:prstGeom prst="rect">
             <a:avLst/>
@@ -10452,7 +10842,7 @@
               <a:buNone/>
             </a:pPr>
             <a:r>
-              <a:rPr lang="en-US" sz="1150" b="1" dirty="0">
+              <a:rPr lang="en-US" sz="950" b="1" dirty="0">
                 <a:solidFill>
                   <a:srgbClr val="1F7A43"/>
                 </a:solidFill>
@@ -10462,7 +10852,7 @@
               </a:rPr>
               <a:t>+3</a:t>
             </a:r>
-            <a:endParaRPr lang="en-US" sz="1150" dirty="0"/>
+            <a:endParaRPr lang="en-US" sz="950" dirty="0"/>
           </a:p>
         </p:txBody>
       </p:sp>
@@ -10474,8 +10864,8 @@
         </p:nvSpPr>
         <p:spPr>
           <a:xfrm>
-            <a:off x="566928" y="3474720"/>
-            <a:ext cx="82296" cy="585216"/>
+            <a:off x="566928" y="2884932"/>
+            <a:ext cx="82296" cy="420624"/>
           </a:xfrm>
           <a:prstGeom prst="rect">
             <a:avLst/>
@@ -10499,12 +10889,12 @@
         </p:nvSpPr>
         <p:spPr>
           <a:xfrm>
-            <a:off x="649224" y="3474720"/>
-            <a:ext cx="5312664" cy="585216"/>
+            <a:off x="649224" y="2884932"/>
+            <a:ext cx="3435096" cy="420624"/>
           </a:xfrm>
           <a:prstGeom prst="roundRect">
             <a:avLst>
-              <a:gd name="adj" fmla="val 6250"/>
+              <a:gd name="adj" fmla="val 8696"/>
             </a:avLst>
           </a:prstGeom>
           <a:solidFill>
@@ -10526,24 +10916,24 @@
         </p:nvSpPr>
         <p:spPr>
           <a:xfrm>
-            <a:off x="768096" y="3474720"/>
-            <a:ext cx="365760" cy="585216"/>
-          </a:xfrm>
-          <a:prstGeom prst="rect">
-            <a:avLst/>
-          </a:prstGeom>
-          <a:noFill/>
-          <a:ln/>
-        </p:spPr>
-        <p:txBody>
-          <a:bodyPr wrap="square" lIns="0" tIns="0" rIns="0" bIns="0" rtlCol="0" anchor="ctr"/>
-          <a:lstStyle/>
-          <a:p>
-            <a:pPr indent="0" marL="0">
-              <a:buNone/>
-            </a:pPr>
-            <a:r>
-              <a:rPr lang="en-US" sz="1500" b="1" dirty="0">
+            <a:off x="713232" y="2884932"/>
+            <a:ext cx="310896" cy="420624"/>
+          </a:xfrm>
+          <a:prstGeom prst="rect">
+            <a:avLst/>
+          </a:prstGeom>
+          <a:noFill/>
+          <a:ln/>
+        </p:spPr>
+        <p:txBody>
+          <a:bodyPr wrap="square" lIns="0" tIns="0" rIns="0" bIns="0" rtlCol="0" anchor="ctr"/>
+          <a:lstStyle/>
+          <a:p>
+            <a:pPr indent="0" marL="0">
+              <a:buNone/>
+            </a:pPr>
+            <a:r>
+              <a:rPr lang="en-US" sz="1200" b="1" dirty="0">
                 <a:solidFill>
                   <a:srgbClr val="C8952B"/>
                 </a:solidFill>
@@ -10553,7 +10943,7 @@
               </a:rPr>
               <a:t>4</a:t>
             </a:r>
-            <a:endParaRPr lang="en-US" sz="1500" dirty="0"/>
+            <a:endParaRPr lang="en-US" sz="1200" dirty="0"/>
           </a:p>
         </p:txBody>
       </p:sp>
@@ -10565,24 +10955,24 @@
         </p:nvSpPr>
         <p:spPr>
           <a:xfrm>
-            <a:off x="1188720" y="3474720"/>
-            <a:ext cx="3977640" cy="585216"/>
-          </a:xfrm>
-          <a:prstGeom prst="rect">
-            <a:avLst/>
-          </a:prstGeom>
-          <a:noFill/>
-          <a:ln/>
-        </p:spPr>
-        <p:txBody>
-          <a:bodyPr wrap="square" lIns="0" tIns="0" rIns="0" bIns="0" rtlCol="0" anchor="ctr"/>
-          <a:lstStyle/>
-          <a:p>
-            <a:pPr indent="0" marL="0">
-              <a:buNone/>
-            </a:pPr>
-            <a:r>
-              <a:rPr lang="en-US" sz="1150" dirty="0">
+            <a:off x="1060704" y="2884932"/>
+            <a:ext cx="2420112" cy="420624"/>
+          </a:xfrm>
+          <a:prstGeom prst="rect">
+            <a:avLst/>
+          </a:prstGeom>
+          <a:noFill/>
+          <a:ln/>
+        </p:spPr>
+        <p:txBody>
+          <a:bodyPr wrap="square" lIns="0" tIns="0" rIns="0" bIns="0" rtlCol="0" anchor="ctr"/>
+          <a:lstStyle/>
+          <a:p>
+            <a:pPr indent="0" marL="0">
+              <a:buNone/>
+            </a:pPr>
+            <a:r>
+              <a:rPr lang="en-US" sz="950" dirty="0">
                 <a:solidFill>
                   <a:srgbClr val="1A3A5C"/>
                 </a:solidFill>
@@ -10592,7 +10982,7 @@
               </a:rPr>
               <a:t>Read endpoints</a:t>
             </a:r>
-            <a:endParaRPr lang="en-US" sz="1150" dirty="0"/>
+            <a:endParaRPr lang="en-US" sz="950" dirty="0"/>
           </a:p>
         </p:txBody>
       </p:sp>
@@ -10604,8 +10994,8 @@
         </p:nvSpPr>
         <p:spPr>
           <a:xfrm>
-            <a:off x="5248656" y="3474720"/>
-            <a:ext cx="530352" cy="585216"/>
+            <a:off x="3517392" y="2884932"/>
+            <a:ext cx="420624" cy="420624"/>
           </a:xfrm>
           <a:prstGeom prst="rect">
             <a:avLst/>
@@ -10621,7 +11011,7 @@
               <a:buNone/>
             </a:pPr>
             <a:r>
-              <a:rPr lang="en-US" sz="1150" b="1" dirty="0">
+              <a:rPr lang="en-US" sz="950" b="1" dirty="0">
                 <a:solidFill>
                   <a:srgbClr val="7B8794"/>
                 </a:solidFill>
@@ -10631,7 +11021,7 @@
               </a:rPr>
               <a:t>—</a:t>
             </a:r>
-            <a:endParaRPr lang="en-US" sz="1150" dirty="0"/>
+            <a:endParaRPr lang="en-US" sz="950" dirty="0"/>
           </a:p>
         </p:txBody>
       </p:sp>
@@ -10643,8 +11033,8 @@
         </p:nvSpPr>
         <p:spPr>
           <a:xfrm>
-            <a:off x="566928" y="4133088"/>
-            <a:ext cx="82296" cy="585216"/>
+            <a:off x="566928" y="3364992"/>
+            <a:ext cx="82296" cy="420624"/>
           </a:xfrm>
           <a:prstGeom prst="rect">
             <a:avLst/>
@@ -10668,12 +11058,12 @@
         </p:nvSpPr>
         <p:spPr>
           <a:xfrm>
-            <a:off x="649224" y="4133088"/>
-            <a:ext cx="5312664" cy="585216"/>
+            <a:off x="649224" y="3364992"/>
+            <a:ext cx="3435096" cy="420624"/>
           </a:xfrm>
           <a:prstGeom prst="roundRect">
             <a:avLst>
-              <a:gd name="adj" fmla="val 6250"/>
+              <a:gd name="adj" fmla="val 8696"/>
             </a:avLst>
           </a:prstGeom>
           <a:solidFill>
@@ -10695,24 +11085,24 @@
         </p:nvSpPr>
         <p:spPr>
           <a:xfrm>
-            <a:off x="768096" y="4133088"/>
-            <a:ext cx="365760" cy="585216"/>
-          </a:xfrm>
-          <a:prstGeom prst="rect">
-            <a:avLst/>
-          </a:prstGeom>
-          <a:noFill/>
-          <a:ln/>
-        </p:spPr>
-        <p:txBody>
-          <a:bodyPr wrap="square" lIns="0" tIns="0" rIns="0" bIns="0" rtlCol="0" anchor="ctr"/>
-          <a:lstStyle/>
-          <a:p>
-            <a:pPr indent="0" marL="0">
-              <a:buNone/>
-            </a:pPr>
-            <a:r>
-              <a:rPr lang="en-US" sz="1500" b="1" dirty="0">
+            <a:off x="713232" y="3364992"/>
+            <a:ext cx="310896" cy="420624"/>
+          </a:xfrm>
+          <a:prstGeom prst="rect">
+            <a:avLst/>
+          </a:prstGeom>
+          <a:noFill/>
+          <a:ln/>
+        </p:spPr>
+        <p:txBody>
+          <a:bodyPr wrap="square" lIns="0" tIns="0" rIns="0" bIns="0" rtlCol="0" anchor="ctr"/>
+          <a:lstStyle/>
+          <a:p>
+            <a:pPr indent="0" marL="0">
+              <a:buNone/>
+            </a:pPr>
+            <a:r>
+              <a:rPr lang="en-US" sz="1200" b="1" dirty="0">
                 <a:solidFill>
                   <a:srgbClr val="C8952B"/>
                 </a:solidFill>
@@ -10722,7 +11112,7 @@
               </a:rPr>
               <a:t>5</a:t>
             </a:r>
-            <a:endParaRPr lang="en-US" sz="1500" dirty="0"/>
+            <a:endParaRPr lang="en-US" sz="1200" dirty="0"/>
           </a:p>
         </p:txBody>
       </p:sp>
@@ -10734,24 +11124,24 @@
         </p:nvSpPr>
         <p:spPr>
           <a:xfrm>
-            <a:off x="1188720" y="4133088"/>
-            <a:ext cx="3977640" cy="585216"/>
-          </a:xfrm>
-          <a:prstGeom prst="rect">
-            <a:avLst/>
-          </a:prstGeom>
-          <a:noFill/>
-          <a:ln/>
-        </p:spPr>
-        <p:txBody>
-          <a:bodyPr wrap="square" lIns="0" tIns="0" rIns="0" bIns="0" rtlCol="0" anchor="ctr"/>
-          <a:lstStyle/>
-          <a:p>
-            <a:pPr indent="0" marL="0">
-              <a:buNone/>
-            </a:pPr>
-            <a:r>
-              <a:rPr lang="en-US" sz="1150" dirty="0">
+            <a:off x="1060704" y="3364992"/>
+            <a:ext cx="2420112" cy="420624"/>
+          </a:xfrm>
+          <a:prstGeom prst="rect">
+            <a:avLst/>
+          </a:prstGeom>
+          <a:noFill/>
+          <a:ln/>
+        </p:spPr>
+        <p:txBody>
+          <a:bodyPr wrap="square" lIns="0" tIns="0" rIns="0" bIns="0" rtlCol="0" anchor="ctr"/>
+          <a:lstStyle/>
+          <a:p>
+            <a:pPr indent="0" marL="0">
+              <a:buNone/>
+            </a:pPr>
+            <a:r>
+              <a:rPr lang="en-US" sz="950" dirty="0">
                 <a:solidFill>
                   <a:srgbClr val="1A3A5C"/>
                 </a:solidFill>
@@ -10761,7 +11151,7 @@
               </a:rPr>
               <a:t>Write endpoints, and the governance gaps</a:t>
             </a:r>
-            <a:endParaRPr lang="en-US" sz="1150" dirty="0"/>
+            <a:endParaRPr lang="en-US" sz="950" dirty="0"/>
           </a:p>
         </p:txBody>
       </p:sp>
@@ -10773,8 +11163,8 @@
         </p:nvSpPr>
         <p:spPr>
           <a:xfrm>
-            <a:off x="5248656" y="4133088"/>
-            <a:ext cx="530352" cy="585216"/>
+            <a:off x="3517392" y="3364992"/>
+            <a:ext cx="420624" cy="420624"/>
           </a:xfrm>
           <a:prstGeom prst="rect">
             <a:avLst/>
@@ -10790,7 +11180,7 @@
               <a:buNone/>
             </a:pPr>
             <a:r>
-              <a:rPr lang="en-US" sz="1150" b="1" dirty="0">
+              <a:rPr lang="en-US" sz="950" b="1" dirty="0">
                 <a:solidFill>
                   <a:srgbClr val="1F7A43"/>
                 </a:solidFill>
@@ -10800,7 +11190,7 @@
               </a:rPr>
               <a:t>+4</a:t>
             </a:r>
-            <a:endParaRPr lang="en-US" sz="1150" dirty="0"/>
+            <a:endParaRPr lang="en-US" sz="950" dirty="0"/>
           </a:p>
         </p:txBody>
       </p:sp>
@@ -10812,8 +11202,8 @@
         </p:nvSpPr>
         <p:spPr>
           <a:xfrm>
-            <a:off x="566928" y="4791456"/>
-            <a:ext cx="82296" cy="585216"/>
+            <a:off x="566928" y="3845052"/>
+            <a:ext cx="82296" cy="420624"/>
           </a:xfrm>
           <a:prstGeom prst="rect">
             <a:avLst/>
@@ -10837,12 +11227,12 @@
         </p:nvSpPr>
         <p:spPr>
           <a:xfrm>
-            <a:off x="649224" y="4791456"/>
-            <a:ext cx="5312664" cy="585216"/>
+            <a:off x="649224" y="3845052"/>
+            <a:ext cx="3435096" cy="420624"/>
           </a:xfrm>
           <a:prstGeom prst="roundRect">
             <a:avLst>
-              <a:gd name="adj" fmla="val 6250"/>
+              <a:gd name="adj" fmla="val 8696"/>
             </a:avLst>
           </a:prstGeom>
           <a:solidFill>
@@ -10864,24 +11254,24 @@
         </p:nvSpPr>
         <p:spPr>
           <a:xfrm>
-            <a:off x="768096" y="4791456"/>
-            <a:ext cx="365760" cy="585216"/>
-          </a:xfrm>
-          <a:prstGeom prst="rect">
-            <a:avLst/>
-          </a:prstGeom>
-          <a:noFill/>
-          <a:ln/>
-        </p:spPr>
-        <p:txBody>
-          <a:bodyPr wrap="square" lIns="0" tIns="0" rIns="0" bIns="0" rtlCol="0" anchor="ctr"/>
-          <a:lstStyle/>
-          <a:p>
-            <a:pPr indent="0" marL="0">
-              <a:buNone/>
-            </a:pPr>
-            <a:r>
-              <a:rPr lang="en-US" sz="1500" b="1" dirty="0">
+            <a:off x="713232" y="3845052"/>
+            <a:ext cx="310896" cy="420624"/>
+          </a:xfrm>
+          <a:prstGeom prst="rect">
+            <a:avLst/>
+          </a:prstGeom>
+          <a:noFill/>
+          <a:ln/>
+        </p:spPr>
+        <p:txBody>
+          <a:bodyPr wrap="square" lIns="0" tIns="0" rIns="0" bIns="0" rtlCol="0" anchor="ctr"/>
+          <a:lstStyle/>
+          <a:p>
+            <a:pPr indent="0" marL="0">
+              <a:buNone/>
+            </a:pPr>
+            <a:r>
+              <a:rPr lang="en-US" sz="1200" b="1" dirty="0">
                 <a:solidFill>
                   <a:srgbClr val="C8952B"/>
                 </a:solidFill>
@@ -10891,7 +11281,7 @@
               </a:rPr>
               <a:t>6</a:t>
             </a:r>
-            <a:endParaRPr lang="en-US" sz="1500" dirty="0"/>
+            <a:endParaRPr lang="en-US" sz="1200" dirty="0"/>
           </a:p>
         </p:txBody>
       </p:sp>
@@ -10903,24 +11293,24 @@
         </p:nvSpPr>
         <p:spPr>
           <a:xfrm>
-            <a:off x="1188720" y="4791456"/>
-            <a:ext cx="3977640" cy="585216"/>
-          </a:xfrm>
-          <a:prstGeom prst="rect">
-            <a:avLst/>
-          </a:prstGeom>
-          <a:noFill/>
-          <a:ln/>
-        </p:spPr>
-        <p:txBody>
-          <a:bodyPr wrap="square" lIns="0" tIns="0" rIns="0" bIns="0" rtlCol="0" anchor="ctr"/>
-          <a:lstStyle/>
-          <a:p>
-            <a:pPr indent="0" marL="0">
-              <a:buNone/>
-            </a:pPr>
-            <a:r>
-              <a:rPr lang="en-US" sz="1150" dirty="0">
+            <a:off x="1060704" y="3845052"/>
+            <a:ext cx="2420112" cy="420624"/>
+          </a:xfrm>
+          <a:prstGeom prst="rect">
+            <a:avLst/>
+          </a:prstGeom>
+          <a:noFill/>
+          <a:ln/>
+        </p:spPr>
+        <p:txBody>
+          <a:bodyPr wrap="square" lIns="0" tIns="0" rIns="0" bIns="0" rtlCol="0" anchor="ctr"/>
+          <a:lstStyle/>
+          <a:p>
+            <a:pPr indent="0" marL="0">
+              <a:buNone/>
+            </a:pPr>
+            <a:r>
+              <a:rPr lang="en-US" sz="950" dirty="0">
                 <a:solidFill>
                   <a:srgbClr val="1A3A5C"/>
                 </a:solidFill>
@@ -10930,7 +11320,7 @@
               </a:rPr>
               <a:t>Administration, OpenAPI, separation of duties</a:t>
             </a:r>
-            <a:endParaRPr lang="en-US" sz="1150" dirty="0"/>
+            <a:endParaRPr lang="en-US" sz="950" dirty="0"/>
           </a:p>
         </p:txBody>
       </p:sp>
@@ -10942,8 +11332,8 @@
         </p:nvSpPr>
         <p:spPr>
           <a:xfrm>
-            <a:off x="5248656" y="4791456"/>
-            <a:ext cx="530352" cy="585216"/>
+            <a:off x="3517392" y="3845052"/>
+            <a:ext cx="420624" cy="420624"/>
           </a:xfrm>
           <a:prstGeom prst="rect">
             <a:avLst/>
@@ -10959,7 +11349,7 @@
               <a:buNone/>
             </a:pPr>
             <a:r>
-              <a:rPr lang="en-US" sz="1150" b="1" dirty="0">
+              <a:rPr lang="en-US" sz="950" b="1" dirty="0">
                 <a:solidFill>
                   <a:srgbClr val="1F7A43"/>
                 </a:solidFill>
@@ -10969,7 +11359,7 @@
               </a:rPr>
               <a:t>+3</a:t>
             </a:r>
-            <a:endParaRPr lang="en-US" sz="1150" dirty="0"/>
+            <a:endParaRPr lang="en-US" sz="950" dirty="0"/>
           </a:p>
         </p:txBody>
       </p:sp>
@@ -10981,8 +11371,8 @@
         </p:nvSpPr>
         <p:spPr>
           <a:xfrm>
-            <a:off x="566928" y="5449824"/>
-            <a:ext cx="82296" cy="585216"/>
+            <a:off x="566928" y="4325112"/>
+            <a:ext cx="82296" cy="420624"/>
           </a:xfrm>
           <a:prstGeom prst="rect">
             <a:avLst/>
@@ -11006,12 +11396,12 @@
         </p:nvSpPr>
         <p:spPr>
           <a:xfrm>
-            <a:off x="649224" y="5449824"/>
-            <a:ext cx="5312664" cy="585216"/>
+            <a:off x="649224" y="4325112"/>
+            <a:ext cx="3435096" cy="420624"/>
           </a:xfrm>
           <a:prstGeom prst="roundRect">
             <a:avLst>
-              <a:gd name="adj" fmla="val 6250"/>
+              <a:gd name="adj" fmla="val 8696"/>
             </a:avLst>
           </a:prstGeom>
           <a:solidFill>
@@ -11033,24 +11423,24 @@
         </p:nvSpPr>
         <p:spPr>
           <a:xfrm>
-            <a:off x="768096" y="5449824"/>
-            <a:ext cx="365760" cy="585216"/>
-          </a:xfrm>
-          <a:prstGeom prst="rect">
-            <a:avLst/>
-          </a:prstGeom>
-          <a:noFill/>
-          <a:ln/>
-        </p:spPr>
-        <p:txBody>
-          <a:bodyPr wrap="square" lIns="0" tIns="0" rIns="0" bIns="0" rtlCol="0" anchor="ctr"/>
-          <a:lstStyle/>
-          <a:p>
-            <a:pPr indent="0" marL="0">
-              <a:buNone/>
-            </a:pPr>
-            <a:r>
-              <a:rPr lang="en-US" sz="1500" b="1" dirty="0">
+            <a:off x="713232" y="4325112"/>
+            <a:ext cx="310896" cy="420624"/>
+          </a:xfrm>
+          <a:prstGeom prst="rect">
+            <a:avLst/>
+          </a:prstGeom>
+          <a:noFill/>
+          <a:ln/>
+        </p:spPr>
+        <p:txBody>
+          <a:bodyPr wrap="square" lIns="0" tIns="0" rIns="0" bIns="0" rtlCol="0" anchor="ctr"/>
+          <a:lstStyle/>
+          <a:p>
+            <a:pPr indent="0" marL="0">
+              <a:buNone/>
+            </a:pPr>
+            <a:r>
+              <a:rPr lang="en-US" sz="1200" b="1" dirty="0">
                 <a:solidFill>
                   <a:srgbClr val="C8952B"/>
                 </a:solidFill>
@@ -11060,7 +11450,7 @@
               </a:rPr>
               <a:t>7</a:t>
             </a:r>
-            <a:endParaRPr lang="en-US" sz="1500" dirty="0"/>
+            <a:endParaRPr lang="en-US" sz="1200" dirty="0"/>
           </a:p>
         </p:txBody>
       </p:sp>
@@ -11072,24 +11462,24 @@
         </p:nvSpPr>
         <p:spPr>
           <a:xfrm>
-            <a:off x="1188720" y="5449824"/>
-            <a:ext cx="3977640" cy="585216"/>
-          </a:xfrm>
-          <a:prstGeom prst="rect">
-            <a:avLst/>
-          </a:prstGeom>
-          <a:noFill/>
-          <a:ln/>
-        </p:spPr>
-        <p:txBody>
-          <a:bodyPr wrap="square" lIns="0" tIns="0" rIns="0" bIns="0" rtlCol="0" anchor="ctr"/>
-          <a:lstStyle/>
-          <a:p>
-            <a:pPr indent="0" marL="0">
-              <a:buNone/>
-            </a:pPr>
-            <a:r>
-              <a:rPr lang="en-US" sz="1150" dirty="0">
+            <a:off x="1060704" y="4325112"/>
+            <a:ext cx="2420112" cy="420624"/>
+          </a:xfrm>
+          <a:prstGeom prst="rect">
+            <a:avLst/>
+          </a:prstGeom>
+          <a:noFill/>
+          <a:ln/>
+        </p:spPr>
+        <p:txBody>
+          <a:bodyPr wrap="square" lIns="0" tIns="0" rIns="0" bIns="0" rtlCol="0" anchor="ctr"/>
+          <a:lstStyle/>
+          <a:p>
+            <a:pPr indent="0" marL="0">
+              <a:buNone/>
+            </a:pPr>
+            <a:r>
+              <a:rPr lang="en-US" sz="950" dirty="0">
                 <a:solidFill>
                   <a:srgbClr val="1A3A5C"/>
                 </a:solidFill>
@@ -11099,7 +11489,7 @@
               </a:rPr>
               <a:t>Web console and self-service</a:t>
             </a:r>
-            <a:endParaRPr lang="en-US" sz="1150" dirty="0"/>
+            <a:endParaRPr lang="en-US" sz="950" dirty="0"/>
           </a:p>
         </p:txBody>
       </p:sp>
@@ -11111,8 +11501,8 @@
         </p:nvSpPr>
         <p:spPr>
           <a:xfrm>
-            <a:off x="5248656" y="5449824"/>
-            <a:ext cx="530352" cy="585216"/>
+            <a:off x="3517392" y="4325112"/>
+            <a:ext cx="420624" cy="420624"/>
           </a:xfrm>
           <a:prstGeom prst="rect">
             <a:avLst/>
@@ -11128,7 +11518,7 @@
               <a:buNone/>
             </a:pPr>
             <a:r>
-              <a:rPr lang="en-US" sz="1150" b="1" dirty="0">
+              <a:rPr lang="en-US" sz="950" b="1" dirty="0">
                 <a:solidFill>
                   <a:srgbClr val="1F7A43"/>
                 </a:solidFill>
@@ -11138,7 +11528,7 @@
               </a:rPr>
               <a:t>+2</a:t>
             </a:r>
-            <a:endParaRPr lang="en-US" sz="1150" dirty="0"/>
+            <a:endParaRPr lang="en-US" sz="950" dirty="0"/>
           </a:p>
         </p:txBody>
       </p:sp>
@@ -11150,8 +11540,8 @@
         </p:nvSpPr>
         <p:spPr>
           <a:xfrm>
-            <a:off x="6199632" y="1499616"/>
-            <a:ext cx="82296" cy="585216"/>
+            <a:off x="566928" y="4805172"/>
+            <a:ext cx="82296" cy="420624"/>
           </a:xfrm>
           <a:prstGeom prst="rect">
             <a:avLst/>
@@ -11175,12 +11565,12 @@
         </p:nvSpPr>
         <p:spPr>
           <a:xfrm>
-            <a:off x="6281928" y="1499616"/>
-            <a:ext cx="5312664" cy="585216"/>
+            <a:off x="649224" y="4805172"/>
+            <a:ext cx="3435096" cy="420624"/>
           </a:xfrm>
           <a:prstGeom prst="roundRect">
             <a:avLst>
-              <a:gd name="adj" fmla="val 6250"/>
+              <a:gd name="adj" fmla="val 8696"/>
             </a:avLst>
           </a:prstGeom>
           <a:solidFill>
@@ -11202,24 +11592,24 @@
         </p:nvSpPr>
         <p:spPr>
           <a:xfrm>
-            <a:off x="6400800" y="1499616"/>
-            <a:ext cx="365760" cy="585216"/>
-          </a:xfrm>
-          <a:prstGeom prst="rect">
-            <a:avLst/>
-          </a:prstGeom>
-          <a:noFill/>
-          <a:ln/>
-        </p:spPr>
-        <p:txBody>
-          <a:bodyPr wrap="square" lIns="0" tIns="0" rIns="0" bIns="0" rtlCol="0" anchor="ctr"/>
-          <a:lstStyle/>
-          <a:p>
-            <a:pPr indent="0" marL="0">
-              <a:buNone/>
-            </a:pPr>
-            <a:r>
-              <a:rPr lang="en-US" sz="1500" b="1" dirty="0">
+            <a:off x="713232" y="4805172"/>
+            <a:ext cx="310896" cy="420624"/>
+          </a:xfrm>
+          <a:prstGeom prst="rect">
+            <a:avLst/>
+          </a:prstGeom>
+          <a:noFill/>
+          <a:ln/>
+        </p:spPr>
+        <p:txBody>
+          <a:bodyPr wrap="square" lIns="0" tIns="0" rIns="0" bIns="0" rtlCol="0" anchor="ctr"/>
+          <a:lstStyle/>
+          <a:p>
+            <a:pPr indent="0" marL="0">
+              <a:buNone/>
+            </a:pPr>
+            <a:r>
+              <a:rPr lang="en-US" sz="1200" b="1" dirty="0">
                 <a:solidFill>
                   <a:srgbClr val="C8952B"/>
                 </a:solidFill>
@@ -11229,7 +11619,7 @@
               </a:rPr>
               <a:t>8</a:t>
             </a:r>
-            <a:endParaRPr lang="en-US" sz="1500" dirty="0"/>
+            <a:endParaRPr lang="en-US" sz="1200" dirty="0"/>
           </a:p>
         </p:txBody>
       </p:sp>
@@ -11241,24 +11631,24 @@
         </p:nvSpPr>
         <p:spPr>
           <a:xfrm>
-            <a:off x="6821424" y="1499616"/>
-            <a:ext cx="3977640" cy="585216"/>
-          </a:xfrm>
-          <a:prstGeom prst="rect">
-            <a:avLst/>
-          </a:prstGeom>
-          <a:noFill/>
-          <a:ln/>
-        </p:spPr>
-        <p:txBody>
-          <a:bodyPr wrap="square" lIns="0" tIns="0" rIns="0" bIns="0" rtlCol="0" anchor="ctr"/>
-          <a:lstStyle/>
-          <a:p>
-            <a:pPr indent="0" marL="0">
-              <a:buNone/>
-            </a:pPr>
-            <a:r>
-              <a:rPr lang="en-US" sz="1150" dirty="0">
+            <a:off x="1060704" y="4805172"/>
+            <a:ext cx="2420112" cy="420624"/>
+          </a:xfrm>
+          <a:prstGeom prst="rect">
+            <a:avLst/>
+          </a:prstGeom>
+          <a:noFill/>
+          <a:ln/>
+        </p:spPr>
+        <p:txBody>
+          <a:bodyPr wrap="square" lIns="0" tIns="0" rIns="0" bIns="0" rtlCol="0" anchor="ctr"/>
+          <a:lstStyle/>
+          <a:p>
+            <a:pPr indent="0" marL="0">
+              <a:buNone/>
+            </a:pPr>
+            <a:r>
+              <a:rPr lang="en-US" sz="950" dirty="0">
                 <a:solidFill>
                   <a:srgbClr val="1A3A5C"/>
                 </a:solidFill>
@@ -11268,7 +11658,7 @@
               </a:rPr>
               <a:t>Enterprise identity and policy</a:t>
             </a:r>
-            <a:endParaRPr lang="en-US" sz="1150" dirty="0"/>
+            <a:endParaRPr lang="en-US" sz="950" dirty="0"/>
           </a:p>
         </p:txBody>
       </p:sp>
@@ -11280,8 +11670,8 @@
         </p:nvSpPr>
         <p:spPr>
           <a:xfrm>
-            <a:off x="10881360" y="1499616"/>
-            <a:ext cx="530352" cy="585216"/>
+            <a:off x="3517392" y="4805172"/>
+            <a:ext cx="420624" cy="420624"/>
           </a:xfrm>
           <a:prstGeom prst="rect">
             <a:avLst/>
@@ -11297,7 +11687,7 @@
               <a:buNone/>
             </a:pPr>
             <a:r>
-              <a:rPr lang="en-US" sz="1150" b="1" dirty="0">
+              <a:rPr lang="en-US" sz="950" b="1" dirty="0">
                 <a:solidFill>
                   <a:srgbClr val="1F7A43"/>
                 </a:solidFill>
@@ -11307,7 +11697,7 @@
               </a:rPr>
               <a:t>+2</a:t>
             </a:r>
-            <a:endParaRPr lang="en-US" sz="1150" dirty="0"/>
+            <a:endParaRPr lang="en-US" sz="950" dirty="0"/>
           </a:p>
         </p:txBody>
       </p:sp>
@@ -11319,8 +11709,8 @@
         </p:nvSpPr>
         <p:spPr>
           <a:xfrm>
-            <a:off x="6199632" y="2157984"/>
-            <a:ext cx="82296" cy="585216"/>
+            <a:off x="566928" y="5285232"/>
+            <a:ext cx="82296" cy="420624"/>
           </a:xfrm>
           <a:prstGeom prst="rect">
             <a:avLst/>
@@ -11344,12 +11734,12 @@
         </p:nvSpPr>
         <p:spPr>
           <a:xfrm>
-            <a:off x="6281928" y="2157984"/>
-            <a:ext cx="5312664" cy="585216"/>
+            <a:off x="649224" y="5285232"/>
+            <a:ext cx="3435096" cy="420624"/>
           </a:xfrm>
           <a:prstGeom prst="roundRect">
             <a:avLst>
-              <a:gd name="adj" fmla="val 6250"/>
+              <a:gd name="adj" fmla="val 8696"/>
             </a:avLst>
           </a:prstGeom>
           <a:solidFill>
@@ -11371,24 +11761,24 @@
         </p:nvSpPr>
         <p:spPr>
           <a:xfrm>
-            <a:off x="6400800" y="2157984"/>
-            <a:ext cx="365760" cy="585216"/>
-          </a:xfrm>
-          <a:prstGeom prst="rect">
-            <a:avLst/>
-          </a:prstGeom>
-          <a:noFill/>
-          <a:ln/>
-        </p:spPr>
-        <p:txBody>
-          <a:bodyPr wrap="square" lIns="0" tIns="0" rIns="0" bIns="0" rtlCol="0" anchor="ctr"/>
-          <a:lstStyle/>
-          <a:p>
-            <a:pPr indent="0" marL="0">
-              <a:buNone/>
-            </a:pPr>
-            <a:r>
-              <a:rPr lang="en-US" sz="1500" b="1" dirty="0">
+            <a:off x="713232" y="5285232"/>
+            <a:ext cx="310896" cy="420624"/>
+          </a:xfrm>
+          <a:prstGeom prst="rect">
+            <a:avLst/>
+          </a:prstGeom>
+          <a:noFill/>
+          <a:ln/>
+        </p:spPr>
+        <p:txBody>
+          <a:bodyPr wrap="square" lIns="0" tIns="0" rIns="0" bIns="0" rtlCol="0" anchor="ctr"/>
+          <a:lstStyle/>
+          <a:p>
+            <a:pPr indent="0" marL="0">
+              <a:buNone/>
+            </a:pPr>
+            <a:r>
+              <a:rPr lang="en-US" sz="1200" b="1" dirty="0">
                 <a:solidFill>
                   <a:srgbClr val="C8952B"/>
                 </a:solidFill>
@@ -11398,7 +11788,7 @@
               </a:rPr>
               <a:t>9</a:t>
             </a:r>
-            <a:endParaRPr lang="en-US" sz="1500" dirty="0"/>
+            <a:endParaRPr lang="en-US" sz="1200" dirty="0"/>
           </a:p>
         </p:txBody>
       </p:sp>
@@ -11410,24 +11800,24 @@
         </p:nvSpPr>
         <p:spPr>
           <a:xfrm>
-            <a:off x="6821424" y="2157984"/>
-            <a:ext cx="3977640" cy="585216"/>
-          </a:xfrm>
-          <a:prstGeom prst="rect">
-            <a:avLst/>
-          </a:prstGeom>
-          <a:noFill/>
-          <a:ln/>
-        </p:spPr>
-        <p:txBody>
-          <a:bodyPr wrap="square" lIns="0" tIns="0" rIns="0" bIns="0" rtlCol="0" anchor="ctr"/>
-          <a:lstStyle/>
-          <a:p>
-            <a:pPr indent="0" marL="0">
-              <a:buNone/>
-            </a:pPr>
-            <a:r>
-              <a:rPr lang="en-US" sz="1150" dirty="0">
+            <a:off x="1060704" y="5285232"/>
+            <a:ext cx="2420112" cy="420624"/>
+          </a:xfrm>
+          <a:prstGeom prst="rect">
+            <a:avLst/>
+          </a:prstGeom>
+          <a:noFill/>
+          <a:ln/>
+        </p:spPr>
+        <p:txBody>
+          <a:bodyPr wrap="square" lIns="0" tIns="0" rIns="0" bIns="0" rtlCol="0" anchor="ctr"/>
+          <a:lstStyle/>
+          <a:p>
+            <a:pPr indent="0" marL="0">
+              <a:buNone/>
+            </a:pPr>
+            <a:r>
+              <a:rPr lang="en-US" sz="950" dirty="0">
                 <a:solidFill>
                   <a:srgbClr val="1A3A5C"/>
                 </a:solidFill>
@@ -11437,7 +11827,7 @@
               </a:rPr>
               <a:t>Audit externalisation, compliance and ceremony</a:t>
             </a:r>
-            <a:endParaRPr lang="en-US" sz="1150" dirty="0"/>
+            <a:endParaRPr lang="en-US" sz="950" dirty="0"/>
           </a:p>
         </p:txBody>
       </p:sp>
@@ -11449,8 +11839,8 @@
         </p:nvSpPr>
         <p:spPr>
           <a:xfrm>
-            <a:off x="10881360" y="2157984"/>
-            <a:ext cx="530352" cy="585216"/>
+            <a:off x="3517392" y="5285232"/>
+            <a:ext cx="420624" cy="420624"/>
           </a:xfrm>
           <a:prstGeom prst="rect">
             <a:avLst/>
@@ -11466,7 +11856,7 @@
               <a:buNone/>
             </a:pPr>
             <a:r>
-              <a:rPr lang="en-US" sz="1150" b="1" dirty="0">
+              <a:rPr lang="en-US" sz="950" b="1" dirty="0">
                 <a:solidFill>
                   <a:srgbClr val="1F7A43"/>
                 </a:solidFill>
@@ -11476,7 +11866,7 @@
               </a:rPr>
               <a:t>+7</a:t>
             </a:r>
-            <a:endParaRPr lang="en-US" sz="1150" dirty="0"/>
+            <a:endParaRPr lang="en-US" sz="950" dirty="0"/>
           </a:p>
         </p:txBody>
       </p:sp>
@@ -11488,8 +11878,8 @@
         </p:nvSpPr>
         <p:spPr>
           <a:xfrm>
-            <a:off x="6199632" y="2816352"/>
-            <a:ext cx="82296" cy="585216"/>
+            <a:off x="4322064" y="1444752"/>
+            <a:ext cx="82296" cy="420624"/>
           </a:xfrm>
           <a:prstGeom prst="rect">
             <a:avLst/>
@@ -11513,12 +11903,12 @@
         </p:nvSpPr>
         <p:spPr>
           <a:xfrm>
-            <a:off x="6281928" y="2816352"/>
-            <a:ext cx="5312664" cy="585216"/>
+            <a:off x="4404360" y="1444752"/>
+            <a:ext cx="3435096" cy="420624"/>
           </a:xfrm>
           <a:prstGeom prst="roundRect">
             <a:avLst>
-              <a:gd name="adj" fmla="val 6250"/>
+              <a:gd name="adj" fmla="val 8696"/>
             </a:avLst>
           </a:prstGeom>
           <a:solidFill>
@@ -11540,24 +11930,24 @@
         </p:nvSpPr>
         <p:spPr>
           <a:xfrm>
-            <a:off x="6400800" y="2816352"/>
-            <a:ext cx="365760" cy="585216"/>
-          </a:xfrm>
-          <a:prstGeom prst="rect">
-            <a:avLst/>
-          </a:prstGeom>
-          <a:noFill/>
-          <a:ln/>
-        </p:spPr>
-        <p:txBody>
-          <a:bodyPr wrap="square" lIns="0" tIns="0" rIns="0" bIns="0" rtlCol="0" anchor="ctr"/>
-          <a:lstStyle/>
-          <a:p>
-            <a:pPr indent="0" marL="0">
-              <a:buNone/>
-            </a:pPr>
-            <a:r>
-              <a:rPr lang="en-US" sz="1500" b="1" dirty="0">
+            <a:off x="4468368" y="1444752"/>
+            <a:ext cx="310896" cy="420624"/>
+          </a:xfrm>
+          <a:prstGeom prst="rect">
+            <a:avLst/>
+          </a:prstGeom>
+          <a:noFill/>
+          <a:ln/>
+        </p:spPr>
+        <p:txBody>
+          <a:bodyPr wrap="square" lIns="0" tIns="0" rIns="0" bIns="0" rtlCol="0" anchor="ctr"/>
+          <a:lstStyle/>
+          <a:p>
+            <a:pPr indent="0" marL="0">
+              <a:buNone/>
+            </a:pPr>
+            <a:r>
+              <a:rPr lang="en-US" sz="1200" b="1" dirty="0">
                 <a:solidFill>
                   <a:srgbClr val="C8952B"/>
                 </a:solidFill>
@@ -11567,7 +11957,7 @@
               </a:rPr>
               <a:t>10</a:t>
             </a:r>
-            <a:endParaRPr lang="en-US" sz="1500" dirty="0"/>
+            <a:endParaRPr lang="en-US" sz="1200" dirty="0"/>
           </a:p>
         </p:txBody>
       </p:sp>
@@ -11579,24 +11969,24 @@
         </p:nvSpPr>
         <p:spPr>
           <a:xfrm>
-            <a:off x="6821424" y="2816352"/>
-            <a:ext cx="3977640" cy="585216"/>
-          </a:xfrm>
-          <a:prstGeom prst="rect">
-            <a:avLst/>
-          </a:prstGeom>
-          <a:noFill/>
-          <a:ln/>
-        </p:spPr>
-        <p:txBody>
-          <a:bodyPr wrap="square" lIns="0" tIns="0" rIns="0" bIns="0" rtlCol="0" anchor="ctr"/>
-          <a:lstStyle/>
-          <a:p>
-            <a:pPr indent="0" marL="0">
-              <a:buNone/>
-            </a:pPr>
-            <a:r>
-              <a:rPr lang="en-US" sz="1150" dirty="0">
+            <a:off x="4815840" y="1444752"/>
+            <a:ext cx="2420112" cy="420624"/>
+          </a:xfrm>
+          <a:prstGeom prst="rect">
+            <a:avLst/>
+          </a:prstGeom>
+          <a:noFill/>
+          <a:ln/>
+        </p:spPr>
+        <p:txBody>
+          <a:bodyPr wrap="square" lIns="0" tIns="0" rIns="0" bIns="0" rtlCol="0" anchor="ctr"/>
+          <a:lstStyle/>
+          <a:p>
+            <a:pPr indent="0" marL="0">
+              <a:buNone/>
+            </a:pPr>
+            <a:r>
+              <a:rPr lang="en-US" sz="950" dirty="0">
                 <a:solidFill>
                   <a:srgbClr val="1A3A5C"/>
                 </a:solidFill>
@@ -11606,7 +11996,7 @@
               </a:rPr>
               <a:t>Storage abstraction and PostgreSQL</a:t>
             </a:r>
-            <a:endParaRPr lang="en-US" sz="1150" dirty="0"/>
+            <a:endParaRPr lang="en-US" sz="950" dirty="0"/>
           </a:p>
         </p:txBody>
       </p:sp>
@@ -11618,8 +12008,8 @@
         </p:nvSpPr>
         <p:spPr>
           <a:xfrm>
-            <a:off x="10881360" y="2816352"/>
-            <a:ext cx="530352" cy="585216"/>
+            <a:off x="7272528" y="1444752"/>
+            <a:ext cx="420624" cy="420624"/>
           </a:xfrm>
           <a:prstGeom prst="rect">
             <a:avLst/>
@@ -11635,7 +12025,7 @@
               <a:buNone/>
             </a:pPr>
             <a:r>
-              <a:rPr lang="en-US" sz="1150" b="1" dirty="0">
+              <a:rPr lang="en-US" sz="950" b="1" dirty="0">
                 <a:solidFill>
                   <a:srgbClr val="1F7A43"/>
                 </a:solidFill>
@@ -11645,7 +12035,7 @@
               </a:rPr>
               <a:t>+1</a:t>
             </a:r>
-            <a:endParaRPr lang="en-US" sz="1150" dirty="0"/>
+            <a:endParaRPr lang="en-US" sz="950" dirty="0"/>
           </a:p>
         </p:txBody>
       </p:sp>
@@ -11657,8 +12047,8 @@
         </p:nvSpPr>
         <p:spPr>
           <a:xfrm>
-            <a:off x="6199632" y="3474720"/>
-            <a:ext cx="82296" cy="585216"/>
+            <a:off x="4322064" y="1924812"/>
+            <a:ext cx="82296" cy="420624"/>
           </a:xfrm>
           <a:prstGeom prst="rect">
             <a:avLst/>
@@ -11682,12 +12072,12 @@
         </p:nvSpPr>
         <p:spPr>
           <a:xfrm>
-            <a:off x="6281928" y="3474720"/>
-            <a:ext cx="5312664" cy="585216"/>
+            <a:off x="4404360" y="1924812"/>
+            <a:ext cx="3435096" cy="420624"/>
           </a:xfrm>
           <a:prstGeom prst="roundRect">
             <a:avLst>
-              <a:gd name="adj" fmla="val 6250"/>
+              <a:gd name="adj" fmla="val 8696"/>
             </a:avLst>
           </a:prstGeom>
           <a:solidFill>
@@ -11709,24 +12099,24 @@
         </p:nvSpPr>
         <p:spPr>
           <a:xfrm>
-            <a:off x="6400800" y="3474720"/>
-            <a:ext cx="365760" cy="585216"/>
-          </a:xfrm>
-          <a:prstGeom prst="rect">
-            <a:avLst/>
-          </a:prstGeom>
-          <a:noFill/>
-          <a:ln/>
-        </p:spPr>
-        <p:txBody>
-          <a:bodyPr wrap="square" lIns="0" tIns="0" rIns="0" bIns="0" rtlCol="0" anchor="ctr"/>
-          <a:lstStyle/>
-          <a:p>
-            <a:pPr indent="0" marL="0">
-              <a:buNone/>
-            </a:pPr>
-            <a:r>
-              <a:rPr lang="en-US" sz="1500" b="1" dirty="0">
+            <a:off x="4468368" y="1924812"/>
+            <a:ext cx="310896" cy="420624"/>
+          </a:xfrm>
+          <a:prstGeom prst="rect">
+            <a:avLst/>
+          </a:prstGeom>
+          <a:noFill/>
+          <a:ln/>
+        </p:spPr>
+        <p:txBody>
+          <a:bodyPr wrap="square" lIns="0" tIns="0" rIns="0" bIns="0" rtlCol="0" anchor="ctr"/>
+          <a:lstStyle/>
+          <a:p>
+            <a:pPr indent="0" marL="0">
+              <a:buNone/>
+            </a:pPr>
+            <a:r>
+              <a:rPr lang="en-US" sz="1200" b="1" dirty="0">
                 <a:solidFill>
                   <a:srgbClr val="C8952B"/>
                 </a:solidFill>
@@ -11736,7 +12126,7 @@
               </a:rPr>
               <a:t>11</a:t>
             </a:r>
-            <a:endParaRPr lang="en-US" sz="1500" dirty="0"/>
+            <a:endParaRPr lang="en-US" sz="1200" dirty="0"/>
           </a:p>
         </p:txBody>
       </p:sp>
@@ -11748,24 +12138,24 @@
         </p:nvSpPr>
         <p:spPr>
           <a:xfrm>
-            <a:off x="6821424" y="3474720"/>
-            <a:ext cx="3977640" cy="585216"/>
-          </a:xfrm>
-          <a:prstGeom prst="rect">
-            <a:avLst/>
-          </a:prstGeom>
-          <a:noFill/>
-          <a:ln/>
-        </p:spPr>
-        <p:txBody>
-          <a:bodyPr wrap="square" lIns="0" tIns="0" rIns="0" bIns="0" rtlCol="0" anchor="ctr"/>
-          <a:lstStyle/>
-          <a:p>
-            <a:pPr indent="0" marL="0">
-              <a:buNone/>
-            </a:pPr>
-            <a:r>
-              <a:rPr lang="en-US" sz="1150" dirty="0">
+            <a:off x="4815840" y="1924812"/>
+            <a:ext cx="2420112" cy="420624"/>
+          </a:xfrm>
+          <a:prstGeom prst="rect">
+            <a:avLst/>
+          </a:prstGeom>
+          <a:noFill/>
+          <a:ln/>
+        </p:spPr>
+        <p:txBody>
+          <a:bodyPr wrap="square" lIns="0" tIns="0" rIns="0" bIns="0" rtlCol="0" anchor="ctr"/>
+          <a:lstStyle/>
+          <a:p>
+            <a:pPr indent="0" marL="0">
+              <a:buNone/>
+            </a:pPr>
+            <a:r>
+              <a:rPr lang="en-US" sz="950" dirty="0">
                 <a:solidFill>
                   <a:srgbClr val="1A3A5C"/>
                 </a:solidFill>
@@ -11775,7 +12165,7 @@
               </a:rPr>
               <a:t>High availability, failover and deployment</a:t>
             </a:r>
-            <a:endParaRPr lang="en-US" sz="1150" dirty="0"/>
+            <a:endParaRPr lang="en-US" sz="950" dirty="0"/>
           </a:p>
         </p:txBody>
       </p:sp>
@@ -11787,8 +12177,8 @@
         </p:nvSpPr>
         <p:spPr>
           <a:xfrm>
-            <a:off x="10881360" y="3474720"/>
-            <a:ext cx="530352" cy="585216"/>
+            <a:off x="7272528" y="1924812"/>
+            <a:ext cx="420624" cy="420624"/>
           </a:xfrm>
           <a:prstGeom prst="rect">
             <a:avLst/>
@@ -11804,7 +12194,7 @@
               <a:buNone/>
             </a:pPr>
             <a:r>
-              <a:rPr lang="en-US" sz="1150" b="1" dirty="0">
+              <a:rPr lang="en-US" sz="950" b="1" dirty="0">
                 <a:solidFill>
                   <a:srgbClr val="1F7A43"/>
                 </a:solidFill>
@@ -11814,7 +12204,7 @@
               </a:rPr>
               <a:t>+6</a:t>
             </a:r>
-            <a:endParaRPr lang="en-US" sz="1150" dirty="0"/>
+            <a:endParaRPr lang="en-US" sz="950" dirty="0"/>
           </a:p>
         </p:txBody>
       </p:sp>
@@ -11826,8 +12216,8 @@
         </p:nvSpPr>
         <p:spPr>
           <a:xfrm>
-            <a:off x="6199632" y="4133088"/>
-            <a:ext cx="82296" cy="585216"/>
+            <a:off x="4322064" y="2404872"/>
+            <a:ext cx="82296" cy="420624"/>
           </a:xfrm>
           <a:prstGeom prst="rect">
             <a:avLst/>
@@ -11851,12 +12241,12 @@
         </p:nvSpPr>
         <p:spPr>
           <a:xfrm>
-            <a:off x="6281928" y="4133088"/>
-            <a:ext cx="5312664" cy="585216"/>
+            <a:off x="4404360" y="2404872"/>
+            <a:ext cx="3435096" cy="420624"/>
           </a:xfrm>
           <a:prstGeom prst="roundRect">
             <a:avLst>
-              <a:gd name="adj" fmla="val 6250"/>
+              <a:gd name="adj" fmla="val 8696"/>
             </a:avLst>
           </a:prstGeom>
           <a:solidFill>
@@ -11878,24 +12268,24 @@
         </p:nvSpPr>
         <p:spPr>
           <a:xfrm>
-            <a:off x="6400800" y="4133088"/>
-            <a:ext cx="365760" cy="585216"/>
-          </a:xfrm>
-          <a:prstGeom prst="rect">
-            <a:avLst/>
-          </a:prstGeom>
-          <a:noFill/>
-          <a:ln/>
-        </p:spPr>
-        <p:txBody>
-          <a:bodyPr wrap="square" lIns="0" tIns="0" rIns="0" bIns="0" rtlCol="0" anchor="ctr"/>
-          <a:lstStyle/>
-          <a:p>
-            <a:pPr indent="0" marL="0">
-              <a:buNone/>
-            </a:pPr>
-            <a:r>
-              <a:rPr lang="en-US" sz="1500" b="1" dirty="0">
+            <a:off x="4468368" y="2404872"/>
+            <a:ext cx="310896" cy="420624"/>
+          </a:xfrm>
+          <a:prstGeom prst="rect">
+            <a:avLst/>
+          </a:prstGeom>
+          <a:noFill/>
+          <a:ln/>
+        </p:spPr>
+        <p:txBody>
+          <a:bodyPr wrap="square" lIns="0" tIns="0" rIns="0" bIns="0" rtlCol="0" anchor="ctr"/>
+          <a:lstStyle/>
+          <a:p>
+            <a:pPr indent="0" marL="0">
+              <a:buNone/>
+            </a:pPr>
+            <a:r>
+              <a:rPr lang="en-US" sz="1200" b="1" dirty="0">
                 <a:solidFill>
                   <a:srgbClr val="C8952B"/>
                 </a:solidFill>
@@ -11905,7 +12295,7 @@
               </a:rPr>
               <a:t>12</a:t>
             </a:r>
-            <a:endParaRPr lang="en-US" sz="1500" dirty="0"/>
+            <a:endParaRPr lang="en-US" sz="1200" dirty="0"/>
           </a:p>
         </p:txBody>
       </p:sp>
@@ -11917,24 +12307,24 @@
         </p:nvSpPr>
         <p:spPr>
           <a:xfrm>
-            <a:off x="6821424" y="4133088"/>
-            <a:ext cx="3977640" cy="585216"/>
-          </a:xfrm>
-          <a:prstGeom prst="rect">
-            <a:avLst/>
-          </a:prstGeom>
-          <a:noFill/>
-          <a:ln/>
-        </p:spPr>
-        <p:txBody>
-          <a:bodyPr wrap="square" lIns="0" tIns="0" rIns="0" bIns="0" rtlCol="0" anchor="ctr"/>
-          <a:lstStyle/>
-          <a:p>
-            <a:pPr indent="0" marL="0">
-              <a:buNone/>
-            </a:pPr>
-            <a:r>
-              <a:rPr lang="en-US" sz="1150" dirty="0">
+            <a:off x="4815840" y="2404872"/>
+            <a:ext cx="2420112" cy="420624"/>
+          </a:xfrm>
+          <a:prstGeom prst="rect">
+            <a:avLst/>
+          </a:prstGeom>
+          <a:noFill/>
+          <a:ln/>
+        </p:spPr>
+        <p:txBody>
+          <a:bodyPr wrap="square" lIns="0" tIns="0" rIns="0" bIns="0" rtlCol="0" anchor="ctr"/>
+          <a:lstStyle/>
+          <a:p>
+            <a:pPr indent="0" marL="0">
+              <a:buNone/>
+            </a:pPr>
+            <a:r>
+              <a:rPr lang="en-US" sz="950" dirty="0">
                 <a:solidFill>
                   <a:srgbClr val="1A3A5C"/>
                 </a:solidFill>
@@ -11944,7 +12334,7 @@
               </a:rPr>
               <a:t>Multi-tenancy</a:t>
             </a:r>
-            <a:endParaRPr lang="en-US" sz="1150" dirty="0"/>
+            <a:endParaRPr lang="en-US" sz="950" dirty="0"/>
           </a:p>
         </p:txBody>
       </p:sp>
@@ -11956,8 +12346,8 @@
         </p:nvSpPr>
         <p:spPr>
           <a:xfrm>
-            <a:off x="10881360" y="4133088"/>
-            <a:ext cx="530352" cy="585216"/>
+            <a:off x="7272528" y="2404872"/>
+            <a:ext cx="420624" cy="420624"/>
           </a:xfrm>
           <a:prstGeom prst="rect">
             <a:avLst/>
@@ -11973,7 +12363,7 @@
               <a:buNone/>
             </a:pPr>
             <a:r>
-              <a:rPr lang="en-US" sz="1150" b="1" dirty="0">
+              <a:rPr lang="en-US" sz="950" b="1" dirty="0">
                 <a:solidFill>
                   <a:srgbClr val="1F7A43"/>
                 </a:solidFill>
@@ -11983,7 +12373,7 @@
               </a:rPr>
               <a:t>+2</a:t>
             </a:r>
-            <a:endParaRPr lang="en-US" sz="1150" dirty="0"/>
+            <a:endParaRPr lang="en-US" sz="950" dirty="0"/>
           </a:p>
         </p:txBody>
       </p:sp>
@@ -11995,8 +12385,8 @@
         </p:nvSpPr>
         <p:spPr>
           <a:xfrm>
-            <a:off x="6199632" y="4791456"/>
-            <a:ext cx="82296" cy="585216"/>
+            <a:off x="4322064" y="2884932"/>
+            <a:ext cx="82296" cy="420624"/>
           </a:xfrm>
           <a:prstGeom prst="rect">
             <a:avLst/>
@@ -12020,12 +12410,12 @@
         </p:nvSpPr>
         <p:spPr>
           <a:xfrm>
-            <a:off x="6281928" y="4791456"/>
-            <a:ext cx="5312664" cy="585216"/>
+            <a:off x="4404360" y="2884932"/>
+            <a:ext cx="3435096" cy="420624"/>
           </a:xfrm>
           <a:prstGeom prst="roundRect">
             <a:avLst>
-              <a:gd name="adj" fmla="val 6250"/>
+              <a:gd name="adj" fmla="val 8696"/>
             </a:avLst>
           </a:prstGeom>
           <a:solidFill>
@@ -12047,24 +12437,24 @@
         </p:nvSpPr>
         <p:spPr>
           <a:xfrm>
-            <a:off x="6400800" y="4791456"/>
-            <a:ext cx="365760" cy="585216"/>
-          </a:xfrm>
-          <a:prstGeom prst="rect">
-            <a:avLst/>
-          </a:prstGeom>
-          <a:noFill/>
-          <a:ln/>
-        </p:spPr>
-        <p:txBody>
-          <a:bodyPr wrap="square" lIns="0" tIns="0" rIns="0" bIns="0" rtlCol="0" anchor="ctr"/>
-          <a:lstStyle/>
-          <a:p>
-            <a:pPr indent="0" marL="0">
-              <a:buNone/>
-            </a:pPr>
-            <a:r>
-              <a:rPr lang="en-US" sz="1500" b="1" dirty="0">
+            <a:off x="4468368" y="2884932"/>
+            <a:ext cx="310896" cy="420624"/>
+          </a:xfrm>
+          <a:prstGeom prst="rect">
+            <a:avLst/>
+          </a:prstGeom>
+          <a:noFill/>
+          <a:ln/>
+        </p:spPr>
+        <p:txBody>
+          <a:bodyPr wrap="square" lIns="0" tIns="0" rIns="0" bIns="0" rtlCol="0" anchor="ctr"/>
+          <a:lstStyle/>
+          <a:p>
+            <a:pPr indent="0" marL="0">
+              <a:buNone/>
+            </a:pPr>
+            <a:r>
+              <a:rPr lang="en-US" sz="1200" b="1" dirty="0">
                 <a:solidFill>
                   <a:srgbClr val="C8952B"/>
                 </a:solidFill>
@@ -12074,7 +12464,7 @@
               </a:rPr>
               <a:t>13</a:t>
             </a:r>
-            <a:endParaRPr lang="en-US" sz="1500" dirty="0"/>
+            <a:endParaRPr lang="en-US" sz="1200" dirty="0"/>
           </a:p>
         </p:txBody>
       </p:sp>
@@ -12086,24 +12476,24 @@
         </p:nvSpPr>
         <p:spPr>
           <a:xfrm>
-            <a:off x="6821424" y="4791456"/>
-            <a:ext cx="3977640" cy="585216"/>
-          </a:xfrm>
-          <a:prstGeom prst="rect">
-            <a:avLst/>
-          </a:prstGeom>
-          <a:noFill/>
-          <a:ln/>
-        </p:spPr>
-        <p:txBody>
-          <a:bodyPr wrap="square" lIns="0" tIns="0" rIns="0" bIns="0" rtlCol="0" anchor="ctr"/>
-          <a:lstStyle/>
-          <a:p>
-            <a:pPr indent="0" marL="0">
-              <a:buNone/>
-            </a:pPr>
-            <a:r>
-              <a:rPr lang="en-US" sz="1150" dirty="0">
+            <a:off x="4815840" y="2884932"/>
+            <a:ext cx="2420112" cy="420624"/>
+          </a:xfrm>
+          <a:prstGeom prst="rect">
+            <a:avLst/>
+          </a:prstGeom>
+          <a:noFill/>
+          <a:ln/>
+        </p:spPr>
+        <p:txBody>
+          <a:bodyPr wrap="square" lIns="0" tIns="0" rIns="0" bIns="0" rtlCol="0" anchor="ctr"/>
+          <a:lstStyle/>
+          <a:p>
+            <a:pPr indent="0" marL="0">
+              <a:buNone/>
+            </a:pPr>
+            <a:r>
+              <a:rPr lang="en-US" sz="950" dirty="0">
                 <a:solidFill>
                   <a:srgbClr val="1A3A5C"/>
                 </a:solidFill>
@@ -12113,7 +12503,7 @@
               </a:rPr>
               <a:t>KMIP JSON and XML encodings</a:t>
             </a:r>
-            <a:endParaRPr lang="en-US" sz="1150" dirty="0"/>
+            <a:endParaRPr lang="en-US" sz="950" dirty="0"/>
           </a:p>
         </p:txBody>
       </p:sp>
@@ -12125,8 +12515,8 @@
         </p:nvSpPr>
         <p:spPr>
           <a:xfrm>
-            <a:off x="10881360" y="4791456"/>
-            <a:ext cx="530352" cy="585216"/>
+            <a:off x="7272528" y="2884932"/>
+            <a:ext cx="420624" cy="420624"/>
           </a:xfrm>
           <a:prstGeom prst="rect">
             <a:avLst/>
@@ -12142,7 +12532,7 @@
               <a:buNone/>
             </a:pPr>
             <a:r>
-              <a:rPr lang="en-US" sz="1150" b="1" dirty="0">
+              <a:rPr lang="en-US" sz="950" b="1" dirty="0">
                 <a:solidFill>
                   <a:srgbClr val="1F7A43"/>
                 </a:solidFill>
@@ -12152,7 +12542,7 @@
               </a:rPr>
               <a:t>+1</a:t>
             </a:r>
-            <a:endParaRPr lang="en-US" sz="1150" dirty="0"/>
+            <a:endParaRPr lang="en-US" sz="950" dirty="0"/>
           </a:p>
         </p:txBody>
       </p:sp>
@@ -12164,8 +12554,8 @@
         </p:nvSpPr>
         <p:spPr>
           <a:xfrm>
-            <a:off x="6199632" y="5449824"/>
-            <a:ext cx="82296" cy="585216"/>
+            <a:off x="4322064" y="3364992"/>
+            <a:ext cx="82296" cy="420624"/>
           </a:xfrm>
           <a:prstGeom prst="rect">
             <a:avLst/>
@@ -12189,12 +12579,12 @@
         </p:nvSpPr>
         <p:spPr>
           <a:xfrm>
-            <a:off x="6281928" y="5449824"/>
-            <a:ext cx="5312664" cy="585216"/>
+            <a:off x="4404360" y="3364992"/>
+            <a:ext cx="3435096" cy="420624"/>
           </a:xfrm>
           <a:prstGeom prst="roundRect">
             <a:avLst>
-              <a:gd name="adj" fmla="val 6250"/>
+              <a:gd name="adj" fmla="val 8696"/>
             </a:avLst>
           </a:prstGeom>
           <a:solidFill>
@@ -12216,24 +12606,24 @@
         </p:nvSpPr>
         <p:spPr>
           <a:xfrm>
-            <a:off x="6400800" y="5449824"/>
-            <a:ext cx="365760" cy="585216"/>
-          </a:xfrm>
-          <a:prstGeom prst="rect">
-            <a:avLst/>
-          </a:prstGeom>
-          <a:noFill/>
-          <a:ln/>
-        </p:spPr>
-        <p:txBody>
-          <a:bodyPr wrap="square" lIns="0" tIns="0" rIns="0" bIns="0" rtlCol="0" anchor="ctr"/>
-          <a:lstStyle/>
-          <a:p>
-            <a:pPr indent="0" marL="0">
-              <a:buNone/>
-            </a:pPr>
-            <a:r>
-              <a:rPr lang="en-US" sz="1500" b="1" dirty="0">
+            <a:off x="4468368" y="3364992"/>
+            <a:ext cx="310896" cy="420624"/>
+          </a:xfrm>
+          <a:prstGeom prst="rect">
+            <a:avLst/>
+          </a:prstGeom>
+          <a:noFill/>
+          <a:ln/>
+        </p:spPr>
+        <p:txBody>
+          <a:bodyPr wrap="square" lIns="0" tIns="0" rIns="0" bIns="0" rtlCol="0" anchor="ctr"/>
+          <a:lstStyle/>
+          <a:p>
+            <a:pPr indent="0" marL="0">
+              <a:buNone/>
+            </a:pPr>
+            <a:r>
+              <a:rPr lang="en-US" sz="1200" b="1" dirty="0">
                 <a:solidFill>
                   <a:srgbClr val="C8952B"/>
                 </a:solidFill>
@@ -12243,7 +12633,7 @@
               </a:rPr>
               <a:t>14</a:t>
             </a:r>
-            <a:endParaRPr lang="en-US" sz="1500" dirty="0"/>
+            <a:endParaRPr lang="en-US" sz="1200" dirty="0"/>
           </a:p>
         </p:txBody>
       </p:sp>
@@ -12255,24 +12645,24 @@
         </p:nvSpPr>
         <p:spPr>
           <a:xfrm>
-            <a:off x="6821424" y="5449824"/>
-            <a:ext cx="3977640" cy="585216"/>
-          </a:xfrm>
-          <a:prstGeom prst="rect">
-            <a:avLst/>
-          </a:prstGeom>
-          <a:noFill/>
-          <a:ln/>
-        </p:spPr>
-        <p:txBody>
-          <a:bodyPr wrap="square" lIns="0" tIns="0" rIns="0" bIns="0" rtlCol="0" anchor="ctr"/>
-          <a:lstStyle/>
-          <a:p>
-            <a:pPr indent="0" marL="0">
-              <a:buNone/>
-            </a:pPr>
-            <a:r>
-              <a:rPr lang="en-US" sz="1150" dirty="0">
+            <a:off x="4815840" y="3364992"/>
+            <a:ext cx="2420112" cy="420624"/>
+          </a:xfrm>
+          <a:prstGeom prst="rect">
+            <a:avLst/>
+          </a:prstGeom>
+          <a:noFill/>
+          <a:ln/>
+        </p:spPr>
+        <p:txBody>
+          <a:bodyPr wrap="square" lIns="0" tIns="0" rIns="0" bIns="0" rtlCol="0" anchor="ctr"/>
+          <a:lstStyle/>
+          <a:p>
+            <a:pPr indent="0" marL="0">
+              <a:buNone/>
+            </a:pPr>
+            <a:r>
+              <a:rPr lang="en-US" sz="950" dirty="0">
                 <a:solidFill>
                   <a:srgbClr val="1A3A5C"/>
                 </a:solidFill>
@@ -12282,7 +12672,7 @@
               </a:rPr>
               <a:t>Certificate discovery and expiry monitoring</a:t>
             </a:r>
-            <a:endParaRPr lang="en-US" sz="1150" dirty="0"/>
+            <a:endParaRPr lang="en-US" sz="950" dirty="0"/>
           </a:p>
         </p:txBody>
       </p:sp>
@@ -12294,8 +12684,8 @@
         </p:nvSpPr>
         <p:spPr>
           <a:xfrm>
-            <a:off x="10881360" y="5449824"/>
-            <a:ext cx="530352" cy="585216"/>
+            <a:off x="7272528" y="3364992"/>
+            <a:ext cx="420624" cy="420624"/>
           </a:xfrm>
           <a:prstGeom prst="rect">
             <a:avLst/>
@@ -12311,7 +12701,7 @@
               <a:buNone/>
             </a:pPr>
             <a:r>
-              <a:rPr lang="en-US" sz="1150" b="1" dirty="0">
+              <a:rPr lang="en-US" sz="950" b="1" dirty="0">
                 <a:solidFill>
                   <a:srgbClr val="1F7A43"/>
                 </a:solidFill>
@@ -12321,44 +12711,2089 @@
               </a:rPr>
               <a:t>+1</a:t>
             </a:r>
-            <a:endParaRPr lang="en-US" sz="1150" dirty="0"/>
-          </a:p>
-        </p:txBody>
-      </p:sp>
-      <p:sp>
-        <p:nvSpPr>
-          <p:cNvPr id="74" name="Text 72"/>
-          <p:cNvSpPr txBox="1"/>
-          <p:nvPr/>
-        </p:nvSpPr>
-        <p:spPr>
-          <a:xfrm>
-            <a:off x="566928" y="6291072"/>
-            <a:ext cx="11027664" cy="310896"/>
-          </a:xfrm>
-          <a:prstGeom prst="rect">
-            <a:avLst/>
-          </a:prstGeom>
-          <a:noFill/>
-          <a:ln/>
-        </p:spPr>
-        <p:txBody>
-          <a:bodyPr wrap="square" lIns="0" tIns="0" rIns="0" bIns="0" rtlCol="0" anchor="ctr"/>
-          <a:lstStyle/>
-          <a:p>
-            <a:pPr indent="0" marL="0">
-              <a:buNone/>
-            </a:pPr>
-            <a:r>
-              <a:rPr lang="en-US" sz="1000" i="1" dirty="0">
-                <a:solidFill>
-                  <a:srgbClr val="7B8794"/>
+            <a:endParaRPr lang="en-US" sz="950" dirty="0"/>
+          </a:p>
+        </p:txBody>
+      </p:sp>
+      <p:sp>
+        <p:nvSpPr>
+          <p:cNvPr id="74" name="Shape 72"/>
+          <p:cNvSpPr/>
+          <p:nvPr/>
+        </p:nvSpPr>
+        <p:spPr>
+          <a:xfrm>
+            <a:off x="4322064" y="3845052"/>
+            <a:ext cx="82296" cy="420624"/>
+          </a:xfrm>
+          <a:prstGeom prst="rect">
+            <a:avLst/>
+          </a:prstGeom>
+          <a:solidFill>
+            <a:srgbClr val="1A3A5C"/>
+          </a:solidFill>
+          <a:ln w="12700">
+            <a:solidFill>
+              <a:srgbClr val="1A3A5C"/>
+            </a:solidFill>
+            <a:prstDash val="solid"/>
+          </a:ln>
+        </p:spPr>
+      </p:sp>
+      <p:sp>
+        <p:nvSpPr>
+          <p:cNvPr id="75" name="Shape 73"/>
+          <p:cNvSpPr/>
+          <p:nvPr/>
+        </p:nvSpPr>
+        <p:spPr>
+          <a:xfrm>
+            <a:off x="4404360" y="3845052"/>
+            <a:ext cx="3435096" cy="420624"/>
+          </a:xfrm>
+          <a:prstGeom prst="roundRect">
+            <a:avLst>
+              <a:gd name="adj" fmla="val 8696"/>
+            </a:avLst>
+          </a:prstGeom>
+          <a:solidFill>
+            <a:srgbClr val="E8EFF6"/>
+          </a:solidFill>
+          <a:ln w="12700">
+            <a:solidFill>
+              <a:srgbClr val="E8EFF6"/>
+            </a:solidFill>
+            <a:prstDash val="solid"/>
+          </a:ln>
+        </p:spPr>
+      </p:sp>
+      <p:sp>
+        <p:nvSpPr>
+          <p:cNvPr id="76" name="Text 74"/>
+          <p:cNvSpPr txBox="1"/>
+          <p:nvPr/>
+        </p:nvSpPr>
+        <p:spPr>
+          <a:xfrm>
+            <a:off x="4468368" y="3845052"/>
+            <a:ext cx="310896" cy="420624"/>
+          </a:xfrm>
+          <a:prstGeom prst="rect">
+            <a:avLst/>
+          </a:prstGeom>
+          <a:noFill/>
+          <a:ln/>
+        </p:spPr>
+        <p:txBody>
+          <a:bodyPr wrap="square" lIns="0" tIns="0" rIns="0" bIns="0" rtlCol="0" anchor="ctr"/>
+          <a:lstStyle/>
+          <a:p>
+            <a:pPr indent="0" marL="0">
+              <a:buNone/>
+            </a:pPr>
+            <a:r>
+              <a:rPr lang="en-US" sz="1200" b="1" dirty="0">
+                <a:solidFill>
+                  <a:srgbClr val="C8952B"/>
+                </a:solidFill>
+                <a:latin typeface="Cambria" pitchFamily="34" charset="0"/>
+                <a:ea typeface="Cambria" pitchFamily="34" charset="-122"/>
+                <a:cs typeface="Cambria" pitchFamily="34" charset="-120"/>
+              </a:rPr>
+              <a:t>15</a:t>
+            </a:r>
+            <a:endParaRPr lang="en-US" sz="1200" dirty="0"/>
+          </a:p>
+        </p:txBody>
+      </p:sp>
+      <p:sp>
+        <p:nvSpPr>
+          <p:cNvPr id="77" name="Text 75"/>
+          <p:cNvSpPr txBox="1"/>
+          <p:nvPr/>
+        </p:nvSpPr>
+        <p:spPr>
+          <a:xfrm>
+            <a:off x="4815840" y="3845052"/>
+            <a:ext cx="2420112" cy="420624"/>
+          </a:xfrm>
+          <a:prstGeom prst="rect">
+            <a:avLst/>
+          </a:prstGeom>
+          <a:noFill/>
+          <a:ln/>
+        </p:spPr>
+        <p:txBody>
+          <a:bodyPr wrap="square" lIns="0" tIns="0" rIns="0" bIns="0" rtlCol="0" anchor="ctr"/>
+          <a:lstStyle/>
+          <a:p>
+            <a:pPr indent="0" marL="0">
+              <a:buNone/>
+            </a:pPr>
+            <a:r>
+              <a:rPr lang="en-US" sz="950" dirty="0">
+                <a:solidFill>
+                  <a:srgbClr val="1A3A5C"/>
                 </a:solidFill>
                 <a:latin typeface="Calibri" pitchFamily="34" charset="0"/>
                 <a:ea typeface="Calibri" pitchFamily="34" charset="-122"/>
                 <a:cs typeface="Calibri" pitchFamily="34" charset="-120"/>
               </a:rPr>
-              <a:t>A Foundation   ·   B The REST control plane   ·   C Enterprise fit   ·   D Scale, availability and tenancy   ·   E Protocol and estate reach      +n is the gap-matrix features that step closes.</a:t>
+              <a:t>Cloud BYOK</a:t>
+            </a:r>
+            <a:endParaRPr lang="en-US" sz="950" dirty="0"/>
+          </a:p>
+        </p:txBody>
+      </p:sp>
+      <p:sp>
+        <p:nvSpPr>
+          <p:cNvPr id="78" name="Text 76"/>
+          <p:cNvSpPr txBox="1"/>
+          <p:nvPr/>
+        </p:nvSpPr>
+        <p:spPr>
+          <a:xfrm>
+            <a:off x="7272528" y="3845052"/>
+            <a:ext cx="420624" cy="420624"/>
+          </a:xfrm>
+          <a:prstGeom prst="rect">
+            <a:avLst/>
+          </a:prstGeom>
+          <a:noFill/>
+          <a:ln/>
+        </p:spPr>
+        <p:txBody>
+          <a:bodyPr wrap="square" lIns="0" tIns="0" rIns="0" bIns="0" rtlCol="0" anchor="ctr"/>
+          <a:lstStyle/>
+          <a:p>
+            <a:pPr algn="r" indent="0" marL="0">
+              <a:buNone/>
+            </a:pPr>
+            <a:r>
+              <a:rPr lang="en-US" sz="950" b="1" dirty="0">
+                <a:solidFill>
+                  <a:srgbClr val="1F7A43"/>
+                </a:solidFill>
+                <a:latin typeface="Calibri" pitchFamily="34" charset="0"/>
+                <a:ea typeface="Calibri" pitchFamily="34" charset="-122"/>
+                <a:cs typeface="Calibri" pitchFamily="34" charset="-120"/>
+              </a:rPr>
+              <a:t>+1</a:t>
+            </a:r>
+            <a:endParaRPr lang="en-US" sz="950" dirty="0"/>
+          </a:p>
+        </p:txBody>
+      </p:sp>
+      <p:sp>
+        <p:nvSpPr>
+          <p:cNvPr id="79" name="Shape 77"/>
+          <p:cNvSpPr/>
+          <p:nvPr/>
+        </p:nvSpPr>
+        <p:spPr>
+          <a:xfrm>
+            <a:off x="4322064" y="4325112"/>
+            <a:ext cx="82296" cy="420624"/>
+          </a:xfrm>
+          <a:prstGeom prst="rect">
+            <a:avLst/>
+          </a:prstGeom>
+          <a:solidFill>
+            <a:srgbClr val="1A3A5C"/>
+          </a:solidFill>
+          <a:ln w="12700">
+            <a:solidFill>
+              <a:srgbClr val="1A3A5C"/>
+            </a:solidFill>
+            <a:prstDash val="solid"/>
+          </a:ln>
+        </p:spPr>
+      </p:sp>
+      <p:sp>
+        <p:nvSpPr>
+          <p:cNvPr id="80" name="Shape 78"/>
+          <p:cNvSpPr/>
+          <p:nvPr/>
+        </p:nvSpPr>
+        <p:spPr>
+          <a:xfrm>
+            <a:off x="4404360" y="4325112"/>
+            <a:ext cx="3435096" cy="420624"/>
+          </a:xfrm>
+          <a:prstGeom prst="roundRect">
+            <a:avLst>
+              <a:gd name="adj" fmla="val 8696"/>
+            </a:avLst>
+          </a:prstGeom>
+          <a:solidFill>
+            <a:srgbClr val="E8EFF6"/>
+          </a:solidFill>
+          <a:ln w="12700">
+            <a:solidFill>
+              <a:srgbClr val="E8EFF6"/>
+            </a:solidFill>
+            <a:prstDash val="solid"/>
+          </a:ln>
+        </p:spPr>
+      </p:sp>
+      <p:sp>
+        <p:nvSpPr>
+          <p:cNvPr id="81" name="Text 79"/>
+          <p:cNvSpPr txBox="1"/>
+          <p:nvPr/>
+        </p:nvSpPr>
+        <p:spPr>
+          <a:xfrm>
+            <a:off x="4468368" y="4325112"/>
+            <a:ext cx="310896" cy="420624"/>
+          </a:xfrm>
+          <a:prstGeom prst="rect">
+            <a:avLst/>
+          </a:prstGeom>
+          <a:noFill/>
+          <a:ln/>
+        </p:spPr>
+        <p:txBody>
+          <a:bodyPr wrap="square" lIns="0" tIns="0" rIns="0" bIns="0" rtlCol="0" anchor="ctr"/>
+          <a:lstStyle/>
+          <a:p>
+            <a:pPr indent="0" marL="0">
+              <a:buNone/>
+            </a:pPr>
+            <a:r>
+              <a:rPr lang="en-US" sz="1200" b="1" dirty="0">
+                <a:solidFill>
+                  <a:srgbClr val="C8952B"/>
+                </a:solidFill>
+                <a:latin typeface="Cambria" pitchFamily="34" charset="0"/>
+                <a:ea typeface="Cambria" pitchFamily="34" charset="-122"/>
+                <a:cs typeface="Cambria" pitchFamily="34" charset="-120"/>
+              </a:rPr>
+              <a:t>16</a:t>
+            </a:r>
+            <a:endParaRPr lang="en-US" sz="1200" dirty="0"/>
+          </a:p>
+        </p:txBody>
+      </p:sp>
+      <p:sp>
+        <p:nvSpPr>
+          <p:cNvPr id="82" name="Text 80"/>
+          <p:cNvSpPr txBox="1"/>
+          <p:nvPr/>
+        </p:nvSpPr>
+        <p:spPr>
+          <a:xfrm>
+            <a:off x="4815840" y="4325112"/>
+            <a:ext cx="2420112" cy="420624"/>
+          </a:xfrm>
+          <a:prstGeom prst="rect">
+            <a:avLst/>
+          </a:prstGeom>
+          <a:noFill/>
+          <a:ln/>
+        </p:spPr>
+        <p:txBody>
+          <a:bodyPr wrap="square" lIns="0" tIns="0" rIns="0" bIns="0" rtlCol="0" anchor="ctr"/>
+          <a:lstStyle/>
+          <a:p>
+            <a:pPr indent="0" marL="0">
+              <a:buNone/>
+            </a:pPr>
+            <a:r>
+              <a:rPr lang="en-US" sz="950" dirty="0">
+                <a:solidFill>
+                  <a:srgbClr val="1A3A5C"/>
+                </a:solidFill>
+                <a:latin typeface="Calibri" pitchFamily="34" charset="0"/>
+                <a:ea typeface="Calibri" pitchFamily="34" charset="-122"/>
+                <a:cs typeface="Calibri" pitchFamily="34" charset="-120"/>
+              </a:rPr>
+              <a:t>External key store — XKS and EKM</a:t>
+            </a:r>
+            <a:endParaRPr lang="en-US" sz="950" dirty="0"/>
+          </a:p>
+        </p:txBody>
+      </p:sp>
+      <p:sp>
+        <p:nvSpPr>
+          <p:cNvPr id="83" name="Text 81"/>
+          <p:cNvSpPr txBox="1"/>
+          <p:nvPr/>
+        </p:nvSpPr>
+        <p:spPr>
+          <a:xfrm>
+            <a:off x="7272528" y="4325112"/>
+            <a:ext cx="420624" cy="420624"/>
+          </a:xfrm>
+          <a:prstGeom prst="rect">
+            <a:avLst/>
+          </a:prstGeom>
+          <a:noFill/>
+          <a:ln/>
+        </p:spPr>
+        <p:txBody>
+          <a:bodyPr wrap="square" lIns="0" tIns="0" rIns="0" bIns="0" rtlCol="0" anchor="ctr"/>
+          <a:lstStyle/>
+          <a:p>
+            <a:pPr algn="r" indent="0" marL="0">
+              <a:buNone/>
+            </a:pPr>
+            <a:r>
+              <a:rPr lang="en-US" sz="950" b="1" dirty="0">
+                <a:solidFill>
+                  <a:srgbClr val="1F7A43"/>
+                </a:solidFill>
+                <a:latin typeface="Calibri" pitchFamily="34" charset="0"/>
+                <a:ea typeface="Calibri" pitchFamily="34" charset="-122"/>
+                <a:cs typeface="Calibri" pitchFamily="34" charset="-120"/>
+              </a:rPr>
+              <a:t>+1</a:t>
+            </a:r>
+            <a:endParaRPr lang="en-US" sz="950" dirty="0"/>
+          </a:p>
+        </p:txBody>
+      </p:sp>
+      <p:sp>
+        <p:nvSpPr>
+          <p:cNvPr id="84" name="Shape 82"/>
+          <p:cNvSpPr/>
+          <p:nvPr/>
+        </p:nvSpPr>
+        <p:spPr>
+          <a:xfrm>
+            <a:off x="4322064" y="4805172"/>
+            <a:ext cx="82296" cy="420624"/>
+          </a:xfrm>
+          <a:prstGeom prst="rect">
+            <a:avLst/>
+          </a:prstGeom>
+          <a:solidFill>
+            <a:srgbClr val="1A3A5C"/>
+          </a:solidFill>
+          <a:ln w="12700">
+            <a:solidFill>
+              <a:srgbClr val="1A3A5C"/>
+            </a:solidFill>
+            <a:prstDash val="solid"/>
+          </a:ln>
+        </p:spPr>
+      </p:sp>
+      <p:sp>
+        <p:nvSpPr>
+          <p:cNvPr id="85" name="Shape 83"/>
+          <p:cNvSpPr/>
+          <p:nvPr/>
+        </p:nvSpPr>
+        <p:spPr>
+          <a:xfrm>
+            <a:off x="4404360" y="4805172"/>
+            <a:ext cx="3435096" cy="420624"/>
+          </a:xfrm>
+          <a:prstGeom prst="roundRect">
+            <a:avLst>
+              <a:gd name="adj" fmla="val 8696"/>
+            </a:avLst>
+          </a:prstGeom>
+          <a:solidFill>
+            <a:srgbClr val="E8EFF6"/>
+          </a:solidFill>
+          <a:ln w="12700">
+            <a:solidFill>
+              <a:srgbClr val="E8EFF6"/>
+            </a:solidFill>
+            <a:prstDash val="solid"/>
+          </a:ln>
+        </p:spPr>
+      </p:sp>
+      <p:sp>
+        <p:nvSpPr>
+          <p:cNvPr id="86" name="Text 84"/>
+          <p:cNvSpPr txBox="1"/>
+          <p:nvPr/>
+        </p:nvSpPr>
+        <p:spPr>
+          <a:xfrm>
+            <a:off x="4468368" y="4805172"/>
+            <a:ext cx="310896" cy="420624"/>
+          </a:xfrm>
+          <a:prstGeom prst="rect">
+            <a:avLst/>
+          </a:prstGeom>
+          <a:noFill/>
+          <a:ln/>
+        </p:spPr>
+        <p:txBody>
+          <a:bodyPr wrap="square" lIns="0" tIns="0" rIns="0" bIns="0" rtlCol="0" anchor="ctr"/>
+          <a:lstStyle/>
+          <a:p>
+            <a:pPr indent="0" marL="0">
+              <a:buNone/>
+            </a:pPr>
+            <a:r>
+              <a:rPr lang="en-US" sz="1200" b="1" dirty="0">
+                <a:solidFill>
+                  <a:srgbClr val="C8952B"/>
+                </a:solidFill>
+                <a:latin typeface="Cambria" pitchFamily="34" charset="0"/>
+                <a:ea typeface="Cambria" pitchFamily="34" charset="-122"/>
+                <a:cs typeface="Cambria" pitchFamily="34" charset="-120"/>
+              </a:rPr>
+              <a:t>17</a:t>
+            </a:r>
+            <a:endParaRPr lang="en-US" sz="1200" dirty="0"/>
+          </a:p>
+        </p:txBody>
+      </p:sp>
+      <p:sp>
+        <p:nvSpPr>
+          <p:cNvPr id="87" name="Text 85"/>
+          <p:cNvSpPr txBox="1"/>
+          <p:nvPr/>
+        </p:nvSpPr>
+        <p:spPr>
+          <a:xfrm>
+            <a:off x="4815840" y="4805172"/>
+            <a:ext cx="2420112" cy="420624"/>
+          </a:xfrm>
+          <a:prstGeom prst="rect">
+            <a:avLst/>
+          </a:prstGeom>
+          <a:noFill/>
+          <a:ln/>
+        </p:spPr>
+        <p:txBody>
+          <a:bodyPr wrap="square" lIns="0" tIns="0" rIns="0" bIns="0" rtlCol="0" anchor="ctr"/>
+          <a:lstStyle/>
+          <a:p>
+            <a:pPr indent="0" marL="0">
+              <a:buNone/>
+            </a:pPr>
+            <a:r>
+              <a:rPr lang="en-US" sz="950" dirty="0">
+                <a:solidFill>
+                  <a:srgbClr val="1A3A5C"/>
+                </a:solidFill>
+                <a:latin typeface="Calibri" pitchFamily="34" charset="0"/>
+                <a:ea typeface="Calibri" pitchFamily="34" charset="-122"/>
+                <a:cs typeface="Calibri" pitchFamily="34" charset="-120"/>
+              </a:rPr>
+              <a:t>PKCS#11 provider for applications</a:t>
+            </a:r>
+            <a:endParaRPr lang="en-US" sz="950" dirty="0"/>
+          </a:p>
+        </p:txBody>
+      </p:sp>
+      <p:sp>
+        <p:nvSpPr>
+          <p:cNvPr id="88" name="Text 86"/>
+          <p:cNvSpPr txBox="1"/>
+          <p:nvPr/>
+        </p:nvSpPr>
+        <p:spPr>
+          <a:xfrm>
+            <a:off x="7272528" y="4805172"/>
+            <a:ext cx="420624" cy="420624"/>
+          </a:xfrm>
+          <a:prstGeom prst="rect">
+            <a:avLst/>
+          </a:prstGeom>
+          <a:noFill/>
+          <a:ln/>
+        </p:spPr>
+        <p:txBody>
+          <a:bodyPr wrap="square" lIns="0" tIns="0" rIns="0" bIns="0" rtlCol="0" anchor="ctr"/>
+          <a:lstStyle/>
+          <a:p>
+            <a:pPr algn="r" indent="0" marL="0">
+              <a:buNone/>
+            </a:pPr>
+            <a:r>
+              <a:rPr lang="en-US" sz="950" b="1" dirty="0">
+                <a:solidFill>
+                  <a:srgbClr val="1F7A43"/>
+                </a:solidFill>
+                <a:latin typeface="Calibri" pitchFamily="34" charset="0"/>
+                <a:ea typeface="Calibri" pitchFamily="34" charset="-122"/>
+                <a:cs typeface="Calibri" pitchFamily="34" charset="-120"/>
+              </a:rPr>
+              <a:t>+1</a:t>
+            </a:r>
+            <a:endParaRPr lang="en-US" sz="950" dirty="0"/>
+          </a:p>
+        </p:txBody>
+      </p:sp>
+      <p:sp>
+        <p:nvSpPr>
+          <p:cNvPr id="89" name="Shape 87"/>
+          <p:cNvSpPr/>
+          <p:nvPr/>
+        </p:nvSpPr>
+        <p:spPr>
+          <a:xfrm>
+            <a:off x="4322064" y="5285232"/>
+            <a:ext cx="82296" cy="420624"/>
+          </a:xfrm>
+          <a:prstGeom prst="rect">
+            <a:avLst/>
+          </a:prstGeom>
+          <a:solidFill>
+            <a:srgbClr val="1A3A5C"/>
+          </a:solidFill>
+          <a:ln w="12700">
+            <a:solidFill>
+              <a:srgbClr val="1A3A5C"/>
+            </a:solidFill>
+            <a:prstDash val="solid"/>
+          </a:ln>
+        </p:spPr>
+      </p:sp>
+      <p:sp>
+        <p:nvSpPr>
+          <p:cNvPr id="90" name="Shape 88"/>
+          <p:cNvSpPr/>
+          <p:nvPr/>
+        </p:nvSpPr>
+        <p:spPr>
+          <a:xfrm>
+            <a:off x="4404360" y="5285232"/>
+            <a:ext cx="3435096" cy="420624"/>
+          </a:xfrm>
+          <a:prstGeom prst="roundRect">
+            <a:avLst>
+              <a:gd name="adj" fmla="val 8696"/>
+            </a:avLst>
+          </a:prstGeom>
+          <a:solidFill>
+            <a:srgbClr val="E8EFF6"/>
+          </a:solidFill>
+          <a:ln w="12700">
+            <a:solidFill>
+              <a:srgbClr val="E8EFF6"/>
+            </a:solidFill>
+            <a:prstDash val="solid"/>
+          </a:ln>
+        </p:spPr>
+      </p:sp>
+      <p:sp>
+        <p:nvSpPr>
+          <p:cNvPr id="91" name="Text 89"/>
+          <p:cNvSpPr txBox="1"/>
+          <p:nvPr/>
+        </p:nvSpPr>
+        <p:spPr>
+          <a:xfrm>
+            <a:off x="4468368" y="5285232"/>
+            <a:ext cx="310896" cy="420624"/>
+          </a:xfrm>
+          <a:prstGeom prst="rect">
+            <a:avLst/>
+          </a:prstGeom>
+          <a:noFill/>
+          <a:ln/>
+        </p:spPr>
+        <p:txBody>
+          <a:bodyPr wrap="square" lIns="0" tIns="0" rIns="0" bIns="0" rtlCol="0" anchor="ctr"/>
+          <a:lstStyle/>
+          <a:p>
+            <a:pPr indent="0" marL="0">
+              <a:buNone/>
+            </a:pPr>
+            <a:r>
+              <a:rPr lang="en-US" sz="1200" b="1" dirty="0">
+                <a:solidFill>
+                  <a:srgbClr val="C8952B"/>
+                </a:solidFill>
+                <a:latin typeface="Cambria" pitchFamily="34" charset="0"/>
+                <a:ea typeface="Cambria" pitchFamily="34" charset="-122"/>
+                <a:cs typeface="Cambria" pitchFamily="34" charset="-120"/>
+              </a:rPr>
+              <a:t>18</a:t>
+            </a:r>
+            <a:endParaRPr lang="en-US" sz="1200" dirty="0"/>
+          </a:p>
+        </p:txBody>
+      </p:sp>
+      <p:sp>
+        <p:nvSpPr>
+          <p:cNvPr id="92" name="Text 90"/>
+          <p:cNvSpPr txBox="1"/>
+          <p:nvPr/>
+        </p:nvSpPr>
+        <p:spPr>
+          <a:xfrm>
+            <a:off x="4815840" y="5285232"/>
+            <a:ext cx="2420112" cy="420624"/>
+          </a:xfrm>
+          <a:prstGeom prst="rect">
+            <a:avLst/>
+          </a:prstGeom>
+          <a:noFill/>
+          <a:ln/>
+        </p:spPr>
+        <p:txBody>
+          <a:bodyPr wrap="square" lIns="0" tIns="0" rIns="0" bIns="0" rtlCol="0" anchor="ctr"/>
+          <a:lstStyle/>
+          <a:p>
+            <a:pPr indent="0" marL="0">
+              <a:buNone/>
+            </a:pPr>
+            <a:r>
+              <a:rPr lang="en-US" sz="950" dirty="0">
+                <a:solidFill>
+                  <a:srgbClr val="1A3A5C"/>
+                </a:solidFill>
+                <a:latin typeface="Calibri" pitchFamily="34" charset="0"/>
+                <a:ea typeface="Calibri" pitchFamily="34" charset="-122"/>
+                <a:cs typeface="Calibri" pitchFamily="34" charset="-120"/>
+              </a:rPr>
+              <a:t>Tokenization and format-preserving encryption</a:t>
+            </a:r>
+            <a:endParaRPr lang="en-US" sz="950" dirty="0"/>
+          </a:p>
+        </p:txBody>
+      </p:sp>
+      <p:sp>
+        <p:nvSpPr>
+          <p:cNvPr id="93" name="Text 91"/>
+          <p:cNvSpPr txBox="1"/>
+          <p:nvPr/>
+        </p:nvSpPr>
+        <p:spPr>
+          <a:xfrm>
+            <a:off x="7272528" y="5285232"/>
+            <a:ext cx="420624" cy="420624"/>
+          </a:xfrm>
+          <a:prstGeom prst="rect">
+            <a:avLst/>
+          </a:prstGeom>
+          <a:noFill/>
+          <a:ln/>
+        </p:spPr>
+        <p:txBody>
+          <a:bodyPr wrap="square" lIns="0" tIns="0" rIns="0" bIns="0" rtlCol="0" anchor="ctr"/>
+          <a:lstStyle/>
+          <a:p>
+            <a:pPr algn="r" indent="0" marL="0">
+              <a:buNone/>
+            </a:pPr>
+            <a:r>
+              <a:rPr lang="en-US" sz="950" b="1" dirty="0">
+                <a:solidFill>
+                  <a:srgbClr val="1F7A43"/>
+                </a:solidFill>
+                <a:latin typeface="Calibri" pitchFamily="34" charset="0"/>
+                <a:ea typeface="Calibri" pitchFamily="34" charset="-122"/>
+                <a:cs typeface="Calibri" pitchFamily="34" charset="-120"/>
+              </a:rPr>
+              <a:t>+1</a:t>
+            </a:r>
+            <a:endParaRPr lang="en-US" sz="950" dirty="0"/>
+          </a:p>
+        </p:txBody>
+      </p:sp>
+      <p:sp>
+        <p:nvSpPr>
+          <p:cNvPr id="94" name="Shape 92"/>
+          <p:cNvSpPr/>
+          <p:nvPr/>
+        </p:nvSpPr>
+        <p:spPr>
+          <a:xfrm>
+            <a:off x="8077200" y="1444752"/>
+            <a:ext cx="82296" cy="420624"/>
+          </a:xfrm>
+          <a:prstGeom prst="rect">
+            <a:avLst/>
+          </a:prstGeom>
+          <a:solidFill>
+            <a:srgbClr val="2E6DA4"/>
+          </a:solidFill>
+          <a:ln w="12700">
+            <a:solidFill>
+              <a:srgbClr val="2E6DA4"/>
+            </a:solidFill>
+            <a:prstDash val="solid"/>
+          </a:ln>
+        </p:spPr>
+      </p:sp>
+      <p:sp>
+        <p:nvSpPr>
+          <p:cNvPr id="95" name="Shape 93"/>
+          <p:cNvSpPr/>
+          <p:nvPr/>
+        </p:nvSpPr>
+        <p:spPr>
+          <a:xfrm>
+            <a:off x="8159496" y="1444752"/>
+            <a:ext cx="3435096" cy="420624"/>
+          </a:xfrm>
+          <a:prstGeom prst="roundRect">
+            <a:avLst>
+              <a:gd name="adj" fmla="val 8696"/>
+            </a:avLst>
+          </a:prstGeom>
+          <a:solidFill>
+            <a:srgbClr val="E8EFF6"/>
+          </a:solidFill>
+          <a:ln w="12700">
+            <a:solidFill>
+              <a:srgbClr val="E8EFF6"/>
+            </a:solidFill>
+            <a:prstDash val="solid"/>
+          </a:ln>
+        </p:spPr>
+      </p:sp>
+      <p:sp>
+        <p:nvSpPr>
+          <p:cNvPr id="96" name="Text 94"/>
+          <p:cNvSpPr txBox="1"/>
+          <p:nvPr/>
+        </p:nvSpPr>
+        <p:spPr>
+          <a:xfrm>
+            <a:off x="8223504" y="1444752"/>
+            <a:ext cx="310896" cy="420624"/>
+          </a:xfrm>
+          <a:prstGeom prst="rect">
+            <a:avLst/>
+          </a:prstGeom>
+          <a:noFill/>
+          <a:ln/>
+        </p:spPr>
+        <p:txBody>
+          <a:bodyPr wrap="square" lIns="0" tIns="0" rIns="0" bIns="0" rtlCol="0" anchor="ctr"/>
+          <a:lstStyle/>
+          <a:p>
+            <a:pPr indent="0" marL="0">
+              <a:buNone/>
+            </a:pPr>
+            <a:r>
+              <a:rPr lang="en-US" sz="1200" b="1" dirty="0">
+                <a:solidFill>
+                  <a:srgbClr val="C8952B"/>
+                </a:solidFill>
+                <a:latin typeface="Cambria" pitchFamily="34" charset="0"/>
+                <a:ea typeface="Cambria" pitchFamily="34" charset="-122"/>
+                <a:cs typeface="Cambria" pitchFamily="34" charset="-120"/>
+              </a:rPr>
+              <a:t>19</a:t>
+            </a:r>
+            <a:endParaRPr lang="en-US" sz="1200" dirty="0"/>
+          </a:p>
+        </p:txBody>
+      </p:sp>
+      <p:sp>
+        <p:nvSpPr>
+          <p:cNvPr id="97" name="Text 95"/>
+          <p:cNvSpPr txBox="1"/>
+          <p:nvPr/>
+        </p:nvSpPr>
+        <p:spPr>
+          <a:xfrm>
+            <a:off x="8570976" y="1444752"/>
+            <a:ext cx="2420112" cy="420624"/>
+          </a:xfrm>
+          <a:prstGeom prst="rect">
+            <a:avLst/>
+          </a:prstGeom>
+          <a:noFill/>
+          <a:ln/>
+        </p:spPr>
+        <p:txBody>
+          <a:bodyPr wrap="square" lIns="0" tIns="0" rIns="0" bIns="0" rtlCol="0" anchor="ctr"/>
+          <a:lstStyle/>
+          <a:p>
+            <a:pPr indent="0" marL="0">
+              <a:buNone/>
+            </a:pPr>
+            <a:r>
+              <a:rPr lang="en-US" sz="950" dirty="0">
+                <a:solidFill>
+                  <a:srgbClr val="9A6410"/>
+                </a:solidFill>
+                <a:latin typeface="Calibri" pitchFamily="34" charset="0"/>
+                <a:ea typeface="Calibri" pitchFamily="34" charset="-122"/>
+                <a:cs typeface="Calibri" pitchFamily="34" charset="-120"/>
+              </a:rPr>
+              <a:t>⧗ Vendor interoperability validation</a:t>
+            </a:r>
+            <a:endParaRPr lang="en-US" sz="950" dirty="0"/>
+          </a:p>
+        </p:txBody>
+      </p:sp>
+      <p:sp>
+        <p:nvSpPr>
+          <p:cNvPr id="98" name="Text 96"/>
+          <p:cNvSpPr txBox="1"/>
+          <p:nvPr/>
+        </p:nvSpPr>
+        <p:spPr>
+          <a:xfrm>
+            <a:off x="11027664" y="1444752"/>
+            <a:ext cx="420624" cy="420624"/>
+          </a:xfrm>
+          <a:prstGeom prst="rect">
+            <a:avLst/>
+          </a:prstGeom>
+          <a:noFill/>
+          <a:ln/>
+        </p:spPr>
+        <p:txBody>
+          <a:bodyPr wrap="square" lIns="0" tIns="0" rIns="0" bIns="0" rtlCol="0" anchor="ctr"/>
+          <a:lstStyle/>
+          <a:p>
+            <a:pPr algn="r" indent="0" marL="0">
+              <a:buNone/>
+            </a:pPr>
+            <a:r>
+              <a:rPr lang="en-US" sz="950" b="1" dirty="0">
+                <a:solidFill>
+                  <a:srgbClr val="1F7A43"/>
+                </a:solidFill>
+                <a:latin typeface="Calibri" pitchFamily="34" charset="0"/>
+                <a:ea typeface="Calibri" pitchFamily="34" charset="-122"/>
+                <a:cs typeface="Calibri" pitchFamily="34" charset="-120"/>
+              </a:rPr>
+              <a:t>+2</a:t>
+            </a:r>
+            <a:endParaRPr lang="en-US" sz="950" dirty="0"/>
+          </a:p>
+        </p:txBody>
+      </p:sp>
+      <p:sp>
+        <p:nvSpPr>
+          <p:cNvPr id="99" name="Shape 97"/>
+          <p:cNvSpPr/>
+          <p:nvPr/>
+        </p:nvSpPr>
+        <p:spPr>
+          <a:xfrm>
+            <a:off x="8077200" y="1924812"/>
+            <a:ext cx="82296" cy="420624"/>
+          </a:xfrm>
+          <a:prstGeom prst="rect">
+            <a:avLst/>
+          </a:prstGeom>
+          <a:solidFill>
+            <a:srgbClr val="2E6DA4"/>
+          </a:solidFill>
+          <a:ln w="12700">
+            <a:solidFill>
+              <a:srgbClr val="2E6DA4"/>
+            </a:solidFill>
+            <a:prstDash val="solid"/>
+          </a:ln>
+        </p:spPr>
+      </p:sp>
+      <p:sp>
+        <p:nvSpPr>
+          <p:cNvPr id="100" name="Shape 98"/>
+          <p:cNvSpPr/>
+          <p:nvPr/>
+        </p:nvSpPr>
+        <p:spPr>
+          <a:xfrm>
+            <a:off x="8159496" y="1924812"/>
+            <a:ext cx="3435096" cy="420624"/>
+          </a:xfrm>
+          <a:prstGeom prst="roundRect">
+            <a:avLst>
+              <a:gd name="adj" fmla="val 8696"/>
+            </a:avLst>
+          </a:prstGeom>
+          <a:solidFill>
+            <a:srgbClr val="E8EFF6"/>
+          </a:solidFill>
+          <a:ln w="12700">
+            <a:solidFill>
+              <a:srgbClr val="E8EFF6"/>
+            </a:solidFill>
+            <a:prstDash val="solid"/>
+          </a:ln>
+        </p:spPr>
+      </p:sp>
+      <p:sp>
+        <p:nvSpPr>
+          <p:cNvPr id="101" name="Text 99"/>
+          <p:cNvSpPr txBox="1"/>
+          <p:nvPr/>
+        </p:nvSpPr>
+        <p:spPr>
+          <a:xfrm>
+            <a:off x="8223504" y="1924812"/>
+            <a:ext cx="310896" cy="420624"/>
+          </a:xfrm>
+          <a:prstGeom prst="rect">
+            <a:avLst/>
+          </a:prstGeom>
+          <a:noFill/>
+          <a:ln/>
+        </p:spPr>
+        <p:txBody>
+          <a:bodyPr wrap="square" lIns="0" tIns="0" rIns="0" bIns="0" rtlCol="0" anchor="ctr"/>
+          <a:lstStyle/>
+          <a:p>
+            <a:pPr indent="0" marL="0">
+              <a:buNone/>
+            </a:pPr>
+            <a:r>
+              <a:rPr lang="en-US" sz="1200" b="1" dirty="0">
+                <a:solidFill>
+                  <a:srgbClr val="C8952B"/>
+                </a:solidFill>
+                <a:latin typeface="Cambria" pitchFamily="34" charset="0"/>
+                <a:ea typeface="Cambria" pitchFamily="34" charset="-122"/>
+                <a:cs typeface="Cambria" pitchFamily="34" charset="-120"/>
+              </a:rPr>
+              <a:t>20</a:t>
+            </a:r>
+            <a:endParaRPr lang="en-US" sz="1200" dirty="0"/>
+          </a:p>
+        </p:txBody>
+      </p:sp>
+      <p:sp>
+        <p:nvSpPr>
+          <p:cNvPr id="102" name="Text 100"/>
+          <p:cNvSpPr txBox="1"/>
+          <p:nvPr/>
+        </p:nvSpPr>
+        <p:spPr>
+          <a:xfrm>
+            <a:off x="8570976" y="1924812"/>
+            <a:ext cx="2420112" cy="420624"/>
+          </a:xfrm>
+          <a:prstGeom prst="rect">
+            <a:avLst/>
+          </a:prstGeom>
+          <a:noFill/>
+          <a:ln/>
+        </p:spPr>
+        <p:txBody>
+          <a:bodyPr wrap="square" lIns="0" tIns="0" rIns="0" bIns="0" rtlCol="0" anchor="ctr"/>
+          <a:lstStyle/>
+          <a:p>
+            <a:pPr indent="0" marL="0">
+              <a:buNone/>
+            </a:pPr>
+            <a:r>
+              <a:rPr lang="en-US" sz="950" dirty="0">
+                <a:solidFill>
+                  <a:srgbClr val="9A6410"/>
+                </a:solidFill>
+                <a:latin typeface="Calibri" pitchFamily="34" charset="0"/>
+                <a:ea typeface="Calibri" pitchFamily="34" charset="-122"/>
+                <a:cs typeface="Calibri" pitchFamily="34" charset="-120"/>
+              </a:rPr>
+              <a:t>⧗ OASIS interoperability certification</a:t>
+            </a:r>
+            <a:endParaRPr lang="en-US" sz="950" dirty="0"/>
+          </a:p>
+        </p:txBody>
+      </p:sp>
+      <p:sp>
+        <p:nvSpPr>
+          <p:cNvPr id="103" name="Text 101"/>
+          <p:cNvSpPr txBox="1"/>
+          <p:nvPr/>
+        </p:nvSpPr>
+        <p:spPr>
+          <a:xfrm>
+            <a:off x="11027664" y="1924812"/>
+            <a:ext cx="420624" cy="420624"/>
+          </a:xfrm>
+          <a:prstGeom prst="rect">
+            <a:avLst/>
+          </a:prstGeom>
+          <a:noFill/>
+          <a:ln/>
+        </p:spPr>
+        <p:txBody>
+          <a:bodyPr wrap="square" lIns="0" tIns="0" rIns="0" bIns="0" rtlCol="0" anchor="ctr"/>
+          <a:lstStyle/>
+          <a:p>
+            <a:pPr algn="r" indent="0" marL="0">
+              <a:buNone/>
+            </a:pPr>
+            <a:r>
+              <a:rPr lang="en-US" sz="950" b="1" dirty="0">
+                <a:solidFill>
+                  <a:srgbClr val="1F7A43"/>
+                </a:solidFill>
+                <a:latin typeface="Calibri" pitchFamily="34" charset="0"/>
+                <a:ea typeface="Calibri" pitchFamily="34" charset="-122"/>
+                <a:cs typeface="Calibri" pitchFamily="34" charset="-120"/>
+              </a:rPr>
+              <a:t>+1</a:t>
+            </a:r>
+            <a:endParaRPr lang="en-US" sz="950" dirty="0"/>
+          </a:p>
+        </p:txBody>
+      </p:sp>
+      <p:sp>
+        <p:nvSpPr>
+          <p:cNvPr id="104" name="Shape 102"/>
+          <p:cNvSpPr/>
+          <p:nvPr/>
+        </p:nvSpPr>
+        <p:spPr>
+          <a:xfrm>
+            <a:off x="8077200" y="2404872"/>
+            <a:ext cx="82296" cy="420624"/>
+          </a:xfrm>
+          <a:prstGeom prst="rect">
+            <a:avLst/>
+          </a:prstGeom>
+          <a:solidFill>
+            <a:srgbClr val="2E6DA4"/>
+          </a:solidFill>
+          <a:ln w="12700">
+            <a:solidFill>
+              <a:srgbClr val="2E6DA4"/>
+            </a:solidFill>
+            <a:prstDash val="solid"/>
+          </a:ln>
+        </p:spPr>
+      </p:sp>
+      <p:sp>
+        <p:nvSpPr>
+          <p:cNvPr id="105" name="Shape 103"/>
+          <p:cNvSpPr/>
+          <p:nvPr/>
+        </p:nvSpPr>
+        <p:spPr>
+          <a:xfrm>
+            <a:off x="8159496" y="2404872"/>
+            <a:ext cx="3435096" cy="420624"/>
+          </a:xfrm>
+          <a:prstGeom prst="roundRect">
+            <a:avLst>
+              <a:gd name="adj" fmla="val 8696"/>
+            </a:avLst>
+          </a:prstGeom>
+          <a:solidFill>
+            <a:srgbClr val="E8EFF6"/>
+          </a:solidFill>
+          <a:ln w="12700">
+            <a:solidFill>
+              <a:srgbClr val="E8EFF6"/>
+            </a:solidFill>
+            <a:prstDash val="solid"/>
+          </a:ln>
+        </p:spPr>
+      </p:sp>
+      <p:sp>
+        <p:nvSpPr>
+          <p:cNvPr id="106" name="Text 104"/>
+          <p:cNvSpPr txBox="1"/>
+          <p:nvPr/>
+        </p:nvSpPr>
+        <p:spPr>
+          <a:xfrm>
+            <a:off x="8223504" y="2404872"/>
+            <a:ext cx="310896" cy="420624"/>
+          </a:xfrm>
+          <a:prstGeom prst="rect">
+            <a:avLst/>
+          </a:prstGeom>
+          <a:noFill/>
+          <a:ln/>
+        </p:spPr>
+        <p:txBody>
+          <a:bodyPr wrap="square" lIns="0" tIns="0" rIns="0" bIns="0" rtlCol="0" anchor="ctr"/>
+          <a:lstStyle/>
+          <a:p>
+            <a:pPr indent="0" marL="0">
+              <a:buNone/>
+            </a:pPr>
+            <a:r>
+              <a:rPr lang="en-US" sz="1200" b="1" dirty="0">
+                <a:solidFill>
+                  <a:srgbClr val="C8952B"/>
+                </a:solidFill>
+                <a:latin typeface="Cambria" pitchFamily="34" charset="0"/>
+                <a:ea typeface="Cambria" pitchFamily="34" charset="-122"/>
+                <a:cs typeface="Cambria" pitchFamily="34" charset="-120"/>
+              </a:rPr>
+              <a:t>21</a:t>
+            </a:r>
+            <a:endParaRPr lang="en-US" sz="1200" dirty="0"/>
+          </a:p>
+        </p:txBody>
+      </p:sp>
+      <p:sp>
+        <p:nvSpPr>
+          <p:cNvPr id="107" name="Text 105"/>
+          <p:cNvSpPr txBox="1"/>
+          <p:nvPr/>
+        </p:nvSpPr>
+        <p:spPr>
+          <a:xfrm>
+            <a:off x="8570976" y="2404872"/>
+            <a:ext cx="2420112" cy="420624"/>
+          </a:xfrm>
+          <a:prstGeom prst="rect">
+            <a:avLst/>
+          </a:prstGeom>
+          <a:noFill/>
+          <a:ln/>
+        </p:spPr>
+        <p:txBody>
+          <a:bodyPr wrap="square" lIns="0" tIns="0" rIns="0" bIns="0" rtlCol="0" anchor="ctr"/>
+          <a:lstStyle/>
+          <a:p>
+            <a:pPr indent="0" marL="0">
+              <a:buNone/>
+            </a:pPr>
+            <a:r>
+              <a:rPr lang="en-US" sz="950" dirty="0">
+                <a:solidFill>
+                  <a:srgbClr val="9A6410"/>
+                </a:solidFill>
+                <a:latin typeface="Calibri" pitchFamily="34" charset="0"/>
+                <a:ea typeface="Calibri" pitchFamily="34" charset="-122"/>
+                <a:cs typeface="Calibri" pitchFamily="34" charset="-120"/>
+              </a:rPr>
+              <a:t>⧗ Certificate authority integration</a:t>
+            </a:r>
+            <a:endParaRPr lang="en-US" sz="950" dirty="0"/>
+          </a:p>
+        </p:txBody>
+      </p:sp>
+      <p:sp>
+        <p:nvSpPr>
+          <p:cNvPr id="108" name="Text 106"/>
+          <p:cNvSpPr txBox="1"/>
+          <p:nvPr/>
+        </p:nvSpPr>
+        <p:spPr>
+          <a:xfrm>
+            <a:off x="11027664" y="2404872"/>
+            <a:ext cx="420624" cy="420624"/>
+          </a:xfrm>
+          <a:prstGeom prst="rect">
+            <a:avLst/>
+          </a:prstGeom>
+          <a:noFill/>
+          <a:ln/>
+        </p:spPr>
+        <p:txBody>
+          <a:bodyPr wrap="square" lIns="0" tIns="0" rIns="0" bIns="0" rtlCol="0" anchor="ctr"/>
+          <a:lstStyle/>
+          <a:p>
+            <a:pPr algn="r" indent="0" marL="0">
+              <a:buNone/>
+            </a:pPr>
+            <a:r>
+              <a:rPr lang="en-US" sz="950" b="1" dirty="0">
+                <a:solidFill>
+                  <a:srgbClr val="1F7A43"/>
+                </a:solidFill>
+                <a:latin typeface="Calibri" pitchFamily="34" charset="0"/>
+                <a:ea typeface="Calibri" pitchFamily="34" charset="-122"/>
+                <a:cs typeface="Calibri" pitchFamily="34" charset="-120"/>
+              </a:rPr>
+              <a:t>+1</a:t>
+            </a:r>
+            <a:endParaRPr lang="en-US" sz="950" dirty="0"/>
+          </a:p>
+        </p:txBody>
+      </p:sp>
+      <p:sp>
+        <p:nvSpPr>
+          <p:cNvPr id="109" name="Shape 107"/>
+          <p:cNvSpPr/>
+          <p:nvPr/>
+        </p:nvSpPr>
+        <p:spPr>
+          <a:xfrm>
+            <a:off x="8077200" y="2884932"/>
+            <a:ext cx="82296" cy="420624"/>
+          </a:xfrm>
+          <a:prstGeom prst="rect">
+            <a:avLst/>
+          </a:prstGeom>
+          <a:solidFill>
+            <a:srgbClr val="2E6DA4"/>
+          </a:solidFill>
+          <a:ln w="12700">
+            <a:solidFill>
+              <a:srgbClr val="2E6DA4"/>
+            </a:solidFill>
+            <a:prstDash val="solid"/>
+          </a:ln>
+        </p:spPr>
+      </p:sp>
+      <p:sp>
+        <p:nvSpPr>
+          <p:cNvPr id="110" name="Shape 108"/>
+          <p:cNvSpPr/>
+          <p:nvPr/>
+        </p:nvSpPr>
+        <p:spPr>
+          <a:xfrm>
+            <a:off x="8159496" y="2884932"/>
+            <a:ext cx="3435096" cy="420624"/>
+          </a:xfrm>
+          <a:prstGeom prst="roundRect">
+            <a:avLst>
+              <a:gd name="adj" fmla="val 8696"/>
+            </a:avLst>
+          </a:prstGeom>
+          <a:solidFill>
+            <a:srgbClr val="E8EFF6"/>
+          </a:solidFill>
+          <a:ln w="12700">
+            <a:solidFill>
+              <a:srgbClr val="E8EFF6"/>
+            </a:solidFill>
+            <a:prstDash val="solid"/>
+          </a:ln>
+        </p:spPr>
+      </p:sp>
+      <p:sp>
+        <p:nvSpPr>
+          <p:cNvPr id="111" name="Text 109"/>
+          <p:cNvSpPr txBox="1"/>
+          <p:nvPr/>
+        </p:nvSpPr>
+        <p:spPr>
+          <a:xfrm>
+            <a:off x="8223504" y="2884932"/>
+            <a:ext cx="310896" cy="420624"/>
+          </a:xfrm>
+          <a:prstGeom prst="rect">
+            <a:avLst/>
+          </a:prstGeom>
+          <a:noFill/>
+          <a:ln/>
+        </p:spPr>
+        <p:txBody>
+          <a:bodyPr wrap="square" lIns="0" tIns="0" rIns="0" bIns="0" rtlCol="0" anchor="ctr"/>
+          <a:lstStyle/>
+          <a:p>
+            <a:pPr indent="0" marL="0">
+              <a:buNone/>
+            </a:pPr>
+            <a:r>
+              <a:rPr lang="en-US" sz="1200" b="1" dirty="0">
+                <a:solidFill>
+                  <a:srgbClr val="C8952B"/>
+                </a:solidFill>
+                <a:latin typeface="Cambria" pitchFamily="34" charset="0"/>
+                <a:ea typeface="Cambria" pitchFamily="34" charset="-122"/>
+                <a:cs typeface="Cambria" pitchFamily="34" charset="-120"/>
+              </a:rPr>
+              <a:t>22</a:t>
+            </a:r>
+            <a:endParaRPr lang="en-US" sz="1200" dirty="0"/>
+          </a:p>
+        </p:txBody>
+      </p:sp>
+      <p:sp>
+        <p:nvSpPr>
+          <p:cNvPr id="112" name="Text 110"/>
+          <p:cNvSpPr txBox="1"/>
+          <p:nvPr/>
+        </p:nvSpPr>
+        <p:spPr>
+          <a:xfrm>
+            <a:off x="8570976" y="2884932"/>
+            <a:ext cx="2420112" cy="420624"/>
+          </a:xfrm>
+          <a:prstGeom prst="rect">
+            <a:avLst/>
+          </a:prstGeom>
+          <a:noFill/>
+          <a:ln/>
+        </p:spPr>
+        <p:txBody>
+          <a:bodyPr wrap="square" lIns="0" tIns="0" rIns="0" bIns="0" rtlCol="0" anchor="ctr"/>
+          <a:lstStyle/>
+          <a:p>
+            <a:pPr indent="0" marL="0">
+              <a:buNone/>
+            </a:pPr>
+            <a:r>
+              <a:rPr lang="en-US" sz="950" dirty="0">
+                <a:solidFill>
+                  <a:srgbClr val="9A6410"/>
+                </a:solidFill>
+                <a:latin typeface="Calibri" pitchFamily="34" charset="0"/>
+                <a:ea typeface="Calibri" pitchFamily="34" charset="-122"/>
+                <a:cs typeface="Calibri" pitchFamily="34" charset="-120"/>
+              </a:rPr>
+              <a:t>⧗ Secrets manager integration</a:t>
+            </a:r>
+            <a:endParaRPr lang="en-US" sz="950" dirty="0"/>
+          </a:p>
+        </p:txBody>
+      </p:sp>
+      <p:sp>
+        <p:nvSpPr>
+          <p:cNvPr id="113" name="Text 111"/>
+          <p:cNvSpPr txBox="1"/>
+          <p:nvPr/>
+        </p:nvSpPr>
+        <p:spPr>
+          <a:xfrm>
+            <a:off x="11027664" y="2884932"/>
+            <a:ext cx="420624" cy="420624"/>
+          </a:xfrm>
+          <a:prstGeom prst="rect">
+            <a:avLst/>
+          </a:prstGeom>
+          <a:noFill/>
+          <a:ln/>
+        </p:spPr>
+        <p:txBody>
+          <a:bodyPr wrap="square" lIns="0" tIns="0" rIns="0" bIns="0" rtlCol="0" anchor="ctr"/>
+          <a:lstStyle/>
+          <a:p>
+            <a:pPr algn="r" indent="0" marL="0">
+              <a:buNone/>
+            </a:pPr>
+            <a:r>
+              <a:rPr lang="en-US" sz="950" b="1" dirty="0">
+                <a:solidFill>
+                  <a:srgbClr val="1F7A43"/>
+                </a:solidFill>
+                <a:latin typeface="Calibri" pitchFamily="34" charset="0"/>
+                <a:ea typeface="Calibri" pitchFamily="34" charset="-122"/>
+                <a:cs typeface="Calibri" pitchFamily="34" charset="-120"/>
+              </a:rPr>
+              <a:t>+1</a:t>
+            </a:r>
+            <a:endParaRPr lang="en-US" sz="950" dirty="0"/>
+          </a:p>
+        </p:txBody>
+      </p:sp>
+      <p:sp>
+        <p:nvSpPr>
+          <p:cNvPr id="114" name="Shape 112"/>
+          <p:cNvSpPr/>
+          <p:nvPr/>
+        </p:nvSpPr>
+        <p:spPr>
+          <a:xfrm>
+            <a:off x="8077200" y="3364992"/>
+            <a:ext cx="82296" cy="420624"/>
+          </a:xfrm>
+          <a:prstGeom prst="rect">
+            <a:avLst/>
+          </a:prstGeom>
+          <a:solidFill>
+            <a:srgbClr val="5A7184"/>
+          </a:solidFill>
+          <a:ln w="12700">
+            <a:solidFill>
+              <a:srgbClr val="5A7184"/>
+            </a:solidFill>
+            <a:prstDash val="solid"/>
+          </a:ln>
+        </p:spPr>
+      </p:sp>
+      <p:sp>
+        <p:nvSpPr>
+          <p:cNvPr id="115" name="Shape 113"/>
+          <p:cNvSpPr/>
+          <p:nvPr/>
+        </p:nvSpPr>
+        <p:spPr>
+          <a:xfrm>
+            <a:off x="8159496" y="3364992"/>
+            <a:ext cx="3435096" cy="420624"/>
+          </a:xfrm>
+          <a:prstGeom prst="roundRect">
+            <a:avLst>
+              <a:gd name="adj" fmla="val 8696"/>
+            </a:avLst>
+          </a:prstGeom>
+          <a:solidFill>
+            <a:srgbClr val="E8EFF6"/>
+          </a:solidFill>
+          <a:ln w="12700">
+            <a:solidFill>
+              <a:srgbClr val="E8EFF6"/>
+            </a:solidFill>
+            <a:prstDash val="solid"/>
+          </a:ln>
+        </p:spPr>
+      </p:sp>
+      <p:sp>
+        <p:nvSpPr>
+          <p:cNvPr id="116" name="Text 114"/>
+          <p:cNvSpPr txBox="1"/>
+          <p:nvPr/>
+        </p:nvSpPr>
+        <p:spPr>
+          <a:xfrm>
+            <a:off x="8223504" y="3364992"/>
+            <a:ext cx="310896" cy="420624"/>
+          </a:xfrm>
+          <a:prstGeom prst="rect">
+            <a:avLst/>
+          </a:prstGeom>
+          <a:noFill/>
+          <a:ln/>
+        </p:spPr>
+        <p:txBody>
+          <a:bodyPr wrap="square" lIns="0" tIns="0" rIns="0" bIns="0" rtlCol="0" anchor="ctr"/>
+          <a:lstStyle/>
+          <a:p>
+            <a:pPr indent="0" marL="0">
+              <a:buNone/>
+            </a:pPr>
+            <a:r>
+              <a:rPr lang="en-US" sz="1200" b="1" dirty="0">
+                <a:solidFill>
+                  <a:srgbClr val="C8952B"/>
+                </a:solidFill>
+                <a:latin typeface="Cambria" pitchFamily="34" charset="0"/>
+                <a:ea typeface="Cambria" pitchFamily="34" charset="-122"/>
+                <a:cs typeface="Cambria" pitchFamily="34" charset="-120"/>
+              </a:rPr>
+              <a:t>23</a:t>
+            </a:r>
+            <a:endParaRPr lang="en-US" sz="1200" dirty="0"/>
+          </a:p>
+        </p:txBody>
+      </p:sp>
+      <p:sp>
+        <p:nvSpPr>
+          <p:cNvPr id="117" name="Text 115"/>
+          <p:cNvSpPr txBox="1"/>
+          <p:nvPr/>
+        </p:nvSpPr>
+        <p:spPr>
+          <a:xfrm>
+            <a:off x="8570976" y="3364992"/>
+            <a:ext cx="2420112" cy="420624"/>
+          </a:xfrm>
+          <a:prstGeom prst="rect">
+            <a:avLst/>
+          </a:prstGeom>
+          <a:noFill/>
+          <a:ln/>
+        </p:spPr>
+        <p:txBody>
+          <a:bodyPr wrap="square" lIns="0" tIns="0" rIns="0" bIns="0" rtlCol="0" anchor="ctr"/>
+          <a:lstStyle/>
+          <a:p>
+            <a:pPr indent="0" marL="0">
+              <a:buNone/>
+            </a:pPr>
+            <a:r>
+              <a:rPr lang="en-US" sz="950" dirty="0">
+                <a:solidFill>
+                  <a:srgbClr val="1A3A5C"/>
+                </a:solidFill>
+                <a:latin typeface="Calibri" pitchFamily="34" charset="0"/>
+                <a:ea typeface="Calibri" pitchFamily="34" charset="-122"/>
+                <a:cs typeface="Calibri" pitchFamily="34" charset="-120"/>
+              </a:rPr>
+              <a:t>KMIP 3.0</a:t>
+            </a:r>
+            <a:endParaRPr lang="en-US" sz="950" dirty="0"/>
+          </a:p>
+        </p:txBody>
+      </p:sp>
+      <p:sp>
+        <p:nvSpPr>
+          <p:cNvPr id="118" name="Text 116"/>
+          <p:cNvSpPr txBox="1"/>
+          <p:nvPr/>
+        </p:nvSpPr>
+        <p:spPr>
+          <a:xfrm>
+            <a:off x="11027664" y="3364992"/>
+            <a:ext cx="420624" cy="420624"/>
+          </a:xfrm>
+          <a:prstGeom prst="rect">
+            <a:avLst/>
+          </a:prstGeom>
+          <a:noFill/>
+          <a:ln/>
+        </p:spPr>
+        <p:txBody>
+          <a:bodyPr wrap="square" lIns="0" tIns="0" rIns="0" bIns="0" rtlCol="0" anchor="ctr"/>
+          <a:lstStyle/>
+          <a:p>
+            <a:pPr algn="r" indent="0" marL="0">
+              <a:buNone/>
+            </a:pPr>
+            <a:r>
+              <a:rPr lang="en-US" sz="950" b="1" dirty="0">
+                <a:solidFill>
+                  <a:srgbClr val="1F7A43"/>
+                </a:solidFill>
+                <a:latin typeface="Calibri" pitchFamily="34" charset="0"/>
+                <a:ea typeface="Calibri" pitchFamily="34" charset="-122"/>
+                <a:cs typeface="Calibri" pitchFamily="34" charset="-120"/>
+              </a:rPr>
+              <a:t>+1</a:t>
+            </a:r>
+            <a:endParaRPr lang="en-US" sz="950" dirty="0"/>
+          </a:p>
+        </p:txBody>
+      </p:sp>
+      <p:sp>
+        <p:nvSpPr>
+          <p:cNvPr id="119" name="Shape 117"/>
+          <p:cNvSpPr/>
+          <p:nvPr/>
+        </p:nvSpPr>
+        <p:spPr>
+          <a:xfrm>
+            <a:off x="8077200" y="3845052"/>
+            <a:ext cx="82296" cy="420624"/>
+          </a:xfrm>
+          <a:prstGeom prst="rect">
+            <a:avLst/>
+          </a:prstGeom>
+          <a:solidFill>
+            <a:srgbClr val="5A7184"/>
+          </a:solidFill>
+          <a:ln w="12700">
+            <a:solidFill>
+              <a:srgbClr val="5A7184"/>
+            </a:solidFill>
+            <a:prstDash val="solid"/>
+          </a:ln>
+        </p:spPr>
+      </p:sp>
+      <p:sp>
+        <p:nvSpPr>
+          <p:cNvPr id="120" name="Shape 118"/>
+          <p:cNvSpPr/>
+          <p:nvPr/>
+        </p:nvSpPr>
+        <p:spPr>
+          <a:xfrm>
+            <a:off x="8159496" y="3845052"/>
+            <a:ext cx="3435096" cy="420624"/>
+          </a:xfrm>
+          <a:prstGeom prst="roundRect">
+            <a:avLst>
+              <a:gd name="adj" fmla="val 8696"/>
+            </a:avLst>
+          </a:prstGeom>
+          <a:solidFill>
+            <a:srgbClr val="E8EFF6"/>
+          </a:solidFill>
+          <a:ln w="12700">
+            <a:solidFill>
+              <a:srgbClr val="E8EFF6"/>
+            </a:solidFill>
+            <a:prstDash val="solid"/>
+          </a:ln>
+        </p:spPr>
+      </p:sp>
+      <p:sp>
+        <p:nvSpPr>
+          <p:cNvPr id="121" name="Text 119"/>
+          <p:cNvSpPr txBox="1"/>
+          <p:nvPr/>
+        </p:nvSpPr>
+        <p:spPr>
+          <a:xfrm>
+            <a:off x="8223504" y="3845052"/>
+            <a:ext cx="310896" cy="420624"/>
+          </a:xfrm>
+          <a:prstGeom prst="rect">
+            <a:avLst/>
+          </a:prstGeom>
+          <a:noFill/>
+          <a:ln/>
+        </p:spPr>
+        <p:txBody>
+          <a:bodyPr wrap="square" lIns="0" tIns="0" rIns="0" bIns="0" rtlCol="0" anchor="ctr"/>
+          <a:lstStyle/>
+          <a:p>
+            <a:pPr indent="0" marL="0">
+              <a:buNone/>
+            </a:pPr>
+            <a:r>
+              <a:rPr lang="en-US" sz="1200" b="1" dirty="0">
+                <a:solidFill>
+                  <a:srgbClr val="C8952B"/>
+                </a:solidFill>
+                <a:latin typeface="Cambria" pitchFamily="34" charset="0"/>
+                <a:ea typeface="Cambria" pitchFamily="34" charset="-122"/>
+                <a:cs typeface="Cambria" pitchFamily="34" charset="-120"/>
+              </a:rPr>
+              <a:t>24</a:t>
+            </a:r>
+            <a:endParaRPr lang="en-US" sz="1200" dirty="0"/>
+          </a:p>
+        </p:txBody>
+      </p:sp>
+      <p:sp>
+        <p:nvSpPr>
+          <p:cNvPr id="122" name="Text 120"/>
+          <p:cNvSpPr txBox="1"/>
+          <p:nvPr/>
+        </p:nvSpPr>
+        <p:spPr>
+          <a:xfrm>
+            <a:off x="8570976" y="3845052"/>
+            <a:ext cx="2420112" cy="420624"/>
+          </a:xfrm>
+          <a:prstGeom prst="rect">
+            <a:avLst/>
+          </a:prstGeom>
+          <a:noFill/>
+          <a:ln/>
+        </p:spPr>
+        <p:txBody>
+          <a:bodyPr wrap="square" lIns="0" tIns="0" rIns="0" bIns="0" rtlCol="0" anchor="ctr"/>
+          <a:lstStyle/>
+          <a:p>
+            <a:pPr indent="0" marL="0">
+              <a:buNone/>
+            </a:pPr>
+            <a:r>
+              <a:rPr lang="en-US" sz="950" dirty="0">
+                <a:solidFill>
+                  <a:srgbClr val="9A6410"/>
+                </a:solidFill>
+                <a:latin typeface="Calibri" pitchFamily="34" charset="0"/>
+                <a:ea typeface="Calibri" pitchFamily="34" charset="-122"/>
+                <a:cs typeface="Calibri" pitchFamily="34" charset="-120"/>
+              </a:rPr>
+              <a:t>⧗ Post-quantum and full algorithm breadth</a:t>
+            </a:r>
+            <a:endParaRPr lang="en-US" sz="950" dirty="0"/>
+          </a:p>
+        </p:txBody>
+      </p:sp>
+      <p:sp>
+        <p:nvSpPr>
+          <p:cNvPr id="123" name="Text 121"/>
+          <p:cNvSpPr txBox="1"/>
+          <p:nvPr/>
+        </p:nvSpPr>
+        <p:spPr>
+          <a:xfrm>
+            <a:off x="11027664" y="3845052"/>
+            <a:ext cx="420624" cy="420624"/>
+          </a:xfrm>
+          <a:prstGeom prst="rect">
+            <a:avLst/>
+          </a:prstGeom>
+          <a:noFill/>
+          <a:ln/>
+        </p:spPr>
+        <p:txBody>
+          <a:bodyPr wrap="square" lIns="0" tIns="0" rIns="0" bIns="0" rtlCol="0" anchor="ctr"/>
+          <a:lstStyle/>
+          <a:p>
+            <a:pPr algn="r" indent="0" marL="0">
+              <a:buNone/>
+            </a:pPr>
+            <a:r>
+              <a:rPr lang="en-US" sz="950" b="1" dirty="0">
+                <a:solidFill>
+                  <a:srgbClr val="1F7A43"/>
+                </a:solidFill>
+                <a:latin typeface="Calibri" pitchFamily="34" charset="0"/>
+                <a:ea typeface="Calibri" pitchFamily="34" charset="-122"/>
+                <a:cs typeface="Calibri" pitchFamily="34" charset="-120"/>
+              </a:rPr>
+              <a:t>+2</a:t>
+            </a:r>
+            <a:endParaRPr lang="en-US" sz="950" dirty="0"/>
+          </a:p>
+        </p:txBody>
+      </p:sp>
+      <p:sp>
+        <p:nvSpPr>
+          <p:cNvPr id="124" name="Shape 122"/>
+          <p:cNvSpPr/>
+          <p:nvPr/>
+        </p:nvSpPr>
+        <p:spPr>
+          <a:xfrm>
+            <a:off x="8077200" y="4325112"/>
+            <a:ext cx="82296" cy="420624"/>
+          </a:xfrm>
+          <a:prstGeom prst="rect">
+            <a:avLst/>
+          </a:prstGeom>
+          <a:solidFill>
+            <a:srgbClr val="6B8299"/>
+          </a:solidFill>
+          <a:ln w="12700">
+            <a:solidFill>
+              <a:srgbClr val="6B8299"/>
+            </a:solidFill>
+            <a:prstDash val="solid"/>
+          </a:ln>
+        </p:spPr>
+      </p:sp>
+      <p:sp>
+        <p:nvSpPr>
+          <p:cNvPr id="125" name="Shape 123"/>
+          <p:cNvSpPr/>
+          <p:nvPr/>
+        </p:nvSpPr>
+        <p:spPr>
+          <a:xfrm>
+            <a:off x="8159496" y="4325112"/>
+            <a:ext cx="3435096" cy="420624"/>
+          </a:xfrm>
+          <a:prstGeom prst="roundRect">
+            <a:avLst>
+              <a:gd name="adj" fmla="val 8696"/>
+            </a:avLst>
+          </a:prstGeom>
+          <a:solidFill>
+            <a:srgbClr val="E8EFF6"/>
+          </a:solidFill>
+          <a:ln w="12700">
+            <a:solidFill>
+              <a:srgbClr val="E8EFF6"/>
+            </a:solidFill>
+            <a:prstDash val="solid"/>
+          </a:ln>
+        </p:spPr>
+      </p:sp>
+      <p:sp>
+        <p:nvSpPr>
+          <p:cNvPr id="126" name="Text 124"/>
+          <p:cNvSpPr txBox="1"/>
+          <p:nvPr/>
+        </p:nvSpPr>
+        <p:spPr>
+          <a:xfrm>
+            <a:off x="8223504" y="4325112"/>
+            <a:ext cx="310896" cy="420624"/>
+          </a:xfrm>
+          <a:prstGeom prst="rect">
+            <a:avLst/>
+          </a:prstGeom>
+          <a:noFill/>
+          <a:ln/>
+        </p:spPr>
+        <p:txBody>
+          <a:bodyPr wrap="square" lIns="0" tIns="0" rIns="0" bIns="0" rtlCol="0" anchor="ctr"/>
+          <a:lstStyle/>
+          <a:p>
+            <a:pPr indent="0" marL="0">
+              <a:buNone/>
+            </a:pPr>
+            <a:r>
+              <a:rPr lang="en-US" sz="1200" b="1" dirty="0">
+                <a:solidFill>
+                  <a:srgbClr val="C8952B"/>
+                </a:solidFill>
+                <a:latin typeface="Cambria" pitchFamily="34" charset="0"/>
+                <a:ea typeface="Cambria" pitchFamily="34" charset="-122"/>
+                <a:cs typeface="Cambria" pitchFamily="34" charset="-120"/>
+              </a:rPr>
+              <a:t>25</a:t>
+            </a:r>
+            <a:endParaRPr lang="en-US" sz="1200" dirty="0"/>
+          </a:p>
+        </p:txBody>
+      </p:sp>
+      <p:sp>
+        <p:nvSpPr>
+          <p:cNvPr id="127" name="Text 125"/>
+          <p:cNvSpPr txBox="1"/>
+          <p:nvPr/>
+        </p:nvSpPr>
+        <p:spPr>
+          <a:xfrm>
+            <a:off x="8570976" y="4325112"/>
+            <a:ext cx="2420112" cy="420624"/>
+          </a:xfrm>
+          <a:prstGeom prst="rect">
+            <a:avLst/>
+          </a:prstGeom>
+          <a:noFill/>
+          <a:ln/>
+        </p:spPr>
+        <p:txBody>
+          <a:bodyPr wrap="square" lIns="0" tIns="0" rIns="0" bIns="0" rtlCol="0" anchor="ctr"/>
+          <a:lstStyle/>
+          <a:p>
+            <a:pPr indent="0" marL="0">
+              <a:buNone/>
+            </a:pPr>
+            <a:r>
+              <a:rPr lang="en-US" sz="950" dirty="0">
+                <a:solidFill>
+                  <a:srgbClr val="9A6410"/>
+                </a:solidFill>
+                <a:latin typeface="Calibri" pitchFamily="34" charset="0"/>
+                <a:ea typeface="Calibri" pitchFamily="34" charset="-122"/>
+                <a:cs typeface="Calibri" pitchFamily="34" charset="-120"/>
+              </a:rPr>
+              <a:t>⧗ Validated hardware migration</a:t>
+            </a:r>
+            <a:endParaRPr lang="en-US" sz="950" dirty="0"/>
+          </a:p>
+        </p:txBody>
+      </p:sp>
+      <p:sp>
+        <p:nvSpPr>
+          <p:cNvPr id="128" name="Text 126"/>
+          <p:cNvSpPr txBox="1"/>
+          <p:nvPr/>
+        </p:nvSpPr>
+        <p:spPr>
+          <a:xfrm>
+            <a:off x="11027664" y="4325112"/>
+            <a:ext cx="420624" cy="420624"/>
+          </a:xfrm>
+          <a:prstGeom prst="rect">
+            <a:avLst/>
+          </a:prstGeom>
+          <a:noFill/>
+          <a:ln/>
+        </p:spPr>
+        <p:txBody>
+          <a:bodyPr wrap="square" lIns="0" tIns="0" rIns="0" bIns="0" rtlCol="0" anchor="ctr"/>
+          <a:lstStyle/>
+          <a:p>
+            <a:pPr algn="r" indent="0" marL="0">
+              <a:buNone/>
+            </a:pPr>
+            <a:r>
+              <a:rPr lang="en-US" sz="950" b="1" dirty="0">
+                <a:solidFill>
+                  <a:srgbClr val="1F7A43"/>
+                </a:solidFill>
+                <a:latin typeface="Calibri" pitchFamily="34" charset="0"/>
+                <a:ea typeface="Calibri" pitchFamily="34" charset="-122"/>
+                <a:cs typeface="Calibri" pitchFamily="34" charset="-120"/>
+              </a:rPr>
+              <a:t>+3</a:t>
+            </a:r>
+            <a:endParaRPr lang="en-US" sz="950" dirty="0"/>
+          </a:p>
+        </p:txBody>
+      </p:sp>
+      <p:sp>
+        <p:nvSpPr>
+          <p:cNvPr id="129" name="Shape 127"/>
+          <p:cNvSpPr/>
+          <p:nvPr/>
+        </p:nvSpPr>
+        <p:spPr>
+          <a:xfrm>
+            <a:off x="8077200" y="4805172"/>
+            <a:ext cx="82296" cy="420624"/>
+          </a:xfrm>
+          <a:prstGeom prst="rect">
+            <a:avLst/>
+          </a:prstGeom>
+          <a:solidFill>
+            <a:srgbClr val="6B8299"/>
+          </a:solidFill>
+          <a:ln w="12700">
+            <a:solidFill>
+              <a:srgbClr val="6B8299"/>
+            </a:solidFill>
+            <a:prstDash val="solid"/>
+          </a:ln>
+        </p:spPr>
+      </p:sp>
+      <p:sp>
+        <p:nvSpPr>
+          <p:cNvPr id="130" name="Shape 128"/>
+          <p:cNvSpPr/>
+          <p:nvPr/>
+        </p:nvSpPr>
+        <p:spPr>
+          <a:xfrm>
+            <a:off x="8159496" y="4805172"/>
+            <a:ext cx="3435096" cy="420624"/>
+          </a:xfrm>
+          <a:prstGeom prst="roundRect">
+            <a:avLst>
+              <a:gd name="adj" fmla="val 8696"/>
+            </a:avLst>
+          </a:prstGeom>
+          <a:solidFill>
+            <a:srgbClr val="E8EFF6"/>
+          </a:solidFill>
+          <a:ln w="12700">
+            <a:solidFill>
+              <a:srgbClr val="E8EFF6"/>
+            </a:solidFill>
+            <a:prstDash val="solid"/>
+          </a:ln>
+        </p:spPr>
+      </p:sp>
+      <p:sp>
+        <p:nvSpPr>
+          <p:cNvPr id="131" name="Text 129"/>
+          <p:cNvSpPr txBox="1"/>
+          <p:nvPr/>
+        </p:nvSpPr>
+        <p:spPr>
+          <a:xfrm>
+            <a:off x="8223504" y="4805172"/>
+            <a:ext cx="310896" cy="420624"/>
+          </a:xfrm>
+          <a:prstGeom prst="rect">
+            <a:avLst/>
+          </a:prstGeom>
+          <a:noFill/>
+          <a:ln/>
+        </p:spPr>
+        <p:txBody>
+          <a:bodyPr wrap="square" lIns="0" tIns="0" rIns="0" bIns="0" rtlCol="0" anchor="ctr"/>
+          <a:lstStyle/>
+          <a:p>
+            <a:pPr indent="0" marL="0">
+              <a:buNone/>
+            </a:pPr>
+            <a:r>
+              <a:rPr lang="en-US" sz="1200" b="1" dirty="0">
+                <a:solidFill>
+                  <a:srgbClr val="C8952B"/>
+                </a:solidFill>
+                <a:latin typeface="Cambria" pitchFamily="34" charset="0"/>
+                <a:ea typeface="Cambria" pitchFamily="34" charset="-122"/>
+                <a:cs typeface="Cambria" pitchFamily="34" charset="-120"/>
+              </a:rPr>
+              <a:t>26</a:t>
+            </a:r>
+            <a:endParaRPr lang="en-US" sz="1200" dirty="0"/>
+          </a:p>
+        </p:txBody>
+      </p:sp>
+      <p:sp>
+        <p:nvSpPr>
+          <p:cNvPr id="132" name="Text 130"/>
+          <p:cNvSpPr txBox="1"/>
+          <p:nvPr/>
+        </p:nvSpPr>
+        <p:spPr>
+          <a:xfrm>
+            <a:off x="8570976" y="4805172"/>
+            <a:ext cx="2420112" cy="420624"/>
+          </a:xfrm>
+          <a:prstGeom prst="rect">
+            <a:avLst/>
+          </a:prstGeom>
+          <a:noFill/>
+          <a:ln/>
+        </p:spPr>
+        <p:txBody>
+          <a:bodyPr wrap="square" lIns="0" tIns="0" rIns="0" bIns="0" rtlCol="0" anchor="ctr"/>
+          <a:lstStyle/>
+          <a:p>
+            <a:pPr indent="0" marL="0">
+              <a:buNone/>
+            </a:pPr>
+            <a:r>
+              <a:rPr lang="en-US" sz="950" dirty="0">
+                <a:solidFill>
+                  <a:srgbClr val="9A6410"/>
+                </a:solidFill>
+                <a:latin typeface="Calibri" pitchFamily="34" charset="0"/>
+                <a:ea typeface="Calibri" pitchFamily="34" charset="-122"/>
+                <a:cs typeface="Calibri" pitchFamily="34" charset="-120"/>
+              </a:rPr>
+              <a:t>⧗ Confidential computing deployment</a:t>
+            </a:r>
+            <a:endParaRPr lang="en-US" sz="950" dirty="0"/>
+          </a:p>
+        </p:txBody>
+      </p:sp>
+      <p:sp>
+        <p:nvSpPr>
+          <p:cNvPr id="133" name="Text 131"/>
+          <p:cNvSpPr txBox="1"/>
+          <p:nvPr/>
+        </p:nvSpPr>
+        <p:spPr>
+          <a:xfrm>
+            <a:off x="11027664" y="4805172"/>
+            <a:ext cx="420624" cy="420624"/>
+          </a:xfrm>
+          <a:prstGeom prst="rect">
+            <a:avLst/>
+          </a:prstGeom>
+          <a:noFill/>
+          <a:ln/>
+        </p:spPr>
+        <p:txBody>
+          <a:bodyPr wrap="square" lIns="0" tIns="0" rIns="0" bIns="0" rtlCol="0" anchor="ctr"/>
+          <a:lstStyle/>
+          <a:p>
+            <a:pPr algn="r" indent="0" marL="0">
+              <a:buNone/>
+            </a:pPr>
+            <a:r>
+              <a:rPr lang="en-US" sz="950" b="1" dirty="0">
+                <a:solidFill>
+                  <a:srgbClr val="1F7A43"/>
+                </a:solidFill>
+                <a:latin typeface="Calibri" pitchFamily="34" charset="0"/>
+                <a:ea typeface="Calibri" pitchFamily="34" charset="-122"/>
+                <a:cs typeface="Calibri" pitchFamily="34" charset="-120"/>
+              </a:rPr>
+              <a:t>+1</a:t>
+            </a:r>
+            <a:endParaRPr lang="en-US" sz="950" dirty="0"/>
+          </a:p>
+        </p:txBody>
+      </p:sp>
+      <p:sp>
+        <p:nvSpPr>
+          <p:cNvPr id="134" name="Text 132"/>
+          <p:cNvSpPr txBox="1"/>
+          <p:nvPr/>
+        </p:nvSpPr>
+        <p:spPr>
+          <a:xfrm>
+            <a:off x="566928" y="6135624"/>
+            <a:ext cx="11027664" cy="466344"/>
+          </a:xfrm>
+          <a:prstGeom prst="rect">
+            <a:avLst/>
+          </a:prstGeom>
+          <a:noFill/>
+          <a:ln/>
+        </p:spPr>
+        <p:txBody>
+          <a:bodyPr wrap="square" lIns="0" tIns="0" rIns="0" bIns="0" rtlCol="0" anchor="ctr"/>
+          <a:lstStyle/>
+          <a:p>
+            <a:pPr indent="0" marL="0">
+              <a:buNone/>
+            </a:pPr>
+            <a:r>
+              <a:rPr lang="en-US" sz="1000" i="1" dirty="0">
+                <a:solidFill>
+                  <a:srgbClr val="7B8794"/>
+                </a:solidFill>
+                <a:latin typeface="Calibri" pitchFamily="34" charset="0"/>
+                <a:ea typeface="Calibri" pitchFamily="34" charset="-122"/>
+                <a:cs typeface="Calibri" pitchFamily="34" charset="-120"/>
+              </a:rPr>
+              <a:t>A Foundation   ·   B The REST control plane   ·   C Enterprise fit   ·   D Scale, availability and tenancy   ·   E Protocol and estate reach   ·   F Cloud and application reach   ·   G Interoperability and adjacent products   ·   H Protocol 3.0 and post-quantum   ·   I Assurance on real hardware</a:t>
+            </a:r>
+            <a:endParaRPr lang="en-US" sz="1000" dirty="0"/>
+          </a:p>
+          <a:p>
+            <a:pPr indent="0" marL="0">
+              <a:buNone/>
+            </a:pPr>
+            <a:r>
+              <a:rPr lang="en-US" sz="1000" i="1" dirty="0">
+                <a:solidFill>
+                  <a:srgbClr val="7B8794"/>
+                </a:solidFill>
+                <a:latin typeface="Calibri" pitchFamily="34" charset="0"/>
+                <a:ea typeface="Calibri" pitchFamily="34" charset="-122"/>
+                <a:cs typeface="Calibri" pitchFamily="34" charset="-120"/>
+              </a:rPr>
+              <a:t>+n is the gap-matrix features that step closes.  ⧗ marks a step that cannot start until something outside this project happens.</a:t>
             </a:r>
             <a:endParaRPr lang="en-US" sz="1000" dirty="0"/>
           </a:p>
@@ -12468,7 +14903,7 @@
                 <a:ea typeface="Cambria" pitchFamily="34" charset="-122"/>
                 <a:cs typeface="Cambria" pitchFamily="34" charset="-120"/>
               </a:rPr>
-              <a:t>Stages C to E — and what stays out</a:t>
+              <a:t>What the plan waits on</a:t>
             </a:r>
             <a:endParaRPr lang="en-US" sz="3400" dirty="0"/>
           </a:p>
@@ -12482,8 +14917,8 @@
         </p:nvSpPr>
         <p:spPr>
           <a:xfrm>
-            <a:off x="566928" y="1572768"/>
-            <a:ext cx="658368" cy="658368"/>
+            <a:off x="566928" y="1481328"/>
+            <a:ext cx="493776" cy="493776"/>
           </a:xfrm>
           <a:prstGeom prst="roundRect">
             <a:avLst>
@@ -12509,8 +14944,8 @@
         </p:nvSpPr>
         <p:spPr>
           <a:xfrm>
-            <a:off x="566928" y="1572768"/>
-            <a:ext cx="658368" cy="658368"/>
+            <a:off x="566928" y="1481328"/>
+            <a:ext cx="493776" cy="493776"/>
           </a:xfrm>
           <a:prstGeom prst="rect">
             <a:avLst/>
@@ -12526,7 +14961,7 @@
               <a:buNone/>
             </a:pPr>
             <a:r>
-              <a:rPr lang="en-US" sz="2200" b="1" dirty="0">
+              <a:rPr lang="en-US" sz="1600" b="1" dirty="0">
                 <a:solidFill>
                   <a:srgbClr val="102437"/>
                 </a:solidFill>
@@ -12534,9 +14969,9 @@
                 <a:ea typeface="Cambria" pitchFamily="34" charset="-122"/>
                 <a:cs typeface="Cambria" pitchFamily="34" charset="-120"/>
               </a:rPr>
-              <a:t>C</a:t>
-            </a:r>
-            <a:endParaRPr lang="en-US" sz="2200" dirty="0"/>
+              <a:t>19</a:t>
+            </a:r>
+            <a:endParaRPr lang="en-US" sz="1600" dirty="0"/>
           </a:p>
         </p:txBody>
       </p:sp>
@@ -12548,24 +14983,24 @@
         </p:nvSpPr>
         <p:spPr>
           <a:xfrm>
-            <a:off x="1481328" y="1554480"/>
-            <a:ext cx="3840480" cy="713232"/>
-          </a:xfrm>
-          <a:prstGeom prst="rect">
-            <a:avLst/>
-          </a:prstGeom>
-          <a:noFill/>
-          <a:ln/>
-        </p:spPr>
-        <p:txBody>
-          <a:bodyPr wrap="square" lIns="0" tIns="0" rIns="0" bIns="0" rtlCol="0" anchor="ctr"/>
-          <a:lstStyle/>
-          <a:p>
-            <a:pPr indent="0" marL="0">
-              <a:buNone/>
-            </a:pPr>
-            <a:r>
-              <a:rPr lang="en-US" sz="1700" b="1" dirty="0">
+            <a:off x="1207008" y="1444752"/>
+            <a:ext cx="4754880" cy="256032"/>
+          </a:xfrm>
+          <a:prstGeom prst="rect">
+            <a:avLst/>
+          </a:prstGeom>
+          <a:noFill/>
+          <a:ln/>
+        </p:spPr>
+        <p:txBody>
+          <a:bodyPr wrap="square" lIns="0" tIns="0" rIns="0" bIns="0" rtlCol="0" anchor="ctr"/>
+          <a:lstStyle/>
+          <a:p>
+            <a:pPr indent="0" marL="0">
+              <a:buNone/>
+            </a:pPr>
+            <a:r>
+              <a:rPr lang="en-US" sz="1300" b="1" dirty="0">
                 <a:solidFill>
                   <a:srgbClr val="FFFFFF"/>
                 </a:solidFill>
@@ -12573,9 +15008,9 @@
                 <a:ea typeface="Cambria" pitchFamily="34" charset="-122"/>
                 <a:cs typeface="Cambria" pitchFamily="34" charset="-120"/>
               </a:rPr>
-              <a:t>Enterprise fit</a:t>
-            </a:r>
-            <a:endParaRPr lang="en-US" sz="1700" dirty="0"/>
+              <a:t>Vendor interoperability validation</a:t>
+            </a:r>
+            <a:endParaRPr lang="en-US" sz="1300" dirty="0"/>
           </a:p>
         </p:txBody>
       </p:sp>
@@ -12587,109 +15022,50 @@
         </p:nvSpPr>
         <p:spPr>
           <a:xfrm>
-            <a:off x="1481328" y="2231136"/>
-            <a:ext cx="3840480" cy="310896"/>
-          </a:xfrm>
-          <a:prstGeom prst="rect">
-            <a:avLst/>
-          </a:prstGeom>
-          <a:noFill/>
-          <a:ln/>
-        </p:spPr>
-        <p:txBody>
-          <a:bodyPr wrap="square" lIns="0" tIns="0" rIns="0" bIns="0" rtlCol="0" anchor="ctr"/>
-          <a:lstStyle/>
-          <a:p>
-            <a:pPr indent="0" marL="0">
-              <a:buNone/>
-            </a:pPr>
-            <a:r>
-              <a:rPr lang="en-US" sz="1050" i="1" dirty="0">
-                <a:solidFill>
-                  <a:srgbClr val="7B94AE"/>
+            <a:off x="1207008" y="1700784"/>
+            <a:ext cx="4754880" cy="530352"/>
+          </a:xfrm>
+          <a:prstGeom prst="rect">
+            <a:avLst/>
+          </a:prstGeom>
+          <a:noFill/>
+          <a:ln/>
+        </p:spPr>
+        <p:txBody>
+          <a:bodyPr wrap="square" lIns="0" tIns="0" rIns="0" bIns="0" rtlCol="0" anchor="ctr"/>
+          <a:lstStyle/>
+          <a:p>
+            <a:pPr indent="0" marL="0">
+              <a:lnSpc>
+                <a:spcPts val="1250"/>
+              </a:lnSpc>
+              <a:buNone/>
+            </a:pPr>
+            <a:r>
+              <a:rPr lang="en-US" sz="1000" dirty="0">
+                <a:solidFill>
+                  <a:srgbClr val="9DB8D4"/>
                 </a:solidFill>
                 <a:latin typeface="Calibri" pitchFamily="34" charset="0"/>
                 <a:ea typeface="Calibri" pitchFamily="34" charset="-122"/>
                 <a:cs typeface="Calibri" pitchFamily="34" charset="-120"/>
               </a:rPr>
-              <a:t>What an auditor and a security team ask for.</a:t>
-            </a:r>
-            <a:endParaRPr lang="en-US" sz="1050" dirty="0"/>
-          </a:p>
-        </p:txBody>
-      </p:sp>
-      <p:sp>
-        <p:nvSpPr>
-          <p:cNvPr id="8" name="Text 6"/>
-          <p:cNvSpPr txBox="1"/>
-          <p:nvPr/>
-        </p:nvSpPr>
-        <p:spPr>
-          <a:xfrm>
-            <a:off x="5413248" y="1554480"/>
-            <a:ext cx="6126480" cy="1060704"/>
-          </a:xfrm>
-          <a:prstGeom prst="rect">
-            <a:avLst/>
-          </a:prstGeom>
-          <a:noFill/>
-          <a:ln/>
-        </p:spPr>
-        <p:txBody>
-          <a:bodyPr wrap="square" lIns="0" tIns="0" rIns="0" bIns="0" rtlCol="0" anchor="ctr"/>
-          <a:lstStyle/>
-          <a:p>
-            <a:pPr indent="0" marL="0">
-              <a:lnSpc>
-                <a:spcPts val="1700"/>
-              </a:lnSpc>
-              <a:buNone/>
-            </a:pPr>
-            <a:r>
-              <a:rPr lang="en-US" sz="1200" dirty="0">
-                <a:solidFill>
-                  <a:srgbClr val="9DB8D4"/>
-                </a:solidFill>
-                <a:latin typeface="Calibri" pitchFamily="34" charset="0"/>
-                <a:ea typeface="Calibri" pitchFamily="34" charset="-122"/>
-                <a:cs typeface="Calibri" pitchFamily="34" charset="-120"/>
-              </a:rPr>
-              <a:t>8.  Enterprise identity and policy</a:t>
-            </a:r>
-            <a:endParaRPr lang="en-US" sz="1200" dirty="0"/>
-          </a:p>
-          <a:p>
-            <a:pPr indent="0" marL="0">
-              <a:lnSpc>
-                <a:spcPts val="1700"/>
-              </a:lnSpc>
-              <a:buNone/>
-            </a:pPr>
-            <a:r>
-              <a:rPr lang="en-US" sz="1200" dirty="0">
-                <a:solidFill>
-                  <a:srgbClr val="9DB8D4"/>
-                </a:solidFill>
-                <a:latin typeface="Calibri" pitchFamily="34" charset="0"/>
-                <a:ea typeface="Calibri" pitchFamily="34" charset="-122"/>
-                <a:cs typeface="Calibri" pitchFamily="34" charset="-120"/>
-              </a:rPr>
-              <a:t>9.  Audit externalisation, compliance and ceremony</a:t>
-            </a:r>
-            <a:endParaRPr lang="en-US" sz="1200" dirty="0"/>
-          </a:p>
-        </p:txBody>
-      </p:sp>
-      <p:sp>
-        <p:nvSpPr>
-          <p:cNvPr id="9" name="Shape 7"/>
+              <a:t>Licences for, or access to, the vendor products being validated.</a:t>
+            </a:r>
+            <a:endParaRPr lang="en-US" sz="1000" dirty="0"/>
+          </a:p>
+        </p:txBody>
+      </p:sp>
+      <p:sp>
+        <p:nvSpPr>
+          <p:cNvPr id="8" name="Shape 6"/>
           <p:cNvSpPr/>
           <p:nvPr/>
         </p:nvSpPr>
         <p:spPr>
           <a:xfrm>
-            <a:off x="566928" y="2798064"/>
-            <a:ext cx="658368" cy="658368"/>
+            <a:off x="566928" y="2286000"/>
+            <a:ext cx="493776" cy="493776"/>
           </a:xfrm>
           <a:prstGeom prst="roundRect">
             <a:avLst>
@@ -12709,14 +15085,14 @@
       </p:sp>
       <p:sp>
         <p:nvSpPr>
-          <p:cNvPr id="10" name="Text 8"/>
-          <p:cNvSpPr txBox="1"/>
-          <p:nvPr/>
-        </p:nvSpPr>
-        <p:spPr>
-          <a:xfrm>
-            <a:off x="566928" y="2798064"/>
-            <a:ext cx="658368" cy="658368"/>
+          <p:cNvPr id="9" name="Text 7"/>
+          <p:cNvSpPr txBox="1"/>
+          <p:nvPr/>
+        </p:nvSpPr>
+        <p:spPr>
+          <a:xfrm>
+            <a:off x="566928" y="2286000"/>
+            <a:ext cx="493776" cy="493776"/>
           </a:xfrm>
           <a:prstGeom prst="rect">
             <a:avLst/>
@@ -12732,7 +15108,7 @@
               <a:buNone/>
             </a:pPr>
             <a:r>
-              <a:rPr lang="en-US" sz="2200" b="1" dirty="0">
+              <a:rPr lang="en-US" sz="1600" b="1" dirty="0">
                 <a:solidFill>
                   <a:srgbClr val="102437"/>
                 </a:solidFill>
@@ -12740,38 +15116,38 @@
                 <a:ea typeface="Cambria" pitchFamily="34" charset="-122"/>
                 <a:cs typeface="Cambria" pitchFamily="34" charset="-120"/>
               </a:rPr>
-              <a:t>D</a:t>
-            </a:r>
-            <a:endParaRPr lang="en-US" sz="2200" dirty="0"/>
-          </a:p>
-        </p:txBody>
-      </p:sp>
-      <p:sp>
-        <p:nvSpPr>
-          <p:cNvPr id="11" name="Text 9"/>
-          <p:cNvSpPr txBox="1"/>
-          <p:nvPr/>
-        </p:nvSpPr>
-        <p:spPr>
-          <a:xfrm>
-            <a:off x="1481328" y="2779776"/>
-            <a:ext cx="3840480" cy="713232"/>
-          </a:xfrm>
-          <a:prstGeom prst="rect">
-            <a:avLst/>
-          </a:prstGeom>
-          <a:noFill/>
-          <a:ln/>
-        </p:spPr>
-        <p:txBody>
-          <a:bodyPr wrap="square" lIns="0" tIns="0" rIns="0" bIns="0" rtlCol="0" anchor="ctr"/>
-          <a:lstStyle/>
-          <a:p>
-            <a:pPr indent="0" marL="0">
-              <a:buNone/>
-            </a:pPr>
-            <a:r>
-              <a:rPr lang="en-US" sz="1700" b="1" dirty="0">
+              <a:t>20</a:t>
+            </a:r>
+            <a:endParaRPr lang="en-US" sz="1600" dirty="0"/>
+          </a:p>
+        </p:txBody>
+      </p:sp>
+      <p:sp>
+        <p:nvSpPr>
+          <p:cNvPr id="10" name="Text 8"/>
+          <p:cNvSpPr txBox="1"/>
+          <p:nvPr/>
+        </p:nvSpPr>
+        <p:spPr>
+          <a:xfrm>
+            <a:off x="1207008" y="2249424"/>
+            <a:ext cx="4754880" cy="256032"/>
+          </a:xfrm>
+          <a:prstGeom prst="rect">
+            <a:avLst/>
+          </a:prstGeom>
+          <a:noFill/>
+          <a:ln/>
+        </p:spPr>
+        <p:txBody>
+          <a:bodyPr wrap="square" lIns="0" tIns="0" rIns="0" bIns="0" rtlCol="0" anchor="ctr"/>
+          <a:lstStyle/>
+          <a:p>
+            <a:pPr indent="0" marL="0">
+              <a:buNone/>
+            </a:pPr>
+            <a:r>
+              <a:rPr lang="en-US" sz="1300" b="1" dirty="0">
                 <a:solidFill>
                   <a:srgbClr val="FFFFFF"/>
                 </a:solidFill>
@@ -12779,143 +15155,64 @@
                 <a:ea typeface="Cambria" pitchFamily="34" charset="-122"/>
                 <a:cs typeface="Cambria" pitchFamily="34" charset="-120"/>
               </a:rPr>
-              <a:t>Scale, availability and tenancy</a:t>
-            </a:r>
-            <a:endParaRPr lang="en-US" sz="1700" dirty="0"/>
-          </a:p>
-        </p:txBody>
-      </p:sp>
-      <p:sp>
-        <p:nvSpPr>
-          <p:cNvPr id="12" name="Text 10"/>
-          <p:cNvSpPr txBox="1"/>
-          <p:nvPr/>
-        </p:nvSpPr>
-        <p:spPr>
-          <a:xfrm>
-            <a:off x="1481328" y="3456432"/>
-            <a:ext cx="3840480" cy="310896"/>
-          </a:xfrm>
-          <a:prstGeom prst="rect">
-            <a:avLst/>
-          </a:prstGeom>
-          <a:noFill/>
-          <a:ln/>
-        </p:spPr>
-        <p:txBody>
-          <a:bodyPr wrap="square" lIns="0" tIns="0" rIns="0" bIns="0" rtlCol="0" anchor="ctr"/>
-          <a:lstStyle/>
-          <a:p>
-            <a:pPr indent="0" marL="0">
-              <a:buNone/>
-            </a:pPr>
-            <a:r>
-              <a:rPr lang="en-US" sz="1050" i="1" dirty="0">
-                <a:solidFill>
-                  <a:srgbClr val="7B94AE"/>
+              <a:t>OASIS interoperability certification</a:t>
+            </a:r>
+            <a:endParaRPr lang="en-US" sz="1300" dirty="0"/>
+          </a:p>
+        </p:txBody>
+      </p:sp>
+      <p:sp>
+        <p:nvSpPr>
+          <p:cNvPr id="11" name="Text 9"/>
+          <p:cNvSpPr txBox="1"/>
+          <p:nvPr/>
+        </p:nvSpPr>
+        <p:spPr>
+          <a:xfrm>
+            <a:off x="1207008" y="2505456"/>
+            <a:ext cx="4754880" cy="530352"/>
+          </a:xfrm>
+          <a:prstGeom prst="rect">
+            <a:avLst/>
+          </a:prstGeom>
+          <a:noFill/>
+          <a:ln/>
+        </p:spPr>
+        <p:txBody>
+          <a:bodyPr wrap="square" lIns="0" tIns="0" rIns="0" bIns="0" rtlCol="0" anchor="ctr"/>
+          <a:lstStyle/>
+          <a:p>
+            <a:pPr indent="0" marL="0">
+              <a:lnSpc>
+                <a:spcPts val="1250"/>
+              </a:lnSpc>
+              <a:buNone/>
+            </a:pPr>
+            <a:r>
+              <a:rPr lang="en-US" sz="1000" dirty="0">
+                <a:solidFill>
+                  <a:srgbClr val="9DB8D4"/>
                 </a:solidFill>
                 <a:latin typeface="Calibri" pitchFamily="34" charset="0"/>
                 <a:ea typeface="Calibri" pitchFamily="34" charset="-122"/>
                 <a:cs typeface="Calibri" pitchFamily="34" charset="-120"/>
               </a:rPr>
-              <a:t>Needs infrastructure to verify.</a:t>
-            </a:r>
-            <a:endParaRPr lang="en-US" sz="1050" dirty="0"/>
-          </a:p>
-        </p:txBody>
-      </p:sp>
-      <p:sp>
-        <p:nvSpPr>
-          <p:cNvPr id="13" name="Text 11"/>
-          <p:cNvSpPr txBox="1"/>
-          <p:nvPr/>
-        </p:nvSpPr>
-        <p:spPr>
-          <a:xfrm>
-            <a:off x="5413248" y="2779776"/>
-            <a:ext cx="6126480" cy="1060704"/>
-          </a:xfrm>
-          <a:prstGeom prst="rect">
-            <a:avLst/>
-          </a:prstGeom>
-          <a:noFill/>
-          <a:ln/>
-        </p:spPr>
-        <p:txBody>
-          <a:bodyPr wrap="square" lIns="0" tIns="0" rIns="0" bIns="0" rtlCol="0" anchor="ctr"/>
-          <a:lstStyle/>
-          <a:p>
-            <a:pPr indent="0" marL="0">
-              <a:lnSpc>
-                <a:spcPts val="1700"/>
-              </a:lnSpc>
-              <a:buNone/>
-            </a:pPr>
-            <a:r>
-              <a:rPr lang="en-US" sz="1200" dirty="0">
-                <a:solidFill>
-                  <a:srgbClr val="9DB8D4"/>
-                </a:solidFill>
-                <a:latin typeface="Calibri" pitchFamily="34" charset="0"/>
-                <a:ea typeface="Calibri" pitchFamily="34" charset="-122"/>
-                <a:cs typeface="Calibri" pitchFamily="34" charset="-120"/>
-              </a:rPr>
-              <a:t>10.  Storage abstraction and PostgreSQL</a:t>
-            </a:r>
-            <a:endParaRPr lang="en-US" sz="1200" dirty="0"/>
-          </a:p>
-          <a:p>
-            <a:pPr indent="0" marL="0">
-              <a:lnSpc>
-                <a:spcPts val="1700"/>
-              </a:lnSpc>
-              <a:buNone/>
-            </a:pPr>
-            <a:r>
-              <a:rPr lang="en-US" sz="1200" dirty="0">
-                <a:solidFill>
-                  <a:srgbClr val="9DB8D4"/>
-                </a:solidFill>
-                <a:latin typeface="Calibri" pitchFamily="34" charset="0"/>
-                <a:ea typeface="Calibri" pitchFamily="34" charset="-122"/>
-                <a:cs typeface="Calibri" pitchFamily="34" charset="-120"/>
-              </a:rPr>
-              <a:t>11.  High availability, failover and deployment</a:t>
-            </a:r>
-            <a:endParaRPr lang="en-US" sz="1200" dirty="0"/>
-          </a:p>
-          <a:p>
-            <a:pPr indent="0" marL="0">
-              <a:lnSpc>
-                <a:spcPts val="1700"/>
-              </a:lnSpc>
-              <a:buNone/>
-            </a:pPr>
-            <a:r>
-              <a:rPr lang="en-US" sz="1200" dirty="0">
-                <a:solidFill>
-                  <a:srgbClr val="9DB8D4"/>
-                </a:solidFill>
-                <a:latin typeface="Calibri" pitchFamily="34" charset="0"/>
-                <a:ea typeface="Calibri" pitchFamily="34" charset="-122"/>
-                <a:cs typeface="Calibri" pitchFamily="34" charset="-120"/>
-              </a:rPr>
-              <a:t>12.  Multi-tenancy</a:t>
-            </a:r>
-            <a:endParaRPr lang="en-US" sz="1200" dirty="0"/>
-          </a:p>
-        </p:txBody>
-      </p:sp>
-      <p:sp>
-        <p:nvSpPr>
-          <p:cNvPr id="14" name="Shape 12"/>
+              <a:t>An OASIS interoperability event, and other implementations to test against.</a:t>
+            </a:r>
+            <a:endParaRPr lang="en-US" sz="1000" dirty="0"/>
+          </a:p>
+        </p:txBody>
+      </p:sp>
+      <p:sp>
+        <p:nvSpPr>
+          <p:cNvPr id="12" name="Shape 10"/>
           <p:cNvSpPr/>
           <p:nvPr/>
         </p:nvSpPr>
         <p:spPr>
           <a:xfrm>
-            <a:off x="566928" y="4023360"/>
-            <a:ext cx="658368" cy="658368"/>
+            <a:off x="566928" y="3090672"/>
+            <a:ext cx="493776" cy="493776"/>
           </a:xfrm>
           <a:prstGeom prst="roundRect">
             <a:avLst>
@@ -12935,14 +15232,14 @@
       </p:sp>
       <p:sp>
         <p:nvSpPr>
-          <p:cNvPr id="15" name="Text 13"/>
-          <p:cNvSpPr txBox="1"/>
-          <p:nvPr/>
-        </p:nvSpPr>
-        <p:spPr>
-          <a:xfrm>
-            <a:off x="566928" y="4023360"/>
-            <a:ext cx="658368" cy="658368"/>
+          <p:cNvPr id="13" name="Text 11"/>
+          <p:cNvSpPr txBox="1"/>
+          <p:nvPr/>
+        </p:nvSpPr>
+        <p:spPr>
+          <a:xfrm>
+            <a:off x="566928" y="3090672"/>
+            <a:ext cx="493776" cy="493776"/>
           </a:xfrm>
           <a:prstGeom prst="rect">
             <a:avLst/>
@@ -12958,7 +15255,7 @@
               <a:buNone/>
             </a:pPr>
             <a:r>
-              <a:rPr lang="en-US" sz="2200" b="1" dirty="0">
+              <a:rPr lang="en-US" sz="1600" b="1" dirty="0">
                 <a:solidFill>
                   <a:srgbClr val="102437"/>
                 </a:solidFill>
@@ -12966,38 +15263,38 @@
                 <a:ea typeface="Cambria" pitchFamily="34" charset="-122"/>
                 <a:cs typeface="Cambria" pitchFamily="34" charset="-120"/>
               </a:rPr>
-              <a:t>E</a:t>
-            </a:r>
-            <a:endParaRPr lang="en-US" sz="2200" dirty="0"/>
-          </a:p>
-        </p:txBody>
-      </p:sp>
-      <p:sp>
-        <p:nvSpPr>
-          <p:cNvPr id="16" name="Text 14"/>
-          <p:cNvSpPr txBox="1"/>
-          <p:nvPr/>
-        </p:nvSpPr>
-        <p:spPr>
-          <a:xfrm>
-            <a:off x="1481328" y="4005072"/>
-            <a:ext cx="3840480" cy="713232"/>
-          </a:xfrm>
-          <a:prstGeom prst="rect">
-            <a:avLst/>
-          </a:prstGeom>
-          <a:noFill/>
-          <a:ln/>
-        </p:spPr>
-        <p:txBody>
-          <a:bodyPr wrap="square" lIns="0" tIns="0" rIns="0" bIns="0" rtlCol="0" anchor="ctr"/>
-          <a:lstStyle/>
-          <a:p>
-            <a:pPr indent="0" marL="0">
-              <a:buNone/>
-            </a:pPr>
-            <a:r>
-              <a:rPr lang="en-US" sz="1700" b="1" dirty="0">
+              <a:t>21</a:t>
+            </a:r>
+            <a:endParaRPr lang="en-US" sz="1600" dirty="0"/>
+          </a:p>
+        </p:txBody>
+      </p:sp>
+      <p:sp>
+        <p:nvSpPr>
+          <p:cNvPr id="14" name="Text 12"/>
+          <p:cNvSpPr txBox="1"/>
+          <p:nvPr/>
+        </p:nvSpPr>
+        <p:spPr>
+          <a:xfrm>
+            <a:off x="1207008" y="3054096"/>
+            <a:ext cx="4754880" cy="256032"/>
+          </a:xfrm>
+          <a:prstGeom prst="rect">
+            <a:avLst/>
+          </a:prstGeom>
+          <a:noFill/>
+          <a:ln/>
+        </p:spPr>
+        <p:txBody>
+          <a:bodyPr wrap="square" lIns="0" tIns="0" rIns="0" bIns="0" rtlCol="0" anchor="ctr"/>
+          <a:lstStyle/>
+          <a:p>
+            <a:pPr indent="0" marL="0">
+              <a:buNone/>
+            </a:pPr>
+            <a:r>
+              <a:rPr lang="en-US" sz="1300" b="1" dirty="0">
                 <a:solidFill>
                   <a:srgbClr val="FFFFFF"/>
                 </a:solidFill>
@@ -13005,48 +15302,117 @@
                 <a:ea typeface="Cambria" pitchFamily="34" charset="-122"/>
                 <a:cs typeface="Cambria" pitchFamily="34" charset="-120"/>
               </a:rPr>
-              <a:t>Protocol and estate reach</a:t>
-            </a:r>
-            <a:endParaRPr lang="en-US" sz="1700" dirty="0"/>
-          </a:p>
-        </p:txBody>
-      </p:sp>
-      <p:sp>
-        <p:nvSpPr>
-          <p:cNvPr id="17" name="Text 15"/>
-          <p:cNvSpPr txBox="1"/>
-          <p:nvPr/>
-        </p:nvSpPr>
-        <p:spPr>
-          <a:xfrm>
-            <a:off x="1481328" y="4681728"/>
-            <a:ext cx="3840480" cy="310896"/>
-          </a:xfrm>
-          <a:prstGeom prst="rect">
-            <a:avLst/>
-          </a:prstGeom>
-          <a:noFill/>
-          <a:ln/>
-        </p:spPr>
-        <p:txBody>
-          <a:bodyPr wrap="square" lIns="0" tIns="0" rIns="0" bIns="0" rtlCol="0" anchor="ctr"/>
-          <a:lstStyle/>
-          <a:p>
-            <a:pPr indent="0" marL="0">
-              <a:buNone/>
-            </a:pPr>
-            <a:r>
-              <a:rPr lang="en-US" sz="1050" i="1" dirty="0">
-                <a:solidFill>
-                  <a:srgbClr val="7B94AE"/>
+              <a:t>Certificate authority integration</a:t>
+            </a:r>
+            <a:endParaRPr lang="en-US" sz="1300" dirty="0"/>
+          </a:p>
+        </p:txBody>
+      </p:sp>
+      <p:sp>
+        <p:nvSpPr>
+          <p:cNvPr id="15" name="Text 13"/>
+          <p:cNvSpPr txBox="1"/>
+          <p:nvPr/>
+        </p:nvSpPr>
+        <p:spPr>
+          <a:xfrm>
+            <a:off x="1207008" y="3310128"/>
+            <a:ext cx="4754880" cy="530352"/>
+          </a:xfrm>
+          <a:prstGeom prst="rect">
+            <a:avLst/>
+          </a:prstGeom>
+          <a:noFill/>
+          <a:ln/>
+        </p:spPr>
+        <p:txBody>
+          <a:bodyPr wrap="square" lIns="0" tIns="0" rIns="0" bIns="0" rtlCol="0" anchor="ctr"/>
+          <a:lstStyle/>
+          <a:p>
+            <a:pPr indent="0" marL="0">
+              <a:lnSpc>
+                <a:spcPts val="1250"/>
+              </a:lnSpc>
+              <a:buNone/>
+            </a:pPr>
+            <a:r>
+              <a:rPr lang="en-US" sz="1000" dirty="0">
+                <a:solidFill>
+                  <a:srgbClr val="9DB8D4"/>
                 </a:solidFill>
                 <a:latin typeface="Calibri" pitchFamily="34" charset="0"/>
                 <a:ea typeface="Calibri" pitchFamily="34" charset="-122"/>
                 <a:cs typeface="Calibri" pitchFamily="34" charset="-120"/>
               </a:rPr>
-              <a:t>Additive, independent of D, verifiable here.</a:t>
-            </a:r>
-            <a:endParaRPr lang="en-US" sz="1050" dirty="0"/>
+              <a:t>A deployed certificate authority — EJBCA or equivalent.</a:t>
+            </a:r>
+            <a:endParaRPr lang="en-US" sz="1000" dirty="0"/>
+          </a:p>
+        </p:txBody>
+      </p:sp>
+      <p:sp>
+        <p:nvSpPr>
+          <p:cNvPr id="16" name="Shape 14"/>
+          <p:cNvSpPr/>
+          <p:nvPr/>
+        </p:nvSpPr>
+        <p:spPr>
+          <a:xfrm>
+            <a:off x="566928" y="3895344"/>
+            <a:ext cx="493776" cy="493776"/>
+          </a:xfrm>
+          <a:prstGeom prst="roundRect">
+            <a:avLst>
+              <a:gd name="adj" fmla="val 11111"/>
+            </a:avLst>
+          </a:prstGeom>
+          <a:solidFill>
+            <a:srgbClr val="C8952B"/>
+          </a:solidFill>
+          <a:ln w="12700">
+            <a:solidFill>
+              <a:srgbClr val="C8952B"/>
+            </a:solidFill>
+            <a:prstDash val="solid"/>
+          </a:ln>
+        </p:spPr>
+      </p:sp>
+      <p:sp>
+        <p:nvSpPr>
+          <p:cNvPr id="17" name="Text 15"/>
+          <p:cNvSpPr txBox="1"/>
+          <p:nvPr/>
+        </p:nvSpPr>
+        <p:spPr>
+          <a:xfrm>
+            <a:off x="566928" y="3895344"/>
+            <a:ext cx="493776" cy="493776"/>
+          </a:xfrm>
+          <a:prstGeom prst="rect">
+            <a:avLst/>
+          </a:prstGeom>
+          <a:noFill/>
+          <a:ln/>
+        </p:spPr>
+        <p:txBody>
+          <a:bodyPr wrap="square" lIns="0" tIns="0" rIns="0" bIns="0" rtlCol="0" anchor="ctr"/>
+          <a:lstStyle/>
+          <a:p>
+            <a:pPr algn="ctr" indent="0" marL="0">
+              <a:buNone/>
+            </a:pPr>
+            <a:r>
+              <a:rPr lang="en-US" sz="1600" b="1" dirty="0">
+                <a:solidFill>
+                  <a:srgbClr val="102437"/>
+                </a:solidFill>
+                <a:latin typeface="Cambria" pitchFamily="34" charset="0"/>
+                <a:ea typeface="Cambria" pitchFamily="34" charset="-122"/>
+                <a:cs typeface="Cambria" pitchFamily="34" charset="-120"/>
+              </a:rPr>
+              <a:t>22</a:t>
+            </a:r>
+            <a:endParaRPr lang="en-US" sz="1600" dirty="0"/>
           </a:p>
         </p:txBody>
       </p:sp>
@@ -13058,8 +15424,47 @@
         </p:nvSpPr>
         <p:spPr>
           <a:xfrm>
-            <a:off x="5413248" y="4005072"/>
-            <a:ext cx="6126480" cy="1060704"/>
+            <a:off x="1207008" y="3858768"/>
+            <a:ext cx="4754880" cy="256032"/>
+          </a:xfrm>
+          <a:prstGeom prst="rect">
+            <a:avLst/>
+          </a:prstGeom>
+          <a:noFill/>
+          <a:ln/>
+        </p:spPr>
+        <p:txBody>
+          <a:bodyPr wrap="square" lIns="0" tIns="0" rIns="0" bIns="0" rtlCol="0" anchor="ctr"/>
+          <a:lstStyle/>
+          <a:p>
+            <a:pPr indent="0" marL="0">
+              <a:buNone/>
+            </a:pPr>
+            <a:r>
+              <a:rPr lang="en-US" sz="1300" b="1" dirty="0">
+                <a:solidFill>
+                  <a:srgbClr val="FFFFFF"/>
+                </a:solidFill>
+                <a:latin typeface="Cambria" pitchFamily="34" charset="0"/>
+                <a:ea typeface="Cambria" pitchFamily="34" charset="-122"/>
+                <a:cs typeface="Cambria" pitchFamily="34" charset="-120"/>
+              </a:rPr>
+              <a:t>Secrets manager integration</a:t>
+            </a:r>
+            <a:endParaRPr lang="en-US" sz="1300" dirty="0"/>
+          </a:p>
+        </p:txBody>
+      </p:sp>
+      <p:sp>
+        <p:nvSpPr>
+          <p:cNvPr id="19" name="Text 17"/>
+          <p:cNvSpPr txBox="1"/>
+          <p:nvPr/>
+        </p:nvSpPr>
+        <p:spPr>
+          <a:xfrm>
+            <a:off x="1207008" y="4114800"/>
+            <a:ext cx="4754880" cy="530352"/>
           </a:xfrm>
           <a:prstGeom prst="rect">
             <a:avLst/>
@@ -13073,12 +15478,12 @@
           <a:p>
             <a:pPr indent="0" marL="0">
               <a:lnSpc>
-                <a:spcPts val="1700"/>
+                <a:spcPts val="1250"/>
               </a:lnSpc>
               <a:buNone/>
             </a:pPr>
             <a:r>
-              <a:rPr lang="en-US" sz="1200" dirty="0">
+              <a:rPr lang="en-US" sz="1000" dirty="0">
                 <a:solidFill>
                   <a:srgbClr val="9DB8D4"/>
                 </a:solidFill>
@@ -13086,19 +15491,146 @@
                 <a:ea typeface="Calibri" pitchFamily="34" charset="-122"/>
                 <a:cs typeface="Calibri" pitchFamily="34" charset="-120"/>
               </a:rPr>
-              <a:t>13.  KMIP JSON and XML encodings</a:t>
-            </a:r>
-            <a:endParaRPr lang="en-US" sz="1200" dirty="0"/>
-          </a:p>
+              <a:t>A deployed secrets manager to integrate with.</a:t>
+            </a:r>
+            <a:endParaRPr lang="en-US" sz="1000" dirty="0"/>
+          </a:p>
+        </p:txBody>
+      </p:sp>
+      <p:sp>
+        <p:nvSpPr>
+          <p:cNvPr id="20" name="Shape 18"/>
+          <p:cNvSpPr/>
+          <p:nvPr/>
+        </p:nvSpPr>
+        <p:spPr>
+          <a:xfrm>
+            <a:off x="6199632" y="1481328"/>
+            <a:ext cx="493776" cy="493776"/>
+          </a:xfrm>
+          <a:prstGeom prst="roundRect">
+            <a:avLst>
+              <a:gd name="adj" fmla="val 11111"/>
+            </a:avLst>
+          </a:prstGeom>
+          <a:solidFill>
+            <a:srgbClr val="C8952B"/>
+          </a:solidFill>
+          <a:ln w="12700">
+            <a:solidFill>
+              <a:srgbClr val="C8952B"/>
+            </a:solidFill>
+            <a:prstDash val="solid"/>
+          </a:ln>
+        </p:spPr>
+      </p:sp>
+      <p:sp>
+        <p:nvSpPr>
+          <p:cNvPr id="21" name="Text 19"/>
+          <p:cNvSpPr txBox="1"/>
+          <p:nvPr/>
+        </p:nvSpPr>
+        <p:spPr>
+          <a:xfrm>
+            <a:off x="6199632" y="1481328"/>
+            <a:ext cx="493776" cy="493776"/>
+          </a:xfrm>
+          <a:prstGeom prst="rect">
+            <a:avLst/>
+          </a:prstGeom>
+          <a:noFill/>
+          <a:ln/>
+        </p:spPr>
+        <p:txBody>
+          <a:bodyPr wrap="square" lIns="0" tIns="0" rIns="0" bIns="0" rtlCol="0" anchor="ctr"/>
+          <a:lstStyle/>
+          <a:p>
+            <a:pPr algn="ctr" indent="0" marL="0">
+              <a:buNone/>
+            </a:pPr>
+            <a:r>
+              <a:rPr lang="en-US" sz="1600" b="1" dirty="0">
+                <a:solidFill>
+                  <a:srgbClr val="102437"/>
+                </a:solidFill>
+                <a:latin typeface="Cambria" pitchFamily="34" charset="0"/>
+                <a:ea typeface="Cambria" pitchFamily="34" charset="-122"/>
+                <a:cs typeface="Cambria" pitchFamily="34" charset="-120"/>
+              </a:rPr>
+              <a:t>24</a:t>
+            </a:r>
+            <a:endParaRPr lang="en-US" sz="1600" dirty="0"/>
+          </a:p>
+        </p:txBody>
+      </p:sp>
+      <p:sp>
+        <p:nvSpPr>
+          <p:cNvPr id="22" name="Text 20"/>
+          <p:cNvSpPr txBox="1"/>
+          <p:nvPr/>
+        </p:nvSpPr>
+        <p:spPr>
+          <a:xfrm>
+            <a:off x="6839712" y="1444752"/>
+            <a:ext cx="4754880" cy="256032"/>
+          </a:xfrm>
+          <a:prstGeom prst="rect">
+            <a:avLst/>
+          </a:prstGeom>
+          <a:noFill/>
+          <a:ln/>
+        </p:spPr>
+        <p:txBody>
+          <a:bodyPr wrap="square" lIns="0" tIns="0" rIns="0" bIns="0" rtlCol="0" anchor="ctr"/>
+          <a:lstStyle/>
+          <a:p>
+            <a:pPr indent="0" marL="0">
+              <a:buNone/>
+            </a:pPr>
+            <a:r>
+              <a:rPr lang="en-US" sz="1300" b="1" dirty="0">
+                <a:solidFill>
+                  <a:srgbClr val="FFFFFF"/>
+                </a:solidFill>
+                <a:latin typeface="Cambria" pitchFamily="34" charset="0"/>
+                <a:ea typeface="Cambria" pitchFamily="34" charset="-122"/>
+                <a:cs typeface="Cambria" pitchFamily="34" charset="-120"/>
+              </a:rPr>
+              <a:t>Post-quantum and full algorithm breadth</a:t>
+            </a:r>
+            <a:endParaRPr lang="en-US" sz="1300" dirty="0"/>
+          </a:p>
+        </p:txBody>
+      </p:sp>
+      <p:sp>
+        <p:nvSpPr>
+          <p:cNvPr id="23" name="Text 21"/>
+          <p:cNvSpPr txBox="1"/>
+          <p:nvPr/>
+        </p:nvSpPr>
+        <p:spPr>
+          <a:xfrm>
+            <a:off x="6839712" y="1700784"/>
+            <a:ext cx="4754880" cy="530352"/>
+          </a:xfrm>
+          <a:prstGeom prst="rect">
+            <a:avLst/>
+          </a:prstGeom>
+          <a:noFill/>
+          <a:ln/>
+        </p:spPr>
+        <p:txBody>
+          <a:bodyPr wrap="square" lIns="0" tIns="0" rIns="0" bIns="0" rtlCol="0" anchor="ctr"/>
+          <a:lstStyle/>
           <a:p>
             <a:pPr indent="0" marL="0">
               <a:lnSpc>
-                <a:spcPts val="1700"/>
+                <a:spcPts val="1250"/>
               </a:lnSpc>
               <a:buNone/>
             </a:pPr>
             <a:r>
-              <a:rPr lang="en-US" sz="1200" dirty="0">
+              <a:rPr lang="en-US" sz="1000" dirty="0">
                 <a:solidFill>
                   <a:srgbClr val="9DB8D4"/>
                 </a:solidFill>
@@ -13106,81 +15638,293 @@
                 <a:ea typeface="Calibri" pitchFamily="34" charset="-122"/>
                 <a:cs typeface="Calibri" pitchFamily="34" charset="-120"/>
               </a:rPr>
-              <a:t>14.  Certificate discovery and expiry monitoring</a:t>
-            </a:r>
-            <a:endParaRPr lang="en-US" sz="1200" dirty="0"/>
-          </a:p>
-        </p:txBody>
-      </p:sp>
-      <p:sp>
-        <p:nvSpPr>
-          <p:cNvPr id="19" name="Text 17"/>
-          <p:cNvSpPr txBox="1"/>
-          <p:nvPr/>
-        </p:nvSpPr>
-        <p:spPr>
-          <a:xfrm>
-            <a:off x="566928" y="5285232"/>
-            <a:ext cx="5120640" cy="274320"/>
-          </a:xfrm>
-          <a:prstGeom prst="rect">
-            <a:avLst/>
-          </a:prstGeom>
-          <a:noFill/>
-          <a:ln/>
-        </p:spPr>
-        <p:txBody>
-          <a:bodyPr wrap="square" lIns="0" tIns="0" rIns="0" bIns="0" rtlCol="0" anchor="ctr"/>
-          <a:lstStyle/>
-          <a:p>
-            <a:pPr indent="0" marL="0">
-              <a:buNone/>
-            </a:pPr>
-            <a:r>
-              <a:rPr lang="en-US" sz="1050" b="1" spc="160" kern="0" dirty="0">
-                <a:solidFill>
-                  <a:srgbClr val="C8952B"/>
+              <a:t>A PKCS#11 token implementing ML-KEM, ML-DSA and SLH-DSA. SoftHSM's work on these is in the development tree, not in any release.</a:t>
+            </a:r>
+            <a:endParaRPr lang="en-US" sz="1000" dirty="0"/>
+          </a:p>
+        </p:txBody>
+      </p:sp>
+      <p:sp>
+        <p:nvSpPr>
+          <p:cNvPr id="24" name="Shape 22"/>
+          <p:cNvSpPr/>
+          <p:nvPr/>
+        </p:nvSpPr>
+        <p:spPr>
+          <a:xfrm>
+            <a:off x="6199632" y="2286000"/>
+            <a:ext cx="493776" cy="493776"/>
+          </a:xfrm>
+          <a:prstGeom prst="roundRect">
+            <a:avLst>
+              <a:gd name="adj" fmla="val 11111"/>
+            </a:avLst>
+          </a:prstGeom>
+          <a:solidFill>
+            <a:srgbClr val="C8952B"/>
+          </a:solidFill>
+          <a:ln w="12700">
+            <a:solidFill>
+              <a:srgbClr val="C8952B"/>
+            </a:solidFill>
+            <a:prstDash val="solid"/>
+          </a:ln>
+        </p:spPr>
+      </p:sp>
+      <p:sp>
+        <p:nvSpPr>
+          <p:cNvPr id="25" name="Text 23"/>
+          <p:cNvSpPr txBox="1"/>
+          <p:nvPr/>
+        </p:nvSpPr>
+        <p:spPr>
+          <a:xfrm>
+            <a:off x="6199632" y="2286000"/>
+            <a:ext cx="493776" cy="493776"/>
+          </a:xfrm>
+          <a:prstGeom prst="rect">
+            <a:avLst/>
+          </a:prstGeom>
+          <a:noFill/>
+          <a:ln/>
+        </p:spPr>
+        <p:txBody>
+          <a:bodyPr wrap="square" lIns="0" tIns="0" rIns="0" bIns="0" rtlCol="0" anchor="ctr"/>
+          <a:lstStyle/>
+          <a:p>
+            <a:pPr algn="ctr" indent="0" marL="0">
+              <a:buNone/>
+            </a:pPr>
+            <a:r>
+              <a:rPr lang="en-US" sz="1600" b="1" dirty="0">
+                <a:solidFill>
+                  <a:srgbClr val="102437"/>
+                </a:solidFill>
+                <a:latin typeface="Cambria" pitchFamily="34" charset="0"/>
+                <a:ea typeface="Cambria" pitchFamily="34" charset="-122"/>
+                <a:cs typeface="Cambria" pitchFamily="34" charset="-120"/>
+              </a:rPr>
+              <a:t>25</a:t>
+            </a:r>
+            <a:endParaRPr lang="en-US" sz="1600" dirty="0"/>
+          </a:p>
+        </p:txBody>
+      </p:sp>
+      <p:sp>
+        <p:nvSpPr>
+          <p:cNvPr id="26" name="Text 24"/>
+          <p:cNvSpPr txBox="1"/>
+          <p:nvPr/>
+        </p:nvSpPr>
+        <p:spPr>
+          <a:xfrm>
+            <a:off x="6839712" y="2249424"/>
+            <a:ext cx="4754880" cy="256032"/>
+          </a:xfrm>
+          <a:prstGeom prst="rect">
+            <a:avLst/>
+          </a:prstGeom>
+          <a:noFill/>
+          <a:ln/>
+        </p:spPr>
+        <p:txBody>
+          <a:bodyPr wrap="square" lIns="0" tIns="0" rIns="0" bIns="0" rtlCol="0" anchor="ctr"/>
+          <a:lstStyle/>
+          <a:p>
+            <a:pPr indent="0" marL="0">
+              <a:buNone/>
+            </a:pPr>
+            <a:r>
+              <a:rPr lang="en-US" sz="1300" b="1" dirty="0">
+                <a:solidFill>
+                  <a:srgbClr val="FFFFFF"/>
+                </a:solidFill>
+                <a:latin typeface="Cambria" pitchFamily="34" charset="0"/>
+                <a:ea typeface="Cambria" pitchFamily="34" charset="-122"/>
+                <a:cs typeface="Cambria" pitchFamily="34" charset="-120"/>
+              </a:rPr>
+              <a:t>Validated hardware migration</a:t>
+            </a:r>
+            <a:endParaRPr lang="en-US" sz="1300" dirty="0"/>
+          </a:p>
+        </p:txBody>
+      </p:sp>
+      <p:sp>
+        <p:nvSpPr>
+          <p:cNvPr id="27" name="Text 25"/>
+          <p:cNvSpPr txBox="1"/>
+          <p:nvPr/>
+        </p:nvSpPr>
+        <p:spPr>
+          <a:xfrm>
+            <a:off x="6839712" y="2505456"/>
+            <a:ext cx="4754880" cy="530352"/>
+          </a:xfrm>
+          <a:prstGeom prst="rect">
+            <a:avLst/>
+          </a:prstGeom>
+          <a:noFill/>
+          <a:ln/>
+        </p:spPr>
+        <p:txBody>
+          <a:bodyPr wrap="square" lIns="0" tIns="0" rIns="0" bIns="0" rtlCol="0" anchor="ctr"/>
+          <a:lstStyle/>
+          <a:p>
+            <a:pPr indent="0" marL="0">
+              <a:lnSpc>
+                <a:spcPts val="1250"/>
+              </a:lnSpc>
+              <a:buNone/>
+            </a:pPr>
+            <a:r>
+              <a:rPr lang="en-US" sz="1000" dirty="0">
+                <a:solidFill>
+                  <a:srgbClr val="9DB8D4"/>
                 </a:solidFill>
                 <a:latin typeface="Calibri" pitchFamily="34" charset="0"/>
                 <a:ea typeface="Calibri" pitchFamily="34" charset="-122"/>
                 <a:cs typeface="Calibri" pitchFamily="34" charset="-120"/>
               </a:rPr>
-              <a:t>Deliberately out of scope</a:t>
-            </a:r>
-            <a:endParaRPr lang="en-US" sz="1050" dirty="0"/>
-          </a:p>
-        </p:txBody>
-      </p:sp>
-      <p:sp>
-        <p:nvSpPr>
-          <p:cNvPr id="20" name="Text 18"/>
-          <p:cNvSpPr txBox="1"/>
-          <p:nvPr/>
-        </p:nvSpPr>
-        <p:spPr>
-          <a:xfrm>
-            <a:off x="566928" y="5541264"/>
-            <a:ext cx="5303520" cy="950976"/>
-          </a:xfrm>
-          <a:prstGeom prst="rect">
-            <a:avLst/>
-          </a:prstGeom>
-          <a:noFill/>
-          <a:ln/>
-        </p:spPr>
-        <p:txBody>
-          <a:bodyPr wrap="square" lIns="0" tIns="0" rIns="0" bIns="0" rtlCol="0" anchor="ctr"/>
-          <a:lstStyle/>
-          <a:p>
-            <a:pPr marL="342900" indent="-342900">
-              <a:spcAft>
-                <a:spcPts val="200"/>
-              </a:spcAft>
-              <a:buSzPct val="100000"/>
-              <a:buChar char="•"/>
-            </a:pPr>
-            <a:r>
-              <a:rPr lang="en-US" sz="1100" dirty="0">
+              <a:t>A FIPS 140-3 and Common Criteria validated HSM, ideally one supporting key-bound approval policy.</a:t>
+            </a:r>
+            <a:endParaRPr lang="en-US" sz="1000" dirty="0"/>
+          </a:p>
+        </p:txBody>
+      </p:sp>
+      <p:sp>
+        <p:nvSpPr>
+          <p:cNvPr id="28" name="Shape 26"/>
+          <p:cNvSpPr/>
+          <p:nvPr/>
+        </p:nvSpPr>
+        <p:spPr>
+          <a:xfrm>
+            <a:off x="6199632" y="3090672"/>
+            <a:ext cx="493776" cy="493776"/>
+          </a:xfrm>
+          <a:prstGeom prst="roundRect">
+            <a:avLst>
+              <a:gd name="adj" fmla="val 11111"/>
+            </a:avLst>
+          </a:prstGeom>
+          <a:solidFill>
+            <a:srgbClr val="C8952B"/>
+          </a:solidFill>
+          <a:ln w="12700">
+            <a:solidFill>
+              <a:srgbClr val="C8952B"/>
+            </a:solidFill>
+            <a:prstDash val="solid"/>
+          </a:ln>
+        </p:spPr>
+      </p:sp>
+      <p:sp>
+        <p:nvSpPr>
+          <p:cNvPr id="29" name="Text 27"/>
+          <p:cNvSpPr txBox="1"/>
+          <p:nvPr/>
+        </p:nvSpPr>
+        <p:spPr>
+          <a:xfrm>
+            <a:off x="6199632" y="3090672"/>
+            <a:ext cx="493776" cy="493776"/>
+          </a:xfrm>
+          <a:prstGeom prst="rect">
+            <a:avLst/>
+          </a:prstGeom>
+          <a:noFill/>
+          <a:ln/>
+        </p:spPr>
+        <p:txBody>
+          <a:bodyPr wrap="square" lIns="0" tIns="0" rIns="0" bIns="0" rtlCol="0" anchor="ctr"/>
+          <a:lstStyle/>
+          <a:p>
+            <a:pPr algn="ctr" indent="0" marL="0">
+              <a:buNone/>
+            </a:pPr>
+            <a:r>
+              <a:rPr lang="en-US" sz="1600" b="1" dirty="0">
+                <a:solidFill>
+                  <a:srgbClr val="102437"/>
+                </a:solidFill>
+                <a:latin typeface="Cambria" pitchFamily="34" charset="0"/>
+                <a:ea typeface="Cambria" pitchFamily="34" charset="-122"/>
+                <a:cs typeface="Cambria" pitchFamily="34" charset="-120"/>
+              </a:rPr>
+              <a:t>26</a:t>
+            </a:r>
+            <a:endParaRPr lang="en-US" sz="1600" dirty="0"/>
+          </a:p>
+        </p:txBody>
+      </p:sp>
+      <p:sp>
+        <p:nvSpPr>
+          <p:cNvPr id="30" name="Text 28"/>
+          <p:cNvSpPr txBox="1"/>
+          <p:nvPr/>
+        </p:nvSpPr>
+        <p:spPr>
+          <a:xfrm>
+            <a:off x="6839712" y="3054096"/>
+            <a:ext cx="4754880" cy="256032"/>
+          </a:xfrm>
+          <a:prstGeom prst="rect">
+            <a:avLst/>
+          </a:prstGeom>
+          <a:noFill/>
+          <a:ln/>
+        </p:spPr>
+        <p:txBody>
+          <a:bodyPr wrap="square" lIns="0" tIns="0" rIns="0" bIns="0" rtlCol="0" anchor="ctr"/>
+          <a:lstStyle/>
+          <a:p>
+            <a:pPr indent="0" marL="0">
+              <a:buNone/>
+            </a:pPr>
+            <a:r>
+              <a:rPr lang="en-US" sz="1300" b="1" dirty="0">
+                <a:solidFill>
+                  <a:srgbClr val="FFFFFF"/>
+                </a:solidFill>
+                <a:latin typeface="Cambria" pitchFamily="34" charset="0"/>
+                <a:ea typeface="Cambria" pitchFamily="34" charset="-122"/>
+                <a:cs typeface="Cambria" pitchFamily="34" charset="-120"/>
+              </a:rPr>
+              <a:t>Confidential computing deployment</a:t>
+            </a:r>
+            <a:endParaRPr lang="en-US" sz="1300" dirty="0"/>
+          </a:p>
+        </p:txBody>
+      </p:sp>
+      <p:sp>
+        <p:nvSpPr>
+          <p:cNvPr id="31" name="Text 29"/>
+          <p:cNvSpPr txBox="1"/>
+          <p:nvPr/>
+        </p:nvSpPr>
+        <p:spPr>
+          <a:xfrm>
+            <a:off x="6839712" y="3310128"/>
+            <a:ext cx="4754880" cy="530352"/>
+          </a:xfrm>
+          <a:prstGeom prst="rect">
+            <a:avLst/>
+          </a:prstGeom>
+          <a:noFill/>
+          <a:ln/>
+        </p:spPr>
+        <p:txBody>
+          <a:bodyPr wrap="square" lIns="0" tIns="0" rIns="0" bIns="0" rtlCol="0" anchor="ctr"/>
+          <a:lstStyle/>
+          <a:p>
+            <a:pPr indent="0" marL="0">
+              <a:lnSpc>
+                <a:spcPts val="1250"/>
+              </a:lnSpc>
+              <a:buNone/>
+            </a:pPr>
+            <a:r>
+              <a:rPr lang="en-US" sz="1000" dirty="0">
                 <a:solidFill>
                   <a:srgbClr val="9DB8D4"/>
                 </a:solidFill>
@@ -13188,89 +15932,26 @@
                 <a:ea typeface="Calibri" pitchFamily="34" charset="-122"/>
                 <a:cs typeface="Calibri" pitchFamily="34" charset="-120"/>
               </a:rPr>
-              <a:t>Secrets management</a:t>
-            </a:r>
-            <a:endParaRPr lang="en-US" sz="1100" dirty="0"/>
-          </a:p>
-          <a:p>
-            <a:pPr marL="342900" indent="-342900">
-              <a:spcAft>
-                <a:spcPts val="200"/>
-              </a:spcAft>
-              <a:buSzPct val="100000"/>
-              <a:buChar char="•"/>
-            </a:pPr>
-            <a:r>
-              <a:rPr lang="en-US" sz="1100" dirty="0">
-                <a:solidFill>
-                  <a:srgbClr val="9DB8D4"/>
-                </a:solidFill>
-                <a:latin typeface="Calibri" pitchFamily="34" charset="0"/>
-                <a:ea typeface="Calibri" pitchFamily="34" charset="-122"/>
-                <a:cs typeface="Calibri" pitchFamily="34" charset="-120"/>
-              </a:rPr>
-              <a:t>Certificate lifecycle</a:t>
-            </a:r>
-            <a:endParaRPr lang="en-US" sz="1100" dirty="0"/>
-          </a:p>
-          <a:p>
-            <a:pPr marL="342900" indent="-342900">
-              <a:spcAft>
-                <a:spcPts val="200"/>
-              </a:spcAft>
-              <a:buSzPct val="100000"/>
-              <a:buChar char="•"/>
-            </a:pPr>
-            <a:r>
-              <a:rPr lang="en-US" sz="1100" dirty="0">
-                <a:solidFill>
-                  <a:srgbClr val="9DB8D4"/>
-                </a:solidFill>
-                <a:latin typeface="Calibri" pitchFamily="34" charset="0"/>
-                <a:ea typeface="Calibri" pitchFamily="34" charset="-122"/>
-                <a:cs typeface="Calibri" pitchFamily="34" charset="-120"/>
-              </a:rPr>
-              <a:t>PKCS#11 provider for applications</a:t>
-            </a:r>
-            <a:endParaRPr lang="en-US" sz="1100" dirty="0"/>
-          </a:p>
-          <a:p>
-            <a:pPr marL="342900" indent="-342900">
-              <a:spcAft>
-                <a:spcPts val="200"/>
-              </a:spcAft>
-              <a:buSzPct val="100000"/>
-              <a:buChar char="•"/>
-            </a:pPr>
-            <a:r>
-              <a:rPr lang="en-US" sz="1100" dirty="0">
-                <a:solidFill>
-                  <a:srgbClr val="9DB8D4"/>
-                </a:solidFill>
-                <a:latin typeface="Calibri" pitchFamily="34" charset="0"/>
-                <a:ea typeface="Calibri" pitchFamily="34" charset="-122"/>
-                <a:cs typeface="Calibri" pitchFamily="34" charset="-120"/>
-              </a:rPr>
-              <a:t>Tokenization / format-preserving encryption</a:t>
-            </a:r>
-            <a:endParaRPr lang="en-US" sz="1100" dirty="0"/>
-          </a:p>
-        </p:txBody>
-      </p:sp>
-      <p:sp>
-        <p:nvSpPr>
-          <p:cNvPr id="21" name="Shape 19"/>
+              <a:t>A confidential-computing platform with remote attestation.</a:t>
+            </a:r>
+            <a:endParaRPr lang="en-US" sz="1000" dirty="0"/>
+          </a:p>
+        </p:txBody>
+      </p:sp>
+      <p:sp>
+        <p:nvSpPr>
+          <p:cNvPr id="32" name="Shape 30"/>
           <p:cNvSpPr/>
           <p:nvPr/>
         </p:nvSpPr>
         <p:spPr>
           <a:xfrm>
-            <a:off x="6236208" y="5266944"/>
-            <a:ext cx="5394960" cy="1207008"/>
+            <a:off x="566928" y="5175504"/>
+            <a:ext cx="11027664" cy="1097280"/>
           </a:xfrm>
           <a:prstGeom prst="roundRect">
             <a:avLst>
-              <a:gd name="adj" fmla="val 4545"/>
+              <a:gd name="adj" fmla="val 5000"/>
             </a:avLst>
           </a:prstGeom>
           <a:solidFill>
@@ -13286,14 +15967,14 @@
       </p:sp>
       <p:sp>
         <p:nvSpPr>
-          <p:cNvPr id="22" name="Text 20"/>
-          <p:cNvSpPr txBox="1"/>
-          <p:nvPr/>
-        </p:nvSpPr>
-        <p:spPr>
-          <a:xfrm>
-            <a:off x="6473952" y="5468112"/>
-            <a:ext cx="4919472" cy="822960"/>
+          <p:cNvPr id="33" name="Text 31"/>
+          <p:cNvSpPr txBox="1"/>
+          <p:nvPr/>
+        </p:nvSpPr>
+        <p:spPr>
+          <a:xfrm>
+            <a:off x="841248" y="5175504"/>
+            <a:ext cx="10479024" cy="1097280"/>
           </a:xfrm>
           <a:prstGeom prst="rect">
             <a:avLst/>
@@ -13312,7 +15993,7 @@
               <a:buNone/>
             </a:pPr>
             <a:r>
-              <a:rPr lang="en-US" sz="1350" i="1" dirty="0">
+              <a:rPr lang="en-US" sz="1250" i="1" dirty="0">
                 <a:solidFill>
                   <a:srgbClr val="FFFFFF"/>
                 </a:solidFill>
@@ -13320,9 +16001,9 @@
                 <a:ea typeface="Cambria" pitchFamily="34" charset="-122"/>
                 <a:cs typeface="Cambria" pitchFamily="34" charset="-120"/>
               </a:rPr>
-              <a:t>Nothing ships that cannot be demonstrated. Where something could not be tested here, the plan says so rather than counting it as done.</a:t>
-            </a:r>
-            <a:endParaRPr lang="en-US" sz="1350" dirty="0"/>
+              <a:t>Every one of the 50 open features now has a step — none is deferred. That is not the same as a plan that can be executed end to end: 7 of 26 steps wait on hardware to buy, a product to deploy, or an event somebody else runs. Two are worth a second look — validated hardware is the largest security gain here and among the smallest in code, and post-quantum needs only a capable token, because the capability probe already gates on what the token advertises.</a:t>
+            </a:r>
+            <a:endParaRPr lang="en-US" sz="1250" dirty="0"/>
           </a:p>
         </p:txBody>
       </p:sp>
